--- a/output/wordlabs-start-3day.pptx
+++ b/output/wordlabs-start-3day.pptx
@@ -4240,7 +4240,7 @@
                 <a:ea typeface="Calibri" pitchFamily="34" charset="-122"/>
                 <a:cs typeface="Calibri" pitchFamily="34" charset="-120"/>
               </a:rPr>
-              <a:t>"begin, move suddenly, jump"</a:t>
+              <a:t>"begin, move suddenly, set going"</a:t>
             </a:r>
             <a:endParaRPr lang="en-US" sz="2200" dirty="0"/>
           </a:p>
@@ -4279,7 +4279,7 @@
                 <a:ea typeface="Calibri" pitchFamily="34" charset="-122"/>
                 <a:cs typeface="Calibri" pitchFamily="34" charset="-120"/>
               </a:rPr>
-              <a:t>Origin: Old English: styrtan</a:t>
+              <a:t>Origin: Latin: startare</a:t>
             </a:r>
             <a:endParaRPr lang="en-US" sz="1300" dirty="0"/>
           </a:p>
@@ -5288,7 +5288,7 @@
                 <a:ea typeface="Calibri" pitchFamily="34" charset="-122"/>
                 <a:cs typeface="Calibri" pitchFamily="34" charset="-120"/>
               </a:rPr>
-              <a:t>Word Labs  •  wordlabs.app  •  Root: 'start' = begin, move suddenly, jump</a:t>
+              <a:t>Word Labs  •  wordlabs.app  •  Root: 'start' = begin, move suddenly, set going</a:t>
             </a:r>
             <a:endParaRPr lang="en-US" sz="800" dirty="0"/>
           </a:p>
@@ -5928,7 +5928,7 @@
                 <a:ea typeface="Calibri" pitchFamily="34" charset="-122"/>
                 <a:cs typeface="Calibri" pitchFamily="34" charset="-120"/>
               </a:rPr>
-              <a:t>Word Labs  •  wordlabs.app  •  Root: 'start' = begin, move suddenly, jump</a:t>
+              <a:t>Word Labs  •  wordlabs.app  •  Root: 'start' = begin, move suddenly, set going</a:t>
             </a:r>
             <a:endParaRPr lang="en-US" sz="800" dirty="0"/>
           </a:p>
@@ -6040,7 +6040,7 @@
                 <a:ea typeface="Calibri" pitchFamily="34" charset="-122"/>
                 <a:cs typeface="Calibri" pitchFamily="34" charset="-120"/>
               </a:rPr>
-              <a:t>The </a:t>
+              <a:t>We had to </a:t>
             </a:r>
             <a:pPr algn="l" indent="0" marL="0">
               <a:buNone/>
@@ -6057,7 +6057,7 @@
                 <a:ea typeface="Calibri" pitchFamily="34" charset="-122"/>
                 <a:cs typeface="Calibri" pitchFamily="34" charset="-120"/>
               </a:rPr>
-              <a:t>starter</a:t>
+              <a:t>restart</a:t>
             </a:r>
             <a:pPr algn="l" indent="0" marL="0">
               <a:buNone/>
@@ -6071,7 +6071,7 @@
                 <a:ea typeface="Calibri" pitchFamily="34" charset="-122"/>
                 <a:cs typeface="Calibri" pitchFamily="34" charset="-120"/>
               </a:rPr>
-              <a:t>'s gun fired, and we all </a:t>
+              <a:t> the game after the power went out, but the quick </a:t>
             </a:r>
             <a:pPr algn="l" indent="0" marL="0">
               <a:buNone/>
@@ -6088,7 +6088,7 @@
                 <a:ea typeface="Calibri" pitchFamily="34" charset="-122"/>
                 <a:cs typeface="Calibri" pitchFamily="34" charset="-120"/>
               </a:rPr>
-              <a:t>restarted</a:t>
+              <a:t>restart</a:t>
             </a:r>
             <a:pPr algn="l" indent="0" marL="0">
               <a:buNone/>
@@ -6102,7 +6102,7 @@
                 <a:ea typeface="Calibri" pitchFamily="34" charset="-122"/>
                 <a:cs typeface="Calibri" pitchFamily="34" charset="-120"/>
               </a:rPr>
-              <a:t> our countdown for the big race!</a:t>
+              <a:t> meant we didn't lose much time.</a:t>
             </a:r>
             <a:endParaRPr lang="en-US" sz="1800" dirty="0"/>
           </a:p>
@@ -6257,7 +6257,7 @@
                 <a:ea typeface="Trebuchet MS" pitchFamily="34" charset="-122"/>
                 <a:cs typeface="Trebuchet MS" pitchFamily="34" charset="-120"/>
               </a:rPr>
-              <a:t>starter</a:t>
+              <a:t>restart</a:t>
             </a:r>
             <a:endParaRPr lang="en-US" sz="1400" dirty="0"/>
           </a:p>
@@ -6385,7 +6385,7 @@
                 <a:ea typeface="Trebuchet MS" pitchFamily="34" charset="-122"/>
                 <a:cs typeface="Trebuchet MS" pitchFamily="34" charset="-120"/>
               </a:rPr>
-              <a:t>restarted</a:t>
+              <a:t>starting</a:t>
             </a:r>
             <a:endParaRPr lang="en-US" sz="1400" dirty="0"/>
           </a:p>
@@ -6716,7 +6716,7 @@
                 <a:ea typeface="Calibri" pitchFamily="34" charset="-122"/>
                 <a:cs typeface="Calibri" pitchFamily="34" charset="-120"/>
               </a:rPr>
-              <a:t>Word Labs  •  wordlabs.app  •  Root: 'start' = begin, move suddenly, jump</a:t>
+              <a:t>Word Labs  •  wordlabs.app  •  Root: 'start' = begin, move suddenly, set going</a:t>
             </a:r>
             <a:endParaRPr lang="en-US" sz="800" dirty="0"/>
           </a:p>
@@ -6855,7 +6855,7 @@
                 <a:ea typeface="Trebuchet MS" pitchFamily="34" charset="-122"/>
                 <a:cs typeface="Trebuchet MS" pitchFamily="34" charset="-120"/>
               </a:rPr>
-              <a:t>starter</a:t>
+              <a:t>restart</a:t>
             </a:r>
             <a:endParaRPr lang="en-US" sz="2800" dirty="0"/>
           </a:p>
@@ -7543,7 +7543,7 @@
                 <a:ea typeface="Calibri" pitchFamily="34" charset="-122"/>
                 <a:cs typeface="Calibri" pitchFamily="34" charset="-120"/>
               </a:rPr>
-              <a:t>Word Labs  •  wordlabs.app  •  Root: 'start' = begin, move suddenly, jump</a:t>
+              <a:t>Word Labs  •  wordlabs.app  •  Root: 'start' = begin, move suddenly, set going</a:t>
             </a:r>
             <a:endParaRPr lang="en-US" sz="800" dirty="0"/>
           </a:p>
@@ -7682,7 +7682,7 @@
                 <a:ea typeface="Trebuchet MS" pitchFamily="34" charset="-122"/>
                 <a:cs typeface="Trebuchet MS" pitchFamily="34" charset="-120"/>
               </a:rPr>
-              <a:t>starter</a:t>
+              <a:t>restart</a:t>
             </a:r>
             <a:endParaRPr lang="en-US" sz="2800" dirty="0"/>
           </a:p>
@@ -7771,11 +7771,11 @@
             </a:avLst>
           </a:prstGeom>
           <a:solidFill>
-            <a:srgbClr val="CCFBF1"/>
+            <a:srgbClr val="DDD6FE"/>
           </a:solidFill>
           <a:ln w="19050">
             <a:solidFill>
-              <a:srgbClr val="0D9488"/>
+              <a:srgbClr val="7C3AED"/>
             </a:solidFill>
             <a:prstDash val="solid"/>
           </a:ln>
@@ -7815,13 +7815,13 @@
             <a:r>
               <a:rPr lang="en-US" sz="1300" b="1" dirty="0">
                 <a:solidFill>
-                  <a:srgbClr val="0F766E"/>
+                  <a:srgbClr val="4C1D95"/>
                 </a:solidFill>
                 <a:latin typeface="Trebuchet MS" pitchFamily="34" charset="0"/>
                 <a:ea typeface="Trebuchet MS" pitchFamily="34" charset="-122"/>
                 <a:cs typeface="Trebuchet MS" pitchFamily="34" charset="-120"/>
               </a:rPr>
-              <a:t>start</a:t>
+              <a:t>re</a:t>
             </a:r>
             <a:endParaRPr lang="en-US" sz="1300" dirty="0"/>
           </a:p>
@@ -7860,7 +7860,7 @@
                 <a:ea typeface="Calibri" pitchFamily="34" charset="-122"/>
                 <a:cs typeface="Calibri" pitchFamily="34" charset="-120"/>
               </a:rPr>
-              <a:t>to begin</a:t>
+              <a:t>again</a:t>
             </a:r>
             <a:endParaRPr lang="en-US" sz="850" dirty="0"/>
           </a:p>
@@ -7883,11 +7883,11 @@
             </a:avLst>
           </a:prstGeom>
           <a:solidFill>
-            <a:srgbClr val="FCE7F3"/>
+            <a:srgbClr val="CCFBF1"/>
           </a:solidFill>
           <a:ln w="19050">
             <a:solidFill>
-              <a:srgbClr val="DB2777"/>
+              <a:srgbClr val="0D9488"/>
             </a:solidFill>
             <a:prstDash val="solid"/>
           </a:ln>
@@ -7927,13 +7927,13 @@
             <a:r>
               <a:rPr lang="en-US" sz="1300" b="1" dirty="0">
                 <a:solidFill>
-                  <a:srgbClr val="9D174D"/>
+                  <a:srgbClr val="0F766E"/>
                 </a:solidFill>
                 <a:latin typeface="Trebuchet MS" pitchFamily="34" charset="0"/>
                 <a:ea typeface="Trebuchet MS" pitchFamily="34" charset="-122"/>
                 <a:cs typeface="Trebuchet MS" pitchFamily="34" charset="-120"/>
               </a:rPr>
-              <a:t>er</a:t>
+              <a:t>start</a:t>
             </a:r>
             <a:endParaRPr lang="en-US" sz="1300" dirty="0"/>
           </a:p>
@@ -7972,7 +7972,7 @@
                 <a:ea typeface="Calibri" pitchFamily="34" charset="-122"/>
                 <a:cs typeface="Calibri" pitchFamily="34" charset="-120"/>
               </a:rPr>
-              <a:t>a person or thing that does something</a:t>
+              <a:t>begin</a:t>
             </a:r>
             <a:endParaRPr lang="en-US" sz="850" dirty="0"/>
           </a:p>
@@ -8528,7 +8528,7 @@
                 <a:ea typeface="Calibri" pitchFamily="34" charset="-122"/>
                 <a:cs typeface="Calibri" pitchFamily="34" charset="-120"/>
               </a:rPr>
-              <a:t>Word Labs  •  wordlabs.app  •  Root: 'start' = begin, move suddenly, jump</a:t>
+              <a:t>Word Labs  •  wordlabs.app  •  Root: 'start' = begin, move suddenly, set going</a:t>
             </a:r>
             <a:endParaRPr lang="en-US" sz="800" dirty="0"/>
           </a:p>
@@ -8667,7 +8667,7 @@
                 <a:ea typeface="Trebuchet MS" pitchFamily="34" charset="-122"/>
                 <a:cs typeface="Trebuchet MS" pitchFamily="34" charset="-120"/>
               </a:rPr>
-              <a:t>starter</a:t>
+              <a:t>restart</a:t>
             </a:r>
             <a:endParaRPr lang="en-US" sz="2800" dirty="0"/>
           </a:p>
@@ -8756,11 +8756,11 @@
             </a:avLst>
           </a:prstGeom>
           <a:solidFill>
-            <a:srgbClr val="CCFBF1"/>
+            <a:srgbClr val="DDD6FE"/>
           </a:solidFill>
           <a:ln w="19050">
             <a:solidFill>
-              <a:srgbClr val="0D9488"/>
+              <a:srgbClr val="7C3AED"/>
             </a:solidFill>
             <a:prstDash val="solid"/>
           </a:ln>
@@ -8800,13 +8800,13 @@
             <a:r>
               <a:rPr lang="en-US" sz="1300" b="1" dirty="0">
                 <a:solidFill>
-                  <a:srgbClr val="0F766E"/>
+                  <a:srgbClr val="4C1D95"/>
                 </a:solidFill>
                 <a:latin typeface="Trebuchet MS" pitchFamily="34" charset="0"/>
                 <a:ea typeface="Trebuchet MS" pitchFamily="34" charset="-122"/>
                 <a:cs typeface="Trebuchet MS" pitchFamily="34" charset="-120"/>
               </a:rPr>
-              <a:t>start</a:t>
+              <a:t>re</a:t>
             </a:r>
             <a:endParaRPr lang="en-US" sz="1300" dirty="0"/>
           </a:p>
@@ -8845,7 +8845,7 @@
                 <a:ea typeface="Calibri" pitchFamily="34" charset="-122"/>
                 <a:cs typeface="Calibri" pitchFamily="34" charset="-120"/>
               </a:rPr>
-              <a:t>to begin</a:t>
+              <a:t>again</a:t>
             </a:r>
             <a:endParaRPr lang="en-US" sz="850" dirty="0"/>
           </a:p>
@@ -8868,11 +8868,11 @@
             </a:avLst>
           </a:prstGeom>
           <a:solidFill>
-            <a:srgbClr val="FCE7F3"/>
+            <a:srgbClr val="CCFBF1"/>
           </a:solidFill>
           <a:ln w="19050">
             <a:solidFill>
-              <a:srgbClr val="DB2777"/>
+              <a:srgbClr val="0D9488"/>
             </a:solidFill>
             <a:prstDash val="solid"/>
           </a:ln>
@@ -8912,13 +8912,13 @@
             <a:r>
               <a:rPr lang="en-US" sz="1300" b="1" dirty="0">
                 <a:solidFill>
-                  <a:srgbClr val="9D174D"/>
+                  <a:srgbClr val="0F766E"/>
                 </a:solidFill>
                 <a:latin typeface="Trebuchet MS" pitchFamily="34" charset="0"/>
                 <a:ea typeface="Trebuchet MS" pitchFamily="34" charset="-122"/>
                 <a:cs typeface="Trebuchet MS" pitchFamily="34" charset="-120"/>
               </a:rPr>
-              <a:t>er</a:t>
+              <a:t>start</a:t>
             </a:r>
             <a:endParaRPr lang="en-US" sz="1300" dirty="0"/>
           </a:p>
@@ -8957,7 +8957,7 @@
                 <a:ea typeface="Calibri" pitchFamily="34" charset="-122"/>
                 <a:cs typeface="Calibri" pitchFamily="34" charset="-120"/>
               </a:rPr>
-              <a:t>a person or thing that does something</a:t>
+              <a:t>begin</a:t>
             </a:r>
             <a:endParaRPr lang="en-US" sz="850" dirty="0"/>
           </a:p>
@@ -9116,7 +9116,7 @@
                 <a:ea typeface="Trebuchet MS" pitchFamily="34" charset="-122"/>
                 <a:cs typeface="Trebuchet MS" pitchFamily="34" charset="-120"/>
               </a:rPr>
-              <a:t>star</a:t>
+              <a:t>re</a:t>
             </a:r>
             <a:endParaRPr lang="en-US" sz="1400" dirty="0"/>
           </a:p>
@@ -9221,7 +9221,7 @@
                 <a:ea typeface="Trebuchet MS" pitchFamily="34" charset="-122"/>
                 <a:cs typeface="Trebuchet MS" pitchFamily="34" charset="-120"/>
               </a:rPr>
-              <a:t>ter</a:t>
+              <a:t>start</a:t>
             </a:r>
             <a:endParaRPr lang="en-US" sz="1400" dirty="0"/>
           </a:p>
@@ -9645,7 +9645,7 @@
                 <a:ea typeface="Calibri" pitchFamily="34" charset="-122"/>
                 <a:cs typeface="Calibri" pitchFamily="34" charset="-120"/>
               </a:rPr>
-              <a:t>Word Labs  •  wordlabs.app  •  Root: 'start' = begin, move suddenly, jump</a:t>
+              <a:t>Word Labs  •  wordlabs.app  •  Root: 'start' = begin, move suddenly, set going</a:t>
             </a:r>
             <a:endParaRPr lang="en-US" sz="800" dirty="0"/>
           </a:p>
@@ -9784,7 +9784,7 @@
                 <a:ea typeface="Trebuchet MS" pitchFamily="34" charset="-122"/>
                 <a:cs typeface="Trebuchet MS" pitchFamily="34" charset="-120"/>
               </a:rPr>
-              <a:t>starter</a:t>
+              <a:t>restart</a:t>
             </a:r>
             <a:endParaRPr lang="en-US" sz="2800" dirty="0"/>
           </a:p>
@@ -9873,11 +9873,11 @@
             </a:avLst>
           </a:prstGeom>
           <a:solidFill>
-            <a:srgbClr val="CCFBF1"/>
+            <a:srgbClr val="DDD6FE"/>
           </a:solidFill>
           <a:ln w="19050">
             <a:solidFill>
-              <a:srgbClr val="0D9488"/>
+              <a:srgbClr val="7C3AED"/>
             </a:solidFill>
             <a:prstDash val="solid"/>
           </a:ln>
@@ -9917,13 +9917,13 @@
             <a:r>
               <a:rPr lang="en-US" sz="1300" b="1" dirty="0">
                 <a:solidFill>
-                  <a:srgbClr val="0F766E"/>
+                  <a:srgbClr val="4C1D95"/>
                 </a:solidFill>
                 <a:latin typeface="Trebuchet MS" pitchFamily="34" charset="0"/>
                 <a:ea typeface="Trebuchet MS" pitchFamily="34" charset="-122"/>
                 <a:cs typeface="Trebuchet MS" pitchFamily="34" charset="-120"/>
               </a:rPr>
-              <a:t>start</a:t>
+              <a:t>re</a:t>
             </a:r>
             <a:endParaRPr lang="en-US" sz="1300" dirty="0"/>
           </a:p>
@@ -9962,7 +9962,7 @@
                 <a:ea typeface="Calibri" pitchFamily="34" charset="-122"/>
                 <a:cs typeface="Calibri" pitchFamily="34" charset="-120"/>
               </a:rPr>
-              <a:t>to begin</a:t>
+              <a:t>again</a:t>
             </a:r>
             <a:endParaRPr lang="en-US" sz="850" dirty="0"/>
           </a:p>
@@ -9985,11 +9985,11 @@
             </a:avLst>
           </a:prstGeom>
           <a:solidFill>
-            <a:srgbClr val="FCE7F3"/>
+            <a:srgbClr val="CCFBF1"/>
           </a:solidFill>
           <a:ln w="19050">
             <a:solidFill>
-              <a:srgbClr val="DB2777"/>
+              <a:srgbClr val="0D9488"/>
             </a:solidFill>
             <a:prstDash val="solid"/>
           </a:ln>
@@ -10029,13 +10029,13 @@
             <a:r>
               <a:rPr lang="en-US" sz="1300" b="1" dirty="0">
                 <a:solidFill>
-                  <a:srgbClr val="9D174D"/>
+                  <a:srgbClr val="0F766E"/>
                 </a:solidFill>
                 <a:latin typeface="Trebuchet MS" pitchFamily="34" charset="0"/>
                 <a:ea typeface="Trebuchet MS" pitchFamily="34" charset="-122"/>
                 <a:cs typeface="Trebuchet MS" pitchFamily="34" charset="-120"/>
               </a:rPr>
-              <a:t>er</a:t>
+              <a:t>start</a:t>
             </a:r>
             <a:endParaRPr lang="en-US" sz="1300" dirty="0"/>
           </a:p>
@@ -10074,7 +10074,7 @@
                 <a:ea typeface="Calibri" pitchFamily="34" charset="-122"/>
                 <a:cs typeface="Calibri" pitchFamily="34" charset="-120"/>
               </a:rPr>
-              <a:t>a person or thing that does something</a:t>
+              <a:t>begin</a:t>
             </a:r>
             <a:endParaRPr lang="en-US" sz="850" dirty="0"/>
           </a:p>
@@ -10233,7 +10233,7 @@
                 <a:ea typeface="Trebuchet MS" pitchFamily="34" charset="-122"/>
                 <a:cs typeface="Trebuchet MS" pitchFamily="34" charset="-120"/>
               </a:rPr>
-              <a:t>star</a:t>
+              <a:t>re</a:t>
             </a:r>
             <a:endParaRPr lang="en-US" sz="1400" dirty="0"/>
           </a:p>
@@ -10338,7 +10338,7 @@
                 <a:ea typeface="Trebuchet MS" pitchFamily="34" charset="-122"/>
                 <a:cs typeface="Trebuchet MS" pitchFamily="34" charset="-120"/>
               </a:rPr>
-              <a:t>ter</a:t>
+              <a:t>start</a:t>
             </a:r>
             <a:endParaRPr lang="en-US" sz="1400" dirty="0"/>
           </a:p>
@@ -10445,7 +10445,7 @@
         </p:nvSpPr>
         <p:spPr>
           <a:xfrm>
-            <a:off x="2427732" y="4169664"/>
+            <a:off x="2254649" y="4169664"/>
             <a:ext cx="685800" cy="475488"/>
           </a:xfrm>
           <a:prstGeom prst="rect">
@@ -10472,7 +10472,7 @@
         </p:nvSpPr>
         <p:spPr>
           <a:xfrm>
-            <a:off x="2427732" y="4169664"/>
+            <a:off x="2254649" y="4169664"/>
             <a:ext cx="685800" cy="475488"/>
           </a:xfrm>
           <a:prstGeom prst="rect">
@@ -10497,7 +10497,7 @@
                 <a:ea typeface="Trebuchet MS" pitchFamily="34" charset="-122"/>
                 <a:cs typeface="Trebuchet MS" pitchFamily="34" charset="-120"/>
               </a:rPr>
-              <a:t>s</a:t>
+              <a:t>r</a:t>
             </a:r>
             <a:endParaRPr lang="en-US" sz="900" dirty="0"/>
           </a:p>
@@ -10511,7 +10511,7 @@
         </p:nvSpPr>
         <p:spPr>
           <a:xfrm>
-            <a:off x="3639312" y="4169664"/>
+            <a:off x="3293146" y="4169664"/>
             <a:ext cx="685800" cy="475488"/>
           </a:xfrm>
           <a:prstGeom prst="rect">
@@ -10538,7 +10538,7 @@
         </p:nvSpPr>
         <p:spPr>
           <a:xfrm>
-            <a:off x="3639312" y="4169664"/>
+            <a:off x="3293146" y="4169664"/>
             <a:ext cx="685800" cy="475488"/>
           </a:xfrm>
           <a:prstGeom prst="rect">
@@ -10563,7 +10563,7 @@
                 <a:ea typeface="Trebuchet MS" pitchFamily="34" charset="-122"/>
                 <a:cs typeface="Trebuchet MS" pitchFamily="34" charset="-120"/>
               </a:rPr>
-              <a:t>t</a:t>
+              <a:t>e</a:t>
             </a:r>
             <a:endParaRPr lang="en-US" sz="900" dirty="0"/>
           </a:p>
@@ -10577,7 +10577,7 @@
         </p:nvSpPr>
         <p:spPr>
           <a:xfrm>
-            <a:off x="4850892" y="4169664"/>
+            <a:off x="4331643" y="4169664"/>
             <a:ext cx="685800" cy="475488"/>
           </a:xfrm>
           <a:prstGeom prst="rect">
@@ -10604,7 +10604,7 @@
         </p:nvSpPr>
         <p:spPr>
           <a:xfrm>
-            <a:off x="4850892" y="4169664"/>
+            <a:off x="4331643" y="4169664"/>
             <a:ext cx="685800" cy="475488"/>
           </a:xfrm>
           <a:prstGeom prst="rect">
@@ -10629,7 +10629,7 @@
                 <a:ea typeface="Trebuchet MS" pitchFamily="34" charset="-122"/>
                 <a:cs typeface="Trebuchet MS" pitchFamily="34" charset="-120"/>
               </a:rPr>
-              <a:t>ar</a:t>
+              <a:t>s</a:t>
             </a:r>
             <a:endParaRPr lang="en-US" sz="900" dirty="0"/>
           </a:p>
@@ -10643,7 +10643,7 @@
         </p:nvSpPr>
         <p:spPr>
           <a:xfrm>
-            <a:off x="6062472" y="4169664"/>
+            <a:off x="5370141" y="4169664"/>
             <a:ext cx="685800" cy="475488"/>
           </a:xfrm>
           <a:prstGeom prst="rect">
@@ -10670,7 +10670,7 @@
         </p:nvSpPr>
         <p:spPr>
           <a:xfrm>
-            <a:off x="6062472" y="4169664"/>
+            <a:off x="5370141" y="4169664"/>
             <a:ext cx="685800" cy="475488"/>
           </a:xfrm>
           <a:prstGeom prst="rect">
@@ -10709,7 +10709,7 @@
         </p:nvSpPr>
         <p:spPr>
           <a:xfrm>
-            <a:off x="7274052" y="4169664"/>
+            <a:off x="6408638" y="4169664"/>
             <a:ext cx="685800" cy="475488"/>
           </a:xfrm>
           <a:prstGeom prst="rect">
@@ -10736,7 +10736,7 @@
         </p:nvSpPr>
         <p:spPr>
           <a:xfrm>
-            <a:off x="7274052" y="4169664"/>
+            <a:off x="6408638" y="4169664"/>
             <a:ext cx="685800" cy="475488"/>
           </a:xfrm>
           <a:prstGeom prst="rect">
@@ -10761,7 +10761,73 @@
                 <a:ea typeface="Trebuchet MS" pitchFamily="34" charset="-122"/>
                 <a:cs typeface="Trebuchet MS" pitchFamily="34" charset="-120"/>
               </a:rPr>
-              <a:t>er</a:t>
+              <a:t>ar</a:t>
+            </a:r>
+            <a:endParaRPr lang="en-US" sz="900" dirty="0"/>
+          </a:p>
+        </p:txBody>
+      </p:sp>
+      <p:sp>
+        <p:nvSpPr>
+          <p:cNvPr id="43" name="Shape 41"/>
+          <p:cNvSpPr/>
+          <p:nvPr/>
+        </p:nvSpPr>
+        <p:spPr>
+          <a:xfrm>
+            <a:off x="7447135" y="4169664"/>
+            <a:ext cx="685800" cy="475488"/>
+          </a:xfrm>
+          <a:prstGeom prst="rect">
+            <a:avLst>
+              <a:gd name="adj" fmla="val 7692"/>
+            </a:avLst>
+          </a:prstGeom>
+          <a:solidFill>
+            <a:srgbClr val="FFFFFF"/>
+          </a:solidFill>
+          <a:ln w="12700">
+            <a:solidFill>
+              <a:srgbClr val="DB2777"/>
+            </a:solidFill>
+            <a:prstDash val="solid"/>
+          </a:ln>
+        </p:spPr>
+      </p:sp>
+      <p:sp>
+        <p:nvSpPr>
+          <p:cNvPr id="44" name="Text 42"/>
+          <p:cNvSpPr/>
+          <p:nvPr/>
+        </p:nvSpPr>
+        <p:spPr>
+          <a:xfrm>
+            <a:off x="7447135" y="4169664"/>
+            <a:ext cx="685800" cy="475488"/>
+          </a:xfrm>
+          <a:prstGeom prst="rect">
+            <a:avLst/>
+          </a:prstGeom>
+          <a:noFill/>
+          <a:ln/>
+        </p:spPr>
+        <p:txBody>
+          <a:bodyPr wrap="square" lIns="0" tIns="0" rIns="0" bIns="0" rtlCol="0" anchor="ctr"/>
+          <a:lstStyle/>
+          <a:p>
+            <a:pPr algn="ctr" indent="0" marL="0">
+              <a:buNone/>
+            </a:pPr>
+            <a:r>
+              <a:rPr lang="en-US" sz="900" b="1" dirty="0">
+                <a:solidFill>
+                  <a:srgbClr val="9D174D"/>
+                </a:solidFill>
+                <a:latin typeface="Trebuchet MS" pitchFamily="34" charset="0"/>
+                <a:ea typeface="Trebuchet MS" pitchFamily="34" charset="-122"/>
+                <a:cs typeface="Trebuchet MS" pitchFamily="34" charset="-120"/>
+              </a:rPr>
+              <a:t>t</a:t>
             </a:r>
             <a:endParaRPr lang="en-US" sz="900" dirty="0"/>
           </a:p>
@@ -11053,7 +11119,7 @@
                 <a:ea typeface="Calibri" pitchFamily="34" charset="-122"/>
                 <a:cs typeface="Calibri" pitchFamily="34" charset="-120"/>
               </a:rPr>
-              <a:t>Word Labs  •  wordlabs.app  •  Root: 'start' = begin, move suddenly, jump</a:t>
+              <a:t>Word Labs  •  wordlabs.app  •  Root: 'start' = begin, move suddenly, set going</a:t>
             </a:r>
             <a:endParaRPr lang="en-US" sz="800" dirty="0"/>
           </a:p>
@@ -11192,7 +11258,7 @@
                 <a:ea typeface="Trebuchet MS" pitchFamily="34" charset="-122"/>
                 <a:cs typeface="Trebuchet MS" pitchFamily="34" charset="-120"/>
               </a:rPr>
-              <a:t>restarted</a:t>
+              <a:t>starting</a:t>
             </a:r>
             <a:endParaRPr lang="en-US" sz="2800" dirty="0"/>
           </a:p>
@@ -11880,7 +11946,7 @@
                 <a:ea typeface="Calibri" pitchFamily="34" charset="-122"/>
                 <a:cs typeface="Calibri" pitchFamily="34" charset="-120"/>
               </a:rPr>
-              <a:t>Word Labs  •  wordlabs.app  •  Root: 'start' = begin, move suddenly, jump</a:t>
+              <a:t>Word Labs  •  wordlabs.app  •  Root: 'start' = begin, move suddenly, set going</a:t>
             </a:r>
             <a:endParaRPr lang="en-US" sz="800" dirty="0"/>
           </a:p>
@@ -12019,7 +12085,7 @@
                 <a:ea typeface="Trebuchet MS" pitchFamily="34" charset="-122"/>
                 <a:cs typeface="Trebuchet MS" pitchFamily="34" charset="-120"/>
               </a:rPr>
-              <a:t>restarted</a:t>
+              <a:t>starting</a:t>
             </a:r>
             <a:endParaRPr lang="en-US" sz="2800" dirty="0"/>
           </a:p>
@@ -12099,7 +12165,7 @@
         </p:nvSpPr>
         <p:spPr>
           <a:xfrm>
-            <a:off x="2221992" y="2258568"/>
+            <a:off x="2938272" y="2258568"/>
             <a:ext cx="1828800" cy="292608"/>
           </a:xfrm>
           <a:prstGeom prst="rect">
@@ -12108,11 +12174,11 @@
             </a:avLst>
           </a:prstGeom>
           <a:solidFill>
-            <a:srgbClr val="DDD6FE"/>
+            <a:srgbClr val="CCFBF1"/>
           </a:solidFill>
           <a:ln w="19050">
             <a:solidFill>
-              <a:srgbClr val="7C3AED"/>
+              <a:srgbClr val="0D9488"/>
             </a:solidFill>
             <a:prstDash val="solid"/>
           </a:ln>
@@ -12133,7 +12199,7 @@
         </p:nvSpPr>
         <p:spPr>
           <a:xfrm>
-            <a:off x="2221992" y="2258568"/>
+            <a:off x="2938272" y="2258568"/>
             <a:ext cx="1828800" cy="292608"/>
           </a:xfrm>
           <a:prstGeom prst="rect">
@@ -12152,13 +12218,13 @@
             <a:r>
               <a:rPr lang="en-US" sz="1300" b="1" dirty="0">
                 <a:solidFill>
-                  <a:srgbClr val="4C1D95"/>
+                  <a:srgbClr val="0F766E"/>
                 </a:solidFill>
                 <a:latin typeface="Trebuchet MS" pitchFamily="34" charset="0"/>
                 <a:ea typeface="Trebuchet MS" pitchFamily="34" charset="-122"/>
                 <a:cs typeface="Trebuchet MS" pitchFamily="34" charset="-120"/>
               </a:rPr>
-              <a:t>re</a:t>
+              <a:t>start</a:t>
             </a:r>
             <a:endParaRPr lang="en-US" sz="1300" dirty="0"/>
           </a:p>
@@ -12172,7 +12238,7 @@
         </p:nvSpPr>
         <p:spPr>
           <a:xfrm>
-            <a:off x="2221992" y="2569464"/>
+            <a:off x="2938272" y="2569464"/>
             <a:ext cx="1828800" cy="201168"/>
           </a:xfrm>
           <a:prstGeom prst="rect">
@@ -12197,7 +12263,7 @@
                 <a:ea typeface="Calibri" pitchFamily="34" charset="-122"/>
                 <a:cs typeface="Calibri" pitchFamily="34" charset="-120"/>
               </a:rPr>
-              <a:t>again</a:t>
+              <a:t>begin</a:t>
             </a:r>
             <a:endParaRPr lang="en-US" sz="850" dirty="0"/>
           </a:p>
@@ -12211,7 +12277,7 @@
         </p:nvSpPr>
         <p:spPr>
           <a:xfrm>
-            <a:off x="4370832" y="2258568"/>
+            <a:off x="5803392" y="2258568"/>
             <a:ext cx="1828800" cy="292608"/>
           </a:xfrm>
           <a:prstGeom prst="rect">
@@ -12220,11 +12286,11 @@
             </a:avLst>
           </a:prstGeom>
           <a:solidFill>
-            <a:srgbClr val="CCFBF1"/>
+            <a:srgbClr val="FCE7F3"/>
           </a:solidFill>
           <a:ln w="19050">
             <a:solidFill>
-              <a:srgbClr val="0D9488"/>
+              <a:srgbClr val="DB2777"/>
             </a:solidFill>
             <a:prstDash val="solid"/>
           </a:ln>
@@ -12245,7 +12311,7 @@
         </p:nvSpPr>
         <p:spPr>
           <a:xfrm>
-            <a:off x="4370832" y="2258568"/>
+            <a:off x="5803392" y="2258568"/>
             <a:ext cx="1828800" cy="292608"/>
           </a:xfrm>
           <a:prstGeom prst="rect">
@@ -12264,13 +12330,13 @@
             <a:r>
               <a:rPr lang="en-US" sz="1300" b="1" dirty="0">
                 <a:solidFill>
-                  <a:srgbClr val="0F766E"/>
+                  <a:srgbClr val="9D174D"/>
                 </a:solidFill>
                 <a:latin typeface="Trebuchet MS" pitchFamily="34" charset="0"/>
                 <a:ea typeface="Trebuchet MS" pitchFamily="34" charset="-122"/>
                 <a:cs typeface="Trebuchet MS" pitchFamily="34" charset="-120"/>
               </a:rPr>
-              <a:t>start</a:t>
+              <a:t>ing</a:t>
             </a:r>
             <a:endParaRPr lang="en-US" sz="1300" dirty="0"/>
           </a:p>
@@ -12284,7 +12350,7 @@
         </p:nvSpPr>
         <p:spPr>
           <a:xfrm>
-            <a:off x="4370832" y="2569464"/>
+            <a:off x="5803392" y="2569464"/>
             <a:ext cx="1828800" cy="201168"/>
           </a:xfrm>
           <a:prstGeom prst="rect">
@@ -12309,7 +12375,7 @@
                 <a:ea typeface="Calibri" pitchFamily="34" charset="-122"/>
                 <a:cs typeface="Calibri" pitchFamily="34" charset="-120"/>
               </a:rPr>
-              <a:t>to begin</a:t>
+              <a:t>action happening now</a:t>
             </a:r>
             <a:endParaRPr lang="en-US" sz="850" dirty="0"/>
           </a:p>
@@ -12323,30 +12389,23 @@
         </p:nvSpPr>
         <p:spPr>
           <a:xfrm>
-            <a:off x="6519672" y="2258568"/>
-            <a:ext cx="1828800" cy="292608"/>
+            <a:off x="365760" y="3273552"/>
+            <a:ext cx="1371600" cy="658368"/>
           </a:xfrm>
           <a:prstGeom prst="rect">
             <a:avLst>
-              <a:gd name="adj" fmla="val 25000"/>
+              <a:gd name="adj" fmla="val 8333"/>
             </a:avLst>
           </a:prstGeom>
           <a:solidFill>
-            <a:srgbClr val="FCE7F3"/>
-          </a:solidFill>
-          <a:ln w="19050">
-            <a:solidFill>
-              <a:srgbClr val="DB2777"/>
-            </a:solidFill>
-            <a:prstDash val="solid"/>
-          </a:ln>
-          <a:effectLst>
-            <a:outerShdw sx="100000" sy="100000" kx="0" ky="0" algn="bl" rotWithShape="0" blurRad="101600" dist="38100" dir="8100000">
-              <a:srgbClr val="000000">
-                <a:alpha val="12000"/>
-              </a:srgbClr>
-            </a:outerShdw>
-          </a:effectLst>
+            <a:srgbClr val="E2E8F0"/>
+          </a:solidFill>
+          <a:ln w="12700">
+            <a:solidFill>
+              <a:srgbClr val="E2E8F0"/>
+            </a:solidFill>
+            <a:prstDash val="solid"/>
+          </a:ln>
         </p:spPr>
       </p:sp>
       <p:sp>
@@ -12357,8 +12416,8 @@
         </p:nvSpPr>
         <p:spPr>
           <a:xfrm>
-            <a:off x="6519672" y="2258568"/>
-            <a:ext cx="1828800" cy="292608"/>
+            <a:off x="365760" y="3273552"/>
+            <a:ext cx="1371600" cy="658368"/>
           </a:xfrm>
           <a:prstGeom prst="rect">
             <a:avLst/>
@@ -12374,73 +12433,100 @@
               <a:buNone/>
             </a:pPr>
             <a:r>
-              <a:rPr lang="en-US" sz="1300" b="1" dirty="0">
-                <a:solidFill>
-                  <a:srgbClr val="9D174D"/>
+              <a:rPr lang="en-US" sz="1100" b="1" dirty="0">
+                <a:solidFill>
+                  <a:srgbClr val="475569"/>
                 </a:solidFill>
                 <a:latin typeface="Trebuchet MS" pitchFamily="34" charset="0"/>
                 <a:ea typeface="Trebuchet MS" pitchFamily="34" charset="-122"/>
                 <a:cs typeface="Trebuchet MS" pitchFamily="34" charset="-120"/>
               </a:rPr>
-              <a:t>ed</a:t>
-            </a:r>
-            <a:endParaRPr lang="en-US" sz="1300" dirty="0"/>
-          </a:p>
-        </p:txBody>
-      </p:sp>
-      <p:sp>
-        <p:nvSpPr>
-          <p:cNvPr id="24" name="Text 22"/>
-          <p:cNvSpPr/>
-          <p:nvPr/>
-        </p:nvSpPr>
-        <p:spPr>
-          <a:xfrm>
-            <a:off x="6519672" y="2569464"/>
-            <a:ext cx="1828800" cy="201168"/>
-          </a:xfrm>
-          <a:prstGeom prst="rect">
-            <a:avLst/>
-          </a:prstGeom>
-          <a:noFill/>
-          <a:ln/>
-        </p:spPr>
-        <p:txBody>
-          <a:bodyPr wrap="square" lIns="0" tIns="0" rIns="0" bIns="0" rtlCol="0" anchor="t"/>
-          <a:lstStyle/>
-          <a:p>
-            <a:pPr algn="ctr" indent="0" marL="0">
-              <a:buNone/>
-            </a:pPr>
-            <a:r>
-              <a:rPr lang="en-US" sz="850" dirty="0">
-                <a:solidFill>
-                  <a:srgbClr val="475569"/>
+              <a:t>Syllables</a:t>
+            </a:r>
+            <a:endParaRPr lang="en-US" sz="1100" dirty="0"/>
+          </a:p>
+        </p:txBody>
+      </p:sp>
+      <p:sp>
+        <p:nvSpPr>
+          <p:cNvPr id="24" name="Shape 22"/>
+          <p:cNvSpPr/>
+          <p:nvPr/>
+        </p:nvSpPr>
+        <p:spPr>
+          <a:xfrm>
+            <a:off x="1874520" y="3273552"/>
+            <a:ext cx="6903720" cy="658368"/>
+          </a:xfrm>
+          <a:prstGeom prst="rect">
+            <a:avLst>
+              <a:gd name="adj" fmla="val 8333"/>
+            </a:avLst>
+          </a:prstGeom>
+          <a:solidFill>
+            <a:srgbClr val="F8FAFC"/>
+          </a:solidFill>
+          <a:ln w="12700">
+            <a:solidFill>
+              <a:srgbClr val="E2E8F0"/>
+            </a:solidFill>
+            <a:prstDash val="dash"/>
+          </a:ln>
+        </p:spPr>
+      </p:sp>
+      <p:sp>
+        <p:nvSpPr>
+          <p:cNvPr id="25" name="Text 23"/>
+          <p:cNvSpPr/>
+          <p:nvPr/>
+        </p:nvSpPr>
+        <p:spPr>
+          <a:xfrm>
+            <a:off x="1874520" y="3273552"/>
+            <a:ext cx="6903720" cy="658368"/>
+          </a:xfrm>
+          <a:prstGeom prst="rect">
+            <a:avLst/>
+          </a:prstGeom>
+          <a:noFill/>
+          <a:ln/>
+        </p:spPr>
+        <p:txBody>
+          <a:bodyPr wrap="square" rtlCol="0" anchor="ctr"/>
+          <a:lstStyle/>
+          <a:p>
+            <a:pPr algn="ctr" indent="0" marL="0">
+              <a:buNone/>
+            </a:pPr>
+            <a:r>
+              <a:rPr lang="en-US" sz="1100" i="1" dirty="0">
+                <a:solidFill>
+                  <a:srgbClr val="CBD5E1"/>
                 </a:solidFill>
                 <a:latin typeface="Calibri" pitchFamily="34" charset="0"/>
                 <a:ea typeface="Calibri" pitchFamily="34" charset="-122"/>
                 <a:cs typeface="Calibri" pitchFamily="34" charset="-120"/>
               </a:rPr>
-              <a:t>happened in the past</a:t>
-            </a:r>
-            <a:endParaRPr lang="en-US" sz="850" dirty="0"/>
-          </a:p>
-        </p:txBody>
-      </p:sp>
-      <p:sp>
-        <p:nvSpPr>
-          <p:cNvPr id="25" name="Shape 23"/>
-          <p:cNvSpPr/>
-          <p:nvPr/>
-        </p:nvSpPr>
-        <p:spPr>
-          <a:xfrm>
-            <a:off x="365760" y="3273552"/>
-            <a:ext cx="1371600" cy="658368"/>
+              <a:t>Write here...</a:t>
+            </a:r>
+            <a:endParaRPr lang="en-US" sz="1100" dirty="0"/>
+          </a:p>
+        </p:txBody>
+      </p:sp>
+      <p:sp>
+        <p:nvSpPr>
+          <p:cNvPr id="26" name="Shape 24"/>
+          <p:cNvSpPr/>
+          <p:nvPr/>
+        </p:nvSpPr>
+        <p:spPr>
+          <a:xfrm>
+            <a:off x="365760" y="4096512"/>
+            <a:ext cx="1371600" cy="804672"/>
           </a:xfrm>
           <a:prstGeom prst="rect">
             <a:avLst>
-              <a:gd name="adj" fmla="val 8333"/>
+              <a:gd name="adj" fmla="val 6818"/>
             </a:avLst>
           </a:prstGeom>
           <a:solidFill>
@@ -12456,14 +12542,14 @@
       </p:sp>
       <p:sp>
         <p:nvSpPr>
-          <p:cNvPr id="26" name="Text 24"/>
-          <p:cNvSpPr/>
-          <p:nvPr/>
-        </p:nvSpPr>
-        <p:spPr>
-          <a:xfrm>
-            <a:off x="365760" y="3273552"/>
-            <a:ext cx="1371600" cy="658368"/>
+          <p:cNvPr id="27" name="Text 25"/>
+          <p:cNvSpPr/>
+          <p:nvPr/>
+        </p:nvSpPr>
+        <p:spPr>
+          <a:xfrm>
+            <a:off x="365760" y="4096512"/>
+            <a:ext cx="1371600" cy="804672"/>
           </a:xfrm>
           <a:prstGeom prst="rect">
             <a:avLst/>
@@ -12487,7 +12573,7 @@
                 <a:ea typeface="Trebuchet MS" pitchFamily="34" charset="-122"/>
                 <a:cs typeface="Trebuchet MS" pitchFamily="34" charset="-120"/>
               </a:rPr>
-              <a:t>Syllables</a:t>
+              <a:t>Phonemes</a:t>
             </a:r>
             <a:endParaRPr lang="en-US" sz="1100" dirty="0"/>
           </a:p>
@@ -12495,80 +12581,14 @@
       </p:sp>
       <p:sp>
         <p:nvSpPr>
-          <p:cNvPr id="27" name="Shape 25"/>
-          <p:cNvSpPr/>
-          <p:nvPr/>
-        </p:nvSpPr>
-        <p:spPr>
-          <a:xfrm>
-            <a:off x="1874520" y="3273552"/>
-            <a:ext cx="6903720" cy="658368"/>
-          </a:xfrm>
-          <a:prstGeom prst="rect">
-            <a:avLst>
-              <a:gd name="adj" fmla="val 8333"/>
-            </a:avLst>
-          </a:prstGeom>
-          <a:solidFill>
-            <a:srgbClr val="F8FAFC"/>
-          </a:solidFill>
-          <a:ln w="12700">
-            <a:solidFill>
-              <a:srgbClr val="E2E8F0"/>
-            </a:solidFill>
-            <a:prstDash val="dash"/>
-          </a:ln>
-        </p:spPr>
-      </p:sp>
-      <p:sp>
-        <p:nvSpPr>
-          <p:cNvPr id="28" name="Text 26"/>
-          <p:cNvSpPr/>
-          <p:nvPr/>
-        </p:nvSpPr>
-        <p:spPr>
-          <a:xfrm>
-            <a:off x="1874520" y="3273552"/>
-            <a:ext cx="6903720" cy="658368"/>
-          </a:xfrm>
-          <a:prstGeom prst="rect">
-            <a:avLst/>
-          </a:prstGeom>
-          <a:noFill/>
-          <a:ln/>
-        </p:spPr>
-        <p:txBody>
-          <a:bodyPr wrap="square" rtlCol="0" anchor="ctr"/>
-          <a:lstStyle/>
-          <a:p>
-            <a:pPr algn="ctr" indent="0" marL="0">
-              <a:buNone/>
-            </a:pPr>
-            <a:r>
-              <a:rPr lang="en-US" sz="1100" i="1" dirty="0">
-                <a:solidFill>
-                  <a:srgbClr val="CBD5E1"/>
-                </a:solidFill>
-                <a:latin typeface="Calibri" pitchFamily="34" charset="0"/>
-                <a:ea typeface="Calibri" pitchFamily="34" charset="-122"/>
-                <a:cs typeface="Calibri" pitchFamily="34" charset="-120"/>
-              </a:rPr>
-              <a:t>Write here...</a:t>
-            </a:r>
-            <a:endParaRPr lang="en-US" sz="1100" dirty="0"/>
-          </a:p>
-        </p:txBody>
-      </p:sp>
-      <p:sp>
-        <p:nvSpPr>
-          <p:cNvPr id="29" name="Shape 27"/>
-          <p:cNvSpPr/>
-          <p:nvPr/>
-        </p:nvSpPr>
-        <p:spPr>
-          <a:xfrm>
-            <a:off x="365760" y="4096512"/>
-            <a:ext cx="1371600" cy="804672"/>
+          <p:cNvPr id="28" name="Shape 26"/>
+          <p:cNvSpPr/>
+          <p:nvPr/>
+        </p:nvSpPr>
+        <p:spPr>
+          <a:xfrm>
+            <a:off x="1874520" y="4096512"/>
+            <a:ext cx="6903720" cy="804672"/>
           </a:xfrm>
           <a:prstGeom prst="rect">
             <a:avLst>
@@ -12576,85 +12596,19 @@
             </a:avLst>
           </a:prstGeom>
           <a:solidFill>
-            <a:srgbClr val="E2E8F0"/>
+            <a:srgbClr val="F8FAFC"/>
           </a:solidFill>
           <a:ln w="12700">
             <a:solidFill>
               <a:srgbClr val="E2E8F0"/>
             </a:solidFill>
-            <a:prstDash val="solid"/>
-          </a:ln>
-        </p:spPr>
-      </p:sp>
-      <p:sp>
-        <p:nvSpPr>
-          <p:cNvPr id="30" name="Text 28"/>
-          <p:cNvSpPr/>
-          <p:nvPr/>
-        </p:nvSpPr>
-        <p:spPr>
-          <a:xfrm>
-            <a:off x="365760" y="4096512"/>
-            <a:ext cx="1371600" cy="804672"/>
-          </a:xfrm>
-          <a:prstGeom prst="rect">
-            <a:avLst/>
-          </a:prstGeom>
-          <a:noFill/>
-          <a:ln/>
-        </p:spPr>
-        <p:txBody>
-          <a:bodyPr wrap="square" lIns="0" tIns="0" rIns="0" bIns="0" rtlCol="0" anchor="ctr"/>
-          <a:lstStyle/>
-          <a:p>
-            <a:pPr algn="ctr" indent="0" marL="0">
-              <a:buNone/>
-            </a:pPr>
-            <a:r>
-              <a:rPr lang="en-US" sz="1100" b="1" dirty="0">
-                <a:solidFill>
-                  <a:srgbClr val="475569"/>
-                </a:solidFill>
-                <a:latin typeface="Trebuchet MS" pitchFamily="34" charset="0"/>
-                <a:ea typeface="Trebuchet MS" pitchFamily="34" charset="-122"/>
-                <a:cs typeface="Trebuchet MS" pitchFamily="34" charset="-120"/>
-              </a:rPr>
-              <a:t>Phonemes</a:t>
-            </a:r>
-            <a:endParaRPr lang="en-US" sz="1100" dirty="0"/>
-          </a:p>
-        </p:txBody>
-      </p:sp>
-      <p:sp>
-        <p:nvSpPr>
-          <p:cNvPr id="31" name="Shape 29"/>
-          <p:cNvSpPr/>
-          <p:nvPr/>
-        </p:nvSpPr>
-        <p:spPr>
-          <a:xfrm>
-            <a:off x="1874520" y="4096512"/>
-            <a:ext cx="6903720" cy="804672"/>
-          </a:xfrm>
-          <a:prstGeom prst="rect">
-            <a:avLst>
-              <a:gd name="adj" fmla="val 6818"/>
-            </a:avLst>
-          </a:prstGeom>
-          <a:solidFill>
-            <a:srgbClr val="F8FAFC"/>
-          </a:solidFill>
-          <a:ln w="12700">
-            <a:solidFill>
-              <a:srgbClr val="E2E8F0"/>
-            </a:solidFill>
             <a:prstDash val="dash"/>
           </a:ln>
         </p:spPr>
       </p:sp>
       <p:sp>
         <p:nvSpPr>
-          <p:cNvPr id="32" name="Text 30"/>
+          <p:cNvPr id="29" name="Text 27"/>
           <p:cNvSpPr/>
           <p:nvPr/>
         </p:nvSpPr>
@@ -12977,7 +12931,7 @@
                 <a:ea typeface="Calibri" pitchFamily="34" charset="-122"/>
                 <a:cs typeface="Calibri" pitchFamily="34" charset="-120"/>
               </a:rPr>
-              <a:t>Word Labs  •  wordlabs.app  •  Root: 'start' = begin, move suddenly, jump</a:t>
+              <a:t>Word Labs  •  wordlabs.app  •  Root: 'start' = begin, move suddenly, set going</a:t>
             </a:r>
             <a:endParaRPr lang="en-US" sz="800" dirty="0"/>
           </a:p>
@@ -13116,7 +13070,7 @@
                 <a:ea typeface="Trebuchet MS" pitchFamily="34" charset="-122"/>
                 <a:cs typeface="Trebuchet MS" pitchFamily="34" charset="-120"/>
               </a:rPr>
-              <a:t>restarted</a:t>
+              <a:t>starting</a:t>
             </a:r>
             <a:endParaRPr lang="en-US" sz="2800" dirty="0"/>
           </a:p>
@@ -13196,7 +13150,7 @@
         </p:nvSpPr>
         <p:spPr>
           <a:xfrm>
-            <a:off x="2221992" y="2258568"/>
+            <a:off x="2938272" y="2258568"/>
             <a:ext cx="1828800" cy="292608"/>
           </a:xfrm>
           <a:prstGeom prst="rect">
@@ -13205,11 +13159,11 @@
             </a:avLst>
           </a:prstGeom>
           <a:solidFill>
-            <a:srgbClr val="DDD6FE"/>
+            <a:srgbClr val="CCFBF1"/>
           </a:solidFill>
           <a:ln w="19050">
             <a:solidFill>
-              <a:srgbClr val="7C3AED"/>
+              <a:srgbClr val="0D9488"/>
             </a:solidFill>
             <a:prstDash val="solid"/>
           </a:ln>
@@ -13230,7 +13184,7 @@
         </p:nvSpPr>
         <p:spPr>
           <a:xfrm>
-            <a:off x="2221992" y="2258568"/>
+            <a:off x="2938272" y="2258568"/>
             <a:ext cx="1828800" cy="292608"/>
           </a:xfrm>
           <a:prstGeom prst="rect">
@@ -13249,13 +13203,13 @@
             <a:r>
               <a:rPr lang="en-US" sz="1300" b="1" dirty="0">
                 <a:solidFill>
-                  <a:srgbClr val="4C1D95"/>
+                  <a:srgbClr val="0F766E"/>
                 </a:solidFill>
                 <a:latin typeface="Trebuchet MS" pitchFamily="34" charset="0"/>
                 <a:ea typeface="Trebuchet MS" pitchFamily="34" charset="-122"/>
                 <a:cs typeface="Trebuchet MS" pitchFamily="34" charset="-120"/>
               </a:rPr>
-              <a:t>re</a:t>
+              <a:t>start</a:t>
             </a:r>
             <a:endParaRPr lang="en-US" sz="1300" dirty="0"/>
           </a:p>
@@ -13269,7 +13223,7 @@
         </p:nvSpPr>
         <p:spPr>
           <a:xfrm>
-            <a:off x="2221992" y="2569464"/>
+            <a:off x="2938272" y="2569464"/>
             <a:ext cx="1828800" cy="201168"/>
           </a:xfrm>
           <a:prstGeom prst="rect">
@@ -13294,7 +13248,7 @@
                 <a:ea typeface="Calibri" pitchFamily="34" charset="-122"/>
                 <a:cs typeface="Calibri" pitchFamily="34" charset="-120"/>
               </a:rPr>
-              <a:t>again</a:t>
+              <a:t>begin</a:t>
             </a:r>
             <a:endParaRPr lang="en-US" sz="850" dirty="0"/>
           </a:p>
@@ -13308,7 +13262,7 @@
         </p:nvSpPr>
         <p:spPr>
           <a:xfrm>
-            <a:off x="4370832" y="2258568"/>
+            <a:off x="5803392" y="2258568"/>
             <a:ext cx="1828800" cy="292608"/>
           </a:xfrm>
           <a:prstGeom prst="rect">
@@ -13317,11 +13271,11 @@
             </a:avLst>
           </a:prstGeom>
           <a:solidFill>
-            <a:srgbClr val="CCFBF1"/>
+            <a:srgbClr val="FCE7F3"/>
           </a:solidFill>
           <a:ln w="19050">
             <a:solidFill>
-              <a:srgbClr val="0D9488"/>
+              <a:srgbClr val="DB2777"/>
             </a:solidFill>
             <a:prstDash val="solid"/>
           </a:ln>
@@ -13342,7 +13296,7 @@
         </p:nvSpPr>
         <p:spPr>
           <a:xfrm>
-            <a:off x="4370832" y="2258568"/>
+            <a:off x="5803392" y="2258568"/>
             <a:ext cx="1828800" cy="292608"/>
           </a:xfrm>
           <a:prstGeom prst="rect">
@@ -13361,13 +13315,13 @@
             <a:r>
               <a:rPr lang="en-US" sz="1300" b="1" dirty="0">
                 <a:solidFill>
-                  <a:srgbClr val="0F766E"/>
+                  <a:srgbClr val="9D174D"/>
                 </a:solidFill>
                 <a:latin typeface="Trebuchet MS" pitchFamily="34" charset="0"/>
                 <a:ea typeface="Trebuchet MS" pitchFamily="34" charset="-122"/>
                 <a:cs typeface="Trebuchet MS" pitchFamily="34" charset="-120"/>
               </a:rPr>
-              <a:t>start</a:t>
+              <a:t>ing</a:t>
             </a:r>
             <a:endParaRPr lang="en-US" sz="1300" dirty="0"/>
           </a:p>
@@ -13381,7 +13335,7 @@
         </p:nvSpPr>
         <p:spPr>
           <a:xfrm>
-            <a:off x="4370832" y="2569464"/>
+            <a:off x="5803392" y="2569464"/>
             <a:ext cx="1828800" cy="201168"/>
           </a:xfrm>
           <a:prstGeom prst="rect">
@@ -13406,7 +13360,7 @@
                 <a:ea typeface="Calibri" pitchFamily="34" charset="-122"/>
                 <a:cs typeface="Calibri" pitchFamily="34" charset="-120"/>
               </a:rPr>
-              <a:t>to begin</a:t>
+              <a:t>action happening now</a:t>
             </a:r>
             <a:endParaRPr lang="en-US" sz="850" dirty="0"/>
           </a:p>
@@ -13420,30 +13374,23 @@
         </p:nvSpPr>
         <p:spPr>
           <a:xfrm>
-            <a:off x="6519672" y="2258568"/>
-            <a:ext cx="1828800" cy="292608"/>
+            <a:off x="365760" y="3273552"/>
+            <a:ext cx="1371600" cy="658368"/>
           </a:xfrm>
           <a:prstGeom prst="rect">
             <a:avLst>
-              <a:gd name="adj" fmla="val 25000"/>
+              <a:gd name="adj" fmla="val 8333"/>
             </a:avLst>
           </a:prstGeom>
           <a:solidFill>
-            <a:srgbClr val="FCE7F3"/>
-          </a:solidFill>
-          <a:ln w="19050">
-            <a:solidFill>
-              <a:srgbClr val="DB2777"/>
-            </a:solidFill>
-            <a:prstDash val="solid"/>
-          </a:ln>
-          <a:effectLst>
-            <a:outerShdw sx="100000" sy="100000" kx="0" ky="0" algn="bl" rotWithShape="0" blurRad="101600" dist="38100" dir="8100000">
-              <a:srgbClr val="000000">
-                <a:alpha val="12000"/>
-              </a:srgbClr>
-            </a:outerShdw>
-          </a:effectLst>
+            <a:srgbClr val="E2E8F0"/>
+          </a:solidFill>
+          <a:ln w="12700">
+            <a:solidFill>
+              <a:srgbClr val="E2E8F0"/>
+            </a:solidFill>
+            <a:prstDash val="solid"/>
+          </a:ln>
         </p:spPr>
       </p:sp>
       <p:sp>
@@ -13454,8 +13401,8 @@
         </p:nvSpPr>
         <p:spPr>
           <a:xfrm>
-            <a:off x="6519672" y="2258568"/>
-            <a:ext cx="1828800" cy="292608"/>
+            <a:off x="365760" y="3273552"/>
+            <a:ext cx="1371600" cy="658368"/>
           </a:xfrm>
           <a:prstGeom prst="rect">
             <a:avLst/>
@@ -13471,69 +13418,30 @@
               <a:buNone/>
             </a:pPr>
             <a:r>
-              <a:rPr lang="en-US" sz="1300" b="1" dirty="0">
-                <a:solidFill>
-                  <a:srgbClr val="9D174D"/>
+              <a:rPr lang="en-US" sz="1100" b="1" dirty="0">
+                <a:solidFill>
+                  <a:srgbClr val="475569"/>
                 </a:solidFill>
                 <a:latin typeface="Trebuchet MS" pitchFamily="34" charset="0"/>
                 <a:ea typeface="Trebuchet MS" pitchFamily="34" charset="-122"/>
                 <a:cs typeface="Trebuchet MS" pitchFamily="34" charset="-120"/>
               </a:rPr>
-              <a:t>ed</a:t>
-            </a:r>
-            <a:endParaRPr lang="en-US" sz="1300" dirty="0"/>
-          </a:p>
-        </p:txBody>
-      </p:sp>
-      <p:sp>
-        <p:nvSpPr>
-          <p:cNvPr id="24" name="Text 22"/>
-          <p:cNvSpPr/>
-          <p:nvPr/>
-        </p:nvSpPr>
-        <p:spPr>
-          <a:xfrm>
-            <a:off x="6519672" y="2569464"/>
-            <a:ext cx="1828800" cy="201168"/>
-          </a:xfrm>
-          <a:prstGeom prst="rect">
-            <a:avLst/>
-          </a:prstGeom>
-          <a:noFill/>
-          <a:ln/>
-        </p:spPr>
-        <p:txBody>
-          <a:bodyPr wrap="square" lIns="0" tIns="0" rIns="0" bIns="0" rtlCol="0" anchor="t"/>
-          <a:lstStyle/>
-          <a:p>
-            <a:pPr algn="ctr" indent="0" marL="0">
-              <a:buNone/>
-            </a:pPr>
-            <a:r>
-              <a:rPr lang="en-US" sz="850" dirty="0">
-                <a:solidFill>
-                  <a:srgbClr val="475569"/>
-                </a:solidFill>
-                <a:latin typeface="Calibri" pitchFamily="34" charset="0"/>
-                <a:ea typeface="Calibri" pitchFamily="34" charset="-122"/>
-                <a:cs typeface="Calibri" pitchFamily="34" charset="-120"/>
-              </a:rPr>
-              <a:t>happened in the past</a:t>
-            </a:r>
-            <a:endParaRPr lang="en-US" sz="850" dirty="0"/>
-          </a:p>
-        </p:txBody>
-      </p:sp>
-      <p:sp>
-        <p:nvSpPr>
-          <p:cNvPr id="25" name="Shape 23"/>
-          <p:cNvSpPr/>
-          <p:nvPr/>
-        </p:nvSpPr>
-        <p:spPr>
-          <a:xfrm>
-            <a:off x="365760" y="3273552"/>
-            <a:ext cx="1371600" cy="658368"/>
+              <a:t>Syllables</a:t>
+            </a:r>
+            <a:endParaRPr lang="en-US" sz="1100" dirty="0"/>
+          </a:p>
+        </p:txBody>
+      </p:sp>
+      <p:sp>
+        <p:nvSpPr>
+          <p:cNvPr id="24" name="Shape 22"/>
+          <p:cNvSpPr/>
+          <p:nvPr/>
+        </p:nvSpPr>
+        <p:spPr>
+          <a:xfrm>
+            <a:off x="1874520" y="3273552"/>
+            <a:ext cx="6903720" cy="658368"/>
           </a:xfrm>
           <a:prstGeom prst="rect">
             <a:avLst>
@@ -13541,11 +13449,38 @@
             </a:avLst>
           </a:prstGeom>
           <a:solidFill>
-            <a:srgbClr val="E2E8F0"/>
-          </a:solidFill>
-          <a:ln w="12700">
-            <a:solidFill>
-              <a:srgbClr val="E2E8F0"/>
+            <a:srgbClr val="CCFBF1"/>
+          </a:solidFill>
+          <a:ln w="12700">
+            <a:solidFill>
+              <a:srgbClr val="0D9488"/>
+            </a:solidFill>
+            <a:prstDash val="solid"/>
+          </a:ln>
+        </p:spPr>
+      </p:sp>
+      <p:sp>
+        <p:nvSpPr>
+          <p:cNvPr id="25" name="Shape 23"/>
+          <p:cNvSpPr/>
+          <p:nvPr/>
+        </p:nvSpPr>
+        <p:spPr>
+          <a:xfrm>
+            <a:off x="2999232" y="3364992"/>
+            <a:ext cx="1645920" cy="475488"/>
+          </a:xfrm>
+          <a:prstGeom prst="rect">
+            <a:avLst>
+              <a:gd name="adj" fmla="val 9615"/>
+            </a:avLst>
+          </a:prstGeom>
+          <a:solidFill>
+            <a:srgbClr val="FFFFFF"/>
+          </a:solidFill>
+          <a:ln w="12700">
+            <a:solidFill>
+              <a:srgbClr val="0D9488"/>
             </a:solidFill>
             <a:prstDash val="solid"/>
           </a:ln>
@@ -13559,8 +13494,8 @@
         </p:nvSpPr>
         <p:spPr>
           <a:xfrm>
-            <a:off x="365760" y="3273552"/>
-            <a:ext cx="1371600" cy="658368"/>
+            <a:off x="2999232" y="3364992"/>
+            <a:ext cx="1645920" cy="475488"/>
           </a:xfrm>
           <a:prstGeom prst="rect">
             <a:avLst/>
@@ -13576,46 +13511,58 @@
               <a:buNone/>
             </a:pPr>
             <a:r>
-              <a:rPr lang="en-US" sz="1100" b="1" dirty="0">
-                <a:solidFill>
-                  <a:srgbClr val="475569"/>
+              <a:rPr lang="en-US" sz="1400" b="1" dirty="0">
+                <a:solidFill>
+                  <a:srgbClr val="0D9488"/>
                 </a:solidFill>
                 <a:latin typeface="Trebuchet MS" pitchFamily="34" charset="0"/>
                 <a:ea typeface="Trebuchet MS" pitchFamily="34" charset="-122"/>
                 <a:cs typeface="Trebuchet MS" pitchFamily="34" charset="-120"/>
               </a:rPr>
-              <a:t>Syllables</a:t>
-            </a:r>
-            <a:endParaRPr lang="en-US" sz="1100" dirty="0"/>
-          </a:p>
-        </p:txBody>
-      </p:sp>
-      <p:sp>
-        <p:nvSpPr>
-          <p:cNvPr id="27" name="Shape 25"/>
-          <p:cNvSpPr/>
-          <p:nvPr/>
-        </p:nvSpPr>
-        <p:spPr>
-          <a:xfrm>
-            <a:off x="1874520" y="3273552"/>
-            <a:ext cx="6903720" cy="658368"/>
-          </a:xfrm>
-          <a:prstGeom prst="rect">
-            <a:avLst>
-              <a:gd name="adj" fmla="val 8333"/>
-            </a:avLst>
-          </a:prstGeom>
-          <a:solidFill>
-            <a:srgbClr val="CCFBF1"/>
-          </a:solidFill>
-          <a:ln w="12700">
-            <a:solidFill>
-              <a:srgbClr val="0D9488"/>
-            </a:solidFill>
-            <a:prstDash val="solid"/>
-          </a:ln>
-        </p:spPr>
+              <a:t>star</a:t>
+            </a:r>
+            <a:endParaRPr lang="en-US" sz="1400" dirty="0"/>
+          </a:p>
+        </p:txBody>
+      </p:sp>
+      <p:sp>
+        <p:nvSpPr>
+          <p:cNvPr id="27" name="Text 25"/>
+          <p:cNvSpPr/>
+          <p:nvPr/>
+        </p:nvSpPr>
+        <p:spPr>
+          <a:xfrm>
+            <a:off x="4645152" y="3364992"/>
+            <a:ext cx="1097280" cy="475488"/>
+          </a:xfrm>
+          <a:prstGeom prst="rect">
+            <a:avLst/>
+          </a:prstGeom>
+          <a:noFill/>
+          <a:ln/>
+        </p:spPr>
+        <p:txBody>
+          <a:bodyPr wrap="square" lIns="0" tIns="0" rIns="0" bIns="0" rtlCol="0" anchor="ctr"/>
+          <a:lstStyle/>
+          <a:p>
+            <a:pPr algn="ctr" indent="0" marL="0">
+              <a:buNone/>
+            </a:pPr>
+            <a:r>
+              <a:rPr lang="en-US" sz="1600" b="1" dirty="0">
+                <a:solidFill>
+                  <a:srgbClr val="0D9488"/>
+                </a:solidFill>
+                <a:latin typeface="Trebuchet MS" pitchFamily="34" charset="0"/>
+                <a:ea typeface="Trebuchet MS" pitchFamily="34" charset="-122"/>
+                <a:cs typeface="Trebuchet MS" pitchFamily="34" charset="-120"/>
+              </a:rPr>
+              <a:t>·</a:t>
+            </a:r>
+            <a:endParaRPr lang="en-US" sz="1600" dirty="0"/>
+          </a:p>
+        </p:txBody>
       </p:sp>
       <p:sp>
         <p:nvSpPr>
@@ -13625,7 +13572,7 @@
         </p:nvSpPr>
         <p:spPr>
           <a:xfrm>
-            <a:off x="2313432" y="3364992"/>
+            <a:off x="5742432" y="3364992"/>
             <a:ext cx="1645920" cy="475488"/>
           </a:xfrm>
           <a:prstGeom prst="rect">
@@ -13652,7 +13599,7 @@
         </p:nvSpPr>
         <p:spPr>
           <a:xfrm>
-            <a:off x="2313432" y="3364992"/>
+            <a:off x="5742432" y="3364992"/>
             <a:ext cx="1645920" cy="475488"/>
           </a:xfrm>
           <a:prstGeom prst="rect">
@@ -13677,7 +13624,7 @@
                 <a:ea typeface="Trebuchet MS" pitchFamily="34" charset="-122"/>
                 <a:cs typeface="Trebuchet MS" pitchFamily="34" charset="-120"/>
               </a:rPr>
-              <a:t>re</a:t>
+              <a:t>ting</a:t>
             </a:r>
             <a:endParaRPr lang="en-US" sz="1400" dirty="0"/>
           </a:p>
@@ -13685,14 +13632,41 @@
       </p:sp>
       <p:sp>
         <p:nvSpPr>
-          <p:cNvPr id="30" name="Text 28"/>
-          <p:cNvSpPr/>
-          <p:nvPr/>
-        </p:nvSpPr>
-        <p:spPr>
-          <a:xfrm>
-            <a:off x="3959352" y="3364992"/>
-            <a:ext cx="411480" cy="475488"/>
+          <p:cNvPr id="30" name="Shape 28"/>
+          <p:cNvSpPr/>
+          <p:nvPr/>
+        </p:nvSpPr>
+        <p:spPr>
+          <a:xfrm>
+            <a:off x="365760" y="4096512"/>
+            <a:ext cx="1371600" cy="804672"/>
+          </a:xfrm>
+          <a:prstGeom prst="rect">
+            <a:avLst>
+              <a:gd name="adj" fmla="val 6818"/>
+            </a:avLst>
+          </a:prstGeom>
+          <a:solidFill>
+            <a:srgbClr val="E2E8F0"/>
+          </a:solidFill>
+          <a:ln w="12700">
+            <a:solidFill>
+              <a:srgbClr val="E2E8F0"/>
+            </a:solidFill>
+            <a:prstDash val="solid"/>
+          </a:ln>
+        </p:spPr>
+      </p:sp>
+      <p:sp>
+        <p:nvSpPr>
+          <p:cNvPr id="31" name="Text 29"/>
+          <p:cNvSpPr/>
+          <p:nvPr/>
+        </p:nvSpPr>
+        <p:spPr>
+          <a:xfrm>
+            <a:off x="365760" y="4096512"/>
+            <a:ext cx="1371600" cy="804672"/>
           </a:xfrm>
           <a:prstGeom prst="rect">
             <a:avLst/>
@@ -13708,201 +13682,30 @@
               <a:buNone/>
             </a:pPr>
             <a:r>
-              <a:rPr lang="en-US" sz="1600" b="1" dirty="0">
-                <a:solidFill>
-                  <a:srgbClr val="0D9488"/>
+              <a:rPr lang="en-US" sz="1100" b="1" dirty="0">
+                <a:solidFill>
+                  <a:srgbClr val="475569"/>
                 </a:solidFill>
                 <a:latin typeface="Trebuchet MS" pitchFamily="34" charset="0"/>
                 <a:ea typeface="Trebuchet MS" pitchFamily="34" charset="-122"/>
                 <a:cs typeface="Trebuchet MS" pitchFamily="34" charset="-120"/>
               </a:rPr>
-              <a:t>·</a:t>
-            </a:r>
-            <a:endParaRPr lang="en-US" sz="1600" dirty="0"/>
-          </a:p>
-        </p:txBody>
-      </p:sp>
-      <p:sp>
-        <p:nvSpPr>
-          <p:cNvPr id="31" name="Shape 29"/>
-          <p:cNvSpPr/>
-          <p:nvPr/>
-        </p:nvSpPr>
-        <p:spPr>
-          <a:xfrm>
-            <a:off x="4370832" y="3364992"/>
-            <a:ext cx="1645920" cy="475488"/>
-          </a:xfrm>
-          <a:prstGeom prst="rect">
-            <a:avLst>
-              <a:gd name="adj" fmla="val 9615"/>
-            </a:avLst>
-          </a:prstGeom>
-          <a:solidFill>
-            <a:srgbClr val="FFFFFF"/>
-          </a:solidFill>
-          <a:ln w="12700">
-            <a:solidFill>
-              <a:srgbClr val="0D9488"/>
-            </a:solidFill>
-            <a:prstDash val="solid"/>
-          </a:ln>
-        </p:spPr>
-      </p:sp>
-      <p:sp>
-        <p:nvSpPr>
-          <p:cNvPr id="32" name="Text 30"/>
-          <p:cNvSpPr/>
-          <p:nvPr/>
-        </p:nvSpPr>
-        <p:spPr>
-          <a:xfrm>
-            <a:off x="4370832" y="3364992"/>
-            <a:ext cx="1645920" cy="475488"/>
-          </a:xfrm>
-          <a:prstGeom prst="rect">
-            <a:avLst/>
-          </a:prstGeom>
-          <a:noFill/>
-          <a:ln/>
-        </p:spPr>
-        <p:txBody>
-          <a:bodyPr wrap="square" lIns="0" tIns="0" rIns="0" bIns="0" rtlCol="0" anchor="ctr"/>
-          <a:lstStyle/>
-          <a:p>
-            <a:pPr algn="ctr" indent="0" marL="0">
-              <a:buNone/>
-            </a:pPr>
-            <a:r>
-              <a:rPr lang="en-US" sz="1400" b="1" dirty="0">
-                <a:solidFill>
-                  <a:srgbClr val="0D9488"/>
-                </a:solidFill>
-                <a:latin typeface="Trebuchet MS" pitchFamily="34" charset="0"/>
-                <a:ea typeface="Trebuchet MS" pitchFamily="34" charset="-122"/>
-                <a:cs typeface="Trebuchet MS" pitchFamily="34" charset="-120"/>
-              </a:rPr>
-              <a:t>star</a:t>
-            </a:r>
-            <a:endParaRPr lang="en-US" sz="1400" dirty="0"/>
-          </a:p>
-        </p:txBody>
-      </p:sp>
-      <p:sp>
-        <p:nvSpPr>
-          <p:cNvPr id="33" name="Text 31"/>
-          <p:cNvSpPr/>
-          <p:nvPr/>
-        </p:nvSpPr>
-        <p:spPr>
-          <a:xfrm>
-            <a:off x="6016752" y="3364992"/>
-            <a:ext cx="411480" cy="475488"/>
-          </a:xfrm>
-          <a:prstGeom prst="rect">
-            <a:avLst/>
-          </a:prstGeom>
-          <a:noFill/>
-          <a:ln/>
-        </p:spPr>
-        <p:txBody>
-          <a:bodyPr wrap="square" lIns="0" tIns="0" rIns="0" bIns="0" rtlCol="0" anchor="ctr"/>
-          <a:lstStyle/>
-          <a:p>
-            <a:pPr algn="ctr" indent="0" marL="0">
-              <a:buNone/>
-            </a:pPr>
-            <a:r>
-              <a:rPr lang="en-US" sz="1600" b="1" dirty="0">
-                <a:solidFill>
-                  <a:srgbClr val="0D9488"/>
-                </a:solidFill>
-                <a:latin typeface="Trebuchet MS" pitchFamily="34" charset="0"/>
-                <a:ea typeface="Trebuchet MS" pitchFamily="34" charset="-122"/>
-                <a:cs typeface="Trebuchet MS" pitchFamily="34" charset="-120"/>
-              </a:rPr>
-              <a:t>·</a:t>
-            </a:r>
-            <a:endParaRPr lang="en-US" sz="1600" dirty="0"/>
-          </a:p>
-        </p:txBody>
-      </p:sp>
-      <p:sp>
-        <p:nvSpPr>
-          <p:cNvPr id="34" name="Shape 32"/>
-          <p:cNvSpPr/>
-          <p:nvPr/>
-        </p:nvSpPr>
-        <p:spPr>
-          <a:xfrm>
-            <a:off x="6428232" y="3364992"/>
-            <a:ext cx="1645920" cy="475488"/>
-          </a:xfrm>
-          <a:prstGeom prst="rect">
-            <a:avLst>
-              <a:gd name="adj" fmla="val 9615"/>
-            </a:avLst>
-          </a:prstGeom>
-          <a:solidFill>
-            <a:srgbClr val="FFFFFF"/>
-          </a:solidFill>
-          <a:ln w="12700">
-            <a:solidFill>
-              <a:srgbClr val="0D9488"/>
-            </a:solidFill>
-            <a:prstDash val="solid"/>
-          </a:ln>
-        </p:spPr>
-      </p:sp>
-      <p:sp>
-        <p:nvSpPr>
-          <p:cNvPr id="35" name="Text 33"/>
-          <p:cNvSpPr/>
-          <p:nvPr/>
-        </p:nvSpPr>
-        <p:spPr>
-          <a:xfrm>
-            <a:off x="6428232" y="3364992"/>
-            <a:ext cx="1645920" cy="475488"/>
-          </a:xfrm>
-          <a:prstGeom prst="rect">
-            <a:avLst/>
-          </a:prstGeom>
-          <a:noFill/>
-          <a:ln/>
-        </p:spPr>
-        <p:txBody>
-          <a:bodyPr wrap="square" lIns="0" tIns="0" rIns="0" bIns="0" rtlCol="0" anchor="ctr"/>
-          <a:lstStyle/>
-          <a:p>
-            <a:pPr algn="ctr" indent="0" marL="0">
-              <a:buNone/>
-            </a:pPr>
-            <a:r>
-              <a:rPr lang="en-US" sz="1400" b="1" dirty="0">
-                <a:solidFill>
-                  <a:srgbClr val="0D9488"/>
-                </a:solidFill>
-                <a:latin typeface="Trebuchet MS" pitchFamily="34" charset="0"/>
-                <a:ea typeface="Trebuchet MS" pitchFamily="34" charset="-122"/>
-                <a:cs typeface="Trebuchet MS" pitchFamily="34" charset="-120"/>
-              </a:rPr>
-              <a:t>ted</a:t>
-            </a:r>
-            <a:endParaRPr lang="en-US" sz="1400" dirty="0"/>
-          </a:p>
-        </p:txBody>
-      </p:sp>
-      <p:sp>
-        <p:nvSpPr>
-          <p:cNvPr id="36" name="Shape 34"/>
-          <p:cNvSpPr/>
-          <p:nvPr/>
-        </p:nvSpPr>
-        <p:spPr>
-          <a:xfrm>
-            <a:off x="365760" y="4096512"/>
-            <a:ext cx="1371600" cy="804672"/>
+              <a:t>Phonemes</a:t>
+            </a:r>
+            <a:endParaRPr lang="en-US" sz="1100" dirty="0"/>
+          </a:p>
+        </p:txBody>
+      </p:sp>
+      <p:sp>
+        <p:nvSpPr>
+          <p:cNvPr id="32" name="Shape 30"/>
+          <p:cNvSpPr/>
+          <p:nvPr/>
+        </p:nvSpPr>
+        <p:spPr>
+          <a:xfrm>
+            <a:off x="1874520" y="4096512"/>
+            <a:ext cx="6903720" cy="804672"/>
           </a:xfrm>
           <a:prstGeom prst="rect">
             <a:avLst>
@@ -13910,85 +13713,19 @@
             </a:avLst>
           </a:prstGeom>
           <a:solidFill>
-            <a:srgbClr val="E2E8F0"/>
+            <a:srgbClr val="F8FAFC"/>
           </a:solidFill>
           <a:ln w="12700">
             <a:solidFill>
               <a:srgbClr val="E2E8F0"/>
             </a:solidFill>
-            <a:prstDash val="solid"/>
-          </a:ln>
-        </p:spPr>
-      </p:sp>
-      <p:sp>
-        <p:nvSpPr>
-          <p:cNvPr id="37" name="Text 35"/>
-          <p:cNvSpPr/>
-          <p:nvPr/>
-        </p:nvSpPr>
-        <p:spPr>
-          <a:xfrm>
-            <a:off x="365760" y="4096512"/>
-            <a:ext cx="1371600" cy="804672"/>
-          </a:xfrm>
-          <a:prstGeom prst="rect">
-            <a:avLst/>
-          </a:prstGeom>
-          <a:noFill/>
-          <a:ln/>
-        </p:spPr>
-        <p:txBody>
-          <a:bodyPr wrap="square" lIns="0" tIns="0" rIns="0" bIns="0" rtlCol="0" anchor="ctr"/>
-          <a:lstStyle/>
-          <a:p>
-            <a:pPr algn="ctr" indent="0" marL="0">
-              <a:buNone/>
-            </a:pPr>
-            <a:r>
-              <a:rPr lang="en-US" sz="1100" b="1" dirty="0">
-                <a:solidFill>
-                  <a:srgbClr val="475569"/>
-                </a:solidFill>
-                <a:latin typeface="Trebuchet MS" pitchFamily="34" charset="0"/>
-                <a:ea typeface="Trebuchet MS" pitchFamily="34" charset="-122"/>
-                <a:cs typeface="Trebuchet MS" pitchFamily="34" charset="-120"/>
-              </a:rPr>
-              <a:t>Phonemes</a:t>
-            </a:r>
-            <a:endParaRPr lang="en-US" sz="1100" dirty="0"/>
-          </a:p>
-        </p:txBody>
-      </p:sp>
-      <p:sp>
-        <p:nvSpPr>
-          <p:cNvPr id="38" name="Shape 36"/>
-          <p:cNvSpPr/>
-          <p:nvPr/>
-        </p:nvSpPr>
-        <p:spPr>
-          <a:xfrm>
-            <a:off x="1874520" y="4096512"/>
-            <a:ext cx="6903720" cy="804672"/>
-          </a:xfrm>
-          <a:prstGeom prst="rect">
-            <a:avLst>
-              <a:gd name="adj" fmla="val 6818"/>
-            </a:avLst>
-          </a:prstGeom>
-          <a:solidFill>
-            <a:srgbClr val="F8FAFC"/>
-          </a:solidFill>
-          <a:ln w="12700">
-            <a:solidFill>
-              <a:srgbClr val="E2E8F0"/>
-            </a:solidFill>
             <a:prstDash val="dash"/>
           </a:ln>
         </p:spPr>
       </p:sp>
       <p:sp>
         <p:nvSpPr>
-          <p:cNvPr id="39" name="Text 37"/>
+          <p:cNvPr id="33" name="Text 31"/>
           <p:cNvSpPr/>
           <p:nvPr/>
         </p:nvSpPr>
@@ -14220,7 +13957,7 @@
                 <a:ea typeface="Calibri" pitchFamily="34" charset="-122"/>
                 <a:cs typeface="Calibri" pitchFamily="34" charset="-120"/>
               </a:rPr>
-              <a:t>Root 'start' — begin, move suddenly, jump</a:t>
+              <a:t>Root 'start' — begin, move suddenly, set going</a:t>
             </a:r>
             <a:endParaRPr lang="en-US" sz="1600" dirty="0"/>
           </a:p>
@@ -14576,7 +14313,7 @@
                 <a:ea typeface="Calibri" pitchFamily="34" charset="-122"/>
                 <a:cs typeface="Calibri" pitchFamily="34" charset="-120"/>
               </a:rPr>
-              <a:t>Word Labs  •  wordlabs.app  •  Root: 'start' = begin, move suddenly, jump</a:t>
+              <a:t>Word Labs  •  wordlabs.app  •  Root: 'start' = begin, move suddenly, set going</a:t>
             </a:r>
             <a:endParaRPr lang="en-US" sz="800" dirty="0"/>
           </a:p>
@@ -14715,7 +14452,7 @@
                 <a:ea typeface="Trebuchet MS" pitchFamily="34" charset="-122"/>
                 <a:cs typeface="Trebuchet MS" pitchFamily="34" charset="-120"/>
               </a:rPr>
-              <a:t>restarted</a:t>
+              <a:t>starting</a:t>
             </a:r>
             <a:endParaRPr lang="en-US" sz="2800" dirty="0"/>
           </a:p>
@@ -14795,7 +14532,7 @@
         </p:nvSpPr>
         <p:spPr>
           <a:xfrm>
-            <a:off x="2221992" y="2258568"/>
+            <a:off x="2938272" y="2258568"/>
             <a:ext cx="1828800" cy="292608"/>
           </a:xfrm>
           <a:prstGeom prst="rect">
@@ -14804,11 +14541,11 @@
             </a:avLst>
           </a:prstGeom>
           <a:solidFill>
-            <a:srgbClr val="DDD6FE"/>
+            <a:srgbClr val="CCFBF1"/>
           </a:solidFill>
           <a:ln w="19050">
             <a:solidFill>
-              <a:srgbClr val="7C3AED"/>
+              <a:srgbClr val="0D9488"/>
             </a:solidFill>
             <a:prstDash val="solid"/>
           </a:ln>
@@ -14829,7 +14566,7 @@
         </p:nvSpPr>
         <p:spPr>
           <a:xfrm>
-            <a:off x="2221992" y="2258568"/>
+            <a:off x="2938272" y="2258568"/>
             <a:ext cx="1828800" cy="292608"/>
           </a:xfrm>
           <a:prstGeom prst="rect">
@@ -14848,13 +14585,13 @@
             <a:r>
               <a:rPr lang="en-US" sz="1300" b="1" dirty="0">
                 <a:solidFill>
-                  <a:srgbClr val="4C1D95"/>
+                  <a:srgbClr val="0F766E"/>
                 </a:solidFill>
                 <a:latin typeface="Trebuchet MS" pitchFamily="34" charset="0"/>
                 <a:ea typeface="Trebuchet MS" pitchFamily="34" charset="-122"/>
                 <a:cs typeface="Trebuchet MS" pitchFamily="34" charset="-120"/>
               </a:rPr>
-              <a:t>re</a:t>
+              <a:t>start</a:t>
             </a:r>
             <a:endParaRPr lang="en-US" sz="1300" dirty="0"/>
           </a:p>
@@ -14868,7 +14605,7 @@
         </p:nvSpPr>
         <p:spPr>
           <a:xfrm>
-            <a:off x="2221992" y="2569464"/>
+            <a:off x="2938272" y="2569464"/>
             <a:ext cx="1828800" cy="201168"/>
           </a:xfrm>
           <a:prstGeom prst="rect">
@@ -14893,7 +14630,7 @@
                 <a:ea typeface="Calibri" pitchFamily="34" charset="-122"/>
                 <a:cs typeface="Calibri" pitchFamily="34" charset="-120"/>
               </a:rPr>
-              <a:t>again</a:t>
+              <a:t>begin</a:t>
             </a:r>
             <a:endParaRPr lang="en-US" sz="850" dirty="0"/>
           </a:p>
@@ -14907,7 +14644,7 @@
         </p:nvSpPr>
         <p:spPr>
           <a:xfrm>
-            <a:off x="4370832" y="2258568"/>
+            <a:off x="5803392" y="2258568"/>
             <a:ext cx="1828800" cy="292608"/>
           </a:xfrm>
           <a:prstGeom prst="rect">
@@ -14916,11 +14653,11 @@
             </a:avLst>
           </a:prstGeom>
           <a:solidFill>
-            <a:srgbClr val="CCFBF1"/>
+            <a:srgbClr val="FCE7F3"/>
           </a:solidFill>
           <a:ln w="19050">
             <a:solidFill>
-              <a:srgbClr val="0D9488"/>
+              <a:srgbClr val="DB2777"/>
             </a:solidFill>
             <a:prstDash val="solid"/>
           </a:ln>
@@ -14941,7 +14678,7 @@
         </p:nvSpPr>
         <p:spPr>
           <a:xfrm>
-            <a:off x="4370832" y="2258568"/>
+            <a:off x="5803392" y="2258568"/>
             <a:ext cx="1828800" cy="292608"/>
           </a:xfrm>
           <a:prstGeom prst="rect">
@@ -14960,13 +14697,13 @@
             <a:r>
               <a:rPr lang="en-US" sz="1300" b="1" dirty="0">
                 <a:solidFill>
-                  <a:srgbClr val="0F766E"/>
+                  <a:srgbClr val="9D174D"/>
                 </a:solidFill>
                 <a:latin typeface="Trebuchet MS" pitchFamily="34" charset="0"/>
                 <a:ea typeface="Trebuchet MS" pitchFamily="34" charset="-122"/>
                 <a:cs typeface="Trebuchet MS" pitchFamily="34" charset="-120"/>
               </a:rPr>
-              <a:t>start</a:t>
+              <a:t>ing</a:t>
             </a:r>
             <a:endParaRPr lang="en-US" sz="1300" dirty="0"/>
           </a:p>
@@ -14980,7 +14717,7 @@
         </p:nvSpPr>
         <p:spPr>
           <a:xfrm>
-            <a:off x="4370832" y="2569464"/>
+            <a:off x="5803392" y="2569464"/>
             <a:ext cx="1828800" cy="201168"/>
           </a:xfrm>
           <a:prstGeom prst="rect">
@@ -15005,7 +14742,7 @@
                 <a:ea typeface="Calibri" pitchFamily="34" charset="-122"/>
                 <a:cs typeface="Calibri" pitchFamily="34" charset="-120"/>
               </a:rPr>
-              <a:t>to begin</a:t>
+              <a:t>action happening now</a:t>
             </a:r>
             <a:endParaRPr lang="en-US" sz="850" dirty="0"/>
           </a:p>
@@ -15019,30 +14756,23 @@
         </p:nvSpPr>
         <p:spPr>
           <a:xfrm>
-            <a:off x="6519672" y="2258568"/>
-            <a:ext cx="1828800" cy="292608"/>
+            <a:off x="365760" y="3273552"/>
+            <a:ext cx="1371600" cy="658368"/>
           </a:xfrm>
           <a:prstGeom prst="rect">
             <a:avLst>
-              <a:gd name="adj" fmla="val 25000"/>
+              <a:gd name="adj" fmla="val 8333"/>
             </a:avLst>
           </a:prstGeom>
           <a:solidFill>
-            <a:srgbClr val="FCE7F3"/>
-          </a:solidFill>
-          <a:ln w="19050">
-            <a:solidFill>
-              <a:srgbClr val="DB2777"/>
-            </a:solidFill>
-            <a:prstDash val="solid"/>
-          </a:ln>
-          <a:effectLst>
-            <a:outerShdw sx="100000" sy="100000" kx="0" ky="0" algn="bl" rotWithShape="0" blurRad="101600" dist="38100" dir="8100000">
-              <a:srgbClr val="000000">
-                <a:alpha val="12000"/>
-              </a:srgbClr>
-            </a:outerShdw>
-          </a:effectLst>
+            <a:srgbClr val="E2E8F0"/>
+          </a:solidFill>
+          <a:ln w="12700">
+            <a:solidFill>
+              <a:srgbClr val="E2E8F0"/>
+            </a:solidFill>
+            <a:prstDash val="solid"/>
+          </a:ln>
         </p:spPr>
       </p:sp>
       <p:sp>
@@ -15053,8 +14783,8 @@
         </p:nvSpPr>
         <p:spPr>
           <a:xfrm>
-            <a:off x="6519672" y="2258568"/>
-            <a:ext cx="1828800" cy="292608"/>
+            <a:off x="365760" y="3273552"/>
+            <a:ext cx="1371600" cy="658368"/>
           </a:xfrm>
           <a:prstGeom prst="rect">
             <a:avLst/>
@@ -15070,69 +14800,30 @@
               <a:buNone/>
             </a:pPr>
             <a:r>
-              <a:rPr lang="en-US" sz="1300" b="1" dirty="0">
-                <a:solidFill>
-                  <a:srgbClr val="9D174D"/>
+              <a:rPr lang="en-US" sz="1100" b="1" dirty="0">
+                <a:solidFill>
+                  <a:srgbClr val="475569"/>
                 </a:solidFill>
                 <a:latin typeface="Trebuchet MS" pitchFamily="34" charset="0"/>
                 <a:ea typeface="Trebuchet MS" pitchFamily="34" charset="-122"/>
                 <a:cs typeface="Trebuchet MS" pitchFamily="34" charset="-120"/>
               </a:rPr>
-              <a:t>ed</a:t>
-            </a:r>
-            <a:endParaRPr lang="en-US" sz="1300" dirty="0"/>
-          </a:p>
-        </p:txBody>
-      </p:sp>
-      <p:sp>
-        <p:nvSpPr>
-          <p:cNvPr id="24" name="Text 22"/>
-          <p:cNvSpPr/>
-          <p:nvPr/>
-        </p:nvSpPr>
-        <p:spPr>
-          <a:xfrm>
-            <a:off x="6519672" y="2569464"/>
-            <a:ext cx="1828800" cy="201168"/>
-          </a:xfrm>
-          <a:prstGeom prst="rect">
-            <a:avLst/>
-          </a:prstGeom>
-          <a:noFill/>
-          <a:ln/>
-        </p:spPr>
-        <p:txBody>
-          <a:bodyPr wrap="square" lIns="0" tIns="0" rIns="0" bIns="0" rtlCol="0" anchor="t"/>
-          <a:lstStyle/>
-          <a:p>
-            <a:pPr algn="ctr" indent="0" marL="0">
-              <a:buNone/>
-            </a:pPr>
-            <a:r>
-              <a:rPr lang="en-US" sz="850" dirty="0">
-                <a:solidFill>
-                  <a:srgbClr val="475569"/>
-                </a:solidFill>
-                <a:latin typeface="Calibri" pitchFamily="34" charset="0"/>
-                <a:ea typeface="Calibri" pitchFamily="34" charset="-122"/>
-                <a:cs typeface="Calibri" pitchFamily="34" charset="-120"/>
-              </a:rPr>
-              <a:t>happened in the past</a:t>
-            </a:r>
-            <a:endParaRPr lang="en-US" sz="850" dirty="0"/>
-          </a:p>
-        </p:txBody>
-      </p:sp>
-      <p:sp>
-        <p:nvSpPr>
-          <p:cNvPr id="25" name="Shape 23"/>
-          <p:cNvSpPr/>
-          <p:nvPr/>
-        </p:nvSpPr>
-        <p:spPr>
-          <a:xfrm>
-            <a:off x="365760" y="3273552"/>
-            <a:ext cx="1371600" cy="658368"/>
+              <a:t>Syllables</a:t>
+            </a:r>
+            <a:endParaRPr lang="en-US" sz="1100" dirty="0"/>
+          </a:p>
+        </p:txBody>
+      </p:sp>
+      <p:sp>
+        <p:nvSpPr>
+          <p:cNvPr id="24" name="Shape 22"/>
+          <p:cNvSpPr/>
+          <p:nvPr/>
+        </p:nvSpPr>
+        <p:spPr>
+          <a:xfrm>
+            <a:off x="1874520" y="3273552"/>
+            <a:ext cx="6903720" cy="658368"/>
           </a:xfrm>
           <a:prstGeom prst="rect">
             <a:avLst>
@@ -15140,11 +14831,38 @@
             </a:avLst>
           </a:prstGeom>
           <a:solidFill>
-            <a:srgbClr val="E2E8F0"/>
-          </a:solidFill>
-          <a:ln w="12700">
-            <a:solidFill>
-              <a:srgbClr val="E2E8F0"/>
+            <a:srgbClr val="CCFBF1"/>
+          </a:solidFill>
+          <a:ln w="12700">
+            <a:solidFill>
+              <a:srgbClr val="0D9488"/>
+            </a:solidFill>
+            <a:prstDash val="solid"/>
+          </a:ln>
+        </p:spPr>
+      </p:sp>
+      <p:sp>
+        <p:nvSpPr>
+          <p:cNvPr id="25" name="Shape 23"/>
+          <p:cNvSpPr/>
+          <p:nvPr/>
+        </p:nvSpPr>
+        <p:spPr>
+          <a:xfrm>
+            <a:off x="2999232" y="3364992"/>
+            <a:ext cx="1645920" cy="475488"/>
+          </a:xfrm>
+          <a:prstGeom prst="rect">
+            <a:avLst>
+              <a:gd name="adj" fmla="val 9615"/>
+            </a:avLst>
+          </a:prstGeom>
+          <a:solidFill>
+            <a:srgbClr val="FFFFFF"/>
+          </a:solidFill>
+          <a:ln w="12700">
+            <a:solidFill>
+              <a:srgbClr val="0D9488"/>
             </a:solidFill>
             <a:prstDash val="solid"/>
           </a:ln>
@@ -15158,8 +14876,8 @@
         </p:nvSpPr>
         <p:spPr>
           <a:xfrm>
-            <a:off x="365760" y="3273552"/>
-            <a:ext cx="1371600" cy="658368"/>
+            <a:off x="2999232" y="3364992"/>
+            <a:ext cx="1645920" cy="475488"/>
           </a:xfrm>
           <a:prstGeom prst="rect">
             <a:avLst/>
@@ -15175,15 +14893,186 @@
               <a:buNone/>
             </a:pPr>
             <a:r>
-              <a:rPr lang="en-US" sz="1100" b="1" dirty="0">
-                <a:solidFill>
-                  <a:srgbClr val="475569"/>
+              <a:rPr lang="en-US" sz="1400" b="1" dirty="0">
+                <a:solidFill>
+                  <a:srgbClr val="0D9488"/>
                 </a:solidFill>
                 <a:latin typeface="Trebuchet MS" pitchFamily="34" charset="0"/>
                 <a:ea typeface="Trebuchet MS" pitchFamily="34" charset="-122"/>
                 <a:cs typeface="Trebuchet MS" pitchFamily="34" charset="-120"/>
               </a:rPr>
-              <a:t>Syllables</a:t>
+              <a:t>star</a:t>
+            </a:r>
+            <a:endParaRPr lang="en-US" sz="1400" dirty="0"/>
+          </a:p>
+        </p:txBody>
+      </p:sp>
+      <p:sp>
+        <p:nvSpPr>
+          <p:cNvPr id="27" name="Text 25"/>
+          <p:cNvSpPr/>
+          <p:nvPr/>
+        </p:nvSpPr>
+        <p:spPr>
+          <a:xfrm>
+            <a:off x="4645152" y="3364992"/>
+            <a:ext cx="1097280" cy="475488"/>
+          </a:xfrm>
+          <a:prstGeom prst="rect">
+            <a:avLst/>
+          </a:prstGeom>
+          <a:noFill/>
+          <a:ln/>
+        </p:spPr>
+        <p:txBody>
+          <a:bodyPr wrap="square" lIns="0" tIns="0" rIns="0" bIns="0" rtlCol="0" anchor="ctr"/>
+          <a:lstStyle/>
+          <a:p>
+            <a:pPr algn="ctr" indent="0" marL="0">
+              <a:buNone/>
+            </a:pPr>
+            <a:r>
+              <a:rPr lang="en-US" sz="1600" b="1" dirty="0">
+                <a:solidFill>
+                  <a:srgbClr val="0D9488"/>
+                </a:solidFill>
+                <a:latin typeface="Trebuchet MS" pitchFamily="34" charset="0"/>
+                <a:ea typeface="Trebuchet MS" pitchFamily="34" charset="-122"/>
+                <a:cs typeface="Trebuchet MS" pitchFamily="34" charset="-120"/>
+              </a:rPr>
+              <a:t>·</a:t>
+            </a:r>
+            <a:endParaRPr lang="en-US" sz="1600" dirty="0"/>
+          </a:p>
+        </p:txBody>
+      </p:sp>
+      <p:sp>
+        <p:nvSpPr>
+          <p:cNvPr id="28" name="Shape 26"/>
+          <p:cNvSpPr/>
+          <p:nvPr/>
+        </p:nvSpPr>
+        <p:spPr>
+          <a:xfrm>
+            <a:off x="5742432" y="3364992"/>
+            <a:ext cx="1645920" cy="475488"/>
+          </a:xfrm>
+          <a:prstGeom prst="rect">
+            <a:avLst>
+              <a:gd name="adj" fmla="val 9615"/>
+            </a:avLst>
+          </a:prstGeom>
+          <a:solidFill>
+            <a:srgbClr val="FFFFFF"/>
+          </a:solidFill>
+          <a:ln w="12700">
+            <a:solidFill>
+              <a:srgbClr val="0D9488"/>
+            </a:solidFill>
+            <a:prstDash val="solid"/>
+          </a:ln>
+        </p:spPr>
+      </p:sp>
+      <p:sp>
+        <p:nvSpPr>
+          <p:cNvPr id="29" name="Text 27"/>
+          <p:cNvSpPr/>
+          <p:nvPr/>
+        </p:nvSpPr>
+        <p:spPr>
+          <a:xfrm>
+            <a:off x="5742432" y="3364992"/>
+            <a:ext cx="1645920" cy="475488"/>
+          </a:xfrm>
+          <a:prstGeom prst="rect">
+            <a:avLst/>
+          </a:prstGeom>
+          <a:noFill/>
+          <a:ln/>
+        </p:spPr>
+        <p:txBody>
+          <a:bodyPr wrap="square" lIns="0" tIns="0" rIns="0" bIns="0" rtlCol="0" anchor="ctr"/>
+          <a:lstStyle/>
+          <a:p>
+            <a:pPr algn="ctr" indent="0" marL="0">
+              <a:buNone/>
+            </a:pPr>
+            <a:r>
+              <a:rPr lang="en-US" sz="1400" b="1" dirty="0">
+                <a:solidFill>
+                  <a:srgbClr val="0D9488"/>
+                </a:solidFill>
+                <a:latin typeface="Trebuchet MS" pitchFamily="34" charset="0"/>
+                <a:ea typeface="Trebuchet MS" pitchFamily="34" charset="-122"/>
+                <a:cs typeface="Trebuchet MS" pitchFamily="34" charset="-120"/>
+              </a:rPr>
+              <a:t>ting</a:t>
+            </a:r>
+            <a:endParaRPr lang="en-US" sz="1400" dirty="0"/>
+          </a:p>
+        </p:txBody>
+      </p:sp>
+      <p:sp>
+        <p:nvSpPr>
+          <p:cNvPr id="30" name="Shape 28"/>
+          <p:cNvSpPr/>
+          <p:nvPr/>
+        </p:nvSpPr>
+        <p:spPr>
+          <a:xfrm>
+            <a:off x="365760" y="4096512"/>
+            <a:ext cx="1371600" cy="804672"/>
+          </a:xfrm>
+          <a:prstGeom prst="rect">
+            <a:avLst>
+              <a:gd name="adj" fmla="val 6818"/>
+            </a:avLst>
+          </a:prstGeom>
+          <a:solidFill>
+            <a:srgbClr val="E2E8F0"/>
+          </a:solidFill>
+          <a:ln w="12700">
+            <a:solidFill>
+              <a:srgbClr val="E2E8F0"/>
+            </a:solidFill>
+            <a:prstDash val="solid"/>
+          </a:ln>
+        </p:spPr>
+      </p:sp>
+      <p:sp>
+        <p:nvSpPr>
+          <p:cNvPr id="31" name="Text 29"/>
+          <p:cNvSpPr/>
+          <p:nvPr/>
+        </p:nvSpPr>
+        <p:spPr>
+          <a:xfrm>
+            <a:off x="365760" y="4096512"/>
+            <a:ext cx="1371600" cy="804672"/>
+          </a:xfrm>
+          <a:prstGeom prst="rect">
+            <a:avLst/>
+          </a:prstGeom>
+          <a:noFill/>
+          <a:ln/>
+        </p:spPr>
+        <p:txBody>
+          <a:bodyPr wrap="square" lIns="0" tIns="0" rIns="0" bIns="0" rtlCol="0" anchor="ctr"/>
+          <a:lstStyle/>
+          <a:p>
+            <a:pPr algn="ctr" indent="0" marL="0">
+              <a:buNone/>
+            </a:pPr>
+            <a:r>
+              <a:rPr lang="en-US" sz="1100" b="1" dirty="0">
+                <a:solidFill>
+                  <a:srgbClr val="475569"/>
+                </a:solidFill>
+                <a:latin typeface="Trebuchet MS" pitchFamily="34" charset="0"/>
+                <a:ea typeface="Trebuchet MS" pitchFamily="34" charset="-122"/>
+                <a:cs typeface="Trebuchet MS" pitchFamily="34" charset="-120"/>
+              </a:rPr>
+              <a:t>Phonemes</a:t>
             </a:r>
             <a:endParaRPr lang="en-US" sz="1100" dirty="0"/>
           </a:p>
@@ -15191,13 +15080,13 @@
       </p:sp>
       <p:sp>
         <p:nvSpPr>
-          <p:cNvPr id="27" name="Shape 25"/>
-          <p:cNvSpPr/>
-          <p:nvPr/>
-        </p:nvSpPr>
-        <p:spPr>
-          <a:xfrm>
-            <a:off x="1874520" y="3273552"/>
+          <p:cNvPr id="32" name="Shape 30"/>
+          <p:cNvSpPr/>
+          <p:nvPr/>
+        </p:nvSpPr>
+        <p:spPr>
+          <a:xfrm>
+            <a:off x="1874520" y="4096512"/>
             <a:ext cx="6903720" cy="658368"/>
           </a:xfrm>
           <a:prstGeom prst="rect">
@@ -15206,30 +15095,30 @@
             </a:avLst>
           </a:prstGeom>
           <a:solidFill>
-            <a:srgbClr val="CCFBF1"/>
-          </a:solidFill>
-          <a:ln w="12700">
-            <a:solidFill>
-              <a:srgbClr val="0D9488"/>
-            </a:solidFill>
-            <a:prstDash val="solid"/>
-          </a:ln>
-        </p:spPr>
-      </p:sp>
-      <p:sp>
-        <p:nvSpPr>
-          <p:cNvPr id="28" name="Shape 26"/>
-          <p:cNvSpPr/>
-          <p:nvPr/>
-        </p:nvSpPr>
-        <p:spPr>
-          <a:xfrm>
-            <a:off x="2313432" y="3364992"/>
-            <a:ext cx="1645920" cy="475488"/>
+            <a:srgbClr val="FCE7F3"/>
+          </a:solidFill>
+          <a:ln w="12700">
+            <a:solidFill>
+              <a:srgbClr val="DB2777"/>
+            </a:solidFill>
+            <a:prstDash val="solid"/>
+          </a:ln>
+        </p:spPr>
+      </p:sp>
+      <p:sp>
+        <p:nvSpPr>
+          <p:cNvPr id="33" name="Shape 31"/>
+          <p:cNvSpPr/>
+          <p:nvPr/>
+        </p:nvSpPr>
+        <p:spPr>
+          <a:xfrm>
+            <a:off x="2254649" y="4169664"/>
+            <a:ext cx="685800" cy="475488"/>
           </a:xfrm>
           <a:prstGeom prst="rect">
             <a:avLst>
-              <a:gd name="adj" fmla="val 9615"/>
+              <a:gd name="adj" fmla="val 7692"/>
             </a:avLst>
           </a:prstGeom>
           <a:solidFill>
@@ -15237,22 +15126,22 @@
           </a:solidFill>
           <a:ln w="12700">
             <a:solidFill>
-              <a:srgbClr val="0D9488"/>
-            </a:solidFill>
-            <a:prstDash val="solid"/>
-          </a:ln>
-        </p:spPr>
-      </p:sp>
-      <p:sp>
-        <p:nvSpPr>
-          <p:cNvPr id="29" name="Text 27"/>
-          <p:cNvSpPr/>
-          <p:nvPr/>
-        </p:nvSpPr>
-        <p:spPr>
-          <a:xfrm>
-            <a:off x="2313432" y="3364992"/>
-            <a:ext cx="1645920" cy="475488"/>
+              <a:srgbClr val="DB2777"/>
+            </a:solidFill>
+            <a:prstDash val="solid"/>
+          </a:ln>
+        </p:spPr>
+      </p:sp>
+      <p:sp>
+        <p:nvSpPr>
+          <p:cNvPr id="34" name="Text 32"/>
+          <p:cNvSpPr/>
+          <p:nvPr/>
+        </p:nvSpPr>
+        <p:spPr>
+          <a:xfrm>
+            <a:off x="2254649" y="4169664"/>
+            <a:ext cx="685800" cy="475488"/>
           </a:xfrm>
           <a:prstGeom prst="rect">
             <a:avLst/>
@@ -15268,30 +15157,57 @@
               <a:buNone/>
             </a:pPr>
             <a:r>
-              <a:rPr lang="en-US" sz="1400" b="1" dirty="0">
-                <a:solidFill>
-                  <a:srgbClr val="0D9488"/>
+              <a:rPr lang="en-US" sz="900" b="1" dirty="0">
+                <a:solidFill>
+                  <a:srgbClr val="9D174D"/>
                 </a:solidFill>
                 <a:latin typeface="Trebuchet MS" pitchFamily="34" charset="0"/>
                 <a:ea typeface="Trebuchet MS" pitchFamily="34" charset="-122"/>
                 <a:cs typeface="Trebuchet MS" pitchFamily="34" charset="-120"/>
               </a:rPr>
-              <a:t>re</a:t>
-            </a:r>
-            <a:endParaRPr lang="en-US" sz="1400" dirty="0"/>
-          </a:p>
-        </p:txBody>
-      </p:sp>
-      <p:sp>
-        <p:nvSpPr>
-          <p:cNvPr id="30" name="Text 28"/>
-          <p:cNvSpPr/>
-          <p:nvPr/>
-        </p:nvSpPr>
-        <p:spPr>
-          <a:xfrm>
-            <a:off x="3959352" y="3364992"/>
-            <a:ext cx="411480" cy="475488"/>
+              <a:t>s</a:t>
+            </a:r>
+            <a:endParaRPr lang="en-US" sz="900" dirty="0"/>
+          </a:p>
+        </p:txBody>
+      </p:sp>
+      <p:sp>
+        <p:nvSpPr>
+          <p:cNvPr id="35" name="Shape 33"/>
+          <p:cNvSpPr/>
+          <p:nvPr/>
+        </p:nvSpPr>
+        <p:spPr>
+          <a:xfrm>
+            <a:off x="3293146" y="4169664"/>
+            <a:ext cx="685800" cy="475488"/>
+          </a:xfrm>
+          <a:prstGeom prst="rect">
+            <a:avLst>
+              <a:gd name="adj" fmla="val 7692"/>
+            </a:avLst>
+          </a:prstGeom>
+          <a:solidFill>
+            <a:srgbClr val="FFFFFF"/>
+          </a:solidFill>
+          <a:ln w="12700">
+            <a:solidFill>
+              <a:srgbClr val="DB2777"/>
+            </a:solidFill>
+            <a:prstDash val="solid"/>
+          </a:ln>
+        </p:spPr>
+      </p:sp>
+      <p:sp>
+        <p:nvSpPr>
+          <p:cNvPr id="36" name="Text 34"/>
+          <p:cNvSpPr/>
+          <p:nvPr/>
+        </p:nvSpPr>
+        <p:spPr>
+          <a:xfrm>
+            <a:off x="3293146" y="4169664"/>
+            <a:ext cx="685800" cy="475488"/>
           </a:xfrm>
           <a:prstGeom prst="rect">
             <a:avLst/>
@@ -15307,34 +15223,34 @@
               <a:buNone/>
             </a:pPr>
             <a:r>
-              <a:rPr lang="en-US" sz="1600" b="1" dirty="0">
-                <a:solidFill>
-                  <a:srgbClr val="0D9488"/>
+              <a:rPr lang="en-US" sz="900" b="1" dirty="0">
+                <a:solidFill>
+                  <a:srgbClr val="9D174D"/>
                 </a:solidFill>
                 <a:latin typeface="Trebuchet MS" pitchFamily="34" charset="0"/>
                 <a:ea typeface="Trebuchet MS" pitchFamily="34" charset="-122"/>
                 <a:cs typeface="Trebuchet MS" pitchFamily="34" charset="-120"/>
               </a:rPr>
-              <a:t>·</a:t>
-            </a:r>
-            <a:endParaRPr lang="en-US" sz="1600" dirty="0"/>
-          </a:p>
-        </p:txBody>
-      </p:sp>
-      <p:sp>
-        <p:nvSpPr>
-          <p:cNvPr id="31" name="Shape 29"/>
-          <p:cNvSpPr/>
-          <p:nvPr/>
-        </p:nvSpPr>
-        <p:spPr>
-          <a:xfrm>
-            <a:off x="4370832" y="3364992"/>
-            <a:ext cx="1645920" cy="475488"/>
+              <a:t>t</a:t>
+            </a:r>
+            <a:endParaRPr lang="en-US" sz="900" dirty="0"/>
+          </a:p>
+        </p:txBody>
+      </p:sp>
+      <p:sp>
+        <p:nvSpPr>
+          <p:cNvPr id="37" name="Shape 35"/>
+          <p:cNvSpPr/>
+          <p:nvPr/>
+        </p:nvSpPr>
+        <p:spPr>
+          <a:xfrm>
+            <a:off x="4331643" y="4169664"/>
+            <a:ext cx="685800" cy="475488"/>
           </a:xfrm>
           <a:prstGeom prst="rect">
             <a:avLst>
-              <a:gd name="adj" fmla="val 9615"/>
+              <a:gd name="adj" fmla="val 7692"/>
             </a:avLst>
           </a:prstGeom>
           <a:solidFill>
@@ -15342,22 +15258,22 @@
           </a:solidFill>
           <a:ln w="12700">
             <a:solidFill>
-              <a:srgbClr val="0D9488"/>
-            </a:solidFill>
-            <a:prstDash val="solid"/>
-          </a:ln>
-        </p:spPr>
-      </p:sp>
-      <p:sp>
-        <p:nvSpPr>
-          <p:cNvPr id="32" name="Text 30"/>
-          <p:cNvSpPr/>
-          <p:nvPr/>
-        </p:nvSpPr>
-        <p:spPr>
-          <a:xfrm>
-            <a:off x="4370832" y="3364992"/>
-            <a:ext cx="1645920" cy="475488"/>
+              <a:srgbClr val="DB2777"/>
+            </a:solidFill>
+            <a:prstDash val="solid"/>
+          </a:ln>
+        </p:spPr>
+      </p:sp>
+      <p:sp>
+        <p:nvSpPr>
+          <p:cNvPr id="38" name="Text 36"/>
+          <p:cNvSpPr/>
+          <p:nvPr/>
+        </p:nvSpPr>
+        <p:spPr>
+          <a:xfrm>
+            <a:off x="4331643" y="4169664"/>
+            <a:ext cx="685800" cy="475488"/>
           </a:xfrm>
           <a:prstGeom prst="rect">
             <a:avLst/>
@@ -15373,30 +15289,57 @@
               <a:buNone/>
             </a:pPr>
             <a:r>
-              <a:rPr lang="en-US" sz="1400" b="1" dirty="0">
-                <a:solidFill>
-                  <a:srgbClr val="0D9488"/>
+              <a:rPr lang="en-US" sz="900" b="1" dirty="0">
+                <a:solidFill>
+                  <a:srgbClr val="9D174D"/>
                 </a:solidFill>
                 <a:latin typeface="Trebuchet MS" pitchFamily="34" charset="0"/>
                 <a:ea typeface="Trebuchet MS" pitchFamily="34" charset="-122"/>
                 <a:cs typeface="Trebuchet MS" pitchFamily="34" charset="-120"/>
               </a:rPr>
-              <a:t>star</a:t>
-            </a:r>
-            <a:endParaRPr lang="en-US" sz="1400" dirty="0"/>
-          </a:p>
-        </p:txBody>
-      </p:sp>
-      <p:sp>
-        <p:nvSpPr>
-          <p:cNvPr id="33" name="Text 31"/>
-          <p:cNvSpPr/>
-          <p:nvPr/>
-        </p:nvSpPr>
-        <p:spPr>
-          <a:xfrm>
-            <a:off x="6016752" y="3364992"/>
-            <a:ext cx="411480" cy="475488"/>
+              <a:t>ar</a:t>
+            </a:r>
+            <a:endParaRPr lang="en-US" sz="900" dirty="0"/>
+          </a:p>
+        </p:txBody>
+      </p:sp>
+      <p:sp>
+        <p:nvSpPr>
+          <p:cNvPr id="39" name="Shape 37"/>
+          <p:cNvSpPr/>
+          <p:nvPr/>
+        </p:nvSpPr>
+        <p:spPr>
+          <a:xfrm>
+            <a:off x="5370141" y="4169664"/>
+            <a:ext cx="685800" cy="475488"/>
+          </a:xfrm>
+          <a:prstGeom prst="rect">
+            <a:avLst>
+              <a:gd name="adj" fmla="val 7692"/>
+            </a:avLst>
+          </a:prstGeom>
+          <a:solidFill>
+            <a:srgbClr val="FFFFFF"/>
+          </a:solidFill>
+          <a:ln w="12700">
+            <a:solidFill>
+              <a:srgbClr val="DB2777"/>
+            </a:solidFill>
+            <a:prstDash val="solid"/>
+          </a:ln>
+        </p:spPr>
+      </p:sp>
+      <p:sp>
+        <p:nvSpPr>
+          <p:cNvPr id="40" name="Text 38"/>
+          <p:cNvSpPr/>
+          <p:nvPr/>
+        </p:nvSpPr>
+        <p:spPr>
+          <a:xfrm>
+            <a:off x="5370141" y="4169664"/>
+            <a:ext cx="685800" cy="475488"/>
           </a:xfrm>
           <a:prstGeom prst="rect">
             <a:avLst/>
@@ -15412,34 +15355,34 @@
               <a:buNone/>
             </a:pPr>
             <a:r>
-              <a:rPr lang="en-US" sz="1600" b="1" dirty="0">
-                <a:solidFill>
-                  <a:srgbClr val="0D9488"/>
+              <a:rPr lang="en-US" sz="900" b="1" dirty="0">
+                <a:solidFill>
+                  <a:srgbClr val="9D174D"/>
                 </a:solidFill>
                 <a:latin typeface="Trebuchet MS" pitchFamily="34" charset="0"/>
                 <a:ea typeface="Trebuchet MS" pitchFamily="34" charset="-122"/>
                 <a:cs typeface="Trebuchet MS" pitchFamily="34" charset="-120"/>
               </a:rPr>
-              <a:t>·</a:t>
-            </a:r>
-            <a:endParaRPr lang="en-US" sz="1600" dirty="0"/>
-          </a:p>
-        </p:txBody>
-      </p:sp>
-      <p:sp>
-        <p:nvSpPr>
-          <p:cNvPr id="34" name="Shape 32"/>
-          <p:cNvSpPr/>
-          <p:nvPr/>
-        </p:nvSpPr>
-        <p:spPr>
-          <a:xfrm>
-            <a:off x="6428232" y="3364992"/>
-            <a:ext cx="1645920" cy="475488"/>
+              <a:t>t</a:t>
+            </a:r>
+            <a:endParaRPr lang="en-US" sz="900" dirty="0"/>
+          </a:p>
+        </p:txBody>
+      </p:sp>
+      <p:sp>
+        <p:nvSpPr>
+          <p:cNvPr id="41" name="Shape 39"/>
+          <p:cNvSpPr/>
+          <p:nvPr/>
+        </p:nvSpPr>
+        <p:spPr>
+          <a:xfrm>
+            <a:off x="6408638" y="4169664"/>
+            <a:ext cx="685800" cy="475488"/>
           </a:xfrm>
           <a:prstGeom prst="rect">
             <a:avLst>
-              <a:gd name="adj" fmla="val 9615"/>
+              <a:gd name="adj" fmla="val 7692"/>
             </a:avLst>
           </a:prstGeom>
           <a:solidFill>
@@ -15447,22 +15390,22 @@
           </a:solidFill>
           <a:ln w="12700">
             <a:solidFill>
-              <a:srgbClr val="0D9488"/>
-            </a:solidFill>
-            <a:prstDash val="solid"/>
-          </a:ln>
-        </p:spPr>
-      </p:sp>
-      <p:sp>
-        <p:nvSpPr>
-          <p:cNvPr id="35" name="Text 33"/>
-          <p:cNvSpPr/>
-          <p:nvPr/>
-        </p:nvSpPr>
-        <p:spPr>
-          <a:xfrm>
-            <a:off x="6428232" y="3364992"/>
-            <a:ext cx="1645920" cy="475488"/>
+              <a:srgbClr val="DB2777"/>
+            </a:solidFill>
+            <a:prstDash val="solid"/>
+          </a:ln>
+        </p:spPr>
+      </p:sp>
+      <p:sp>
+        <p:nvSpPr>
+          <p:cNvPr id="42" name="Text 40"/>
+          <p:cNvSpPr/>
+          <p:nvPr/>
+        </p:nvSpPr>
+        <p:spPr>
+          <a:xfrm>
+            <a:off x="6408638" y="4169664"/>
+            <a:ext cx="685800" cy="475488"/>
           </a:xfrm>
           <a:prstGeom prst="rect">
             <a:avLst/>
@@ -15478,57 +15421,57 @@
               <a:buNone/>
             </a:pPr>
             <a:r>
-              <a:rPr lang="en-US" sz="1400" b="1" dirty="0">
-                <a:solidFill>
-                  <a:srgbClr val="0D9488"/>
+              <a:rPr lang="en-US" sz="900" b="1" dirty="0">
+                <a:solidFill>
+                  <a:srgbClr val="9D174D"/>
                 </a:solidFill>
                 <a:latin typeface="Trebuchet MS" pitchFamily="34" charset="0"/>
                 <a:ea typeface="Trebuchet MS" pitchFamily="34" charset="-122"/>
                 <a:cs typeface="Trebuchet MS" pitchFamily="34" charset="-120"/>
               </a:rPr>
-              <a:t>ted</a:t>
-            </a:r>
-            <a:endParaRPr lang="en-US" sz="1400" dirty="0"/>
-          </a:p>
-        </p:txBody>
-      </p:sp>
-      <p:sp>
-        <p:nvSpPr>
-          <p:cNvPr id="36" name="Shape 34"/>
-          <p:cNvSpPr/>
-          <p:nvPr/>
-        </p:nvSpPr>
-        <p:spPr>
-          <a:xfrm>
-            <a:off x="365760" y="4096512"/>
-            <a:ext cx="1371600" cy="804672"/>
+              <a:t>i</a:t>
+            </a:r>
+            <a:endParaRPr lang="en-US" sz="900" dirty="0"/>
+          </a:p>
+        </p:txBody>
+      </p:sp>
+      <p:sp>
+        <p:nvSpPr>
+          <p:cNvPr id="43" name="Shape 41"/>
+          <p:cNvSpPr/>
+          <p:nvPr/>
+        </p:nvSpPr>
+        <p:spPr>
+          <a:xfrm>
+            <a:off x="7447135" y="4169664"/>
+            <a:ext cx="685800" cy="475488"/>
           </a:xfrm>
           <a:prstGeom prst="rect">
             <a:avLst>
-              <a:gd name="adj" fmla="val 6818"/>
+              <a:gd name="adj" fmla="val 7692"/>
             </a:avLst>
           </a:prstGeom>
           <a:solidFill>
-            <a:srgbClr val="E2E8F0"/>
-          </a:solidFill>
-          <a:ln w="12700">
-            <a:solidFill>
-              <a:srgbClr val="E2E8F0"/>
-            </a:solidFill>
-            <a:prstDash val="solid"/>
-          </a:ln>
-        </p:spPr>
-      </p:sp>
-      <p:sp>
-        <p:nvSpPr>
-          <p:cNvPr id="37" name="Text 35"/>
-          <p:cNvSpPr/>
-          <p:nvPr/>
-        </p:nvSpPr>
-        <p:spPr>
-          <a:xfrm>
-            <a:off x="365760" y="4096512"/>
-            <a:ext cx="1371600" cy="804672"/>
+            <a:srgbClr val="FFFFFF"/>
+          </a:solidFill>
+          <a:ln w="12700">
+            <a:solidFill>
+              <a:srgbClr val="DB2777"/>
+            </a:solidFill>
+            <a:prstDash val="solid"/>
+          </a:ln>
+        </p:spPr>
+      </p:sp>
+      <p:sp>
+        <p:nvSpPr>
+          <p:cNvPr id="44" name="Text 42"/>
+          <p:cNvSpPr/>
+          <p:nvPr/>
+        </p:nvSpPr>
+        <p:spPr>
+          <a:xfrm>
+            <a:off x="7447135" y="4169664"/>
+            <a:ext cx="685800" cy="475488"/>
           </a:xfrm>
           <a:prstGeom prst="rect">
             <a:avLst/>
@@ -15544,504 +15487,15 @@
               <a:buNone/>
             </a:pPr>
             <a:r>
-              <a:rPr lang="en-US" sz="1100" b="1" dirty="0">
-                <a:solidFill>
-                  <a:srgbClr val="475569"/>
+              <a:rPr lang="en-US" sz="900" b="1" dirty="0">
+                <a:solidFill>
+                  <a:srgbClr val="9D174D"/>
                 </a:solidFill>
                 <a:latin typeface="Trebuchet MS" pitchFamily="34" charset="0"/>
                 <a:ea typeface="Trebuchet MS" pitchFamily="34" charset="-122"/>
                 <a:cs typeface="Trebuchet MS" pitchFamily="34" charset="-120"/>
               </a:rPr>
-              <a:t>Phonemes</a:t>
-            </a:r>
-            <a:endParaRPr lang="en-US" sz="1100" dirty="0"/>
-          </a:p>
-        </p:txBody>
-      </p:sp>
-      <p:sp>
-        <p:nvSpPr>
-          <p:cNvPr id="38" name="Shape 36"/>
-          <p:cNvSpPr/>
-          <p:nvPr/>
-        </p:nvSpPr>
-        <p:spPr>
-          <a:xfrm>
-            <a:off x="1874520" y="4096512"/>
-            <a:ext cx="6903720" cy="658368"/>
-          </a:xfrm>
-          <a:prstGeom prst="rect">
-            <a:avLst>
-              <a:gd name="adj" fmla="val 8333"/>
-            </a:avLst>
-          </a:prstGeom>
-          <a:solidFill>
-            <a:srgbClr val="FCE7F3"/>
-          </a:solidFill>
-          <a:ln w="12700">
-            <a:solidFill>
-              <a:srgbClr val="DB2777"/>
-            </a:solidFill>
-            <a:prstDash val="solid"/>
-          </a:ln>
-        </p:spPr>
-      </p:sp>
-      <p:sp>
-        <p:nvSpPr>
-          <p:cNvPr id="39" name="Shape 37"/>
-          <p:cNvSpPr/>
-          <p:nvPr/>
-        </p:nvSpPr>
-        <p:spPr>
-          <a:xfrm>
-            <a:off x="2124837" y="4169664"/>
-            <a:ext cx="685800" cy="475488"/>
-          </a:xfrm>
-          <a:prstGeom prst="rect">
-            <a:avLst>
-              <a:gd name="adj" fmla="val 7692"/>
-            </a:avLst>
-          </a:prstGeom>
-          <a:solidFill>
-            <a:srgbClr val="FFFFFF"/>
-          </a:solidFill>
-          <a:ln w="12700">
-            <a:solidFill>
-              <a:srgbClr val="DB2777"/>
-            </a:solidFill>
-            <a:prstDash val="solid"/>
-          </a:ln>
-        </p:spPr>
-      </p:sp>
-      <p:sp>
-        <p:nvSpPr>
-          <p:cNvPr id="40" name="Text 38"/>
-          <p:cNvSpPr/>
-          <p:nvPr/>
-        </p:nvSpPr>
-        <p:spPr>
-          <a:xfrm>
-            <a:off x="2124837" y="4169664"/>
-            <a:ext cx="685800" cy="475488"/>
-          </a:xfrm>
-          <a:prstGeom prst="rect">
-            <a:avLst/>
-          </a:prstGeom>
-          <a:noFill/>
-          <a:ln/>
-        </p:spPr>
-        <p:txBody>
-          <a:bodyPr wrap="square" lIns="0" tIns="0" rIns="0" bIns="0" rtlCol="0" anchor="ctr"/>
-          <a:lstStyle/>
-          <a:p>
-            <a:pPr algn="ctr" indent="0" marL="0">
-              <a:buNone/>
-            </a:pPr>
-            <a:r>
-              <a:rPr lang="en-US" sz="900" b="1" dirty="0">
-                <a:solidFill>
-                  <a:srgbClr val="9D174D"/>
-                </a:solidFill>
-                <a:latin typeface="Trebuchet MS" pitchFamily="34" charset="0"/>
-                <a:ea typeface="Trebuchet MS" pitchFamily="34" charset="-122"/>
-                <a:cs typeface="Trebuchet MS" pitchFamily="34" charset="-120"/>
-              </a:rPr>
-              <a:t>r</a:t>
-            </a:r>
-            <a:endParaRPr lang="en-US" sz="900" dirty="0"/>
-          </a:p>
-        </p:txBody>
-      </p:sp>
-      <p:sp>
-        <p:nvSpPr>
-          <p:cNvPr id="41" name="Shape 39"/>
-          <p:cNvSpPr/>
-          <p:nvPr/>
-        </p:nvSpPr>
-        <p:spPr>
-          <a:xfrm>
-            <a:off x="3033522" y="4169664"/>
-            <a:ext cx="685800" cy="475488"/>
-          </a:xfrm>
-          <a:prstGeom prst="rect">
-            <a:avLst>
-              <a:gd name="adj" fmla="val 7692"/>
-            </a:avLst>
-          </a:prstGeom>
-          <a:solidFill>
-            <a:srgbClr val="FFFFFF"/>
-          </a:solidFill>
-          <a:ln w="12700">
-            <a:solidFill>
-              <a:srgbClr val="DB2777"/>
-            </a:solidFill>
-            <a:prstDash val="solid"/>
-          </a:ln>
-        </p:spPr>
-      </p:sp>
-      <p:sp>
-        <p:nvSpPr>
-          <p:cNvPr id="42" name="Text 40"/>
-          <p:cNvSpPr/>
-          <p:nvPr/>
-        </p:nvSpPr>
-        <p:spPr>
-          <a:xfrm>
-            <a:off x="3033522" y="4169664"/>
-            <a:ext cx="685800" cy="475488"/>
-          </a:xfrm>
-          <a:prstGeom prst="rect">
-            <a:avLst/>
-          </a:prstGeom>
-          <a:noFill/>
-          <a:ln/>
-        </p:spPr>
-        <p:txBody>
-          <a:bodyPr wrap="square" lIns="0" tIns="0" rIns="0" bIns="0" rtlCol="0" anchor="ctr"/>
-          <a:lstStyle/>
-          <a:p>
-            <a:pPr algn="ctr" indent="0" marL="0">
-              <a:buNone/>
-            </a:pPr>
-            <a:r>
-              <a:rPr lang="en-US" sz="900" b="1" dirty="0">
-                <a:solidFill>
-                  <a:srgbClr val="9D174D"/>
-                </a:solidFill>
-                <a:latin typeface="Trebuchet MS" pitchFamily="34" charset="0"/>
-                <a:ea typeface="Trebuchet MS" pitchFamily="34" charset="-122"/>
-                <a:cs typeface="Trebuchet MS" pitchFamily="34" charset="-120"/>
-              </a:rPr>
-              <a:t>e</a:t>
-            </a:r>
-            <a:endParaRPr lang="en-US" sz="900" dirty="0"/>
-          </a:p>
-        </p:txBody>
-      </p:sp>
-      <p:sp>
-        <p:nvSpPr>
-          <p:cNvPr id="43" name="Shape 41"/>
-          <p:cNvSpPr/>
-          <p:nvPr/>
-        </p:nvSpPr>
-        <p:spPr>
-          <a:xfrm>
-            <a:off x="3942207" y="4169664"/>
-            <a:ext cx="685800" cy="475488"/>
-          </a:xfrm>
-          <a:prstGeom prst="rect">
-            <a:avLst>
-              <a:gd name="adj" fmla="val 7692"/>
-            </a:avLst>
-          </a:prstGeom>
-          <a:solidFill>
-            <a:srgbClr val="FFFFFF"/>
-          </a:solidFill>
-          <a:ln w="12700">
-            <a:solidFill>
-              <a:srgbClr val="DB2777"/>
-            </a:solidFill>
-            <a:prstDash val="solid"/>
-          </a:ln>
-        </p:spPr>
-      </p:sp>
-      <p:sp>
-        <p:nvSpPr>
-          <p:cNvPr id="44" name="Text 42"/>
-          <p:cNvSpPr/>
-          <p:nvPr/>
-        </p:nvSpPr>
-        <p:spPr>
-          <a:xfrm>
-            <a:off x="3942207" y="4169664"/>
-            <a:ext cx="685800" cy="475488"/>
-          </a:xfrm>
-          <a:prstGeom prst="rect">
-            <a:avLst/>
-          </a:prstGeom>
-          <a:noFill/>
-          <a:ln/>
-        </p:spPr>
-        <p:txBody>
-          <a:bodyPr wrap="square" lIns="0" tIns="0" rIns="0" bIns="0" rtlCol="0" anchor="ctr"/>
-          <a:lstStyle/>
-          <a:p>
-            <a:pPr algn="ctr" indent="0" marL="0">
-              <a:buNone/>
-            </a:pPr>
-            <a:r>
-              <a:rPr lang="en-US" sz="900" b="1" dirty="0">
-                <a:solidFill>
-                  <a:srgbClr val="9D174D"/>
-                </a:solidFill>
-                <a:latin typeface="Trebuchet MS" pitchFamily="34" charset="0"/>
-                <a:ea typeface="Trebuchet MS" pitchFamily="34" charset="-122"/>
-                <a:cs typeface="Trebuchet MS" pitchFamily="34" charset="-120"/>
-              </a:rPr>
-              <a:t>s</a:t>
-            </a:r>
-            <a:endParaRPr lang="en-US" sz="900" dirty="0"/>
-          </a:p>
-        </p:txBody>
-      </p:sp>
-      <p:sp>
-        <p:nvSpPr>
-          <p:cNvPr id="45" name="Shape 43"/>
-          <p:cNvSpPr/>
-          <p:nvPr/>
-        </p:nvSpPr>
-        <p:spPr>
-          <a:xfrm>
-            <a:off x="4850892" y="4169664"/>
-            <a:ext cx="685800" cy="475488"/>
-          </a:xfrm>
-          <a:prstGeom prst="rect">
-            <a:avLst>
-              <a:gd name="adj" fmla="val 7692"/>
-            </a:avLst>
-          </a:prstGeom>
-          <a:solidFill>
-            <a:srgbClr val="FFFFFF"/>
-          </a:solidFill>
-          <a:ln w="12700">
-            <a:solidFill>
-              <a:srgbClr val="DB2777"/>
-            </a:solidFill>
-            <a:prstDash val="solid"/>
-          </a:ln>
-        </p:spPr>
-      </p:sp>
-      <p:sp>
-        <p:nvSpPr>
-          <p:cNvPr id="46" name="Text 44"/>
-          <p:cNvSpPr/>
-          <p:nvPr/>
-        </p:nvSpPr>
-        <p:spPr>
-          <a:xfrm>
-            <a:off x="4850892" y="4169664"/>
-            <a:ext cx="685800" cy="475488"/>
-          </a:xfrm>
-          <a:prstGeom prst="rect">
-            <a:avLst/>
-          </a:prstGeom>
-          <a:noFill/>
-          <a:ln/>
-        </p:spPr>
-        <p:txBody>
-          <a:bodyPr wrap="square" lIns="0" tIns="0" rIns="0" bIns="0" rtlCol="0" anchor="ctr"/>
-          <a:lstStyle/>
-          <a:p>
-            <a:pPr algn="ctr" indent="0" marL="0">
-              <a:buNone/>
-            </a:pPr>
-            <a:r>
-              <a:rPr lang="en-US" sz="900" b="1" dirty="0">
-                <a:solidFill>
-                  <a:srgbClr val="9D174D"/>
-                </a:solidFill>
-                <a:latin typeface="Trebuchet MS" pitchFamily="34" charset="0"/>
-                <a:ea typeface="Trebuchet MS" pitchFamily="34" charset="-122"/>
-                <a:cs typeface="Trebuchet MS" pitchFamily="34" charset="-120"/>
-              </a:rPr>
-              <a:t>t</a:t>
-            </a:r>
-            <a:endParaRPr lang="en-US" sz="900" dirty="0"/>
-          </a:p>
-        </p:txBody>
-      </p:sp>
-      <p:sp>
-        <p:nvSpPr>
-          <p:cNvPr id="47" name="Shape 45"/>
-          <p:cNvSpPr/>
-          <p:nvPr/>
-        </p:nvSpPr>
-        <p:spPr>
-          <a:xfrm>
-            <a:off x="5759577" y="4169664"/>
-            <a:ext cx="685800" cy="475488"/>
-          </a:xfrm>
-          <a:prstGeom prst="rect">
-            <a:avLst>
-              <a:gd name="adj" fmla="val 7692"/>
-            </a:avLst>
-          </a:prstGeom>
-          <a:solidFill>
-            <a:srgbClr val="FFFFFF"/>
-          </a:solidFill>
-          <a:ln w="12700">
-            <a:solidFill>
-              <a:srgbClr val="DB2777"/>
-            </a:solidFill>
-            <a:prstDash val="solid"/>
-          </a:ln>
-        </p:spPr>
-      </p:sp>
-      <p:sp>
-        <p:nvSpPr>
-          <p:cNvPr id="48" name="Text 46"/>
-          <p:cNvSpPr/>
-          <p:nvPr/>
-        </p:nvSpPr>
-        <p:spPr>
-          <a:xfrm>
-            <a:off x="5759577" y="4169664"/>
-            <a:ext cx="685800" cy="475488"/>
-          </a:xfrm>
-          <a:prstGeom prst="rect">
-            <a:avLst/>
-          </a:prstGeom>
-          <a:noFill/>
-          <a:ln/>
-        </p:spPr>
-        <p:txBody>
-          <a:bodyPr wrap="square" lIns="0" tIns="0" rIns="0" bIns="0" rtlCol="0" anchor="ctr"/>
-          <a:lstStyle/>
-          <a:p>
-            <a:pPr algn="ctr" indent="0" marL="0">
-              <a:buNone/>
-            </a:pPr>
-            <a:r>
-              <a:rPr lang="en-US" sz="900" b="1" dirty="0">
-                <a:solidFill>
-                  <a:srgbClr val="9D174D"/>
-                </a:solidFill>
-                <a:latin typeface="Trebuchet MS" pitchFamily="34" charset="0"/>
-                <a:ea typeface="Trebuchet MS" pitchFamily="34" charset="-122"/>
-                <a:cs typeface="Trebuchet MS" pitchFamily="34" charset="-120"/>
-              </a:rPr>
-              <a:t>ar</a:t>
-            </a:r>
-            <a:endParaRPr lang="en-US" sz="900" dirty="0"/>
-          </a:p>
-        </p:txBody>
-      </p:sp>
-      <p:sp>
-        <p:nvSpPr>
-          <p:cNvPr id="49" name="Shape 47"/>
-          <p:cNvSpPr/>
-          <p:nvPr/>
-        </p:nvSpPr>
-        <p:spPr>
-          <a:xfrm>
-            <a:off x="6668262" y="4169664"/>
-            <a:ext cx="685800" cy="475488"/>
-          </a:xfrm>
-          <a:prstGeom prst="rect">
-            <a:avLst>
-              <a:gd name="adj" fmla="val 7692"/>
-            </a:avLst>
-          </a:prstGeom>
-          <a:solidFill>
-            <a:srgbClr val="FFFFFF"/>
-          </a:solidFill>
-          <a:ln w="12700">
-            <a:solidFill>
-              <a:srgbClr val="DB2777"/>
-            </a:solidFill>
-            <a:prstDash val="solid"/>
-          </a:ln>
-        </p:spPr>
-      </p:sp>
-      <p:sp>
-        <p:nvSpPr>
-          <p:cNvPr id="50" name="Text 48"/>
-          <p:cNvSpPr/>
-          <p:nvPr/>
-        </p:nvSpPr>
-        <p:spPr>
-          <a:xfrm>
-            <a:off x="6668262" y="4169664"/>
-            <a:ext cx="685800" cy="475488"/>
-          </a:xfrm>
-          <a:prstGeom prst="rect">
-            <a:avLst/>
-          </a:prstGeom>
-          <a:noFill/>
-          <a:ln/>
-        </p:spPr>
-        <p:txBody>
-          <a:bodyPr wrap="square" lIns="0" tIns="0" rIns="0" bIns="0" rtlCol="0" anchor="ctr"/>
-          <a:lstStyle/>
-          <a:p>
-            <a:pPr algn="ctr" indent="0" marL="0">
-              <a:buNone/>
-            </a:pPr>
-            <a:r>
-              <a:rPr lang="en-US" sz="900" b="1" dirty="0">
-                <a:solidFill>
-                  <a:srgbClr val="9D174D"/>
-                </a:solidFill>
-                <a:latin typeface="Trebuchet MS" pitchFamily="34" charset="0"/>
-                <a:ea typeface="Trebuchet MS" pitchFamily="34" charset="-122"/>
-                <a:cs typeface="Trebuchet MS" pitchFamily="34" charset="-120"/>
-              </a:rPr>
-              <a:t>t</a:t>
-            </a:r>
-            <a:endParaRPr lang="en-US" sz="900" dirty="0"/>
-          </a:p>
-        </p:txBody>
-      </p:sp>
-      <p:sp>
-        <p:nvSpPr>
-          <p:cNvPr id="51" name="Shape 49"/>
-          <p:cNvSpPr/>
-          <p:nvPr/>
-        </p:nvSpPr>
-        <p:spPr>
-          <a:xfrm>
-            <a:off x="7576947" y="4169664"/>
-            <a:ext cx="685800" cy="475488"/>
-          </a:xfrm>
-          <a:prstGeom prst="rect">
-            <a:avLst>
-              <a:gd name="adj" fmla="val 7692"/>
-            </a:avLst>
-          </a:prstGeom>
-          <a:solidFill>
-            <a:srgbClr val="FFFFFF"/>
-          </a:solidFill>
-          <a:ln w="12700">
-            <a:solidFill>
-              <a:srgbClr val="DB2777"/>
-            </a:solidFill>
-            <a:prstDash val="solid"/>
-          </a:ln>
-        </p:spPr>
-      </p:sp>
-      <p:sp>
-        <p:nvSpPr>
-          <p:cNvPr id="52" name="Text 50"/>
-          <p:cNvSpPr/>
-          <p:nvPr/>
-        </p:nvSpPr>
-        <p:spPr>
-          <a:xfrm>
-            <a:off x="7576947" y="4169664"/>
-            <a:ext cx="685800" cy="475488"/>
-          </a:xfrm>
-          <a:prstGeom prst="rect">
-            <a:avLst/>
-          </a:prstGeom>
-          <a:noFill/>
-          <a:ln/>
-        </p:spPr>
-        <p:txBody>
-          <a:bodyPr wrap="square" lIns="0" tIns="0" rIns="0" bIns="0" rtlCol="0" anchor="ctr"/>
-          <a:lstStyle/>
-          <a:p>
-            <a:pPr algn="ctr" indent="0" marL="0">
-              <a:buNone/>
-            </a:pPr>
-            <a:r>
-              <a:rPr lang="en-US" sz="900" b="1" dirty="0">
-                <a:solidFill>
-                  <a:srgbClr val="9D174D"/>
-                </a:solidFill>
-                <a:latin typeface="Trebuchet MS" pitchFamily="34" charset="0"/>
-                <a:ea typeface="Trebuchet MS" pitchFamily="34" charset="-122"/>
-                <a:cs typeface="Trebuchet MS" pitchFamily="34" charset="-120"/>
-              </a:rPr>
-              <a:t>ed</a:t>
+              <a:t>ng</a:t>
             </a:r>
             <a:endParaRPr lang="en-US" sz="900" dirty="0"/>
           </a:p>
@@ -16615,7 +16069,7 @@
                 <a:ea typeface="Calibri" pitchFamily="34" charset="-122"/>
                 <a:cs typeface="Calibri" pitchFamily="34" charset="-120"/>
               </a:rPr>
-              <a:t>Word Labs  •  wordlabs.app  •  Root: 'start' = begin, move suddenly, jump</a:t>
+              <a:t>Word Labs  •  wordlabs.app  •  Root: 'start' = begin, move suddenly, set going</a:t>
             </a:r>
             <a:endParaRPr lang="en-US" sz="800" dirty="0"/>
           </a:p>
@@ -17255,7 +16709,7 @@
                 <a:ea typeface="Calibri" pitchFamily="34" charset="-122"/>
                 <a:cs typeface="Calibri" pitchFamily="34" charset="-120"/>
               </a:rPr>
-              <a:t>Word Labs  •  wordlabs.app  •  Root: 'start' = begin, move suddenly, jump</a:t>
+              <a:t>Word Labs  •  wordlabs.app  •  Root: 'start' = begin, move suddenly, set going</a:t>
             </a:r>
             <a:endParaRPr lang="en-US" sz="800" dirty="0"/>
           </a:p>
@@ -17384,7 +16838,7 @@
                 <a:ea typeface="Calibri" pitchFamily="34" charset="-122"/>
                 <a:cs typeface="Calibri" pitchFamily="34" charset="-120"/>
               </a:rPr>
-              <a:t>starting</a:t>
+              <a:t>starter</a:t>
             </a:r>
             <a:pPr algn="l" indent="0" marL="0">
               <a:buNone/>
@@ -17398,7 +16852,7 @@
                 <a:ea typeface="Calibri" pitchFamily="34" charset="-122"/>
                 <a:cs typeface="Calibri" pitchFamily="34" charset="-120"/>
               </a:rPr>
-              <a:t> whistle blew, the </a:t>
+              <a:t> fired the gun, and the </a:t>
             </a:r>
             <a:pPr algn="l" indent="0" marL="0">
               <a:buNone/>
@@ -17415,7 +16869,7 @@
                 <a:ea typeface="Calibri" pitchFamily="34" charset="-122"/>
                 <a:cs typeface="Calibri" pitchFamily="34" charset="-120"/>
               </a:rPr>
-              <a:t>jumpstart</a:t>
+              <a:t>startling</a:t>
             </a:r>
             <a:pPr algn="l" indent="0" marL="0">
               <a:buNone/>
@@ -17429,7 +16883,7 @@
                 <a:ea typeface="Calibri" pitchFamily="34" charset="-122"/>
                 <a:cs typeface="Calibri" pitchFamily="34" charset="-120"/>
               </a:rPr>
-              <a:t> button was pressed, and the </a:t>
+              <a:t> bang sent the runners sprinting, each one </a:t>
             </a:r>
             <a:pPr algn="l" indent="0" marL="0">
               <a:buNone/>
@@ -17446,7 +16900,7 @@
                 <a:ea typeface="Calibri" pitchFamily="34" charset="-122"/>
                 <a:cs typeface="Calibri" pitchFamily="34" charset="-120"/>
               </a:rPr>
-              <a:t>restarted</a:t>
+              <a:t>started</a:t>
             </a:r>
             <a:pPr algn="l" indent="0" marL="0">
               <a:buNone/>
@@ -17460,7 +16914,7 @@
                 <a:ea typeface="Calibri" pitchFamily="34" charset="-122"/>
                 <a:cs typeface="Calibri" pitchFamily="34" charset="-120"/>
               </a:rPr>
-              <a:t> engine roared to life.</a:t>
+              <a:t> on their very best performance.</a:t>
             </a:r>
             <a:endParaRPr lang="en-US" sz="1800" dirty="0"/>
           </a:p>
@@ -17615,7 +17069,7 @@
                 <a:ea typeface="Trebuchet MS" pitchFamily="34" charset="-122"/>
                 <a:cs typeface="Trebuchet MS" pitchFamily="34" charset="-120"/>
               </a:rPr>
-              <a:t>starting</a:t>
+              <a:t>starter</a:t>
             </a:r>
             <a:endParaRPr lang="en-US" sz="1400" dirty="0"/>
           </a:p>
@@ -17743,7 +17197,7 @@
                 <a:ea typeface="Trebuchet MS" pitchFamily="34" charset="-122"/>
                 <a:cs typeface="Trebuchet MS" pitchFamily="34" charset="-120"/>
               </a:rPr>
-              <a:t>jumpstart</a:t>
+              <a:t>startling</a:t>
             </a:r>
             <a:endParaRPr lang="en-US" sz="1400" dirty="0"/>
           </a:p>
@@ -17871,7 +17325,7 @@
                 <a:ea typeface="Trebuchet MS" pitchFamily="34" charset="-122"/>
                 <a:cs typeface="Trebuchet MS" pitchFamily="34" charset="-120"/>
               </a:rPr>
-              <a:t>restarted</a:t>
+              <a:t>started</a:t>
             </a:r>
             <a:endParaRPr lang="en-US" sz="1400" dirty="0"/>
           </a:p>
@@ -18202,7 +17656,7 @@
                 <a:ea typeface="Calibri" pitchFamily="34" charset="-122"/>
                 <a:cs typeface="Calibri" pitchFamily="34" charset="-120"/>
               </a:rPr>
-              <a:t>Word Labs  •  wordlabs.app  •  Root: 'start' = begin, move suddenly, jump</a:t>
+              <a:t>Word Labs  •  wordlabs.app  •  Root: 'start' = begin, move suddenly, set going</a:t>
             </a:r>
             <a:endParaRPr lang="en-US" sz="800" dirty="0"/>
           </a:p>
@@ -18341,7 +17795,7 @@
                 <a:ea typeface="Trebuchet MS" pitchFamily="34" charset="-122"/>
                 <a:cs typeface="Trebuchet MS" pitchFamily="34" charset="-120"/>
               </a:rPr>
-              <a:t>starting</a:t>
+              <a:t>starter</a:t>
             </a:r>
             <a:endParaRPr lang="en-US" sz="2800" dirty="0"/>
           </a:p>
@@ -19029,7 +18483,7 @@
                 <a:ea typeface="Calibri" pitchFamily="34" charset="-122"/>
                 <a:cs typeface="Calibri" pitchFamily="34" charset="-120"/>
               </a:rPr>
-              <a:t>Word Labs  •  wordlabs.app  •  Root: 'start' = begin, move suddenly, jump</a:t>
+              <a:t>Word Labs  •  wordlabs.app  •  Root: 'start' = begin, move suddenly, set going</a:t>
             </a:r>
             <a:endParaRPr lang="en-US" sz="800" dirty="0"/>
           </a:p>
@@ -19168,7 +18622,7 @@
                 <a:ea typeface="Trebuchet MS" pitchFamily="34" charset="-122"/>
                 <a:cs typeface="Trebuchet MS" pitchFamily="34" charset="-120"/>
               </a:rPr>
-              <a:t>starting</a:t>
+              <a:t>starter</a:t>
             </a:r>
             <a:endParaRPr lang="en-US" sz="2800" dirty="0"/>
           </a:p>
@@ -19346,7 +18800,7 @@
                 <a:ea typeface="Calibri" pitchFamily="34" charset="-122"/>
                 <a:cs typeface="Calibri" pitchFamily="34" charset="-120"/>
               </a:rPr>
-              <a:t>to begin</a:t>
+              <a:t>begin</a:t>
             </a:r>
             <a:endParaRPr lang="en-US" sz="850" dirty="0"/>
           </a:p>
@@ -19419,7 +18873,7 @@
                 <a:ea typeface="Trebuchet MS" pitchFamily="34" charset="-122"/>
                 <a:cs typeface="Trebuchet MS" pitchFamily="34" charset="-120"/>
               </a:rPr>
-              <a:t>ing</a:t>
+              <a:t>er</a:t>
             </a:r>
             <a:endParaRPr lang="en-US" sz="1300" dirty="0"/>
           </a:p>
@@ -19458,7 +18912,7 @@
                 <a:ea typeface="Calibri" pitchFamily="34" charset="-122"/>
                 <a:cs typeface="Calibri" pitchFamily="34" charset="-120"/>
               </a:rPr>
-              <a:t>happening right now</a:t>
+              <a:t>person who does something</a:t>
             </a:r>
             <a:endParaRPr lang="en-US" sz="850" dirty="0"/>
           </a:p>
@@ -20014,7 +19468,7 @@
                 <a:ea typeface="Calibri" pitchFamily="34" charset="-122"/>
                 <a:cs typeface="Calibri" pitchFamily="34" charset="-120"/>
               </a:rPr>
-              <a:t>Word Labs  •  wordlabs.app  •  Root: 'start' = begin, move suddenly, jump</a:t>
+              <a:t>Word Labs  •  wordlabs.app  •  Root: 'start' = begin, move suddenly, set going</a:t>
             </a:r>
             <a:endParaRPr lang="en-US" sz="800" dirty="0"/>
           </a:p>
@@ -20153,7 +19607,7 @@
                 <a:ea typeface="Trebuchet MS" pitchFamily="34" charset="-122"/>
                 <a:cs typeface="Trebuchet MS" pitchFamily="34" charset="-120"/>
               </a:rPr>
-              <a:t>starting</a:t>
+              <a:t>starter</a:t>
             </a:r>
             <a:endParaRPr lang="en-US" sz="2800" dirty="0"/>
           </a:p>
@@ -20331,7 +19785,7 @@
                 <a:ea typeface="Calibri" pitchFamily="34" charset="-122"/>
                 <a:cs typeface="Calibri" pitchFamily="34" charset="-120"/>
               </a:rPr>
-              <a:t>to begin</a:t>
+              <a:t>begin</a:t>
             </a:r>
             <a:endParaRPr lang="en-US" sz="850" dirty="0"/>
           </a:p>
@@ -20404,7 +19858,7 @@
                 <a:ea typeface="Trebuchet MS" pitchFamily="34" charset="-122"/>
                 <a:cs typeface="Trebuchet MS" pitchFamily="34" charset="-120"/>
               </a:rPr>
-              <a:t>ing</a:t>
+              <a:t>er</a:t>
             </a:r>
             <a:endParaRPr lang="en-US" sz="1300" dirty="0"/>
           </a:p>
@@ -20443,7 +19897,7 @@
                 <a:ea typeface="Calibri" pitchFamily="34" charset="-122"/>
                 <a:cs typeface="Calibri" pitchFamily="34" charset="-120"/>
               </a:rPr>
-              <a:t>happening right now</a:t>
+              <a:t>person who does something</a:t>
             </a:r>
             <a:endParaRPr lang="en-US" sz="850" dirty="0"/>
           </a:p>
@@ -20707,7 +20161,7 @@
                 <a:ea typeface="Trebuchet MS" pitchFamily="34" charset="-122"/>
                 <a:cs typeface="Trebuchet MS" pitchFamily="34" charset="-120"/>
               </a:rPr>
-              <a:t>ting</a:t>
+              <a:t>ter</a:t>
             </a:r>
             <a:endParaRPr lang="en-US" sz="1400" dirty="0"/>
           </a:p>
@@ -21131,7 +20585,7 @@
                 <a:ea typeface="Calibri" pitchFamily="34" charset="-122"/>
                 <a:cs typeface="Calibri" pitchFamily="34" charset="-120"/>
               </a:rPr>
-              <a:t>Word Labs  •  wordlabs.app  •  Root: 'start' = begin, move suddenly, jump</a:t>
+              <a:t>Word Labs  •  wordlabs.app  •  Root: 'start' = begin, move suddenly, set going</a:t>
             </a:r>
             <a:endParaRPr lang="en-US" sz="800" dirty="0"/>
           </a:p>
@@ -21270,7 +20724,7 @@
                 <a:ea typeface="Trebuchet MS" pitchFamily="34" charset="-122"/>
                 <a:cs typeface="Trebuchet MS" pitchFamily="34" charset="-120"/>
               </a:rPr>
-              <a:t>starting</a:t>
+              <a:t>starter</a:t>
             </a:r>
             <a:endParaRPr lang="en-US" sz="2800" dirty="0"/>
           </a:p>
@@ -21448,7 +20902,7 @@
                 <a:ea typeface="Calibri" pitchFamily="34" charset="-122"/>
                 <a:cs typeface="Calibri" pitchFamily="34" charset="-120"/>
               </a:rPr>
-              <a:t>to begin</a:t>
+              <a:t>begin</a:t>
             </a:r>
             <a:endParaRPr lang="en-US" sz="850" dirty="0"/>
           </a:p>
@@ -21521,7 +20975,7 @@
                 <a:ea typeface="Trebuchet MS" pitchFamily="34" charset="-122"/>
                 <a:cs typeface="Trebuchet MS" pitchFamily="34" charset="-120"/>
               </a:rPr>
-              <a:t>ing</a:t>
+              <a:t>er</a:t>
             </a:r>
             <a:endParaRPr lang="en-US" sz="1300" dirty="0"/>
           </a:p>
@@ -21560,7 +21014,7 @@
                 <a:ea typeface="Calibri" pitchFamily="34" charset="-122"/>
                 <a:cs typeface="Calibri" pitchFamily="34" charset="-120"/>
               </a:rPr>
-              <a:t>happening right now</a:t>
+              <a:t>person who does something</a:t>
             </a:r>
             <a:endParaRPr lang="en-US" sz="850" dirty="0"/>
           </a:p>
@@ -21824,7 +21278,7 @@
                 <a:ea typeface="Trebuchet MS" pitchFamily="34" charset="-122"/>
                 <a:cs typeface="Trebuchet MS" pitchFamily="34" charset="-120"/>
               </a:rPr>
-              <a:t>ting</a:t>
+              <a:t>ter</a:t>
             </a:r>
             <a:endParaRPr lang="en-US" sz="1400" dirty="0"/>
           </a:p>
@@ -22247,7 +21701,7 @@
                 <a:ea typeface="Trebuchet MS" pitchFamily="34" charset="-122"/>
                 <a:cs typeface="Trebuchet MS" pitchFamily="34" charset="-120"/>
               </a:rPr>
-              <a:t>ing</a:t>
+              <a:t>er</a:t>
             </a:r>
             <a:endParaRPr lang="en-US" sz="900" dirty="0"/>
           </a:p>
@@ -22539,7 +21993,7 @@
                 <a:ea typeface="Calibri" pitchFamily="34" charset="-122"/>
                 <a:cs typeface="Calibri" pitchFamily="34" charset="-120"/>
               </a:rPr>
-              <a:t>Word Labs  •  wordlabs.app  •  Root: 'start' = begin, move suddenly, jump</a:t>
+              <a:t>Word Labs  •  wordlabs.app  •  Root: 'start' = begin, move suddenly, set going</a:t>
             </a:r>
             <a:endParaRPr lang="en-US" sz="800" dirty="0"/>
           </a:p>
@@ -22678,7 +22132,7 @@
                 <a:ea typeface="Trebuchet MS" pitchFamily="34" charset="-122"/>
                 <a:cs typeface="Trebuchet MS" pitchFamily="34" charset="-120"/>
               </a:rPr>
-              <a:t>jumpstart</a:t>
+              <a:t>startling</a:t>
             </a:r>
             <a:endParaRPr lang="en-US" sz="2800" dirty="0"/>
           </a:p>
@@ -23366,7 +22820,7 @@
                 <a:ea typeface="Calibri" pitchFamily="34" charset="-122"/>
                 <a:cs typeface="Calibri" pitchFamily="34" charset="-120"/>
               </a:rPr>
-              <a:t>Word Labs  •  wordlabs.app  •  Root: 'start' = begin, move suddenly, jump</a:t>
+              <a:t>Word Labs  •  wordlabs.app  •  Root: 'start' = begin, move suddenly, set going</a:t>
             </a:r>
             <a:endParaRPr lang="en-US" sz="800" dirty="0"/>
           </a:p>
@@ -23505,7 +22959,7 @@
                 <a:ea typeface="Trebuchet MS" pitchFamily="34" charset="-122"/>
                 <a:cs typeface="Trebuchet MS" pitchFamily="34" charset="-120"/>
               </a:rPr>
-              <a:t>jumpstart</a:t>
+              <a:t>startling</a:t>
             </a:r>
             <a:endParaRPr lang="en-US" sz="2800" dirty="0"/>
           </a:p>
@@ -23585,7 +23039,7 @@
         </p:nvSpPr>
         <p:spPr>
           <a:xfrm>
-            <a:off x="2938272" y="2258568"/>
+            <a:off x="2221992" y="2258568"/>
             <a:ext cx="1828800" cy="292608"/>
           </a:xfrm>
           <a:prstGeom prst="rect">
@@ -23594,11 +23048,11 @@
             </a:avLst>
           </a:prstGeom>
           <a:solidFill>
-            <a:srgbClr val="DDD6FE"/>
+            <a:srgbClr val="CCFBF1"/>
           </a:solidFill>
           <a:ln w="19050">
             <a:solidFill>
-              <a:srgbClr val="7C3AED"/>
+              <a:srgbClr val="0D9488"/>
             </a:solidFill>
             <a:prstDash val="solid"/>
           </a:ln>
@@ -23619,7 +23073,7 @@
         </p:nvSpPr>
         <p:spPr>
           <a:xfrm>
-            <a:off x="2938272" y="2258568"/>
+            <a:off x="2221992" y="2258568"/>
             <a:ext cx="1828800" cy="292608"/>
           </a:xfrm>
           <a:prstGeom prst="rect">
@@ -23638,13 +23092,13 @@
             <a:r>
               <a:rPr lang="en-US" sz="1300" b="1" dirty="0">
                 <a:solidFill>
-                  <a:srgbClr val="4C1D95"/>
+                  <a:srgbClr val="0F766E"/>
                 </a:solidFill>
                 <a:latin typeface="Trebuchet MS" pitchFamily="34" charset="0"/>
                 <a:ea typeface="Trebuchet MS" pitchFamily="34" charset="-122"/>
                 <a:cs typeface="Trebuchet MS" pitchFamily="34" charset="-120"/>
               </a:rPr>
-              <a:t>jump</a:t>
+              <a:t>start</a:t>
             </a:r>
             <a:endParaRPr lang="en-US" sz="1300" dirty="0"/>
           </a:p>
@@ -23658,7 +23112,7 @@
         </p:nvSpPr>
         <p:spPr>
           <a:xfrm>
-            <a:off x="2938272" y="2569464"/>
+            <a:off x="2221992" y="2569464"/>
             <a:ext cx="1828800" cy="201168"/>
           </a:xfrm>
           <a:prstGeom prst="rect">
@@ -23683,7 +23137,7 @@
                 <a:ea typeface="Calibri" pitchFamily="34" charset="-122"/>
                 <a:cs typeface="Calibri" pitchFamily="34" charset="-120"/>
               </a:rPr>
-              <a:t>to leap or push quickly</a:t>
+              <a:t>move suddenly</a:t>
             </a:r>
             <a:endParaRPr lang="en-US" sz="850" dirty="0"/>
           </a:p>
@@ -23697,7 +23151,7 @@
         </p:nvSpPr>
         <p:spPr>
           <a:xfrm>
-            <a:off x="5803392" y="2258568"/>
+            <a:off x="4370832" y="2258568"/>
             <a:ext cx="1828800" cy="292608"/>
           </a:xfrm>
           <a:prstGeom prst="rect">
@@ -23706,11 +23160,11 @@
             </a:avLst>
           </a:prstGeom>
           <a:solidFill>
-            <a:srgbClr val="CCFBF1"/>
+            <a:srgbClr val="FCE7F3"/>
           </a:solidFill>
           <a:ln w="19050">
             <a:solidFill>
-              <a:srgbClr val="0D9488"/>
+              <a:srgbClr val="DB2777"/>
             </a:solidFill>
             <a:prstDash val="solid"/>
           </a:ln>
@@ -23731,7 +23185,7 @@
         </p:nvSpPr>
         <p:spPr>
           <a:xfrm>
-            <a:off x="5803392" y="2258568"/>
+            <a:off x="4370832" y="2258568"/>
             <a:ext cx="1828800" cy="292608"/>
           </a:xfrm>
           <a:prstGeom prst="rect">
@@ -23750,13 +23204,13 @@
             <a:r>
               <a:rPr lang="en-US" sz="1300" b="1" dirty="0">
                 <a:solidFill>
-                  <a:srgbClr val="0F766E"/>
+                  <a:srgbClr val="9D174D"/>
                 </a:solidFill>
                 <a:latin typeface="Trebuchet MS" pitchFamily="34" charset="0"/>
                 <a:ea typeface="Trebuchet MS" pitchFamily="34" charset="-122"/>
                 <a:cs typeface="Trebuchet MS" pitchFamily="34" charset="-120"/>
               </a:rPr>
-              <a:t>start</a:t>
+              <a:t>l</a:t>
             </a:r>
             <a:endParaRPr lang="en-US" sz="1300" dirty="0"/>
           </a:p>
@@ -23770,7 +23224,7 @@
         </p:nvSpPr>
         <p:spPr>
           <a:xfrm>
-            <a:off x="5803392" y="2569464"/>
+            <a:off x="4370832" y="2569464"/>
             <a:ext cx="1828800" cy="201168"/>
           </a:xfrm>
           <a:prstGeom prst="rect">
@@ -23795,7 +23249,7 @@
                 <a:ea typeface="Calibri" pitchFamily="34" charset="-122"/>
                 <a:cs typeface="Calibri" pitchFamily="34" charset="-120"/>
               </a:rPr>
-              <a:t>to begin</a:t>
+              <a:t>connecting sound</a:t>
             </a:r>
             <a:endParaRPr lang="en-US" sz="850" dirty="0"/>
           </a:p>
@@ -23804,6 +23258,118 @@
       <p:sp>
         <p:nvSpPr>
           <p:cNvPr id="22" name="Shape 20"/>
+          <p:cNvSpPr/>
+          <p:nvPr/>
+        </p:nvSpPr>
+        <p:spPr>
+          <a:xfrm>
+            <a:off x="6519672" y="2258568"/>
+            <a:ext cx="1828800" cy="292608"/>
+          </a:xfrm>
+          <a:prstGeom prst="rect">
+            <a:avLst>
+              <a:gd name="adj" fmla="val 25000"/>
+            </a:avLst>
+          </a:prstGeom>
+          <a:solidFill>
+            <a:srgbClr val="FCE7F3"/>
+          </a:solidFill>
+          <a:ln w="19050">
+            <a:solidFill>
+              <a:srgbClr val="DB2777"/>
+            </a:solidFill>
+            <a:prstDash val="solid"/>
+          </a:ln>
+          <a:effectLst>
+            <a:outerShdw sx="100000" sy="100000" kx="0" ky="0" algn="bl" rotWithShape="0" blurRad="101600" dist="38100" dir="8100000">
+              <a:srgbClr val="000000">
+                <a:alpha val="12000"/>
+              </a:srgbClr>
+            </a:outerShdw>
+          </a:effectLst>
+        </p:spPr>
+      </p:sp>
+      <p:sp>
+        <p:nvSpPr>
+          <p:cNvPr id="23" name="Text 21"/>
+          <p:cNvSpPr/>
+          <p:nvPr/>
+        </p:nvSpPr>
+        <p:spPr>
+          <a:xfrm>
+            <a:off x="6519672" y="2258568"/>
+            <a:ext cx="1828800" cy="292608"/>
+          </a:xfrm>
+          <a:prstGeom prst="rect">
+            <a:avLst/>
+          </a:prstGeom>
+          <a:noFill/>
+          <a:ln/>
+        </p:spPr>
+        <p:txBody>
+          <a:bodyPr wrap="square" lIns="0" tIns="0" rIns="0" bIns="0" rtlCol="0" anchor="ctr"/>
+          <a:lstStyle/>
+          <a:p>
+            <a:pPr algn="ctr" indent="0" marL="0">
+              <a:buNone/>
+            </a:pPr>
+            <a:r>
+              <a:rPr lang="en-US" sz="1300" b="1" dirty="0">
+                <a:solidFill>
+                  <a:srgbClr val="9D174D"/>
+                </a:solidFill>
+                <a:latin typeface="Trebuchet MS" pitchFamily="34" charset="0"/>
+                <a:ea typeface="Trebuchet MS" pitchFamily="34" charset="-122"/>
+                <a:cs typeface="Trebuchet MS" pitchFamily="34" charset="-120"/>
+              </a:rPr>
+              <a:t>ing</a:t>
+            </a:r>
+            <a:endParaRPr lang="en-US" sz="1300" dirty="0"/>
+          </a:p>
+        </p:txBody>
+      </p:sp>
+      <p:sp>
+        <p:nvSpPr>
+          <p:cNvPr id="24" name="Text 22"/>
+          <p:cNvSpPr/>
+          <p:nvPr/>
+        </p:nvSpPr>
+        <p:spPr>
+          <a:xfrm>
+            <a:off x="6519672" y="2569464"/>
+            <a:ext cx="1828800" cy="201168"/>
+          </a:xfrm>
+          <a:prstGeom prst="rect">
+            <a:avLst/>
+          </a:prstGeom>
+          <a:noFill/>
+          <a:ln/>
+        </p:spPr>
+        <p:txBody>
+          <a:bodyPr wrap="square" lIns="0" tIns="0" rIns="0" bIns="0" rtlCol="0" anchor="t"/>
+          <a:lstStyle/>
+          <a:p>
+            <a:pPr algn="ctr" indent="0" marL="0">
+              <a:buNone/>
+            </a:pPr>
+            <a:r>
+              <a:rPr lang="en-US" sz="850" dirty="0">
+                <a:solidFill>
+                  <a:srgbClr val="475569"/>
+                </a:solidFill>
+                <a:latin typeface="Calibri" pitchFamily="34" charset="0"/>
+                <a:ea typeface="Calibri" pitchFamily="34" charset="-122"/>
+                <a:cs typeface="Calibri" pitchFamily="34" charset="-120"/>
+              </a:rPr>
+              <a:t>action or quality</a:t>
+            </a:r>
+            <a:endParaRPr lang="en-US" sz="850" dirty="0"/>
+          </a:p>
+        </p:txBody>
+      </p:sp>
+      <p:sp>
+        <p:nvSpPr>
+          <p:cNvPr id="25" name="Shape 23"/>
           <p:cNvSpPr/>
           <p:nvPr/>
         </p:nvSpPr>
@@ -23830,7 +23396,7 @@
       </p:sp>
       <p:sp>
         <p:nvSpPr>
-          <p:cNvPr id="23" name="Text 21"/>
+          <p:cNvPr id="26" name="Text 24"/>
           <p:cNvSpPr/>
           <p:nvPr/>
         </p:nvSpPr>
@@ -23869,7 +23435,7 @@
       </p:sp>
       <p:sp>
         <p:nvSpPr>
-          <p:cNvPr id="24" name="Shape 22"/>
+          <p:cNvPr id="27" name="Shape 25"/>
           <p:cNvSpPr/>
           <p:nvPr/>
         </p:nvSpPr>
@@ -23896,7 +23462,7 @@
       </p:sp>
       <p:sp>
         <p:nvSpPr>
-          <p:cNvPr id="25" name="Text 23"/>
+          <p:cNvPr id="28" name="Text 26"/>
           <p:cNvSpPr/>
           <p:nvPr/>
         </p:nvSpPr>
@@ -23935,7 +23501,7 @@
       </p:sp>
       <p:sp>
         <p:nvSpPr>
-          <p:cNvPr id="26" name="Shape 24"/>
+          <p:cNvPr id="29" name="Shape 27"/>
           <p:cNvSpPr/>
           <p:nvPr/>
         </p:nvSpPr>
@@ -23962,7 +23528,7 @@
       </p:sp>
       <p:sp>
         <p:nvSpPr>
-          <p:cNvPr id="27" name="Text 25"/>
+          <p:cNvPr id="30" name="Text 28"/>
           <p:cNvSpPr/>
           <p:nvPr/>
         </p:nvSpPr>
@@ -24001,7 +23567,7 @@
       </p:sp>
       <p:sp>
         <p:nvSpPr>
-          <p:cNvPr id="28" name="Shape 26"/>
+          <p:cNvPr id="31" name="Shape 29"/>
           <p:cNvSpPr/>
           <p:nvPr/>
         </p:nvSpPr>
@@ -24028,7 +23594,7 @@
       </p:sp>
       <p:sp>
         <p:nvSpPr>
-          <p:cNvPr id="29" name="Text 27"/>
+          <p:cNvPr id="32" name="Text 30"/>
           <p:cNvSpPr/>
           <p:nvPr/>
         </p:nvSpPr>
@@ -24351,7 +23917,7 @@
                 <a:ea typeface="Calibri" pitchFamily="34" charset="-122"/>
                 <a:cs typeface="Calibri" pitchFamily="34" charset="-120"/>
               </a:rPr>
-              <a:t>Word Labs  •  wordlabs.app  •  Root: 'start' = begin, move suddenly, jump</a:t>
+              <a:t>Word Labs  •  wordlabs.app  •  Root: 'start' = begin, move suddenly, set going</a:t>
             </a:r>
             <a:endParaRPr lang="en-US" sz="800" dirty="0"/>
           </a:p>
@@ -24424,7 +23990,7 @@
                 <a:ea typeface="Trebuchet MS" pitchFamily="34" charset="-122"/>
                 <a:cs typeface="Trebuchet MS" pitchFamily="34" charset="-120"/>
               </a:rPr>
-              <a:t>We are learning that the root 'start' means 'begin, move suddenly, jump'.</a:t>
+              <a:t>We are learning that the root 'start' means 'begin, move suddenly, set going'.</a:t>
             </a:r>
             <a:endParaRPr lang="en-US" sz="2000" dirty="0"/>
           </a:p>
@@ -25070,7 +24636,7 @@
                 <a:ea typeface="Calibri" pitchFamily="34" charset="-122"/>
                 <a:cs typeface="Calibri" pitchFamily="34" charset="-120"/>
               </a:rPr>
-              <a:t>Word Labs  •  wordlabs.app  •  Root: 'start' = begin, move suddenly, jump</a:t>
+              <a:t>Word Labs  •  wordlabs.app  •  Root: 'start' = begin, move suddenly, set going</a:t>
             </a:r>
             <a:endParaRPr lang="en-US" sz="800" dirty="0"/>
           </a:p>
@@ -25209,7 +24775,7 @@
                 <a:ea typeface="Trebuchet MS" pitchFamily="34" charset="-122"/>
                 <a:cs typeface="Trebuchet MS" pitchFamily="34" charset="-120"/>
               </a:rPr>
-              <a:t>jumpstart</a:t>
+              <a:t>startling</a:t>
             </a:r>
             <a:endParaRPr lang="en-US" sz="2800" dirty="0"/>
           </a:p>
@@ -25289,7 +24855,7 @@
         </p:nvSpPr>
         <p:spPr>
           <a:xfrm>
-            <a:off x="2938272" y="2258568"/>
+            <a:off x="2221992" y="2258568"/>
             <a:ext cx="1828800" cy="292608"/>
           </a:xfrm>
           <a:prstGeom prst="rect">
@@ -25298,11 +24864,11 @@
             </a:avLst>
           </a:prstGeom>
           <a:solidFill>
-            <a:srgbClr val="DDD6FE"/>
+            <a:srgbClr val="CCFBF1"/>
           </a:solidFill>
           <a:ln w="19050">
             <a:solidFill>
-              <a:srgbClr val="7C3AED"/>
+              <a:srgbClr val="0D9488"/>
             </a:solidFill>
             <a:prstDash val="solid"/>
           </a:ln>
@@ -25323,7 +24889,7 @@
         </p:nvSpPr>
         <p:spPr>
           <a:xfrm>
-            <a:off x="2938272" y="2258568"/>
+            <a:off x="2221992" y="2258568"/>
             <a:ext cx="1828800" cy="292608"/>
           </a:xfrm>
           <a:prstGeom prst="rect">
@@ -25342,13 +24908,13 @@
             <a:r>
               <a:rPr lang="en-US" sz="1300" b="1" dirty="0">
                 <a:solidFill>
-                  <a:srgbClr val="4C1D95"/>
+                  <a:srgbClr val="0F766E"/>
                 </a:solidFill>
                 <a:latin typeface="Trebuchet MS" pitchFamily="34" charset="0"/>
                 <a:ea typeface="Trebuchet MS" pitchFamily="34" charset="-122"/>
                 <a:cs typeface="Trebuchet MS" pitchFamily="34" charset="-120"/>
               </a:rPr>
-              <a:t>jump</a:t>
+              <a:t>start</a:t>
             </a:r>
             <a:endParaRPr lang="en-US" sz="1300" dirty="0"/>
           </a:p>
@@ -25362,7 +24928,7 @@
         </p:nvSpPr>
         <p:spPr>
           <a:xfrm>
-            <a:off x="2938272" y="2569464"/>
+            <a:off x="2221992" y="2569464"/>
             <a:ext cx="1828800" cy="201168"/>
           </a:xfrm>
           <a:prstGeom prst="rect">
@@ -25387,7 +24953,7 @@
                 <a:ea typeface="Calibri" pitchFamily="34" charset="-122"/>
                 <a:cs typeface="Calibri" pitchFamily="34" charset="-120"/>
               </a:rPr>
-              <a:t>to leap or push quickly</a:t>
+              <a:t>move suddenly</a:t>
             </a:r>
             <a:endParaRPr lang="en-US" sz="850" dirty="0"/>
           </a:p>
@@ -25401,7 +24967,7 @@
         </p:nvSpPr>
         <p:spPr>
           <a:xfrm>
-            <a:off x="5803392" y="2258568"/>
+            <a:off x="4370832" y="2258568"/>
             <a:ext cx="1828800" cy="292608"/>
           </a:xfrm>
           <a:prstGeom prst="rect">
@@ -25410,11 +24976,11 @@
             </a:avLst>
           </a:prstGeom>
           <a:solidFill>
-            <a:srgbClr val="CCFBF1"/>
+            <a:srgbClr val="FCE7F3"/>
           </a:solidFill>
           <a:ln w="19050">
             <a:solidFill>
-              <a:srgbClr val="0D9488"/>
+              <a:srgbClr val="DB2777"/>
             </a:solidFill>
             <a:prstDash val="solid"/>
           </a:ln>
@@ -25435,7 +25001,7 @@
         </p:nvSpPr>
         <p:spPr>
           <a:xfrm>
-            <a:off x="5803392" y="2258568"/>
+            <a:off x="4370832" y="2258568"/>
             <a:ext cx="1828800" cy="292608"/>
           </a:xfrm>
           <a:prstGeom prst="rect">
@@ -25454,13 +25020,13 @@
             <a:r>
               <a:rPr lang="en-US" sz="1300" b="1" dirty="0">
                 <a:solidFill>
-                  <a:srgbClr val="0F766E"/>
+                  <a:srgbClr val="9D174D"/>
                 </a:solidFill>
                 <a:latin typeface="Trebuchet MS" pitchFamily="34" charset="0"/>
                 <a:ea typeface="Trebuchet MS" pitchFamily="34" charset="-122"/>
                 <a:cs typeface="Trebuchet MS" pitchFamily="34" charset="-120"/>
               </a:rPr>
-              <a:t>start</a:t>
+              <a:t>l</a:t>
             </a:r>
             <a:endParaRPr lang="en-US" sz="1300" dirty="0"/>
           </a:p>
@@ -25474,7 +25040,7 @@
         </p:nvSpPr>
         <p:spPr>
           <a:xfrm>
-            <a:off x="5803392" y="2569464"/>
+            <a:off x="4370832" y="2569464"/>
             <a:ext cx="1828800" cy="201168"/>
           </a:xfrm>
           <a:prstGeom prst="rect">
@@ -25499,7 +25065,7 @@
                 <a:ea typeface="Calibri" pitchFamily="34" charset="-122"/>
                 <a:cs typeface="Calibri" pitchFamily="34" charset="-120"/>
               </a:rPr>
-              <a:t>to begin</a:t>
+              <a:t>connecting sound</a:t>
             </a:r>
             <a:endParaRPr lang="en-US" sz="850" dirty="0"/>
           </a:p>
@@ -25508,6 +25074,118 @@
       <p:sp>
         <p:nvSpPr>
           <p:cNvPr id="22" name="Shape 20"/>
+          <p:cNvSpPr/>
+          <p:nvPr/>
+        </p:nvSpPr>
+        <p:spPr>
+          <a:xfrm>
+            <a:off x="6519672" y="2258568"/>
+            <a:ext cx="1828800" cy="292608"/>
+          </a:xfrm>
+          <a:prstGeom prst="rect">
+            <a:avLst>
+              <a:gd name="adj" fmla="val 25000"/>
+            </a:avLst>
+          </a:prstGeom>
+          <a:solidFill>
+            <a:srgbClr val="FCE7F3"/>
+          </a:solidFill>
+          <a:ln w="19050">
+            <a:solidFill>
+              <a:srgbClr val="DB2777"/>
+            </a:solidFill>
+            <a:prstDash val="solid"/>
+          </a:ln>
+          <a:effectLst>
+            <a:outerShdw sx="100000" sy="100000" kx="0" ky="0" algn="bl" rotWithShape="0" blurRad="101600" dist="38100" dir="8100000">
+              <a:srgbClr val="000000">
+                <a:alpha val="12000"/>
+              </a:srgbClr>
+            </a:outerShdw>
+          </a:effectLst>
+        </p:spPr>
+      </p:sp>
+      <p:sp>
+        <p:nvSpPr>
+          <p:cNvPr id="23" name="Text 21"/>
+          <p:cNvSpPr/>
+          <p:nvPr/>
+        </p:nvSpPr>
+        <p:spPr>
+          <a:xfrm>
+            <a:off x="6519672" y="2258568"/>
+            <a:ext cx="1828800" cy="292608"/>
+          </a:xfrm>
+          <a:prstGeom prst="rect">
+            <a:avLst/>
+          </a:prstGeom>
+          <a:noFill/>
+          <a:ln/>
+        </p:spPr>
+        <p:txBody>
+          <a:bodyPr wrap="square" lIns="0" tIns="0" rIns="0" bIns="0" rtlCol="0" anchor="ctr"/>
+          <a:lstStyle/>
+          <a:p>
+            <a:pPr algn="ctr" indent="0" marL="0">
+              <a:buNone/>
+            </a:pPr>
+            <a:r>
+              <a:rPr lang="en-US" sz="1300" b="1" dirty="0">
+                <a:solidFill>
+                  <a:srgbClr val="9D174D"/>
+                </a:solidFill>
+                <a:latin typeface="Trebuchet MS" pitchFamily="34" charset="0"/>
+                <a:ea typeface="Trebuchet MS" pitchFamily="34" charset="-122"/>
+                <a:cs typeface="Trebuchet MS" pitchFamily="34" charset="-120"/>
+              </a:rPr>
+              <a:t>ing</a:t>
+            </a:r>
+            <a:endParaRPr lang="en-US" sz="1300" dirty="0"/>
+          </a:p>
+        </p:txBody>
+      </p:sp>
+      <p:sp>
+        <p:nvSpPr>
+          <p:cNvPr id="24" name="Text 22"/>
+          <p:cNvSpPr/>
+          <p:nvPr/>
+        </p:nvSpPr>
+        <p:spPr>
+          <a:xfrm>
+            <a:off x="6519672" y="2569464"/>
+            <a:ext cx="1828800" cy="201168"/>
+          </a:xfrm>
+          <a:prstGeom prst="rect">
+            <a:avLst/>
+          </a:prstGeom>
+          <a:noFill/>
+          <a:ln/>
+        </p:spPr>
+        <p:txBody>
+          <a:bodyPr wrap="square" lIns="0" tIns="0" rIns="0" bIns="0" rtlCol="0" anchor="t"/>
+          <a:lstStyle/>
+          <a:p>
+            <a:pPr algn="ctr" indent="0" marL="0">
+              <a:buNone/>
+            </a:pPr>
+            <a:r>
+              <a:rPr lang="en-US" sz="850" dirty="0">
+                <a:solidFill>
+                  <a:srgbClr val="475569"/>
+                </a:solidFill>
+                <a:latin typeface="Calibri" pitchFamily="34" charset="0"/>
+                <a:ea typeface="Calibri" pitchFamily="34" charset="-122"/>
+                <a:cs typeface="Calibri" pitchFamily="34" charset="-120"/>
+              </a:rPr>
+              <a:t>action or quality</a:t>
+            </a:r>
+            <a:endParaRPr lang="en-US" sz="850" dirty="0"/>
+          </a:p>
+        </p:txBody>
+      </p:sp>
+      <p:sp>
+        <p:nvSpPr>
+          <p:cNvPr id="25" name="Shape 23"/>
           <p:cNvSpPr/>
           <p:nvPr/>
         </p:nvSpPr>
@@ -25534,7 +25212,7 @@
       </p:sp>
       <p:sp>
         <p:nvSpPr>
-          <p:cNvPr id="23" name="Text 21"/>
+          <p:cNvPr id="26" name="Text 24"/>
           <p:cNvSpPr/>
           <p:nvPr/>
         </p:nvSpPr>
@@ -25573,7 +25251,7 @@
       </p:sp>
       <p:sp>
         <p:nvSpPr>
-          <p:cNvPr id="24" name="Shape 22"/>
+          <p:cNvPr id="27" name="Shape 25"/>
           <p:cNvSpPr/>
           <p:nvPr/>
         </p:nvSpPr>
@@ -25600,7 +25278,7 @@
       </p:sp>
       <p:sp>
         <p:nvSpPr>
-          <p:cNvPr id="25" name="Shape 23"/>
+          <p:cNvPr id="28" name="Shape 26"/>
           <p:cNvSpPr/>
           <p:nvPr/>
         </p:nvSpPr>
@@ -25627,7 +25305,7 @@
       </p:sp>
       <p:sp>
         <p:nvSpPr>
-          <p:cNvPr id="26" name="Text 24"/>
+          <p:cNvPr id="29" name="Text 27"/>
           <p:cNvSpPr/>
           <p:nvPr/>
         </p:nvSpPr>
@@ -25658,7 +25336,7 @@
                 <a:ea typeface="Trebuchet MS" pitchFamily="34" charset="-122"/>
                 <a:cs typeface="Trebuchet MS" pitchFamily="34" charset="-120"/>
               </a:rPr>
-              <a:t>jump</a:t>
+              <a:t>start</a:t>
             </a:r>
             <a:endParaRPr lang="en-US" sz="1400" dirty="0"/>
           </a:p>
@@ -25666,7 +25344,7 @@
       </p:sp>
       <p:sp>
         <p:nvSpPr>
-          <p:cNvPr id="27" name="Text 25"/>
+          <p:cNvPr id="30" name="Text 28"/>
           <p:cNvSpPr/>
           <p:nvPr/>
         </p:nvSpPr>
@@ -25705,7 +25383,7 @@
       </p:sp>
       <p:sp>
         <p:nvSpPr>
-          <p:cNvPr id="28" name="Shape 26"/>
+          <p:cNvPr id="31" name="Shape 29"/>
           <p:cNvSpPr/>
           <p:nvPr/>
         </p:nvSpPr>
@@ -25732,7 +25410,7 @@
       </p:sp>
       <p:sp>
         <p:nvSpPr>
-          <p:cNvPr id="29" name="Text 27"/>
+          <p:cNvPr id="32" name="Text 30"/>
           <p:cNvSpPr/>
           <p:nvPr/>
         </p:nvSpPr>
@@ -25763,7 +25441,7 @@
                 <a:ea typeface="Trebuchet MS" pitchFamily="34" charset="-122"/>
                 <a:cs typeface="Trebuchet MS" pitchFamily="34" charset="-120"/>
               </a:rPr>
-              <a:t>start</a:t>
+              <a:t>ling</a:t>
             </a:r>
             <a:endParaRPr lang="en-US" sz="1400" dirty="0"/>
           </a:p>
@@ -25771,7 +25449,7 @@
       </p:sp>
       <p:sp>
         <p:nvSpPr>
-          <p:cNvPr id="30" name="Shape 28"/>
+          <p:cNvPr id="33" name="Shape 31"/>
           <p:cNvSpPr/>
           <p:nvPr/>
         </p:nvSpPr>
@@ -25798,7 +25476,7 @@
       </p:sp>
       <p:sp>
         <p:nvSpPr>
-          <p:cNvPr id="31" name="Text 29"/>
+          <p:cNvPr id="34" name="Text 32"/>
           <p:cNvSpPr/>
           <p:nvPr/>
         </p:nvSpPr>
@@ -25837,7 +25515,7 @@
       </p:sp>
       <p:sp>
         <p:nvSpPr>
-          <p:cNvPr id="32" name="Shape 30"/>
+          <p:cNvPr id="35" name="Shape 33"/>
           <p:cNvSpPr/>
           <p:nvPr/>
         </p:nvSpPr>
@@ -25864,7 +25542,7 @@
       </p:sp>
       <p:sp>
         <p:nvSpPr>
-          <p:cNvPr id="33" name="Text 31"/>
+          <p:cNvPr id="36" name="Text 34"/>
           <p:cNvSpPr/>
           <p:nvPr/>
         </p:nvSpPr>
@@ -26187,7 +25865,7 @@
                 <a:ea typeface="Calibri" pitchFamily="34" charset="-122"/>
                 <a:cs typeface="Calibri" pitchFamily="34" charset="-120"/>
               </a:rPr>
-              <a:t>Word Labs  •  wordlabs.app  •  Root: 'start' = begin, move suddenly, jump</a:t>
+              <a:t>Word Labs  •  wordlabs.app  •  Root: 'start' = begin, move suddenly, set going</a:t>
             </a:r>
             <a:endParaRPr lang="en-US" sz="800" dirty="0"/>
           </a:p>
@@ -26326,7 +26004,7 @@
                 <a:ea typeface="Trebuchet MS" pitchFamily="34" charset="-122"/>
                 <a:cs typeface="Trebuchet MS" pitchFamily="34" charset="-120"/>
               </a:rPr>
-              <a:t>jumpstart</a:t>
+              <a:t>startling</a:t>
             </a:r>
             <a:endParaRPr lang="en-US" sz="2800" dirty="0"/>
           </a:p>
@@ -26406,7 +26084,7 @@
         </p:nvSpPr>
         <p:spPr>
           <a:xfrm>
-            <a:off x="2938272" y="2258568"/>
+            <a:off x="2221992" y="2258568"/>
             <a:ext cx="1828800" cy="292608"/>
           </a:xfrm>
           <a:prstGeom prst="rect">
@@ -26415,11 +26093,11 @@
             </a:avLst>
           </a:prstGeom>
           <a:solidFill>
-            <a:srgbClr val="DDD6FE"/>
+            <a:srgbClr val="CCFBF1"/>
           </a:solidFill>
           <a:ln w="19050">
             <a:solidFill>
-              <a:srgbClr val="7C3AED"/>
+              <a:srgbClr val="0D9488"/>
             </a:solidFill>
             <a:prstDash val="solid"/>
           </a:ln>
@@ -26440,7 +26118,7 @@
         </p:nvSpPr>
         <p:spPr>
           <a:xfrm>
-            <a:off x="2938272" y="2258568"/>
+            <a:off x="2221992" y="2258568"/>
             <a:ext cx="1828800" cy="292608"/>
           </a:xfrm>
           <a:prstGeom prst="rect">
@@ -26459,13 +26137,13 @@
             <a:r>
               <a:rPr lang="en-US" sz="1300" b="1" dirty="0">
                 <a:solidFill>
-                  <a:srgbClr val="4C1D95"/>
+                  <a:srgbClr val="0F766E"/>
                 </a:solidFill>
                 <a:latin typeface="Trebuchet MS" pitchFamily="34" charset="0"/>
                 <a:ea typeface="Trebuchet MS" pitchFamily="34" charset="-122"/>
                 <a:cs typeface="Trebuchet MS" pitchFamily="34" charset="-120"/>
               </a:rPr>
-              <a:t>jump</a:t>
+              <a:t>start</a:t>
             </a:r>
             <a:endParaRPr lang="en-US" sz="1300" dirty="0"/>
           </a:p>
@@ -26479,7 +26157,7 @@
         </p:nvSpPr>
         <p:spPr>
           <a:xfrm>
-            <a:off x="2938272" y="2569464"/>
+            <a:off x="2221992" y="2569464"/>
             <a:ext cx="1828800" cy="201168"/>
           </a:xfrm>
           <a:prstGeom prst="rect">
@@ -26504,7 +26182,7 @@
                 <a:ea typeface="Calibri" pitchFamily="34" charset="-122"/>
                 <a:cs typeface="Calibri" pitchFamily="34" charset="-120"/>
               </a:rPr>
-              <a:t>to leap or push quickly</a:t>
+              <a:t>move suddenly</a:t>
             </a:r>
             <a:endParaRPr lang="en-US" sz="850" dirty="0"/>
           </a:p>
@@ -26518,7 +26196,7 @@
         </p:nvSpPr>
         <p:spPr>
           <a:xfrm>
-            <a:off x="5803392" y="2258568"/>
+            <a:off x="4370832" y="2258568"/>
             <a:ext cx="1828800" cy="292608"/>
           </a:xfrm>
           <a:prstGeom prst="rect">
@@ -26527,11 +26205,11 @@
             </a:avLst>
           </a:prstGeom>
           <a:solidFill>
-            <a:srgbClr val="CCFBF1"/>
+            <a:srgbClr val="FCE7F3"/>
           </a:solidFill>
           <a:ln w="19050">
             <a:solidFill>
-              <a:srgbClr val="0D9488"/>
+              <a:srgbClr val="DB2777"/>
             </a:solidFill>
             <a:prstDash val="solid"/>
           </a:ln>
@@ -26552,7 +26230,7 @@
         </p:nvSpPr>
         <p:spPr>
           <a:xfrm>
-            <a:off x="5803392" y="2258568"/>
+            <a:off x="4370832" y="2258568"/>
             <a:ext cx="1828800" cy="292608"/>
           </a:xfrm>
           <a:prstGeom prst="rect">
@@ -26571,13 +26249,13 @@
             <a:r>
               <a:rPr lang="en-US" sz="1300" b="1" dirty="0">
                 <a:solidFill>
-                  <a:srgbClr val="0F766E"/>
+                  <a:srgbClr val="9D174D"/>
                 </a:solidFill>
                 <a:latin typeface="Trebuchet MS" pitchFamily="34" charset="0"/>
                 <a:ea typeface="Trebuchet MS" pitchFamily="34" charset="-122"/>
                 <a:cs typeface="Trebuchet MS" pitchFamily="34" charset="-120"/>
               </a:rPr>
-              <a:t>start</a:t>
+              <a:t>l</a:t>
             </a:r>
             <a:endParaRPr lang="en-US" sz="1300" dirty="0"/>
           </a:p>
@@ -26591,7 +26269,7 @@
         </p:nvSpPr>
         <p:spPr>
           <a:xfrm>
-            <a:off x="5803392" y="2569464"/>
+            <a:off x="4370832" y="2569464"/>
             <a:ext cx="1828800" cy="201168"/>
           </a:xfrm>
           <a:prstGeom prst="rect">
@@ -26616,7 +26294,7 @@
                 <a:ea typeface="Calibri" pitchFamily="34" charset="-122"/>
                 <a:cs typeface="Calibri" pitchFamily="34" charset="-120"/>
               </a:rPr>
-              <a:t>to begin</a:t>
+              <a:t>connecting sound</a:t>
             </a:r>
             <a:endParaRPr lang="en-US" sz="850" dirty="0"/>
           </a:p>
@@ -26625,6 +26303,118 @@
       <p:sp>
         <p:nvSpPr>
           <p:cNvPr id="22" name="Shape 20"/>
+          <p:cNvSpPr/>
+          <p:nvPr/>
+        </p:nvSpPr>
+        <p:spPr>
+          <a:xfrm>
+            <a:off x="6519672" y="2258568"/>
+            <a:ext cx="1828800" cy="292608"/>
+          </a:xfrm>
+          <a:prstGeom prst="rect">
+            <a:avLst>
+              <a:gd name="adj" fmla="val 25000"/>
+            </a:avLst>
+          </a:prstGeom>
+          <a:solidFill>
+            <a:srgbClr val="FCE7F3"/>
+          </a:solidFill>
+          <a:ln w="19050">
+            <a:solidFill>
+              <a:srgbClr val="DB2777"/>
+            </a:solidFill>
+            <a:prstDash val="solid"/>
+          </a:ln>
+          <a:effectLst>
+            <a:outerShdw sx="100000" sy="100000" kx="0" ky="0" algn="bl" rotWithShape="0" blurRad="101600" dist="38100" dir="8100000">
+              <a:srgbClr val="000000">
+                <a:alpha val="12000"/>
+              </a:srgbClr>
+            </a:outerShdw>
+          </a:effectLst>
+        </p:spPr>
+      </p:sp>
+      <p:sp>
+        <p:nvSpPr>
+          <p:cNvPr id="23" name="Text 21"/>
+          <p:cNvSpPr/>
+          <p:nvPr/>
+        </p:nvSpPr>
+        <p:spPr>
+          <a:xfrm>
+            <a:off x="6519672" y="2258568"/>
+            <a:ext cx="1828800" cy="292608"/>
+          </a:xfrm>
+          <a:prstGeom prst="rect">
+            <a:avLst/>
+          </a:prstGeom>
+          <a:noFill/>
+          <a:ln/>
+        </p:spPr>
+        <p:txBody>
+          <a:bodyPr wrap="square" lIns="0" tIns="0" rIns="0" bIns="0" rtlCol="0" anchor="ctr"/>
+          <a:lstStyle/>
+          <a:p>
+            <a:pPr algn="ctr" indent="0" marL="0">
+              <a:buNone/>
+            </a:pPr>
+            <a:r>
+              <a:rPr lang="en-US" sz="1300" b="1" dirty="0">
+                <a:solidFill>
+                  <a:srgbClr val="9D174D"/>
+                </a:solidFill>
+                <a:latin typeface="Trebuchet MS" pitchFamily="34" charset="0"/>
+                <a:ea typeface="Trebuchet MS" pitchFamily="34" charset="-122"/>
+                <a:cs typeface="Trebuchet MS" pitchFamily="34" charset="-120"/>
+              </a:rPr>
+              <a:t>ing</a:t>
+            </a:r>
+            <a:endParaRPr lang="en-US" sz="1300" dirty="0"/>
+          </a:p>
+        </p:txBody>
+      </p:sp>
+      <p:sp>
+        <p:nvSpPr>
+          <p:cNvPr id="24" name="Text 22"/>
+          <p:cNvSpPr/>
+          <p:nvPr/>
+        </p:nvSpPr>
+        <p:spPr>
+          <a:xfrm>
+            <a:off x="6519672" y="2569464"/>
+            <a:ext cx="1828800" cy="201168"/>
+          </a:xfrm>
+          <a:prstGeom prst="rect">
+            <a:avLst/>
+          </a:prstGeom>
+          <a:noFill/>
+          <a:ln/>
+        </p:spPr>
+        <p:txBody>
+          <a:bodyPr wrap="square" lIns="0" tIns="0" rIns="0" bIns="0" rtlCol="0" anchor="t"/>
+          <a:lstStyle/>
+          <a:p>
+            <a:pPr algn="ctr" indent="0" marL="0">
+              <a:buNone/>
+            </a:pPr>
+            <a:r>
+              <a:rPr lang="en-US" sz="850" dirty="0">
+                <a:solidFill>
+                  <a:srgbClr val="475569"/>
+                </a:solidFill>
+                <a:latin typeface="Calibri" pitchFamily="34" charset="0"/>
+                <a:ea typeface="Calibri" pitchFamily="34" charset="-122"/>
+                <a:cs typeface="Calibri" pitchFamily="34" charset="-120"/>
+              </a:rPr>
+              <a:t>action or quality</a:t>
+            </a:r>
+            <a:endParaRPr lang="en-US" sz="850" dirty="0"/>
+          </a:p>
+        </p:txBody>
+      </p:sp>
+      <p:sp>
+        <p:nvSpPr>
+          <p:cNvPr id="25" name="Shape 23"/>
           <p:cNvSpPr/>
           <p:nvPr/>
         </p:nvSpPr>
@@ -26651,7 +26441,7 @@
       </p:sp>
       <p:sp>
         <p:nvSpPr>
-          <p:cNvPr id="23" name="Text 21"/>
+          <p:cNvPr id="26" name="Text 24"/>
           <p:cNvSpPr/>
           <p:nvPr/>
         </p:nvSpPr>
@@ -26690,7 +26480,7 @@
       </p:sp>
       <p:sp>
         <p:nvSpPr>
-          <p:cNvPr id="24" name="Shape 22"/>
+          <p:cNvPr id="27" name="Shape 25"/>
           <p:cNvSpPr/>
           <p:nvPr/>
         </p:nvSpPr>
@@ -26717,7 +26507,7 @@
       </p:sp>
       <p:sp>
         <p:nvSpPr>
-          <p:cNvPr id="25" name="Shape 23"/>
+          <p:cNvPr id="28" name="Shape 26"/>
           <p:cNvSpPr/>
           <p:nvPr/>
         </p:nvSpPr>
@@ -26744,7 +26534,7 @@
       </p:sp>
       <p:sp>
         <p:nvSpPr>
-          <p:cNvPr id="26" name="Text 24"/>
+          <p:cNvPr id="29" name="Text 27"/>
           <p:cNvSpPr/>
           <p:nvPr/>
         </p:nvSpPr>
@@ -26775,7 +26565,7 @@
                 <a:ea typeface="Trebuchet MS" pitchFamily="34" charset="-122"/>
                 <a:cs typeface="Trebuchet MS" pitchFamily="34" charset="-120"/>
               </a:rPr>
-              <a:t>jump</a:t>
+              <a:t>start</a:t>
             </a:r>
             <a:endParaRPr lang="en-US" sz="1400" dirty="0"/>
           </a:p>
@@ -26783,7 +26573,7 @@
       </p:sp>
       <p:sp>
         <p:nvSpPr>
-          <p:cNvPr id="27" name="Text 25"/>
+          <p:cNvPr id="30" name="Text 28"/>
           <p:cNvSpPr/>
           <p:nvPr/>
         </p:nvSpPr>
@@ -26822,7 +26612,7 @@
       </p:sp>
       <p:sp>
         <p:nvSpPr>
-          <p:cNvPr id="28" name="Shape 26"/>
+          <p:cNvPr id="31" name="Shape 29"/>
           <p:cNvSpPr/>
           <p:nvPr/>
         </p:nvSpPr>
@@ -26849,7 +26639,7 @@
       </p:sp>
       <p:sp>
         <p:nvSpPr>
-          <p:cNvPr id="29" name="Text 27"/>
+          <p:cNvPr id="32" name="Text 30"/>
           <p:cNvSpPr/>
           <p:nvPr/>
         </p:nvSpPr>
@@ -26880,7 +26670,7 @@
                 <a:ea typeface="Trebuchet MS" pitchFamily="34" charset="-122"/>
                 <a:cs typeface="Trebuchet MS" pitchFamily="34" charset="-120"/>
               </a:rPr>
-              <a:t>start</a:t>
+              <a:t>ling</a:t>
             </a:r>
             <a:endParaRPr lang="en-US" sz="1400" dirty="0"/>
           </a:p>
@@ -26888,7 +26678,7 @@
       </p:sp>
       <p:sp>
         <p:nvSpPr>
-          <p:cNvPr id="30" name="Shape 28"/>
+          <p:cNvPr id="33" name="Shape 31"/>
           <p:cNvSpPr/>
           <p:nvPr/>
         </p:nvSpPr>
@@ -26915,7 +26705,7 @@
       </p:sp>
       <p:sp>
         <p:nvSpPr>
-          <p:cNvPr id="31" name="Text 29"/>
+          <p:cNvPr id="34" name="Text 32"/>
           <p:cNvSpPr/>
           <p:nvPr/>
         </p:nvSpPr>
@@ -26954,7 +26744,7 @@
       </p:sp>
       <p:sp>
         <p:nvSpPr>
-          <p:cNvPr id="32" name="Shape 30"/>
+          <p:cNvPr id="35" name="Shape 33"/>
           <p:cNvSpPr/>
           <p:nvPr/>
         </p:nvSpPr>
@@ -26981,13 +26771,13 @@
       </p:sp>
       <p:sp>
         <p:nvSpPr>
-          <p:cNvPr id="33" name="Shape 31"/>
-          <p:cNvSpPr/>
-          <p:nvPr/>
-        </p:nvSpPr>
-        <p:spPr>
-          <a:xfrm>
-            <a:off x="2023872" y="4169664"/>
+          <p:cNvPr id="36" name="Shape 34"/>
+          <p:cNvSpPr/>
+          <p:nvPr/>
+        </p:nvSpPr>
+        <p:spPr>
+          <a:xfrm>
+            <a:off x="2124837" y="4169664"/>
             <a:ext cx="685800" cy="475488"/>
           </a:xfrm>
           <a:prstGeom prst="rect">
@@ -27008,13 +26798,13 @@
       </p:sp>
       <p:sp>
         <p:nvSpPr>
-          <p:cNvPr id="34" name="Text 32"/>
-          <p:cNvSpPr/>
-          <p:nvPr/>
-        </p:nvSpPr>
-        <p:spPr>
-          <a:xfrm>
-            <a:off x="2023872" y="4169664"/>
+          <p:cNvPr id="37" name="Text 35"/>
+          <p:cNvSpPr/>
+          <p:nvPr/>
+        </p:nvSpPr>
+        <p:spPr>
+          <a:xfrm>
+            <a:off x="2124837" y="4169664"/>
             <a:ext cx="685800" cy="475488"/>
           </a:xfrm>
           <a:prstGeom prst="rect">
@@ -27039,7 +26829,7 @@
                 <a:ea typeface="Trebuchet MS" pitchFamily="34" charset="-122"/>
                 <a:cs typeface="Trebuchet MS" pitchFamily="34" charset="-120"/>
               </a:rPr>
-              <a:t>j</a:t>
+              <a:t>s</a:t>
             </a:r>
             <a:endParaRPr lang="en-US" sz="900" dirty="0"/>
           </a:p>
@@ -27047,13 +26837,13 @@
       </p:sp>
       <p:sp>
         <p:nvSpPr>
-          <p:cNvPr id="35" name="Shape 33"/>
-          <p:cNvSpPr/>
-          <p:nvPr/>
-        </p:nvSpPr>
-        <p:spPr>
-          <a:xfrm>
-            <a:off x="2831592" y="4169664"/>
+          <p:cNvPr id="38" name="Shape 36"/>
+          <p:cNvSpPr/>
+          <p:nvPr/>
+        </p:nvSpPr>
+        <p:spPr>
+          <a:xfrm>
+            <a:off x="3033522" y="4169664"/>
             <a:ext cx="685800" cy="475488"/>
           </a:xfrm>
           <a:prstGeom prst="rect">
@@ -27074,13 +26864,13 @@
       </p:sp>
       <p:sp>
         <p:nvSpPr>
-          <p:cNvPr id="36" name="Text 34"/>
-          <p:cNvSpPr/>
-          <p:nvPr/>
-        </p:nvSpPr>
-        <p:spPr>
-          <a:xfrm>
-            <a:off x="2831592" y="4169664"/>
+          <p:cNvPr id="39" name="Text 37"/>
+          <p:cNvSpPr/>
+          <p:nvPr/>
+        </p:nvSpPr>
+        <p:spPr>
+          <a:xfrm>
+            <a:off x="3033522" y="4169664"/>
             <a:ext cx="685800" cy="475488"/>
           </a:xfrm>
           <a:prstGeom prst="rect">
@@ -27105,7 +26895,7 @@
                 <a:ea typeface="Trebuchet MS" pitchFamily="34" charset="-122"/>
                 <a:cs typeface="Trebuchet MS" pitchFamily="34" charset="-120"/>
               </a:rPr>
-              <a:t>u</a:t>
+              <a:t>t</a:t>
             </a:r>
             <a:endParaRPr lang="en-US" sz="900" dirty="0"/>
           </a:p>
@@ -27113,13 +26903,13 @@
       </p:sp>
       <p:sp>
         <p:nvSpPr>
-          <p:cNvPr id="37" name="Shape 35"/>
-          <p:cNvSpPr/>
-          <p:nvPr/>
-        </p:nvSpPr>
-        <p:spPr>
-          <a:xfrm>
-            <a:off x="3639312" y="4169664"/>
+          <p:cNvPr id="40" name="Shape 38"/>
+          <p:cNvSpPr/>
+          <p:nvPr/>
+        </p:nvSpPr>
+        <p:spPr>
+          <a:xfrm>
+            <a:off x="3942207" y="4169664"/>
             <a:ext cx="685800" cy="475488"/>
           </a:xfrm>
           <a:prstGeom prst="rect">
@@ -27140,13 +26930,13 @@
       </p:sp>
       <p:sp>
         <p:nvSpPr>
-          <p:cNvPr id="38" name="Text 36"/>
-          <p:cNvSpPr/>
-          <p:nvPr/>
-        </p:nvSpPr>
-        <p:spPr>
-          <a:xfrm>
-            <a:off x="3639312" y="4169664"/>
+          <p:cNvPr id="41" name="Text 39"/>
+          <p:cNvSpPr/>
+          <p:nvPr/>
+        </p:nvSpPr>
+        <p:spPr>
+          <a:xfrm>
+            <a:off x="3942207" y="4169664"/>
             <a:ext cx="685800" cy="475488"/>
           </a:xfrm>
           <a:prstGeom prst="rect">
@@ -27171,7 +26961,7 @@
                 <a:ea typeface="Trebuchet MS" pitchFamily="34" charset="-122"/>
                 <a:cs typeface="Trebuchet MS" pitchFamily="34" charset="-120"/>
               </a:rPr>
-              <a:t>m</a:t>
+              <a:t>ar</a:t>
             </a:r>
             <a:endParaRPr lang="en-US" sz="900" dirty="0"/>
           </a:p>
@@ -27179,13 +26969,13 @@
       </p:sp>
       <p:sp>
         <p:nvSpPr>
-          <p:cNvPr id="39" name="Shape 37"/>
-          <p:cNvSpPr/>
-          <p:nvPr/>
-        </p:nvSpPr>
-        <p:spPr>
-          <a:xfrm>
-            <a:off x="4447032" y="4169664"/>
+          <p:cNvPr id="42" name="Shape 40"/>
+          <p:cNvSpPr/>
+          <p:nvPr/>
+        </p:nvSpPr>
+        <p:spPr>
+          <a:xfrm>
+            <a:off x="4850892" y="4169664"/>
             <a:ext cx="685800" cy="475488"/>
           </a:xfrm>
           <a:prstGeom prst="rect">
@@ -27206,13 +26996,13 @@
       </p:sp>
       <p:sp>
         <p:nvSpPr>
-          <p:cNvPr id="40" name="Text 38"/>
-          <p:cNvSpPr/>
-          <p:nvPr/>
-        </p:nvSpPr>
-        <p:spPr>
-          <a:xfrm>
-            <a:off x="4447032" y="4169664"/>
+          <p:cNvPr id="43" name="Text 41"/>
+          <p:cNvSpPr/>
+          <p:nvPr/>
+        </p:nvSpPr>
+        <p:spPr>
+          <a:xfrm>
+            <a:off x="4850892" y="4169664"/>
             <a:ext cx="685800" cy="475488"/>
           </a:xfrm>
           <a:prstGeom prst="rect">
@@ -27237,7 +27027,7 @@
                 <a:ea typeface="Trebuchet MS" pitchFamily="34" charset="-122"/>
                 <a:cs typeface="Trebuchet MS" pitchFamily="34" charset="-120"/>
               </a:rPr>
-              <a:t>p</a:t>
+              <a:t>t</a:t>
             </a:r>
             <a:endParaRPr lang="en-US" sz="900" dirty="0"/>
           </a:p>
@@ -27245,13 +27035,13 @@
       </p:sp>
       <p:sp>
         <p:nvSpPr>
-          <p:cNvPr id="41" name="Shape 39"/>
-          <p:cNvSpPr/>
-          <p:nvPr/>
-        </p:nvSpPr>
-        <p:spPr>
-          <a:xfrm>
-            <a:off x="5254752" y="4169664"/>
+          <p:cNvPr id="44" name="Shape 42"/>
+          <p:cNvSpPr/>
+          <p:nvPr/>
+        </p:nvSpPr>
+        <p:spPr>
+          <a:xfrm>
+            <a:off x="5759577" y="4169664"/>
             <a:ext cx="685800" cy="475488"/>
           </a:xfrm>
           <a:prstGeom prst="rect">
@@ -27272,13 +27062,13 @@
       </p:sp>
       <p:sp>
         <p:nvSpPr>
-          <p:cNvPr id="42" name="Text 40"/>
-          <p:cNvSpPr/>
-          <p:nvPr/>
-        </p:nvSpPr>
-        <p:spPr>
-          <a:xfrm>
-            <a:off x="5254752" y="4169664"/>
+          <p:cNvPr id="45" name="Text 43"/>
+          <p:cNvSpPr/>
+          <p:nvPr/>
+        </p:nvSpPr>
+        <p:spPr>
+          <a:xfrm>
+            <a:off x="5759577" y="4169664"/>
             <a:ext cx="685800" cy="475488"/>
           </a:xfrm>
           <a:prstGeom prst="rect">
@@ -27303,7 +27093,7 @@
                 <a:ea typeface="Trebuchet MS" pitchFamily="34" charset="-122"/>
                 <a:cs typeface="Trebuchet MS" pitchFamily="34" charset="-120"/>
               </a:rPr>
-              <a:t>s</a:t>
+              <a:t>l</a:t>
             </a:r>
             <a:endParaRPr lang="en-US" sz="900" dirty="0"/>
           </a:p>
@@ -27311,13 +27101,13 @@
       </p:sp>
       <p:sp>
         <p:nvSpPr>
-          <p:cNvPr id="43" name="Shape 41"/>
-          <p:cNvSpPr/>
-          <p:nvPr/>
-        </p:nvSpPr>
-        <p:spPr>
-          <a:xfrm>
-            <a:off x="6062472" y="4169664"/>
+          <p:cNvPr id="46" name="Shape 44"/>
+          <p:cNvSpPr/>
+          <p:nvPr/>
+        </p:nvSpPr>
+        <p:spPr>
+          <a:xfrm>
+            <a:off x="6668262" y="4169664"/>
             <a:ext cx="685800" cy="475488"/>
           </a:xfrm>
           <a:prstGeom prst="rect">
@@ -27338,13 +27128,13 @@
       </p:sp>
       <p:sp>
         <p:nvSpPr>
-          <p:cNvPr id="44" name="Text 42"/>
-          <p:cNvSpPr/>
-          <p:nvPr/>
-        </p:nvSpPr>
-        <p:spPr>
-          <a:xfrm>
-            <a:off x="6062472" y="4169664"/>
+          <p:cNvPr id="47" name="Text 45"/>
+          <p:cNvSpPr/>
+          <p:nvPr/>
+        </p:nvSpPr>
+        <p:spPr>
+          <a:xfrm>
+            <a:off x="6668262" y="4169664"/>
             <a:ext cx="685800" cy="475488"/>
           </a:xfrm>
           <a:prstGeom prst="rect">
@@ -27369,7 +27159,7 @@
                 <a:ea typeface="Trebuchet MS" pitchFamily="34" charset="-122"/>
                 <a:cs typeface="Trebuchet MS" pitchFamily="34" charset="-120"/>
               </a:rPr>
-              <a:t>t</a:t>
+              <a:t>i</a:t>
             </a:r>
             <a:endParaRPr lang="en-US" sz="900" dirty="0"/>
           </a:p>
@@ -27377,13 +27167,13 @@
       </p:sp>
       <p:sp>
         <p:nvSpPr>
-          <p:cNvPr id="45" name="Shape 43"/>
-          <p:cNvSpPr/>
-          <p:nvPr/>
-        </p:nvSpPr>
-        <p:spPr>
-          <a:xfrm>
-            <a:off x="6870192" y="4169664"/>
+          <p:cNvPr id="48" name="Shape 46"/>
+          <p:cNvSpPr/>
+          <p:nvPr/>
+        </p:nvSpPr>
+        <p:spPr>
+          <a:xfrm>
+            <a:off x="7576947" y="4169664"/>
             <a:ext cx="685800" cy="475488"/>
           </a:xfrm>
           <a:prstGeom prst="rect">
@@ -27404,13 +27194,13 @@
       </p:sp>
       <p:sp>
         <p:nvSpPr>
-          <p:cNvPr id="46" name="Text 44"/>
-          <p:cNvSpPr/>
-          <p:nvPr/>
-        </p:nvSpPr>
-        <p:spPr>
-          <a:xfrm>
-            <a:off x="6870192" y="4169664"/>
+          <p:cNvPr id="49" name="Text 47"/>
+          <p:cNvSpPr/>
+          <p:nvPr/>
+        </p:nvSpPr>
+        <p:spPr>
+          <a:xfrm>
+            <a:off x="7576947" y="4169664"/>
             <a:ext cx="685800" cy="475488"/>
           </a:xfrm>
           <a:prstGeom prst="rect">
@@ -27435,73 +27225,7 @@
                 <a:ea typeface="Trebuchet MS" pitchFamily="34" charset="-122"/>
                 <a:cs typeface="Trebuchet MS" pitchFamily="34" charset="-120"/>
               </a:rPr>
-              <a:t>ar</a:t>
-            </a:r>
-            <a:endParaRPr lang="en-US" sz="900" dirty="0"/>
-          </a:p>
-        </p:txBody>
-      </p:sp>
-      <p:sp>
-        <p:nvSpPr>
-          <p:cNvPr id="47" name="Shape 45"/>
-          <p:cNvSpPr/>
-          <p:nvPr/>
-        </p:nvSpPr>
-        <p:spPr>
-          <a:xfrm>
-            <a:off x="7677912" y="4169664"/>
-            <a:ext cx="685800" cy="475488"/>
-          </a:xfrm>
-          <a:prstGeom prst="rect">
-            <a:avLst>
-              <a:gd name="adj" fmla="val 7692"/>
-            </a:avLst>
-          </a:prstGeom>
-          <a:solidFill>
-            <a:srgbClr val="FFFFFF"/>
-          </a:solidFill>
-          <a:ln w="12700">
-            <a:solidFill>
-              <a:srgbClr val="DB2777"/>
-            </a:solidFill>
-            <a:prstDash val="solid"/>
-          </a:ln>
-        </p:spPr>
-      </p:sp>
-      <p:sp>
-        <p:nvSpPr>
-          <p:cNvPr id="48" name="Text 46"/>
-          <p:cNvSpPr/>
-          <p:nvPr/>
-        </p:nvSpPr>
-        <p:spPr>
-          <a:xfrm>
-            <a:off x="7677912" y="4169664"/>
-            <a:ext cx="685800" cy="475488"/>
-          </a:xfrm>
-          <a:prstGeom prst="rect">
-            <a:avLst/>
-          </a:prstGeom>
-          <a:noFill/>
-          <a:ln/>
-        </p:spPr>
-        <p:txBody>
-          <a:bodyPr wrap="square" lIns="0" tIns="0" rIns="0" bIns="0" rtlCol="0" anchor="ctr"/>
-          <a:lstStyle/>
-          <a:p>
-            <a:pPr algn="ctr" indent="0" marL="0">
-              <a:buNone/>
-            </a:pPr>
-            <a:r>
-              <a:rPr lang="en-US" sz="900" b="1" dirty="0">
-                <a:solidFill>
-                  <a:srgbClr val="9D174D"/>
-                </a:solidFill>
-                <a:latin typeface="Trebuchet MS" pitchFamily="34" charset="0"/>
-                <a:ea typeface="Trebuchet MS" pitchFamily="34" charset="-122"/>
-                <a:cs typeface="Trebuchet MS" pitchFamily="34" charset="-120"/>
-              </a:rPr>
-              <a:t>t</a:t>
+              <a:t>ng</a:t>
             </a:r>
             <a:endParaRPr lang="en-US" sz="900" dirty="0"/>
           </a:p>
@@ -27793,7 +27517,7 @@
                 <a:ea typeface="Calibri" pitchFamily="34" charset="-122"/>
                 <a:cs typeface="Calibri" pitchFamily="34" charset="-120"/>
               </a:rPr>
-              <a:t>Word Labs  •  wordlabs.app  •  Root: 'start' = begin, move suddenly, jump</a:t>
+              <a:t>Word Labs  •  wordlabs.app  •  Root: 'start' = begin, move suddenly, set going</a:t>
             </a:r>
             <a:endParaRPr lang="en-US" sz="800" dirty="0"/>
           </a:p>
@@ -27932,7 +27656,7 @@
                 <a:ea typeface="Trebuchet MS" pitchFamily="34" charset="-122"/>
                 <a:cs typeface="Trebuchet MS" pitchFamily="34" charset="-120"/>
               </a:rPr>
-              <a:t>restarted</a:t>
+              <a:t>started</a:t>
             </a:r>
             <a:endParaRPr lang="en-US" sz="2800" dirty="0"/>
           </a:p>
@@ -28620,7 +28344,7 @@
                 <a:ea typeface="Calibri" pitchFamily="34" charset="-122"/>
                 <a:cs typeface="Calibri" pitchFamily="34" charset="-120"/>
               </a:rPr>
-              <a:t>Word Labs  •  wordlabs.app  •  Root: 'start' = begin, move suddenly, jump</a:t>
+              <a:t>Word Labs  •  wordlabs.app  •  Root: 'start' = begin, move suddenly, set going</a:t>
             </a:r>
             <a:endParaRPr lang="en-US" sz="800" dirty="0"/>
           </a:p>
@@ -28759,7 +28483,7 @@
                 <a:ea typeface="Trebuchet MS" pitchFamily="34" charset="-122"/>
                 <a:cs typeface="Trebuchet MS" pitchFamily="34" charset="-120"/>
               </a:rPr>
-              <a:t>restarted</a:t>
+              <a:t>started</a:t>
             </a:r>
             <a:endParaRPr lang="en-US" sz="2800" dirty="0"/>
           </a:p>
@@ -28839,7 +28563,7 @@
         </p:nvSpPr>
         <p:spPr>
           <a:xfrm>
-            <a:off x="2221992" y="2258568"/>
+            <a:off x="2938272" y="2258568"/>
             <a:ext cx="1828800" cy="292608"/>
           </a:xfrm>
           <a:prstGeom prst="rect">
@@ -28848,11 +28572,11 @@
             </a:avLst>
           </a:prstGeom>
           <a:solidFill>
-            <a:srgbClr val="DDD6FE"/>
+            <a:srgbClr val="CCFBF1"/>
           </a:solidFill>
           <a:ln w="19050">
             <a:solidFill>
-              <a:srgbClr val="7C3AED"/>
+              <a:srgbClr val="0D9488"/>
             </a:solidFill>
             <a:prstDash val="solid"/>
           </a:ln>
@@ -28873,7 +28597,7 @@
         </p:nvSpPr>
         <p:spPr>
           <a:xfrm>
-            <a:off x="2221992" y="2258568"/>
+            <a:off x="2938272" y="2258568"/>
             <a:ext cx="1828800" cy="292608"/>
           </a:xfrm>
           <a:prstGeom prst="rect">
@@ -28892,13 +28616,13 @@
             <a:r>
               <a:rPr lang="en-US" sz="1300" b="1" dirty="0">
                 <a:solidFill>
-                  <a:srgbClr val="4C1D95"/>
+                  <a:srgbClr val="0F766E"/>
                 </a:solidFill>
                 <a:latin typeface="Trebuchet MS" pitchFamily="34" charset="0"/>
                 <a:ea typeface="Trebuchet MS" pitchFamily="34" charset="-122"/>
                 <a:cs typeface="Trebuchet MS" pitchFamily="34" charset="-120"/>
               </a:rPr>
-              <a:t>re</a:t>
+              <a:t>start</a:t>
             </a:r>
             <a:endParaRPr lang="en-US" sz="1300" dirty="0"/>
           </a:p>
@@ -28912,7 +28636,7 @@
         </p:nvSpPr>
         <p:spPr>
           <a:xfrm>
-            <a:off x="2221992" y="2569464"/>
+            <a:off x="2938272" y="2569464"/>
             <a:ext cx="1828800" cy="201168"/>
           </a:xfrm>
           <a:prstGeom prst="rect">
@@ -28937,7 +28661,7 @@
                 <a:ea typeface="Calibri" pitchFamily="34" charset="-122"/>
                 <a:cs typeface="Calibri" pitchFamily="34" charset="-120"/>
               </a:rPr>
-              <a:t>again</a:t>
+              <a:t>begin</a:t>
             </a:r>
             <a:endParaRPr lang="en-US" sz="850" dirty="0"/>
           </a:p>
@@ -28951,7 +28675,7 @@
         </p:nvSpPr>
         <p:spPr>
           <a:xfrm>
-            <a:off x="4370832" y="2258568"/>
+            <a:off x="5803392" y="2258568"/>
             <a:ext cx="1828800" cy="292608"/>
           </a:xfrm>
           <a:prstGeom prst="rect">
@@ -28960,11 +28684,11 @@
             </a:avLst>
           </a:prstGeom>
           <a:solidFill>
-            <a:srgbClr val="CCFBF1"/>
+            <a:srgbClr val="FCE7F3"/>
           </a:solidFill>
           <a:ln w="19050">
             <a:solidFill>
-              <a:srgbClr val="0D9488"/>
+              <a:srgbClr val="DB2777"/>
             </a:solidFill>
             <a:prstDash val="solid"/>
           </a:ln>
@@ -28985,7 +28709,7 @@
         </p:nvSpPr>
         <p:spPr>
           <a:xfrm>
-            <a:off x="4370832" y="2258568"/>
+            <a:off x="5803392" y="2258568"/>
             <a:ext cx="1828800" cy="292608"/>
           </a:xfrm>
           <a:prstGeom prst="rect">
@@ -29004,13 +28728,13 @@
             <a:r>
               <a:rPr lang="en-US" sz="1300" b="1" dirty="0">
                 <a:solidFill>
-                  <a:srgbClr val="0F766E"/>
+                  <a:srgbClr val="9D174D"/>
                 </a:solidFill>
                 <a:latin typeface="Trebuchet MS" pitchFamily="34" charset="0"/>
                 <a:ea typeface="Trebuchet MS" pitchFamily="34" charset="-122"/>
                 <a:cs typeface="Trebuchet MS" pitchFamily="34" charset="-120"/>
               </a:rPr>
-              <a:t>start</a:t>
+              <a:t>ed</a:t>
             </a:r>
             <a:endParaRPr lang="en-US" sz="1300" dirty="0"/>
           </a:p>
@@ -29024,7 +28748,7 @@
         </p:nvSpPr>
         <p:spPr>
           <a:xfrm>
-            <a:off x="4370832" y="2569464"/>
+            <a:off x="5803392" y="2569464"/>
             <a:ext cx="1828800" cy="201168"/>
           </a:xfrm>
           <a:prstGeom prst="rect">
@@ -29049,7 +28773,7 @@
                 <a:ea typeface="Calibri" pitchFamily="34" charset="-122"/>
                 <a:cs typeface="Calibri" pitchFamily="34" charset="-120"/>
               </a:rPr>
-              <a:t>to begin</a:t>
+              <a:t>happened in the past</a:t>
             </a:r>
             <a:endParaRPr lang="en-US" sz="850" dirty="0"/>
           </a:p>
@@ -29063,30 +28787,23 @@
         </p:nvSpPr>
         <p:spPr>
           <a:xfrm>
-            <a:off x="6519672" y="2258568"/>
-            <a:ext cx="1828800" cy="292608"/>
+            <a:off x="365760" y="3273552"/>
+            <a:ext cx="1371600" cy="658368"/>
           </a:xfrm>
           <a:prstGeom prst="rect">
             <a:avLst>
-              <a:gd name="adj" fmla="val 25000"/>
+              <a:gd name="adj" fmla="val 8333"/>
             </a:avLst>
           </a:prstGeom>
           <a:solidFill>
-            <a:srgbClr val="FCE7F3"/>
-          </a:solidFill>
-          <a:ln w="19050">
-            <a:solidFill>
-              <a:srgbClr val="DB2777"/>
-            </a:solidFill>
-            <a:prstDash val="solid"/>
-          </a:ln>
-          <a:effectLst>
-            <a:outerShdw sx="100000" sy="100000" kx="0" ky="0" algn="bl" rotWithShape="0" blurRad="101600" dist="38100" dir="8100000">
-              <a:srgbClr val="000000">
-                <a:alpha val="12000"/>
-              </a:srgbClr>
-            </a:outerShdw>
-          </a:effectLst>
+            <a:srgbClr val="E2E8F0"/>
+          </a:solidFill>
+          <a:ln w="12700">
+            <a:solidFill>
+              <a:srgbClr val="E2E8F0"/>
+            </a:solidFill>
+            <a:prstDash val="solid"/>
+          </a:ln>
         </p:spPr>
       </p:sp>
       <p:sp>
@@ -29097,8 +28814,8 @@
         </p:nvSpPr>
         <p:spPr>
           <a:xfrm>
-            <a:off x="6519672" y="2258568"/>
-            <a:ext cx="1828800" cy="292608"/>
+            <a:off x="365760" y="3273552"/>
+            <a:ext cx="1371600" cy="658368"/>
           </a:xfrm>
           <a:prstGeom prst="rect">
             <a:avLst/>
@@ -29114,73 +28831,100 @@
               <a:buNone/>
             </a:pPr>
             <a:r>
-              <a:rPr lang="en-US" sz="1300" b="1" dirty="0">
-                <a:solidFill>
-                  <a:srgbClr val="9D174D"/>
+              <a:rPr lang="en-US" sz="1100" b="1" dirty="0">
+                <a:solidFill>
+                  <a:srgbClr val="475569"/>
                 </a:solidFill>
                 <a:latin typeface="Trebuchet MS" pitchFamily="34" charset="0"/>
                 <a:ea typeface="Trebuchet MS" pitchFamily="34" charset="-122"/>
                 <a:cs typeface="Trebuchet MS" pitchFamily="34" charset="-120"/>
               </a:rPr>
-              <a:t>ed</a:t>
-            </a:r>
-            <a:endParaRPr lang="en-US" sz="1300" dirty="0"/>
-          </a:p>
-        </p:txBody>
-      </p:sp>
-      <p:sp>
-        <p:nvSpPr>
-          <p:cNvPr id="24" name="Text 22"/>
-          <p:cNvSpPr/>
-          <p:nvPr/>
-        </p:nvSpPr>
-        <p:spPr>
-          <a:xfrm>
-            <a:off x="6519672" y="2569464"/>
-            <a:ext cx="1828800" cy="201168"/>
-          </a:xfrm>
-          <a:prstGeom prst="rect">
-            <a:avLst/>
-          </a:prstGeom>
-          <a:noFill/>
-          <a:ln/>
-        </p:spPr>
-        <p:txBody>
-          <a:bodyPr wrap="square" lIns="0" tIns="0" rIns="0" bIns="0" rtlCol="0" anchor="t"/>
-          <a:lstStyle/>
-          <a:p>
-            <a:pPr algn="ctr" indent="0" marL="0">
-              <a:buNone/>
-            </a:pPr>
-            <a:r>
-              <a:rPr lang="en-US" sz="850" dirty="0">
-                <a:solidFill>
-                  <a:srgbClr val="475569"/>
+              <a:t>Syllables</a:t>
+            </a:r>
+            <a:endParaRPr lang="en-US" sz="1100" dirty="0"/>
+          </a:p>
+        </p:txBody>
+      </p:sp>
+      <p:sp>
+        <p:nvSpPr>
+          <p:cNvPr id="24" name="Shape 22"/>
+          <p:cNvSpPr/>
+          <p:nvPr/>
+        </p:nvSpPr>
+        <p:spPr>
+          <a:xfrm>
+            <a:off x="1874520" y="3273552"/>
+            <a:ext cx="6903720" cy="658368"/>
+          </a:xfrm>
+          <a:prstGeom prst="rect">
+            <a:avLst>
+              <a:gd name="adj" fmla="val 8333"/>
+            </a:avLst>
+          </a:prstGeom>
+          <a:solidFill>
+            <a:srgbClr val="F8FAFC"/>
+          </a:solidFill>
+          <a:ln w="12700">
+            <a:solidFill>
+              <a:srgbClr val="E2E8F0"/>
+            </a:solidFill>
+            <a:prstDash val="dash"/>
+          </a:ln>
+        </p:spPr>
+      </p:sp>
+      <p:sp>
+        <p:nvSpPr>
+          <p:cNvPr id="25" name="Text 23"/>
+          <p:cNvSpPr/>
+          <p:nvPr/>
+        </p:nvSpPr>
+        <p:spPr>
+          <a:xfrm>
+            <a:off x="1874520" y="3273552"/>
+            <a:ext cx="6903720" cy="658368"/>
+          </a:xfrm>
+          <a:prstGeom prst="rect">
+            <a:avLst/>
+          </a:prstGeom>
+          <a:noFill/>
+          <a:ln/>
+        </p:spPr>
+        <p:txBody>
+          <a:bodyPr wrap="square" rtlCol="0" anchor="ctr"/>
+          <a:lstStyle/>
+          <a:p>
+            <a:pPr algn="ctr" indent="0" marL="0">
+              <a:buNone/>
+            </a:pPr>
+            <a:r>
+              <a:rPr lang="en-US" sz="1100" i="1" dirty="0">
+                <a:solidFill>
+                  <a:srgbClr val="CBD5E1"/>
                 </a:solidFill>
                 <a:latin typeface="Calibri" pitchFamily="34" charset="0"/>
                 <a:ea typeface="Calibri" pitchFamily="34" charset="-122"/>
                 <a:cs typeface="Calibri" pitchFamily="34" charset="-120"/>
               </a:rPr>
-              <a:t>happened in the past</a:t>
-            </a:r>
-            <a:endParaRPr lang="en-US" sz="850" dirty="0"/>
-          </a:p>
-        </p:txBody>
-      </p:sp>
-      <p:sp>
-        <p:nvSpPr>
-          <p:cNvPr id="25" name="Shape 23"/>
-          <p:cNvSpPr/>
-          <p:nvPr/>
-        </p:nvSpPr>
-        <p:spPr>
-          <a:xfrm>
-            <a:off x="365760" y="3273552"/>
-            <a:ext cx="1371600" cy="658368"/>
+              <a:t>Write here...</a:t>
+            </a:r>
+            <a:endParaRPr lang="en-US" sz="1100" dirty="0"/>
+          </a:p>
+        </p:txBody>
+      </p:sp>
+      <p:sp>
+        <p:nvSpPr>
+          <p:cNvPr id="26" name="Shape 24"/>
+          <p:cNvSpPr/>
+          <p:nvPr/>
+        </p:nvSpPr>
+        <p:spPr>
+          <a:xfrm>
+            <a:off x="365760" y="4096512"/>
+            <a:ext cx="1371600" cy="804672"/>
           </a:xfrm>
           <a:prstGeom prst="rect">
             <a:avLst>
-              <a:gd name="adj" fmla="val 8333"/>
+              <a:gd name="adj" fmla="val 6818"/>
             </a:avLst>
           </a:prstGeom>
           <a:solidFill>
@@ -29196,14 +28940,14 @@
       </p:sp>
       <p:sp>
         <p:nvSpPr>
-          <p:cNvPr id="26" name="Text 24"/>
-          <p:cNvSpPr/>
-          <p:nvPr/>
-        </p:nvSpPr>
-        <p:spPr>
-          <a:xfrm>
-            <a:off x="365760" y="3273552"/>
-            <a:ext cx="1371600" cy="658368"/>
+          <p:cNvPr id="27" name="Text 25"/>
+          <p:cNvSpPr/>
+          <p:nvPr/>
+        </p:nvSpPr>
+        <p:spPr>
+          <a:xfrm>
+            <a:off x="365760" y="4096512"/>
+            <a:ext cx="1371600" cy="804672"/>
           </a:xfrm>
           <a:prstGeom prst="rect">
             <a:avLst/>
@@ -29227,7 +28971,7 @@
                 <a:ea typeface="Trebuchet MS" pitchFamily="34" charset="-122"/>
                 <a:cs typeface="Trebuchet MS" pitchFamily="34" charset="-120"/>
               </a:rPr>
-              <a:t>Syllables</a:t>
+              <a:t>Phonemes</a:t>
             </a:r>
             <a:endParaRPr lang="en-US" sz="1100" dirty="0"/>
           </a:p>
@@ -29235,80 +28979,14 @@
       </p:sp>
       <p:sp>
         <p:nvSpPr>
-          <p:cNvPr id="27" name="Shape 25"/>
-          <p:cNvSpPr/>
-          <p:nvPr/>
-        </p:nvSpPr>
-        <p:spPr>
-          <a:xfrm>
-            <a:off x="1874520" y="3273552"/>
-            <a:ext cx="6903720" cy="658368"/>
-          </a:xfrm>
-          <a:prstGeom prst="rect">
-            <a:avLst>
-              <a:gd name="adj" fmla="val 8333"/>
-            </a:avLst>
-          </a:prstGeom>
-          <a:solidFill>
-            <a:srgbClr val="F8FAFC"/>
-          </a:solidFill>
-          <a:ln w="12700">
-            <a:solidFill>
-              <a:srgbClr val="E2E8F0"/>
-            </a:solidFill>
-            <a:prstDash val="dash"/>
-          </a:ln>
-        </p:spPr>
-      </p:sp>
-      <p:sp>
-        <p:nvSpPr>
-          <p:cNvPr id="28" name="Text 26"/>
-          <p:cNvSpPr/>
-          <p:nvPr/>
-        </p:nvSpPr>
-        <p:spPr>
-          <a:xfrm>
-            <a:off x="1874520" y="3273552"/>
-            <a:ext cx="6903720" cy="658368"/>
-          </a:xfrm>
-          <a:prstGeom prst="rect">
-            <a:avLst/>
-          </a:prstGeom>
-          <a:noFill/>
-          <a:ln/>
-        </p:spPr>
-        <p:txBody>
-          <a:bodyPr wrap="square" rtlCol="0" anchor="ctr"/>
-          <a:lstStyle/>
-          <a:p>
-            <a:pPr algn="ctr" indent="0" marL="0">
-              <a:buNone/>
-            </a:pPr>
-            <a:r>
-              <a:rPr lang="en-US" sz="1100" i="1" dirty="0">
-                <a:solidFill>
-                  <a:srgbClr val="CBD5E1"/>
-                </a:solidFill>
-                <a:latin typeface="Calibri" pitchFamily="34" charset="0"/>
-                <a:ea typeface="Calibri" pitchFamily="34" charset="-122"/>
-                <a:cs typeface="Calibri" pitchFamily="34" charset="-120"/>
-              </a:rPr>
-              <a:t>Write here...</a:t>
-            </a:r>
-            <a:endParaRPr lang="en-US" sz="1100" dirty="0"/>
-          </a:p>
-        </p:txBody>
-      </p:sp>
-      <p:sp>
-        <p:nvSpPr>
-          <p:cNvPr id="29" name="Shape 27"/>
-          <p:cNvSpPr/>
-          <p:nvPr/>
-        </p:nvSpPr>
-        <p:spPr>
-          <a:xfrm>
-            <a:off x="365760" y="4096512"/>
-            <a:ext cx="1371600" cy="804672"/>
+          <p:cNvPr id="28" name="Shape 26"/>
+          <p:cNvSpPr/>
+          <p:nvPr/>
+        </p:nvSpPr>
+        <p:spPr>
+          <a:xfrm>
+            <a:off x="1874520" y="4096512"/>
+            <a:ext cx="6903720" cy="804672"/>
           </a:xfrm>
           <a:prstGeom prst="rect">
             <a:avLst>
@@ -29316,85 +28994,19 @@
             </a:avLst>
           </a:prstGeom>
           <a:solidFill>
-            <a:srgbClr val="E2E8F0"/>
+            <a:srgbClr val="F8FAFC"/>
           </a:solidFill>
           <a:ln w="12700">
             <a:solidFill>
               <a:srgbClr val="E2E8F0"/>
             </a:solidFill>
-            <a:prstDash val="solid"/>
-          </a:ln>
-        </p:spPr>
-      </p:sp>
-      <p:sp>
-        <p:nvSpPr>
-          <p:cNvPr id="30" name="Text 28"/>
-          <p:cNvSpPr/>
-          <p:nvPr/>
-        </p:nvSpPr>
-        <p:spPr>
-          <a:xfrm>
-            <a:off x="365760" y="4096512"/>
-            <a:ext cx="1371600" cy="804672"/>
-          </a:xfrm>
-          <a:prstGeom prst="rect">
-            <a:avLst/>
-          </a:prstGeom>
-          <a:noFill/>
-          <a:ln/>
-        </p:spPr>
-        <p:txBody>
-          <a:bodyPr wrap="square" lIns="0" tIns="0" rIns="0" bIns="0" rtlCol="0" anchor="ctr"/>
-          <a:lstStyle/>
-          <a:p>
-            <a:pPr algn="ctr" indent="0" marL="0">
-              <a:buNone/>
-            </a:pPr>
-            <a:r>
-              <a:rPr lang="en-US" sz="1100" b="1" dirty="0">
-                <a:solidFill>
-                  <a:srgbClr val="475569"/>
-                </a:solidFill>
-                <a:latin typeface="Trebuchet MS" pitchFamily="34" charset="0"/>
-                <a:ea typeface="Trebuchet MS" pitchFamily="34" charset="-122"/>
-                <a:cs typeface="Trebuchet MS" pitchFamily="34" charset="-120"/>
-              </a:rPr>
-              <a:t>Phonemes</a:t>
-            </a:r>
-            <a:endParaRPr lang="en-US" sz="1100" dirty="0"/>
-          </a:p>
-        </p:txBody>
-      </p:sp>
-      <p:sp>
-        <p:nvSpPr>
-          <p:cNvPr id="31" name="Shape 29"/>
-          <p:cNvSpPr/>
-          <p:nvPr/>
-        </p:nvSpPr>
-        <p:spPr>
-          <a:xfrm>
-            <a:off x="1874520" y="4096512"/>
-            <a:ext cx="6903720" cy="804672"/>
-          </a:xfrm>
-          <a:prstGeom prst="rect">
-            <a:avLst>
-              <a:gd name="adj" fmla="val 6818"/>
-            </a:avLst>
-          </a:prstGeom>
-          <a:solidFill>
-            <a:srgbClr val="F8FAFC"/>
-          </a:solidFill>
-          <a:ln w="12700">
-            <a:solidFill>
-              <a:srgbClr val="E2E8F0"/>
-            </a:solidFill>
             <a:prstDash val="dash"/>
           </a:ln>
         </p:spPr>
       </p:sp>
       <p:sp>
         <p:nvSpPr>
-          <p:cNvPr id="32" name="Text 30"/>
+          <p:cNvPr id="29" name="Text 27"/>
           <p:cNvSpPr/>
           <p:nvPr/>
         </p:nvSpPr>
@@ -29717,7 +29329,7 @@
                 <a:ea typeface="Calibri" pitchFamily="34" charset="-122"/>
                 <a:cs typeface="Calibri" pitchFamily="34" charset="-120"/>
               </a:rPr>
-              <a:t>Word Labs  •  wordlabs.app  •  Root: 'start' = begin, move suddenly, jump</a:t>
+              <a:t>Word Labs  •  wordlabs.app  •  Root: 'start' = begin, move suddenly, set going</a:t>
             </a:r>
             <a:endParaRPr lang="en-US" sz="800" dirty="0"/>
           </a:p>
@@ -29856,7 +29468,7 @@
                 <a:ea typeface="Trebuchet MS" pitchFamily="34" charset="-122"/>
                 <a:cs typeface="Trebuchet MS" pitchFamily="34" charset="-120"/>
               </a:rPr>
-              <a:t>restarted</a:t>
+              <a:t>started</a:t>
             </a:r>
             <a:endParaRPr lang="en-US" sz="2800" dirty="0"/>
           </a:p>
@@ -29936,7 +29548,7 @@
         </p:nvSpPr>
         <p:spPr>
           <a:xfrm>
-            <a:off x="2221992" y="2258568"/>
+            <a:off x="2938272" y="2258568"/>
             <a:ext cx="1828800" cy="292608"/>
           </a:xfrm>
           <a:prstGeom prst="rect">
@@ -29945,11 +29557,11 @@
             </a:avLst>
           </a:prstGeom>
           <a:solidFill>
-            <a:srgbClr val="DDD6FE"/>
+            <a:srgbClr val="CCFBF1"/>
           </a:solidFill>
           <a:ln w="19050">
             <a:solidFill>
-              <a:srgbClr val="7C3AED"/>
+              <a:srgbClr val="0D9488"/>
             </a:solidFill>
             <a:prstDash val="solid"/>
           </a:ln>
@@ -29970,7 +29582,7 @@
         </p:nvSpPr>
         <p:spPr>
           <a:xfrm>
-            <a:off x="2221992" y="2258568"/>
+            <a:off x="2938272" y="2258568"/>
             <a:ext cx="1828800" cy="292608"/>
           </a:xfrm>
           <a:prstGeom prst="rect">
@@ -29989,13 +29601,13 @@
             <a:r>
               <a:rPr lang="en-US" sz="1300" b="1" dirty="0">
                 <a:solidFill>
-                  <a:srgbClr val="4C1D95"/>
+                  <a:srgbClr val="0F766E"/>
                 </a:solidFill>
                 <a:latin typeface="Trebuchet MS" pitchFamily="34" charset="0"/>
                 <a:ea typeface="Trebuchet MS" pitchFamily="34" charset="-122"/>
                 <a:cs typeface="Trebuchet MS" pitchFamily="34" charset="-120"/>
               </a:rPr>
-              <a:t>re</a:t>
+              <a:t>start</a:t>
             </a:r>
             <a:endParaRPr lang="en-US" sz="1300" dirty="0"/>
           </a:p>
@@ -30009,7 +29621,7 @@
         </p:nvSpPr>
         <p:spPr>
           <a:xfrm>
-            <a:off x="2221992" y="2569464"/>
+            <a:off x="2938272" y="2569464"/>
             <a:ext cx="1828800" cy="201168"/>
           </a:xfrm>
           <a:prstGeom prst="rect">
@@ -30034,7 +29646,7 @@
                 <a:ea typeface="Calibri" pitchFamily="34" charset="-122"/>
                 <a:cs typeface="Calibri" pitchFamily="34" charset="-120"/>
               </a:rPr>
-              <a:t>again</a:t>
+              <a:t>begin</a:t>
             </a:r>
             <a:endParaRPr lang="en-US" sz="850" dirty="0"/>
           </a:p>
@@ -30048,7 +29660,7 @@
         </p:nvSpPr>
         <p:spPr>
           <a:xfrm>
-            <a:off x="4370832" y="2258568"/>
+            <a:off x="5803392" y="2258568"/>
             <a:ext cx="1828800" cy="292608"/>
           </a:xfrm>
           <a:prstGeom prst="rect">
@@ -30057,11 +29669,11 @@
             </a:avLst>
           </a:prstGeom>
           <a:solidFill>
-            <a:srgbClr val="CCFBF1"/>
+            <a:srgbClr val="FCE7F3"/>
           </a:solidFill>
           <a:ln w="19050">
             <a:solidFill>
-              <a:srgbClr val="0D9488"/>
+              <a:srgbClr val="DB2777"/>
             </a:solidFill>
             <a:prstDash val="solid"/>
           </a:ln>
@@ -30082,7 +29694,7 @@
         </p:nvSpPr>
         <p:spPr>
           <a:xfrm>
-            <a:off x="4370832" y="2258568"/>
+            <a:off x="5803392" y="2258568"/>
             <a:ext cx="1828800" cy="292608"/>
           </a:xfrm>
           <a:prstGeom prst="rect">
@@ -30101,13 +29713,13 @@
             <a:r>
               <a:rPr lang="en-US" sz="1300" b="1" dirty="0">
                 <a:solidFill>
-                  <a:srgbClr val="0F766E"/>
+                  <a:srgbClr val="9D174D"/>
                 </a:solidFill>
                 <a:latin typeface="Trebuchet MS" pitchFamily="34" charset="0"/>
                 <a:ea typeface="Trebuchet MS" pitchFamily="34" charset="-122"/>
                 <a:cs typeface="Trebuchet MS" pitchFamily="34" charset="-120"/>
               </a:rPr>
-              <a:t>start</a:t>
+              <a:t>ed</a:t>
             </a:r>
             <a:endParaRPr lang="en-US" sz="1300" dirty="0"/>
           </a:p>
@@ -30121,7 +29733,7 @@
         </p:nvSpPr>
         <p:spPr>
           <a:xfrm>
-            <a:off x="4370832" y="2569464"/>
+            <a:off x="5803392" y="2569464"/>
             <a:ext cx="1828800" cy="201168"/>
           </a:xfrm>
           <a:prstGeom prst="rect">
@@ -30146,7 +29758,7 @@
                 <a:ea typeface="Calibri" pitchFamily="34" charset="-122"/>
                 <a:cs typeface="Calibri" pitchFamily="34" charset="-120"/>
               </a:rPr>
-              <a:t>to begin</a:t>
+              <a:t>happened in the past</a:t>
             </a:r>
             <a:endParaRPr lang="en-US" sz="850" dirty="0"/>
           </a:p>
@@ -30160,30 +29772,23 @@
         </p:nvSpPr>
         <p:spPr>
           <a:xfrm>
-            <a:off x="6519672" y="2258568"/>
-            <a:ext cx="1828800" cy="292608"/>
+            <a:off x="365760" y="3273552"/>
+            <a:ext cx="1371600" cy="658368"/>
           </a:xfrm>
           <a:prstGeom prst="rect">
             <a:avLst>
-              <a:gd name="adj" fmla="val 25000"/>
+              <a:gd name="adj" fmla="val 8333"/>
             </a:avLst>
           </a:prstGeom>
           <a:solidFill>
-            <a:srgbClr val="FCE7F3"/>
-          </a:solidFill>
-          <a:ln w="19050">
-            <a:solidFill>
-              <a:srgbClr val="DB2777"/>
-            </a:solidFill>
-            <a:prstDash val="solid"/>
-          </a:ln>
-          <a:effectLst>
-            <a:outerShdw sx="100000" sy="100000" kx="0" ky="0" algn="bl" rotWithShape="0" blurRad="101600" dist="38100" dir="8100000">
-              <a:srgbClr val="000000">
-                <a:alpha val="12000"/>
-              </a:srgbClr>
-            </a:outerShdw>
-          </a:effectLst>
+            <a:srgbClr val="E2E8F0"/>
+          </a:solidFill>
+          <a:ln w="12700">
+            <a:solidFill>
+              <a:srgbClr val="E2E8F0"/>
+            </a:solidFill>
+            <a:prstDash val="solid"/>
+          </a:ln>
         </p:spPr>
       </p:sp>
       <p:sp>
@@ -30194,8 +29799,8 @@
         </p:nvSpPr>
         <p:spPr>
           <a:xfrm>
-            <a:off x="6519672" y="2258568"/>
-            <a:ext cx="1828800" cy="292608"/>
+            <a:off x="365760" y="3273552"/>
+            <a:ext cx="1371600" cy="658368"/>
           </a:xfrm>
           <a:prstGeom prst="rect">
             <a:avLst/>
@@ -30211,69 +29816,30 @@
               <a:buNone/>
             </a:pPr>
             <a:r>
-              <a:rPr lang="en-US" sz="1300" b="1" dirty="0">
-                <a:solidFill>
-                  <a:srgbClr val="9D174D"/>
+              <a:rPr lang="en-US" sz="1100" b="1" dirty="0">
+                <a:solidFill>
+                  <a:srgbClr val="475569"/>
                 </a:solidFill>
                 <a:latin typeface="Trebuchet MS" pitchFamily="34" charset="0"/>
                 <a:ea typeface="Trebuchet MS" pitchFamily="34" charset="-122"/>
                 <a:cs typeface="Trebuchet MS" pitchFamily="34" charset="-120"/>
               </a:rPr>
-              <a:t>ed</a:t>
-            </a:r>
-            <a:endParaRPr lang="en-US" sz="1300" dirty="0"/>
-          </a:p>
-        </p:txBody>
-      </p:sp>
-      <p:sp>
-        <p:nvSpPr>
-          <p:cNvPr id="24" name="Text 22"/>
-          <p:cNvSpPr/>
-          <p:nvPr/>
-        </p:nvSpPr>
-        <p:spPr>
-          <a:xfrm>
-            <a:off x="6519672" y="2569464"/>
-            <a:ext cx="1828800" cy="201168"/>
-          </a:xfrm>
-          <a:prstGeom prst="rect">
-            <a:avLst/>
-          </a:prstGeom>
-          <a:noFill/>
-          <a:ln/>
-        </p:spPr>
-        <p:txBody>
-          <a:bodyPr wrap="square" lIns="0" tIns="0" rIns="0" bIns="0" rtlCol="0" anchor="t"/>
-          <a:lstStyle/>
-          <a:p>
-            <a:pPr algn="ctr" indent="0" marL="0">
-              <a:buNone/>
-            </a:pPr>
-            <a:r>
-              <a:rPr lang="en-US" sz="850" dirty="0">
-                <a:solidFill>
-                  <a:srgbClr val="475569"/>
-                </a:solidFill>
-                <a:latin typeface="Calibri" pitchFamily="34" charset="0"/>
-                <a:ea typeface="Calibri" pitchFamily="34" charset="-122"/>
-                <a:cs typeface="Calibri" pitchFamily="34" charset="-120"/>
-              </a:rPr>
-              <a:t>happened in the past</a:t>
-            </a:r>
-            <a:endParaRPr lang="en-US" sz="850" dirty="0"/>
-          </a:p>
-        </p:txBody>
-      </p:sp>
-      <p:sp>
-        <p:nvSpPr>
-          <p:cNvPr id="25" name="Shape 23"/>
-          <p:cNvSpPr/>
-          <p:nvPr/>
-        </p:nvSpPr>
-        <p:spPr>
-          <a:xfrm>
-            <a:off x="365760" y="3273552"/>
-            <a:ext cx="1371600" cy="658368"/>
+              <a:t>Syllables</a:t>
+            </a:r>
+            <a:endParaRPr lang="en-US" sz="1100" dirty="0"/>
+          </a:p>
+        </p:txBody>
+      </p:sp>
+      <p:sp>
+        <p:nvSpPr>
+          <p:cNvPr id="24" name="Shape 22"/>
+          <p:cNvSpPr/>
+          <p:nvPr/>
+        </p:nvSpPr>
+        <p:spPr>
+          <a:xfrm>
+            <a:off x="1874520" y="3273552"/>
+            <a:ext cx="6903720" cy="658368"/>
           </a:xfrm>
           <a:prstGeom prst="rect">
             <a:avLst>
@@ -30281,11 +29847,38 @@
             </a:avLst>
           </a:prstGeom>
           <a:solidFill>
-            <a:srgbClr val="E2E8F0"/>
-          </a:solidFill>
-          <a:ln w="12700">
-            <a:solidFill>
-              <a:srgbClr val="E2E8F0"/>
+            <a:srgbClr val="CCFBF1"/>
+          </a:solidFill>
+          <a:ln w="12700">
+            <a:solidFill>
+              <a:srgbClr val="0D9488"/>
+            </a:solidFill>
+            <a:prstDash val="solid"/>
+          </a:ln>
+        </p:spPr>
+      </p:sp>
+      <p:sp>
+        <p:nvSpPr>
+          <p:cNvPr id="25" name="Shape 23"/>
+          <p:cNvSpPr/>
+          <p:nvPr/>
+        </p:nvSpPr>
+        <p:spPr>
+          <a:xfrm>
+            <a:off x="2999232" y="3364992"/>
+            <a:ext cx="1645920" cy="475488"/>
+          </a:xfrm>
+          <a:prstGeom prst="rect">
+            <a:avLst>
+              <a:gd name="adj" fmla="val 9615"/>
+            </a:avLst>
+          </a:prstGeom>
+          <a:solidFill>
+            <a:srgbClr val="FFFFFF"/>
+          </a:solidFill>
+          <a:ln w="12700">
+            <a:solidFill>
+              <a:srgbClr val="0D9488"/>
             </a:solidFill>
             <a:prstDash val="solid"/>
           </a:ln>
@@ -30299,8 +29892,8 @@
         </p:nvSpPr>
         <p:spPr>
           <a:xfrm>
-            <a:off x="365760" y="3273552"/>
-            <a:ext cx="1371600" cy="658368"/>
+            <a:off x="2999232" y="3364992"/>
+            <a:ext cx="1645920" cy="475488"/>
           </a:xfrm>
           <a:prstGeom prst="rect">
             <a:avLst/>
@@ -30316,46 +29909,58 @@
               <a:buNone/>
             </a:pPr>
             <a:r>
-              <a:rPr lang="en-US" sz="1100" b="1" dirty="0">
-                <a:solidFill>
-                  <a:srgbClr val="475569"/>
+              <a:rPr lang="en-US" sz="1400" b="1" dirty="0">
+                <a:solidFill>
+                  <a:srgbClr val="0D9488"/>
                 </a:solidFill>
                 <a:latin typeface="Trebuchet MS" pitchFamily="34" charset="0"/>
                 <a:ea typeface="Trebuchet MS" pitchFamily="34" charset="-122"/>
                 <a:cs typeface="Trebuchet MS" pitchFamily="34" charset="-120"/>
               </a:rPr>
-              <a:t>Syllables</a:t>
-            </a:r>
-            <a:endParaRPr lang="en-US" sz="1100" dirty="0"/>
-          </a:p>
-        </p:txBody>
-      </p:sp>
-      <p:sp>
-        <p:nvSpPr>
-          <p:cNvPr id="27" name="Shape 25"/>
-          <p:cNvSpPr/>
-          <p:nvPr/>
-        </p:nvSpPr>
-        <p:spPr>
-          <a:xfrm>
-            <a:off x="1874520" y="3273552"/>
-            <a:ext cx="6903720" cy="658368"/>
-          </a:xfrm>
-          <a:prstGeom prst="rect">
-            <a:avLst>
-              <a:gd name="adj" fmla="val 8333"/>
-            </a:avLst>
-          </a:prstGeom>
-          <a:solidFill>
-            <a:srgbClr val="CCFBF1"/>
-          </a:solidFill>
-          <a:ln w="12700">
-            <a:solidFill>
-              <a:srgbClr val="0D9488"/>
-            </a:solidFill>
-            <a:prstDash val="solid"/>
-          </a:ln>
-        </p:spPr>
+              <a:t>star</a:t>
+            </a:r>
+            <a:endParaRPr lang="en-US" sz="1400" dirty="0"/>
+          </a:p>
+        </p:txBody>
+      </p:sp>
+      <p:sp>
+        <p:nvSpPr>
+          <p:cNvPr id="27" name="Text 25"/>
+          <p:cNvSpPr/>
+          <p:nvPr/>
+        </p:nvSpPr>
+        <p:spPr>
+          <a:xfrm>
+            <a:off x="4645152" y="3364992"/>
+            <a:ext cx="1097280" cy="475488"/>
+          </a:xfrm>
+          <a:prstGeom prst="rect">
+            <a:avLst/>
+          </a:prstGeom>
+          <a:noFill/>
+          <a:ln/>
+        </p:spPr>
+        <p:txBody>
+          <a:bodyPr wrap="square" lIns="0" tIns="0" rIns="0" bIns="0" rtlCol="0" anchor="ctr"/>
+          <a:lstStyle/>
+          <a:p>
+            <a:pPr algn="ctr" indent="0" marL="0">
+              <a:buNone/>
+            </a:pPr>
+            <a:r>
+              <a:rPr lang="en-US" sz="1600" b="1" dirty="0">
+                <a:solidFill>
+                  <a:srgbClr val="0D9488"/>
+                </a:solidFill>
+                <a:latin typeface="Trebuchet MS" pitchFamily="34" charset="0"/>
+                <a:ea typeface="Trebuchet MS" pitchFamily="34" charset="-122"/>
+                <a:cs typeface="Trebuchet MS" pitchFamily="34" charset="-120"/>
+              </a:rPr>
+              <a:t>·</a:t>
+            </a:r>
+            <a:endParaRPr lang="en-US" sz="1600" dirty="0"/>
+          </a:p>
+        </p:txBody>
       </p:sp>
       <p:sp>
         <p:nvSpPr>
@@ -30365,7 +29970,7 @@
         </p:nvSpPr>
         <p:spPr>
           <a:xfrm>
-            <a:off x="2313432" y="3364992"/>
+            <a:off x="5742432" y="3364992"/>
             <a:ext cx="1645920" cy="475488"/>
           </a:xfrm>
           <a:prstGeom prst="rect">
@@ -30392,7 +29997,7 @@
         </p:nvSpPr>
         <p:spPr>
           <a:xfrm>
-            <a:off x="2313432" y="3364992"/>
+            <a:off x="5742432" y="3364992"/>
             <a:ext cx="1645920" cy="475488"/>
           </a:xfrm>
           <a:prstGeom prst="rect">
@@ -30417,7 +30022,7 @@
                 <a:ea typeface="Trebuchet MS" pitchFamily="34" charset="-122"/>
                 <a:cs typeface="Trebuchet MS" pitchFamily="34" charset="-120"/>
               </a:rPr>
-              <a:t>re</a:t>
+              <a:t>ted</a:t>
             </a:r>
             <a:endParaRPr lang="en-US" sz="1400" dirty="0"/>
           </a:p>
@@ -30425,14 +30030,41 @@
       </p:sp>
       <p:sp>
         <p:nvSpPr>
-          <p:cNvPr id="30" name="Text 28"/>
-          <p:cNvSpPr/>
-          <p:nvPr/>
-        </p:nvSpPr>
-        <p:spPr>
-          <a:xfrm>
-            <a:off x="3959352" y="3364992"/>
-            <a:ext cx="411480" cy="475488"/>
+          <p:cNvPr id="30" name="Shape 28"/>
+          <p:cNvSpPr/>
+          <p:nvPr/>
+        </p:nvSpPr>
+        <p:spPr>
+          <a:xfrm>
+            <a:off x="365760" y="4096512"/>
+            <a:ext cx="1371600" cy="804672"/>
+          </a:xfrm>
+          <a:prstGeom prst="rect">
+            <a:avLst>
+              <a:gd name="adj" fmla="val 6818"/>
+            </a:avLst>
+          </a:prstGeom>
+          <a:solidFill>
+            <a:srgbClr val="E2E8F0"/>
+          </a:solidFill>
+          <a:ln w="12700">
+            <a:solidFill>
+              <a:srgbClr val="E2E8F0"/>
+            </a:solidFill>
+            <a:prstDash val="solid"/>
+          </a:ln>
+        </p:spPr>
+      </p:sp>
+      <p:sp>
+        <p:nvSpPr>
+          <p:cNvPr id="31" name="Text 29"/>
+          <p:cNvSpPr/>
+          <p:nvPr/>
+        </p:nvSpPr>
+        <p:spPr>
+          <a:xfrm>
+            <a:off x="365760" y="4096512"/>
+            <a:ext cx="1371600" cy="804672"/>
           </a:xfrm>
           <a:prstGeom prst="rect">
             <a:avLst/>
@@ -30448,201 +30080,30 @@
               <a:buNone/>
             </a:pPr>
             <a:r>
-              <a:rPr lang="en-US" sz="1600" b="1" dirty="0">
-                <a:solidFill>
-                  <a:srgbClr val="0D9488"/>
+              <a:rPr lang="en-US" sz="1100" b="1" dirty="0">
+                <a:solidFill>
+                  <a:srgbClr val="475569"/>
                 </a:solidFill>
                 <a:latin typeface="Trebuchet MS" pitchFamily="34" charset="0"/>
                 <a:ea typeface="Trebuchet MS" pitchFamily="34" charset="-122"/>
                 <a:cs typeface="Trebuchet MS" pitchFamily="34" charset="-120"/>
               </a:rPr>
-              <a:t>·</a:t>
-            </a:r>
-            <a:endParaRPr lang="en-US" sz="1600" dirty="0"/>
-          </a:p>
-        </p:txBody>
-      </p:sp>
-      <p:sp>
-        <p:nvSpPr>
-          <p:cNvPr id="31" name="Shape 29"/>
-          <p:cNvSpPr/>
-          <p:nvPr/>
-        </p:nvSpPr>
-        <p:spPr>
-          <a:xfrm>
-            <a:off x="4370832" y="3364992"/>
-            <a:ext cx="1645920" cy="475488"/>
-          </a:xfrm>
-          <a:prstGeom prst="rect">
-            <a:avLst>
-              <a:gd name="adj" fmla="val 9615"/>
-            </a:avLst>
-          </a:prstGeom>
-          <a:solidFill>
-            <a:srgbClr val="FFFFFF"/>
-          </a:solidFill>
-          <a:ln w="12700">
-            <a:solidFill>
-              <a:srgbClr val="0D9488"/>
-            </a:solidFill>
-            <a:prstDash val="solid"/>
-          </a:ln>
-        </p:spPr>
-      </p:sp>
-      <p:sp>
-        <p:nvSpPr>
-          <p:cNvPr id="32" name="Text 30"/>
-          <p:cNvSpPr/>
-          <p:nvPr/>
-        </p:nvSpPr>
-        <p:spPr>
-          <a:xfrm>
-            <a:off x="4370832" y="3364992"/>
-            <a:ext cx="1645920" cy="475488"/>
-          </a:xfrm>
-          <a:prstGeom prst="rect">
-            <a:avLst/>
-          </a:prstGeom>
-          <a:noFill/>
-          <a:ln/>
-        </p:spPr>
-        <p:txBody>
-          <a:bodyPr wrap="square" lIns="0" tIns="0" rIns="0" bIns="0" rtlCol="0" anchor="ctr"/>
-          <a:lstStyle/>
-          <a:p>
-            <a:pPr algn="ctr" indent="0" marL="0">
-              <a:buNone/>
-            </a:pPr>
-            <a:r>
-              <a:rPr lang="en-US" sz="1400" b="1" dirty="0">
-                <a:solidFill>
-                  <a:srgbClr val="0D9488"/>
-                </a:solidFill>
-                <a:latin typeface="Trebuchet MS" pitchFamily="34" charset="0"/>
-                <a:ea typeface="Trebuchet MS" pitchFamily="34" charset="-122"/>
-                <a:cs typeface="Trebuchet MS" pitchFamily="34" charset="-120"/>
-              </a:rPr>
-              <a:t>star</a:t>
-            </a:r>
-            <a:endParaRPr lang="en-US" sz="1400" dirty="0"/>
-          </a:p>
-        </p:txBody>
-      </p:sp>
-      <p:sp>
-        <p:nvSpPr>
-          <p:cNvPr id="33" name="Text 31"/>
-          <p:cNvSpPr/>
-          <p:nvPr/>
-        </p:nvSpPr>
-        <p:spPr>
-          <a:xfrm>
-            <a:off x="6016752" y="3364992"/>
-            <a:ext cx="411480" cy="475488"/>
-          </a:xfrm>
-          <a:prstGeom prst="rect">
-            <a:avLst/>
-          </a:prstGeom>
-          <a:noFill/>
-          <a:ln/>
-        </p:spPr>
-        <p:txBody>
-          <a:bodyPr wrap="square" lIns="0" tIns="0" rIns="0" bIns="0" rtlCol="0" anchor="ctr"/>
-          <a:lstStyle/>
-          <a:p>
-            <a:pPr algn="ctr" indent="0" marL="0">
-              <a:buNone/>
-            </a:pPr>
-            <a:r>
-              <a:rPr lang="en-US" sz="1600" b="1" dirty="0">
-                <a:solidFill>
-                  <a:srgbClr val="0D9488"/>
-                </a:solidFill>
-                <a:latin typeface="Trebuchet MS" pitchFamily="34" charset="0"/>
-                <a:ea typeface="Trebuchet MS" pitchFamily="34" charset="-122"/>
-                <a:cs typeface="Trebuchet MS" pitchFamily="34" charset="-120"/>
-              </a:rPr>
-              <a:t>·</a:t>
-            </a:r>
-            <a:endParaRPr lang="en-US" sz="1600" dirty="0"/>
-          </a:p>
-        </p:txBody>
-      </p:sp>
-      <p:sp>
-        <p:nvSpPr>
-          <p:cNvPr id="34" name="Shape 32"/>
-          <p:cNvSpPr/>
-          <p:nvPr/>
-        </p:nvSpPr>
-        <p:spPr>
-          <a:xfrm>
-            <a:off x="6428232" y="3364992"/>
-            <a:ext cx="1645920" cy="475488"/>
-          </a:xfrm>
-          <a:prstGeom prst="rect">
-            <a:avLst>
-              <a:gd name="adj" fmla="val 9615"/>
-            </a:avLst>
-          </a:prstGeom>
-          <a:solidFill>
-            <a:srgbClr val="FFFFFF"/>
-          </a:solidFill>
-          <a:ln w="12700">
-            <a:solidFill>
-              <a:srgbClr val="0D9488"/>
-            </a:solidFill>
-            <a:prstDash val="solid"/>
-          </a:ln>
-        </p:spPr>
-      </p:sp>
-      <p:sp>
-        <p:nvSpPr>
-          <p:cNvPr id="35" name="Text 33"/>
-          <p:cNvSpPr/>
-          <p:nvPr/>
-        </p:nvSpPr>
-        <p:spPr>
-          <a:xfrm>
-            <a:off x="6428232" y="3364992"/>
-            <a:ext cx="1645920" cy="475488"/>
-          </a:xfrm>
-          <a:prstGeom prst="rect">
-            <a:avLst/>
-          </a:prstGeom>
-          <a:noFill/>
-          <a:ln/>
-        </p:spPr>
-        <p:txBody>
-          <a:bodyPr wrap="square" lIns="0" tIns="0" rIns="0" bIns="0" rtlCol="0" anchor="ctr"/>
-          <a:lstStyle/>
-          <a:p>
-            <a:pPr algn="ctr" indent="0" marL="0">
-              <a:buNone/>
-            </a:pPr>
-            <a:r>
-              <a:rPr lang="en-US" sz="1400" b="1" dirty="0">
-                <a:solidFill>
-                  <a:srgbClr val="0D9488"/>
-                </a:solidFill>
-                <a:latin typeface="Trebuchet MS" pitchFamily="34" charset="0"/>
-                <a:ea typeface="Trebuchet MS" pitchFamily="34" charset="-122"/>
-                <a:cs typeface="Trebuchet MS" pitchFamily="34" charset="-120"/>
-              </a:rPr>
-              <a:t>ted</a:t>
-            </a:r>
-            <a:endParaRPr lang="en-US" sz="1400" dirty="0"/>
-          </a:p>
-        </p:txBody>
-      </p:sp>
-      <p:sp>
-        <p:nvSpPr>
-          <p:cNvPr id="36" name="Shape 34"/>
-          <p:cNvSpPr/>
-          <p:nvPr/>
-        </p:nvSpPr>
-        <p:spPr>
-          <a:xfrm>
-            <a:off x="365760" y="4096512"/>
-            <a:ext cx="1371600" cy="804672"/>
+              <a:t>Phonemes</a:t>
+            </a:r>
+            <a:endParaRPr lang="en-US" sz="1100" dirty="0"/>
+          </a:p>
+        </p:txBody>
+      </p:sp>
+      <p:sp>
+        <p:nvSpPr>
+          <p:cNvPr id="32" name="Shape 30"/>
+          <p:cNvSpPr/>
+          <p:nvPr/>
+        </p:nvSpPr>
+        <p:spPr>
+          <a:xfrm>
+            <a:off x="1874520" y="4096512"/>
+            <a:ext cx="6903720" cy="804672"/>
           </a:xfrm>
           <a:prstGeom prst="rect">
             <a:avLst>
@@ -30650,85 +30111,19 @@
             </a:avLst>
           </a:prstGeom>
           <a:solidFill>
-            <a:srgbClr val="E2E8F0"/>
+            <a:srgbClr val="F8FAFC"/>
           </a:solidFill>
           <a:ln w="12700">
             <a:solidFill>
               <a:srgbClr val="E2E8F0"/>
             </a:solidFill>
-            <a:prstDash val="solid"/>
-          </a:ln>
-        </p:spPr>
-      </p:sp>
-      <p:sp>
-        <p:nvSpPr>
-          <p:cNvPr id="37" name="Text 35"/>
-          <p:cNvSpPr/>
-          <p:nvPr/>
-        </p:nvSpPr>
-        <p:spPr>
-          <a:xfrm>
-            <a:off x="365760" y="4096512"/>
-            <a:ext cx="1371600" cy="804672"/>
-          </a:xfrm>
-          <a:prstGeom prst="rect">
-            <a:avLst/>
-          </a:prstGeom>
-          <a:noFill/>
-          <a:ln/>
-        </p:spPr>
-        <p:txBody>
-          <a:bodyPr wrap="square" lIns="0" tIns="0" rIns="0" bIns="0" rtlCol="0" anchor="ctr"/>
-          <a:lstStyle/>
-          <a:p>
-            <a:pPr algn="ctr" indent="0" marL="0">
-              <a:buNone/>
-            </a:pPr>
-            <a:r>
-              <a:rPr lang="en-US" sz="1100" b="1" dirty="0">
-                <a:solidFill>
-                  <a:srgbClr val="475569"/>
-                </a:solidFill>
-                <a:latin typeface="Trebuchet MS" pitchFamily="34" charset="0"/>
-                <a:ea typeface="Trebuchet MS" pitchFamily="34" charset="-122"/>
-                <a:cs typeface="Trebuchet MS" pitchFamily="34" charset="-120"/>
-              </a:rPr>
-              <a:t>Phonemes</a:t>
-            </a:r>
-            <a:endParaRPr lang="en-US" sz="1100" dirty="0"/>
-          </a:p>
-        </p:txBody>
-      </p:sp>
-      <p:sp>
-        <p:nvSpPr>
-          <p:cNvPr id="38" name="Shape 36"/>
-          <p:cNvSpPr/>
-          <p:nvPr/>
-        </p:nvSpPr>
-        <p:spPr>
-          <a:xfrm>
-            <a:off x="1874520" y="4096512"/>
-            <a:ext cx="6903720" cy="804672"/>
-          </a:xfrm>
-          <a:prstGeom prst="rect">
-            <a:avLst>
-              <a:gd name="adj" fmla="val 6818"/>
-            </a:avLst>
-          </a:prstGeom>
-          <a:solidFill>
-            <a:srgbClr val="F8FAFC"/>
-          </a:solidFill>
-          <a:ln w="12700">
-            <a:solidFill>
-              <a:srgbClr val="E2E8F0"/>
-            </a:solidFill>
             <a:prstDash val="dash"/>
           </a:ln>
         </p:spPr>
       </p:sp>
       <p:sp>
         <p:nvSpPr>
-          <p:cNvPr id="39" name="Text 37"/>
+          <p:cNvPr id="33" name="Text 31"/>
           <p:cNvSpPr/>
           <p:nvPr/>
         </p:nvSpPr>
@@ -31051,7 +30446,7 @@
                 <a:ea typeface="Calibri" pitchFamily="34" charset="-122"/>
                 <a:cs typeface="Calibri" pitchFamily="34" charset="-120"/>
               </a:rPr>
-              <a:t>Word Labs  •  wordlabs.app  •  Root: 'start' = begin, move suddenly, jump</a:t>
+              <a:t>Word Labs  •  wordlabs.app  •  Root: 'start' = begin, move suddenly, set going</a:t>
             </a:r>
             <a:endParaRPr lang="en-US" sz="800" dirty="0"/>
           </a:p>
@@ -31190,7 +30585,7 @@
                 <a:ea typeface="Trebuchet MS" pitchFamily="34" charset="-122"/>
                 <a:cs typeface="Trebuchet MS" pitchFamily="34" charset="-120"/>
               </a:rPr>
-              <a:t>restarted</a:t>
+              <a:t>started</a:t>
             </a:r>
             <a:endParaRPr lang="en-US" sz="2800" dirty="0"/>
           </a:p>
@@ -31270,7 +30665,7 @@
         </p:nvSpPr>
         <p:spPr>
           <a:xfrm>
-            <a:off x="2221992" y="2258568"/>
+            <a:off x="2938272" y="2258568"/>
             <a:ext cx="1828800" cy="292608"/>
           </a:xfrm>
           <a:prstGeom prst="rect">
@@ -31279,11 +30674,11 @@
             </a:avLst>
           </a:prstGeom>
           <a:solidFill>
-            <a:srgbClr val="DDD6FE"/>
+            <a:srgbClr val="CCFBF1"/>
           </a:solidFill>
           <a:ln w="19050">
             <a:solidFill>
-              <a:srgbClr val="7C3AED"/>
+              <a:srgbClr val="0D9488"/>
             </a:solidFill>
             <a:prstDash val="solid"/>
           </a:ln>
@@ -31304,7 +30699,7 @@
         </p:nvSpPr>
         <p:spPr>
           <a:xfrm>
-            <a:off x="2221992" y="2258568"/>
+            <a:off x="2938272" y="2258568"/>
             <a:ext cx="1828800" cy="292608"/>
           </a:xfrm>
           <a:prstGeom prst="rect">
@@ -31323,13 +30718,13 @@
             <a:r>
               <a:rPr lang="en-US" sz="1300" b="1" dirty="0">
                 <a:solidFill>
-                  <a:srgbClr val="4C1D95"/>
+                  <a:srgbClr val="0F766E"/>
                 </a:solidFill>
                 <a:latin typeface="Trebuchet MS" pitchFamily="34" charset="0"/>
                 <a:ea typeface="Trebuchet MS" pitchFamily="34" charset="-122"/>
                 <a:cs typeface="Trebuchet MS" pitchFamily="34" charset="-120"/>
               </a:rPr>
-              <a:t>re</a:t>
+              <a:t>start</a:t>
             </a:r>
             <a:endParaRPr lang="en-US" sz="1300" dirty="0"/>
           </a:p>
@@ -31343,7 +30738,7 @@
         </p:nvSpPr>
         <p:spPr>
           <a:xfrm>
-            <a:off x="2221992" y="2569464"/>
+            <a:off x="2938272" y="2569464"/>
             <a:ext cx="1828800" cy="201168"/>
           </a:xfrm>
           <a:prstGeom prst="rect">
@@ -31368,7 +30763,7 @@
                 <a:ea typeface="Calibri" pitchFamily="34" charset="-122"/>
                 <a:cs typeface="Calibri" pitchFamily="34" charset="-120"/>
               </a:rPr>
-              <a:t>again</a:t>
+              <a:t>begin</a:t>
             </a:r>
             <a:endParaRPr lang="en-US" sz="850" dirty="0"/>
           </a:p>
@@ -31382,7 +30777,7 @@
         </p:nvSpPr>
         <p:spPr>
           <a:xfrm>
-            <a:off x="4370832" y="2258568"/>
+            <a:off x="5803392" y="2258568"/>
             <a:ext cx="1828800" cy="292608"/>
           </a:xfrm>
           <a:prstGeom prst="rect">
@@ -31391,11 +30786,11 @@
             </a:avLst>
           </a:prstGeom>
           <a:solidFill>
-            <a:srgbClr val="CCFBF1"/>
+            <a:srgbClr val="FCE7F3"/>
           </a:solidFill>
           <a:ln w="19050">
             <a:solidFill>
-              <a:srgbClr val="0D9488"/>
+              <a:srgbClr val="DB2777"/>
             </a:solidFill>
             <a:prstDash val="solid"/>
           </a:ln>
@@ -31416,7 +30811,7 @@
         </p:nvSpPr>
         <p:spPr>
           <a:xfrm>
-            <a:off x="4370832" y="2258568"/>
+            <a:off x="5803392" y="2258568"/>
             <a:ext cx="1828800" cy="292608"/>
           </a:xfrm>
           <a:prstGeom prst="rect">
@@ -31435,13 +30830,13 @@
             <a:r>
               <a:rPr lang="en-US" sz="1300" b="1" dirty="0">
                 <a:solidFill>
-                  <a:srgbClr val="0F766E"/>
+                  <a:srgbClr val="9D174D"/>
                 </a:solidFill>
                 <a:latin typeface="Trebuchet MS" pitchFamily="34" charset="0"/>
                 <a:ea typeface="Trebuchet MS" pitchFamily="34" charset="-122"/>
                 <a:cs typeface="Trebuchet MS" pitchFamily="34" charset="-120"/>
               </a:rPr>
-              <a:t>start</a:t>
+              <a:t>ed</a:t>
             </a:r>
             <a:endParaRPr lang="en-US" sz="1300" dirty="0"/>
           </a:p>
@@ -31455,7 +30850,7 @@
         </p:nvSpPr>
         <p:spPr>
           <a:xfrm>
-            <a:off x="4370832" y="2569464"/>
+            <a:off x="5803392" y="2569464"/>
             <a:ext cx="1828800" cy="201168"/>
           </a:xfrm>
           <a:prstGeom prst="rect">
@@ -31480,7 +30875,7 @@
                 <a:ea typeface="Calibri" pitchFamily="34" charset="-122"/>
                 <a:cs typeface="Calibri" pitchFamily="34" charset="-120"/>
               </a:rPr>
-              <a:t>to begin</a:t>
+              <a:t>happened in the past</a:t>
             </a:r>
             <a:endParaRPr lang="en-US" sz="850" dirty="0"/>
           </a:p>
@@ -31494,30 +30889,23 @@
         </p:nvSpPr>
         <p:spPr>
           <a:xfrm>
-            <a:off x="6519672" y="2258568"/>
-            <a:ext cx="1828800" cy="292608"/>
+            <a:off x="365760" y="3273552"/>
+            <a:ext cx="1371600" cy="658368"/>
           </a:xfrm>
           <a:prstGeom prst="rect">
             <a:avLst>
-              <a:gd name="adj" fmla="val 25000"/>
+              <a:gd name="adj" fmla="val 8333"/>
             </a:avLst>
           </a:prstGeom>
           <a:solidFill>
-            <a:srgbClr val="FCE7F3"/>
-          </a:solidFill>
-          <a:ln w="19050">
-            <a:solidFill>
-              <a:srgbClr val="DB2777"/>
-            </a:solidFill>
-            <a:prstDash val="solid"/>
-          </a:ln>
-          <a:effectLst>
-            <a:outerShdw sx="100000" sy="100000" kx="0" ky="0" algn="bl" rotWithShape="0" blurRad="101600" dist="38100" dir="8100000">
-              <a:srgbClr val="000000">
-                <a:alpha val="12000"/>
-              </a:srgbClr>
-            </a:outerShdw>
-          </a:effectLst>
+            <a:srgbClr val="E2E8F0"/>
+          </a:solidFill>
+          <a:ln w="12700">
+            <a:solidFill>
+              <a:srgbClr val="E2E8F0"/>
+            </a:solidFill>
+            <a:prstDash val="solid"/>
+          </a:ln>
         </p:spPr>
       </p:sp>
       <p:sp>
@@ -31528,8 +30916,8 @@
         </p:nvSpPr>
         <p:spPr>
           <a:xfrm>
-            <a:off x="6519672" y="2258568"/>
-            <a:ext cx="1828800" cy="292608"/>
+            <a:off x="365760" y="3273552"/>
+            <a:ext cx="1371600" cy="658368"/>
           </a:xfrm>
           <a:prstGeom prst="rect">
             <a:avLst/>
@@ -31545,69 +30933,30 @@
               <a:buNone/>
             </a:pPr>
             <a:r>
-              <a:rPr lang="en-US" sz="1300" b="1" dirty="0">
-                <a:solidFill>
-                  <a:srgbClr val="9D174D"/>
+              <a:rPr lang="en-US" sz="1100" b="1" dirty="0">
+                <a:solidFill>
+                  <a:srgbClr val="475569"/>
                 </a:solidFill>
                 <a:latin typeface="Trebuchet MS" pitchFamily="34" charset="0"/>
                 <a:ea typeface="Trebuchet MS" pitchFamily="34" charset="-122"/>
                 <a:cs typeface="Trebuchet MS" pitchFamily="34" charset="-120"/>
               </a:rPr>
-              <a:t>ed</a:t>
-            </a:r>
-            <a:endParaRPr lang="en-US" sz="1300" dirty="0"/>
-          </a:p>
-        </p:txBody>
-      </p:sp>
-      <p:sp>
-        <p:nvSpPr>
-          <p:cNvPr id="24" name="Text 22"/>
-          <p:cNvSpPr/>
-          <p:nvPr/>
-        </p:nvSpPr>
-        <p:spPr>
-          <a:xfrm>
-            <a:off x="6519672" y="2569464"/>
-            <a:ext cx="1828800" cy="201168"/>
-          </a:xfrm>
-          <a:prstGeom prst="rect">
-            <a:avLst/>
-          </a:prstGeom>
-          <a:noFill/>
-          <a:ln/>
-        </p:spPr>
-        <p:txBody>
-          <a:bodyPr wrap="square" lIns="0" tIns="0" rIns="0" bIns="0" rtlCol="0" anchor="t"/>
-          <a:lstStyle/>
-          <a:p>
-            <a:pPr algn="ctr" indent="0" marL="0">
-              <a:buNone/>
-            </a:pPr>
-            <a:r>
-              <a:rPr lang="en-US" sz="850" dirty="0">
-                <a:solidFill>
-                  <a:srgbClr val="475569"/>
-                </a:solidFill>
-                <a:latin typeface="Calibri" pitchFamily="34" charset="0"/>
-                <a:ea typeface="Calibri" pitchFamily="34" charset="-122"/>
-                <a:cs typeface="Calibri" pitchFamily="34" charset="-120"/>
-              </a:rPr>
-              <a:t>happened in the past</a:t>
-            </a:r>
-            <a:endParaRPr lang="en-US" sz="850" dirty="0"/>
-          </a:p>
-        </p:txBody>
-      </p:sp>
-      <p:sp>
-        <p:nvSpPr>
-          <p:cNvPr id="25" name="Shape 23"/>
-          <p:cNvSpPr/>
-          <p:nvPr/>
-        </p:nvSpPr>
-        <p:spPr>
-          <a:xfrm>
-            <a:off x="365760" y="3273552"/>
-            <a:ext cx="1371600" cy="658368"/>
+              <a:t>Syllables</a:t>
+            </a:r>
+            <a:endParaRPr lang="en-US" sz="1100" dirty="0"/>
+          </a:p>
+        </p:txBody>
+      </p:sp>
+      <p:sp>
+        <p:nvSpPr>
+          <p:cNvPr id="24" name="Shape 22"/>
+          <p:cNvSpPr/>
+          <p:nvPr/>
+        </p:nvSpPr>
+        <p:spPr>
+          <a:xfrm>
+            <a:off x="1874520" y="3273552"/>
+            <a:ext cx="6903720" cy="658368"/>
           </a:xfrm>
           <a:prstGeom prst="rect">
             <a:avLst>
@@ -31615,11 +30964,38 @@
             </a:avLst>
           </a:prstGeom>
           <a:solidFill>
-            <a:srgbClr val="E2E8F0"/>
-          </a:solidFill>
-          <a:ln w="12700">
-            <a:solidFill>
-              <a:srgbClr val="E2E8F0"/>
+            <a:srgbClr val="CCFBF1"/>
+          </a:solidFill>
+          <a:ln w="12700">
+            <a:solidFill>
+              <a:srgbClr val="0D9488"/>
+            </a:solidFill>
+            <a:prstDash val="solid"/>
+          </a:ln>
+        </p:spPr>
+      </p:sp>
+      <p:sp>
+        <p:nvSpPr>
+          <p:cNvPr id="25" name="Shape 23"/>
+          <p:cNvSpPr/>
+          <p:nvPr/>
+        </p:nvSpPr>
+        <p:spPr>
+          <a:xfrm>
+            <a:off x="2999232" y="3364992"/>
+            <a:ext cx="1645920" cy="475488"/>
+          </a:xfrm>
+          <a:prstGeom prst="rect">
+            <a:avLst>
+              <a:gd name="adj" fmla="val 9615"/>
+            </a:avLst>
+          </a:prstGeom>
+          <a:solidFill>
+            <a:srgbClr val="FFFFFF"/>
+          </a:solidFill>
+          <a:ln w="12700">
+            <a:solidFill>
+              <a:srgbClr val="0D9488"/>
             </a:solidFill>
             <a:prstDash val="solid"/>
           </a:ln>
@@ -31633,8 +31009,8 @@
         </p:nvSpPr>
         <p:spPr>
           <a:xfrm>
-            <a:off x="365760" y="3273552"/>
-            <a:ext cx="1371600" cy="658368"/>
+            <a:off x="2999232" y="3364992"/>
+            <a:ext cx="1645920" cy="475488"/>
           </a:xfrm>
           <a:prstGeom prst="rect">
             <a:avLst/>
@@ -31650,15 +31026,186 @@
               <a:buNone/>
             </a:pPr>
             <a:r>
-              <a:rPr lang="en-US" sz="1100" b="1" dirty="0">
-                <a:solidFill>
-                  <a:srgbClr val="475569"/>
+              <a:rPr lang="en-US" sz="1400" b="1" dirty="0">
+                <a:solidFill>
+                  <a:srgbClr val="0D9488"/>
                 </a:solidFill>
                 <a:latin typeface="Trebuchet MS" pitchFamily="34" charset="0"/>
                 <a:ea typeface="Trebuchet MS" pitchFamily="34" charset="-122"/>
                 <a:cs typeface="Trebuchet MS" pitchFamily="34" charset="-120"/>
               </a:rPr>
-              <a:t>Syllables</a:t>
+              <a:t>star</a:t>
+            </a:r>
+            <a:endParaRPr lang="en-US" sz="1400" dirty="0"/>
+          </a:p>
+        </p:txBody>
+      </p:sp>
+      <p:sp>
+        <p:nvSpPr>
+          <p:cNvPr id="27" name="Text 25"/>
+          <p:cNvSpPr/>
+          <p:nvPr/>
+        </p:nvSpPr>
+        <p:spPr>
+          <a:xfrm>
+            <a:off x="4645152" y="3364992"/>
+            <a:ext cx="1097280" cy="475488"/>
+          </a:xfrm>
+          <a:prstGeom prst="rect">
+            <a:avLst/>
+          </a:prstGeom>
+          <a:noFill/>
+          <a:ln/>
+        </p:spPr>
+        <p:txBody>
+          <a:bodyPr wrap="square" lIns="0" tIns="0" rIns="0" bIns="0" rtlCol="0" anchor="ctr"/>
+          <a:lstStyle/>
+          <a:p>
+            <a:pPr algn="ctr" indent="0" marL="0">
+              <a:buNone/>
+            </a:pPr>
+            <a:r>
+              <a:rPr lang="en-US" sz="1600" b="1" dirty="0">
+                <a:solidFill>
+                  <a:srgbClr val="0D9488"/>
+                </a:solidFill>
+                <a:latin typeface="Trebuchet MS" pitchFamily="34" charset="0"/>
+                <a:ea typeface="Trebuchet MS" pitchFamily="34" charset="-122"/>
+                <a:cs typeface="Trebuchet MS" pitchFamily="34" charset="-120"/>
+              </a:rPr>
+              <a:t>·</a:t>
+            </a:r>
+            <a:endParaRPr lang="en-US" sz="1600" dirty="0"/>
+          </a:p>
+        </p:txBody>
+      </p:sp>
+      <p:sp>
+        <p:nvSpPr>
+          <p:cNvPr id="28" name="Shape 26"/>
+          <p:cNvSpPr/>
+          <p:nvPr/>
+        </p:nvSpPr>
+        <p:spPr>
+          <a:xfrm>
+            <a:off x="5742432" y="3364992"/>
+            <a:ext cx="1645920" cy="475488"/>
+          </a:xfrm>
+          <a:prstGeom prst="rect">
+            <a:avLst>
+              <a:gd name="adj" fmla="val 9615"/>
+            </a:avLst>
+          </a:prstGeom>
+          <a:solidFill>
+            <a:srgbClr val="FFFFFF"/>
+          </a:solidFill>
+          <a:ln w="12700">
+            <a:solidFill>
+              <a:srgbClr val="0D9488"/>
+            </a:solidFill>
+            <a:prstDash val="solid"/>
+          </a:ln>
+        </p:spPr>
+      </p:sp>
+      <p:sp>
+        <p:nvSpPr>
+          <p:cNvPr id="29" name="Text 27"/>
+          <p:cNvSpPr/>
+          <p:nvPr/>
+        </p:nvSpPr>
+        <p:spPr>
+          <a:xfrm>
+            <a:off x="5742432" y="3364992"/>
+            <a:ext cx="1645920" cy="475488"/>
+          </a:xfrm>
+          <a:prstGeom prst="rect">
+            <a:avLst/>
+          </a:prstGeom>
+          <a:noFill/>
+          <a:ln/>
+        </p:spPr>
+        <p:txBody>
+          <a:bodyPr wrap="square" lIns="0" tIns="0" rIns="0" bIns="0" rtlCol="0" anchor="ctr"/>
+          <a:lstStyle/>
+          <a:p>
+            <a:pPr algn="ctr" indent="0" marL="0">
+              <a:buNone/>
+            </a:pPr>
+            <a:r>
+              <a:rPr lang="en-US" sz="1400" b="1" dirty="0">
+                <a:solidFill>
+                  <a:srgbClr val="0D9488"/>
+                </a:solidFill>
+                <a:latin typeface="Trebuchet MS" pitchFamily="34" charset="0"/>
+                <a:ea typeface="Trebuchet MS" pitchFamily="34" charset="-122"/>
+                <a:cs typeface="Trebuchet MS" pitchFamily="34" charset="-120"/>
+              </a:rPr>
+              <a:t>ted</a:t>
+            </a:r>
+            <a:endParaRPr lang="en-US" sz="1400" dirty="0"/>
+          </a:p>
+        </p:txBody>
+      </p:sp>
+      <p:sp>
+        <p:nvSpPr>
+          <p:cNvPr id="30" name="Shape 28"/>
+          <p:cNvSpPr/>
+          <p:nvPr/>
+        </p:nvSpPr>
+        <p:spPr>
+          <a:xfrm>
+            <a:off x="365760" y="4096512"/>
+            <a:ext cx="1371600" cy="804672"/>
+          </a:xfrm>
+          <a:prstGeom prst="rect">
+            <a:avLst>
+              <a:gd name="adj" fmla="val 6818"/>
+            </a:avLst>
+          </a:prstGeom>
+          <a:solidFill>
+            <a:srgbClr val="E2E8F0"/>
+          </a:solidFill>
+          <a:ln w="12700">
+            <a:solidFill>
+              <a:srgbClr val="E2E8F0"/>
+            </a:solidFill>
+            <a:prstDash val="solid"/>
+          </a:ln>
+        </p:spPr>
+      </p:sp>
+      <p:sp>
+        <p:nvSpPr>
+          <p:cNvPr id="31" name="Text 29"/>
+          <p:cNvSpPr/>
+          <p:nvPr/>
+        </p:nvSpPr>
+        <p:spPr>
+          <a:xfrm>
+            <a:off x="365760" y="4096512"/>
+            <a:ext cx="1371600" cy="804672"/>
+          </a:xfrm>
+          <a:prstGeom prst="rect">
+            <a:avLst/>
+          </a:prstGeom>
+          <a:noFill/>
+          <a:ln/>
+        </p:spPr>
+        <p:txBody>
+          <a:bodyPr wrap="square" lIns="0" tIns="0" rIns="0" bIns="0" rtlCol="0" anchor="ctr"/>
+          <a:lstStyle/>
+          <a:p>
+            <a:pPr algn="ctr" indent="0" marL="0">
+              <a:buNone/>
+            </a:pPr>
+            <a:r>
+              <a:rPr lang="en-US" sz="1100" b="1" dirty="0">
+                <a:solidFill>
+                  <a:srgbClr val="475569"/>
+                </a:solidFill>
+                <a:latin typeface="Trebuchet MS" pitchFamily="34" charset="0"/>
+                <a:ea typeface="Trebuchet MS" pitchFamily="34" charset="-122"/>
+                <a:cs typeface="Trebuchet MS" pitchFamily="34" charset="-120"/>
+              </a:rPr>
+              <a:t>Phonemes</a:t>
             </a:r>
             <a:endParaRPr lang="en-US" sz="1100" dirty="0"/>
           </a:p>
@@ -31666,13 +31213,13 @@
       </p:sp>
       <p:sp>
         <p:nvSpPr>
-          <p:cNvPr id="27" name="Shape 25"/>
-          <p:cNvSpPr/>
-          <p:nvPr/>
-        </p:nvSpPr>
-        <p:spPr>
-          <a:xfrm>
-            <a:off x="1874520" y="3273552"/>
+          <p:cNvPr id="32" name="Shape 30"/>
+          <p:cNvSpPr/>
+          <p:nvPr/>
+        </p:nvSpPr>
+        <p:spPr>
+          <a:xfrm>
+            <a:off x="1874520" y="4096512"/>
             <a:ext cx="6903720" cy="658368"/>
           </a:xfrm>
           <a:prstGeom prst="rect">
@@ -31681,30 +31228,30 @@
             </a:avLst>
           </a:prstGeom>
           <a:solidFill>
-            <a:srgbClr val="CCFBF1"/>
-          </a:solidFill>
-          <a:ln w="12700">
-            <a:solidFill>
-              <a:srgbClr val="0D9488"/>
-            </a:solidFill>
-            <a:prstDash val="solid"/>
-          </a:ln>
-        </p:spPr>
-      </p:sp>
-      <p:sp>
-        <p:nvSpPr>
-          <p:cNvPr id="28" name="Shape 26"/>
-          <p:cNvSpPr/>
-          <p:nvPr/>
-        </p:nvSpPr>
-        <p:spPr>
-          <a:xfrm>
-            <a:off x="2313432" y="3364992"/>
-            <a:ext cx="1645920" cy="475488"/>
+            <a:srgbClr val="FCE7F3"/>
+          </a:solidFill>
+          <a:ln w="12700">
+            <a:solidFill>
+              <a:srgbClr val="DB2777"/>
+            </a:solidFill>
+            <a:prstDash val="solid"/>
+          </a:ln>
+        </p:spPr>
+      </p:sp>
+      <p:sp>
+        <p:nvSpPr>
+          <p:cNvPr id="33" name="Shape 31"/>
+          <p:cNvSpPr/>
+          <p:nvPr/>
+        </p:nvSpPr>
+        <p:spPr>
+          <a:xfrm>
+            <a:off x="2254649" y="4169664"/>
+            <a:ext cx="685800" cy="475488"/>
           </a:xfrm>
           <a:prstGeom prst="rect">
             <a:avLst>
-              <a:gd name="adj" fmla="val 9615"/>
+              <a:gd name="adj" fmla="val 7692"/>
             </a:avLst>
           </a:prstGeom>
           <a:solidFill>
@@ -31712,22 +31259,22 @@
           </a:solidFill>
           <a:ln w="12700">
             <a:solidFill>
-              <a:srgbClr val="0D9488"/>
-            </a:solidFill>
-            <a:prstDash val="solid"/>
-          </a:ln>
-        </p:spPr>
-      </p:sp>
-      <p:sp>
-        <p:nvSpPr>
-          <p:cNvPr id="29" name="Text 27"/>
-          <p:cNvSpPr/>
-          <p:nvPr/>
-        </p:nvSpPr>
-        <p:spPr>
-          <a:xfrm>
-            <a:off x="2313432" y="3364992"/>
-            <a:ext cx="1645920" cy="475488"/>
+              <a:srgbClr val="DB2777"/>
+            </a:solidFill>
+            <a:prstDash val="solid"/>
+          </a:ln>
+        </p:spPr>
+      </p:sp>
+      <p:sp>
+        <p:nvSpPr>
+          <p:cNvPr id="34" name="Text 32"/>
+          <p:cNvSpPr/>
+          <p:nvPr/>
+        </p:nvSpPr>
+        <p:spPr>
+          <a:xfrm>
+            <a:off x="2254649" y="4169664"/>
+            <a:ext cx="685800" cy="475488"/>
           </a:xfrm>
           <a:prstGeom prst="rect">
             <a:avLst/>
@@ -31743,30 +31290,57 @@
               <a:buNone/>
             </a:pPr>
             <a:r>
-              <a:rPr lang="en-US" sz="1400" b="1" dirty="0">
-                <a:solidFill>
-                  <a:srgbClr val="0D9488"/>
+              <a:rPr lang="en-US" sz="900" b="1" dirty="0">
+                <a:solidFill>
+                  <a:srgbClr val="9D174D"/>
                 </a:solidFill>
                 <a:latin typeface="Trebuchet MS" pitchFamily="34" charset="0"/>
                 <a:ea typeface="Trebuchet MS" pitchFamily="34" charset="-122"/>
                 <a:cs typeface="Trebuchet MS" pitchFamily="34" charset="-120"/>
               </a:rPr>
-              <a:t>re</a:t>
-            </a:r>
-            <a:endParaRPr lang="en-US" sz="1400" dirty="0"/>
-          </a:p>
-        </p:txBody>
-      </p:sp>
-      <p:sp>
-        <p:nvSpPr>
-          <p:cNvPr id="30" name="Text 28"/>
-          <p:cNvSpPr/>
-          <p:nvPr/>
-        </p:nvSpPr>
-        <p:spPr>
-          <a:xfrm>
-            <a:off x="3959352" y="3364992"/>
-            <a:ext cx="411480" cy="475488"/>
+              <a:t>s</a:t>
+            </a:r>
+            <a:endParaRPr lang="en-US" sz="900" dirty="0"/>
+          </a:p>
+        </p:txBody>
+      </p:sp>
+      <p:sp>
+        <p:nvSpPr>
+          <p:cNvPr id="35" name="Shape 33"/>
+          <p:cNvSpPr/>
+          <p:nvPr/>
+        </p:nvSpPr>
+        <p:spPr>
+          <a:xfrm>
+            <a:off x="3293146" y="4169664"/>
+            <a:ext cx="685800" cy="475488"/>
+          </a:xfrm>
+          <a:prstGeom prst="rect">
+            <a:avLst>
+              <a:gd name="adj" fmla="val 7692"/>
+            </a:avLst>
+          </a:prstGeom>
+          <a:solidFill>
+            <a:srgbClr val="FFFFFF"/>
+          </a:solidFill>
+          <a:ln w="12700">
+            <a:solidFill>
+              <a:srgbClr val="DB2777"/>
+            </a:solidFill>
+            <a:prstDash val="solid"/>
+          </a:ln>
+        </p:spPr>
+      </p:sp>
+      <p:sp>
+        <p:nvSpPr>
+          <p:cNvPr id="36" name="Text 34"/>
+          <p:cNvSpPr/>
+          <p:nvPr/>
+        </p:nvSpPr>
+        <p:spPr>
+          <a:xfrm>
+            <a:off x="3293146" y="4169664"/>
+            <a:ext cx="685800" cy="475488"/>
           </a:xfrm>
           <a:prstGeom prst="rect">
             <a:avLst/>
@@ -31782,34 +31356,34 @@
               <a:buNone/>
             </a:pPr>
             <a:r>
-              <a:rPr lang="en-US" sz="1600" b="1" dirty="0">
-                <a:solidFill>
-                  <a:srgbClr val="0D9488"/>
+              <a:rPr lang="en-US" sz="900" b="1" dirty="0">
+                <a:solidFill>
+                  <a:srgbClr val="9D174D"/>
                 </a:solidFill>
                 <a:latin typeface="Trebuchet MS" pitchFamily="34" charset="0"/>
                 <a:ea typeface="Trebuchet MS" pitchFamily="34" charset="-122"/>
                 <a:cs typeface="Trebuchet MS" pitchFamily="34" charset="-120"/>
               </a:rPr>
-              <a:t>·</a:t>
-            </a:r>
-            <a:endParaRPr lang="en-US" sz="1600" dirty="0"/>
-          </a:p>
-        </p:txBody>
-      </p:sp>
-      <p:sp>
-        <p:nvSpPr>
-          <p:cNvPr id="31" name="Shape 29"/>
-          <p:cNvSpPr/>
-          <p:nvPr/>
-        </p:nvSpPr>
-        <p:spPr>
-          <a:xfrm>
-            <a:off x="4370832" y="3364992"/>
-            <a:ext cx="1645920" cy="475488"/>
+              <a:t>t</a:t>
+            </a:r>
+            <a:endParaRPr lang="en-US" sz="900" dirty="0"/>
+          </a:p>
+        </p:txBody>
+      </p:sp>
+      <p:sp>
+        <p:nvSpPr>
+          <p:cNvPr id="37" name="Shape 35"/>
+          <p:cNvSpPr/>
+          <p:nvPr/>
+        </p:nvSpPr>
+        <p:spPr>
+          <a:xfrm>
+            <a:off x="4331643" y="4169664"/>
+            <a:ext cx="685800" cy="475488"/>
           </a:xfrm>
           <a:prstGeom prst="rect">
             <a:avLst>
-              <a:gd name="adj" fmla="val 9615"/>
+              <a:gd name="adj" fmla="val 7692"/>
             </a:avLst>
           </a:prstGeom>
           <a:solidFill>
@@ -31817,22 +31391,22 @@
           </a:solidFill>
           <a:ln w="12700">
             <a:solidFill>
-              <a:srgbClr val="0D9488"/>
-            </a:solidFill>
-            <a:prstDash val="solid"/>
-          </a:ln>
-        </p:spPr>
-      </p:sp>
-      <p:sp>
-        <p:nvSpPr>
-          <p:cNvPr id="32" name="Text 30"/>
-          <p:cNvSpPr/>
-          <p:nvPr/>
-        </p:nvSpPr>
-        <p:spPr>
-          <a:xfrm>
-            <a:off x="4370832" y="3364992"/>
-            <a:ext cx="1645920" cy="475488"/>
+              <a:srgbClr val="DB2777"/>
+            </a:solidFill>
+            <a:prstDash val="solid"/>
+          </a:ln>
+        </p:spPr>
+      </p:sp>
+      <p:sp>
+        <p:nvSpPr>
+          <p:cNvPr id="38" name="Text 36"/>
+          <p:cNvSpPr/>
+          <p:nvPr/>
+        </p:nvSpPr>
+        <p:spPr>
+          <a:xfrm>
+            <a:off x="4331643" y="4169664"/>
+            <a:ext cx="685800" cy="475488"/>
           </a:xfrm>
           <a:prstGeom prst="rect">
             <a:avLst/>
@@ -31848,30 +31422,57 @@
               <a:buNone/>
             </a:pPr>
             <a:r>
-              <a:rPr lang="en-US" sz="1400" b="1" dirty="0">
-                <a:solidFill>
-                  <a:srgbClr val="0D9488"/>
+              <a:rPr lang="en-US" sz="900" b="1" dirty="0">
+                <a:solidFill>
+                  <a:srgbClr val="9D174D"/>
                 </a:solidFill>
                 <a:latin typeface="Trebuchet MS" pitchFamily="34" charset="0"/>
                 <a:ea typeface="Trebuchet MS" pitchFamily="34" charset="-122"/>
                 <a:cs typeface="Trebuchet MS" pitchFamily="34" charset="-120"/>
               </a:rPr>
-              <a:t>star</a:t>
-            </a:r>
-            <a:endParaRPr lang="en-US" sz="1400" dirty="0"/>
-          </a:p>
-        </p:txBody>
-      </p:sp>
-      <p:sp>
-        <p:nvSpPr>
-          <p:cNvPr id="33" name="Text 31"/>
-          <p:cNvSpPr/>
-          <p:nvPr/>
-        </p:nvSpPr>
-        <p:spPr>
-          <a:xfrm>
-            <a:off x="6016752" y="3364992"/>
-            <a:ext cx="411480" cy="475488"/>
+              <a:t>ar</a:t>
+            </a:r>
+            <a:endParaRPr lang="en-US" sz="900" dirty="0"/>
+          </a:p>
+        </p:txBody>
+      </p:sp>
+      <p:sp>
+        <p:nvSpPr>
+          <p:cNvPr id="39" name="Shape 37"/>
+          <p:cNvSpPr/>
+          <p:nvPr/>
+        </p:nvSpPr>
+        <p:spPr>
+          <a:xfrm>
+            <a:off x="5370141" y="4169664"/>
+            <a:ext cx="685800" cy="475488"/>
+          </a:xfrm>
+          <a:prstGeom prst="rect">
+            <a:avLst>
+              <a:gd name="adj" fmla="val 7692"/>
+            </a:avLst>
+          </a:prstGeom>
+          <a:solidFill>
+            <a:srgbClr val="FFFFFF"/>
+          </a:solidFill>
+          <a:ln w="12700">
+            <a:solidFill>
+              <a:srgbClr val="DB2777"/>
+            </a:solidFill>
+            <a:prstDash val="solid"/>
+          </a:ln>
+        </p:spPr>
+      </p:sp>
+      <p:sp>
+        <p:nvSpPr>
+          <p:cNvPr id="40" name="Text 38"/>
+          <p:cNvSpPr/>
+          <p:nvPr/>
+        </p:nvSpPr>
+        <p:spPr>
+          <a:xfrm>
+            <a:off x="5370141" y="4169664"/>
+            <a:ext cx="685800" cy="475488"/>
           </a:xfrm>
           <a:prstGeom prst="rect">
             <a:avLst/>
@@ -31887,34 +31488,34 @@
               <a:buNone/>
             </a:pPr>
             <a:r>
-              <a:rPr lang="en-US" sz="1600" b="1" dirty="0">
-                <a:solidFill>
-                  <a:srgbClr val="0D9488"/>
+              <a:rPr lang="en-US" sz="900" b="1" dirty="0">
+                <a:solidFill>
+                  <a:srgbClr val="9D174D"/>
                 </a:solidFill>
                 <a:latin typeface="Trebuchet MS" pitchFamily="34" charset="0"/>
                 <a:ea typeface="Trebuchet MS" pitchFamily="34" charset="-122"/>
                 <a:cs typeface="Trebuchet MS" pitchFamily="34" charset="-120"/>
               </a:rPr>
-              <a:t>·</a:t>
-            </a:r>
-            <a:endParaRPr lang="en-US" sz="1600" dirty="0"/>
-          </a:p>
-        </p:txBody>
-      </p:sp>
-      <p:sp>
-        <p:nvSpPr>
-          <p:cNvPr id="34" name="Shape 32"/>
-          <p:cNvSpPr/>
-          <p:nvPr/>
-        </p:nvSpPr>
-        <p:spPr>
-          <a:xfrm>
-            <a:off x="6428232" y="3364992"/>
-            <a:ext cx="1645920" cy="475488"/>
+              <a:t>t</a:t>
+            </a:r>
+            <a:endParaRPr lang="en-US" sz="900" dirty="0"/>
+          </a:p>
+        </p:txBody>
+      </p:sp>
+      <p:sp>
+        <p:nvSpPr>
+          <p:cNvPr id="41" name="Shape 39"/>
+          <p:cNvSpPr/>
+          <p:nvPr/>
+        </p:nvSpPr>
+        <p:spPr>
+          <a:xfrm>
+            <a:off x="6408638" y="4169664"/>
+            <a:ext cx="685800" cy="475488"/>
           </a:xfrm>
           <a:prstGeom prst="rect">
             <a:avLst>
-              <a:gd name="adj" fmla="val 9615"/>
+              <a:gd name="adj" fmla="val 7692"/>
             </a:avLst>
           </a:prstGeom>
           <a:solidFill>
@@ -31922,22 +31523,22 @@
           </a:solidFill>
           <a:ln w="12700">
             <a:solidFill>
-              <a:srgbClr val="0D9488"/>
-            </a:solidFill>
-            <a:prstDash val="solid"/>
-          </a:ln>
-        </p:spPr>
-      </p:sp>
-      <p:sp>
-        <p:nvSpPr>
-          <p:cNvPr id="35" name="Text 33"/>
-          <p:cNvSpPr/>
-          <p:nvPr/>
-        </p:nvSpPr>
-        <p:spPr>
-          <a:xfrm>
-            <a:off x="6428232" y="3364992"/>
-            <a:ext cx="1645920" cy="475488"/>
+              <a:srgbClr val="DB2777"/>
+            </a:solidFill>
+            <a:prstDash val="solid"/>
+          </a:ln>
+        </p:spPr>
+      </p:sp>
+      <p:sp>
+        <p:nvSpPr>
+          <p:cNvPr id="42" name="Text 40"/>
+          <p:cNvSpPr/>
+          <p:nvPr/>
+        </p:nvSpPr>
+        <p:spPr>
+          <a:xfrm>
+            <a:off x="6408638" y="4169664"/>
+            <a:ext cx="685800" cy="475488"/>
           </a:xfrm>
           <a:prstGeom prst="rect">
             <a:avLst/>
@@ -31953,57 +31554,57 @@
               <a:buNone/>
             </a:pPr>
             <a:r>
-              <a:rPr lang="en-US" sz="1400" b="1" dirty="0">
-                <a:solidFill>
-                  <a:srgbClr val="0D9488"/>
+              <a:rPr lang="en-US" sz="900" b="1" dirty="0">
+                <a:solidFill>
+                  <a:srgbClr val="9D174D"/>
                 </a:solidFill>
                 <a:latin typeface="Trebuchet MS" pitchFamily="34" charset="0"/>
                 <a:ea typeface="Trebuchet MS" pitchFamily="34" charset="-122"/>
                 <a:cs typeface="Trebuchet MS" pitchFamily="34" charset="-120"/>
               </a:rPr>
-              <a:t>ted</a:t>
-            </a:r>
-            <a:endParaRPr lang="en-US" sz="1400" dirty="0"/>
-          </a:p>
-        </p:txBody>
-      </p:sp>
-      <p:sp>
-        <p:nvSpPr>
-          <p:cNvPr id="36" name="Shape 34"/>
-          <p:cNvSpPr/>
-          <p:nvPr/>
-        </p:nvSpPr>
-        <p:spPr>
-          <a:xfrm>
-            <a:off x="365760" y="4096512"/>
-            <a:ext cx="1371600" cy="804672"/>
+              <a:t>e</a:t>
+            </a:r>
+            <a:endParaRPr lang="en-US" sz="900" dirty="0"/>
+          </a:p>
+        </p:txBody>
+      </p:sp>
+      <p:sp>
+        <p:nvSpPr>
+          <p:cNvPr id="43" name="Shape 41"/>
+          <p:cNvSpPr/>
+          <p:nvPr/>
+        </p:nvSpPr>
+        <p:spPr>
+          <a:xfrm>
+            <a:off x="7447135" y="4169664"/>
+            <a:ext cx="685800" cy="475488"/>
           </a:xfrm>
           <a:prstGeom prst="rect">
             <a:avLst>
-              <a:gd name="adj" fmla="val 6818"/>
+              <a:gd name="adj" fmla="val 7692"/>
             </a:avLst>
           </a:prstGeom>
           <a:solidFill>
-            <a:srgbClr val="E2E8F0"/>
-          </a:solidFill>
-          <a:ln w="12700">
-            <a:solidFill>
-              <a:srgbClr val="E2E8F0"/>
-            </a:solidFill>
-            <a:prstDash val="solid"/>
-          </a:ln>
-        </p:spPr>
-      </p:sp>
-      <p:sp>
-        <p:nvSpPr>
-          <p:cNvPr id="37" name="Text 35"/>
-          <p:cNvSpPr/>
-          <p:nvPr/>
-        </p:nvSpPr>
-        <p:spPr>
-          <a:xfrm>
-            <a:off x="365760" y="4096512"/>
-            <a:ext cx="1371600" cy="804672"/>
+            <a:srgbClr val="FFFFFF"/>
+          </a:solidFill>
+          <a:ln w="12700">
+            <a:solidFill>
+              <a:srgbClr val="DB2777"/>
+            </a:solidFill>
+            <a:prstDash val="solid"/>
+          </a:ln>
+        </p:spPr>
+      </p:sp>
+      <p:sp>
+        <p:nvSpPr>
+          <p:cNvPr id="44" name="Text 42"/>
+          <p:cNvSpPr/>
+          <p:nvPr/>
+        </p:nvSpPr>
+        <p:spPr>
+          <a:xfrm>
+            <a:off x="7447135" y="4169664"/>
+            <a:ext cx="685800" cy="475488"/>
           </a:xfrm>
           <a:prstGeom prst="rect">
             <a:avLst/>
@@ -32019,504 +31620,15 @@
               <a:buNone/>
             </a:pPr>
             <a:r>
-              <a:rPr lang="en-US" sz="1100" b="1" dirty="0">
-                <a:solidFill>
-                  <a:srgbClr val="475569"/>
+              <a:rPr lang="en-US" sz="900" b="1" dirty="0">
+                <a:solidFill>
+                  <a:srgbClr val="9D174D"/>
                 </a:solidFill>
                 <a:latin typeface="Trebuchet MS" pitchFamily="34" charset="0"/>
                 <a:ea typeface="Trebuchet MS" pitchFamily="34" charset="-122"/>
                 <a:cs typeface="Trebuchet MS" pitchFamily="34" charset="-120"/>
               </a:rPr>
-              <a:t>Phonemes</a:t>
-            </a:r>
-            <a:endParaRPr lang="en-US" sz="1100" dirty="0"/>
-          </a:p>
-        </p:txBody>
-      </p:sp>
-      <p:sp>
-        <p:nvSpPr>
-          <p:cNvPr id="38" name="Shape 36"/>
-          <p:cNvSpPr/>
-          <p:nvPr/>
-        </p:nvSpPr>
-        <p:spPr>
-          <a:xfrm>
-            <a:off x="1874520" y="4096512"/>
-            <a:ext cx="6903720" cy="658368"/>
-          </a:xfrm>
-          <a:prstGeom prst="rect">
-            <a:avLst>
-              <a:gd name="adj" fmla="val 8333"/>
-            </a:avLst>
-          </a:prstGeom>
-          <a:solidFill>
-            <a:srgbClr val="FCE7F3"/>
-          </a:solidFill>
-          <a:ln w="12700">
-            <a:solidFill>
-              <a:srgbClr val="DB2777"/>
-            </a:solidFill>
-            <a:prstDash val="solid"/>
-          </a:ln>
-        </p:spPr>
-      </p:sp>
-      <p:sp>
-        <p:nvSpPr>
-          <p:cNvPr id="39" name="Shape 37"/>
-          <p:cNvSpPr/>
-          <p:nvPr/>
-        </p:nvSpPr>
-        <p:spPr>
-          <a:xfrm>
-            <a:off x="2124837" y="4169664"/>
-            <a:ext cx="685800" cy="475488"/>
-          </a:xfrm>
-          <a:prstGeom prst="rect">
-            <a:avLst>
-              <a:gd name="adj" fmla="val 7692"/>
-            </a:avLst>
-          </a:prstGeom>
-          <a:solidFill>
-            <a:srgbClr val="FFFFFF"/>
-          </a:solidFill>
-          <a:ln w="12700">
-            <a:solidFill>
-              <a:srgbClr val="DB2777"/>
-            </a:solidFill>
-            <a:prstDash val="solid"/>
-          </a:ln>
-        </p:spPr>
-      </p:sp>
-      <p:sp>
-        <p:nvSpPr>
-          <p:cNvPr id="40" name="Text 38"/>
-          <p:cNvSpPr/>
-          <p:nvPr/>
-        </p:nvSpPr>
-        <p:spPr>
-          <a:xfrm>
-            <a:off x="2124837" y="4169664"/>
-            <a:ext cx="685800" cy="475488"/>
-          </a:xfrm>
-          <a:prstGeom prst="rect">
-            <a:avLst/>
-          </a:prstGeom>
-          <a:noFill/>
-          <a:ln/>
-        </p:spPr>
-        <p:txBody>
-          <a:bodyPr wrap="square" lIns="0" tIns="0" rIns="0" bIns="0" rtlCol="0" anchor="ctr"/>
-          <a:lstStyle/>
-          <a:p>
-            <a:pPr algn="ctr" indent="0" marL="0">
-              <a:buNone/>
-            </a:pPr>
-            <a:r>
-              <a:rPr lang="en-US" sz="900" b="1" dirty="0">
-                <a:solidFill>
-                  <a:srgbClr val="9D174D"/>
-                </a:solidFill>
-                <a:latin typeface="Trebuchet MS" pitchFamily="34" charset="0"/>
-                <a:ea typeface="Trebuchet MS" pitchFamily="34" charset="-122"/>
-                <a:cs typeface="Trebuchet MS" pitchFamily="34" charset="-120"/>
-              </a:rPr>
-              <a:t>r</a:t>
-            </a:r>
-            <a:endParaRPr lang="en-US" sz="900" dirty="0"/>
-          </a:p>
-        </p:txBody>
-      </p:sp>
-      <p:sp>
-        <p:nvSpPr>
-          <p:cNvPr id="41" name="Shape 39"/>
-          <p:cNvSpPr/>
-          <p:nvPr/>
-        </p:nvSpPr>
-        <p:spPr>
-          <a:xfrm>
-            <a:off x="3033522" y="4169664"/>
-            <a:ext cx="685800" cy="475488"/>
-          </a:xfrm>
-          <a:prstGeom prst="rect">
-            <a:avLst>
-              <a:gd name="adj" fmla="val 7692"/>
-            </a:avLst>
-          </a:prstGeom>
-          <a:solidFill>
-            <a:srgbClr val="FFFFFF"/>
-          </a:solidFill>
-          <a:ln w="12700">
-            <a:solidFill>
-              <a:srgbClr val="DB2777"/>
-            </a:solidFill>
-            <a:prstDash val="solid"/>
-          </a:ln>
-        </p:spPr>
-      </p:sp>
-      <p:sp>
-        <p:nvSpPr>
-          <p:cNvPr id="42" name="Text 40"/>
-          <p:cNvSpPr/>
-          <p:nvPr/>
-        </p:nvSpPr>
-        <p:spPr>
-          <a:xfrm>
-            <a:off x="3033522" y="4169664"/>
-            <a:ext cx="685800" cy="475488"/>
-          </a:xfrm>
-          <a:prstGeom prst="rect">
-            <a:avLst/>
-          </a:prstGeom>
-          <a:noFill/>
-          <a:ln/>
-        </p:spPr>
-        <p:txBody>
-          <a:bodyPr wrap="square" lIns="0" tIns="0" rIns="0" bIns="0" rtlCol="0" anchor="ctr"/>
-          <a:lstStyle/>
-          <a:p>
-            <a:pPr algn="ctr" indent="0" marL="0">
-              <a:buNone/>
-            </a:pPr>
-            <a:r>
-              <a:rPr lang="en-US" sz="900" b="1" dirty="0">
-                <a:solidFill>
-                  <a:srgbClr val="9D174D"/>
-                </a:solidFill>
-                <a:latin typeface="Trebuchet MS" pitchFamily="34" charset="0"/>
-                <a:ea typeface="Trebuchet MS" pitchFamily="34" charset="-122"/>
-                <a:cs typeface="Trebuchet MS" pitchFamily="34" charset="-120"/>
-              </a:rPr>
-              <a:t>e</a:t>
-            </a:r>
-            <a:endParaRPr lang="en-US" sz="900" dirty="0"/>
-          </a:p>
-        </p:txBody>
-      </p:sp>
-      <p:sp>
-        <p:nvSpPr>
-          <p:cNvPr id="43" name="Shape 41"/>
-          <p:cNvSpPr/>
-          <p:nvPr/>
-        </p:nvSpPr>
-        <p:spPr>
-          <a:xfrm>
-            <a:off x="3942207" y="4169664"/>
-            <a:ext cx="685800" cy="475488"/>
-          </a:xfrm>
-          <a:prstGeom prst="rect">
-            <a:avLst>
-              <a:gd name="adj" fmla="val 7692"/>
-            </a:avLst>
-          </a:prstGeom>
-          <a:solidFill>
-            <a:srgbClr val="FFFFFF"/>
-          </a:solidFill>
-          <a:ln w="12700">
-            <a:solidFill>
-              <a:srgbClr val="DB2777"/>
-            </a:solidFill>
-            <a:prstDash val="solid"/>
-          </a:ln>
-        </p:spPr>
-      </p:sp>
-      <p:sp>
-        <p:nvSpPr>
-          <p:cNvPr id="44" name="Text 42"/>
-          <p:cNvSpPr/>
-          <p:nvPr/>
-        </p:nvSpPr>
-        <p:spPr>
-          <a:xfrm>
-            <a:off x="3942207" y="4169664"/>
-            <a:ext cx="685800" cy="475488"/>
-          </a:xfrm>
-          <a:prstGeom prst="rect">
-            <a:avLst/>
-          </a:prstGeom>
-          <a:noFill/>
-          <a:ln/>
-        </p:spPr>
-        <p:txBody>
-          <a:bodyPr wrap="square" lIns="0" tIns="0" rIns="0" bIns="0" rtlCol="0" anchor="ctr"/>
-          <a:lstStyle/>
-          <a:p>
-            <a:pPr algn="ctr" indent="0" marL="0">
-              <a:buNone/>
-            </a:pPr>
-            <a:r>
-              <a:rPr lang="en-US" sz="900" b="1" dirty="0">
-                <a:solidFill>
-                  <a:srgbClr val="9D174D"/>
-                </a:solidFill>
-                <a:latin typeface="Trebuchet MS" pitchFamily="34" charset="0"/>
-                <a:ea typeface="Trebuchet MS" pitchFamily="34" charset="-122"/>
-                <a:cs typeface="Trebuchet MS" pitchFamily="34" charset="-120"/>
-              </a:rPr>
-              <a:t>s</a:t>
-            </a:r>
-            <a:endParaRPr lang="en-US" sz="900" dirty="0"/>
-          </a:p>
-        </p:txBody>
-      </p:sp>
-      <p:sp>
-        <p:nvSpPr>
-          <p:cNvPr id="45" name="Shape 43"/>
-          <p:cNvSpPr/>
-          <p:nvPr/>
-        </p:nvSpPr>
-        <p:spPr>
-          <a:xfrm>
-            <a:off x="4850892" y="4169664"/>
-            <a:ext cx="685800" cy="475488"/>
-          </a:xfrm>
-          <a:prstGeom prst="rect">
-            <a:avLst>
-              <a:gd name="adj" fmla="val 7692"/>
-            </a:avLst>
-          </a:prstGeom>
-          <a:solidFill>
-            <a:srgbClr val="FFFFFF"/>
-          </a:solidFill>
-          <a:ln w="12700">
-            <a:solidFill>
-              <a:srgbClr val="DB2777"/>
-            </a:solidFill>
-            <a:prstDash val="solid"/>
-          </a:ln>
-        </p:spPr>
-      </p:sp>
-      <p:sp>
-        <p:nvSpPr>
-          <p:cNvPr id="46" name="Text 44"/>
-          <p:cNvSpPr/>
-          <p:nvPr/>
-        </p:nvSpPr>
-        <p:spPr>
-          <a:xfrm>
-            <a:off x="4850892" y="4169664"/>
-            <a:ext cx="685800" cy="475488"/>
-          </a:xfrm>
-          <a:prstGeom prst="rect">
-            <a:avLst/>
-          </a:prstGeom>
-          <a:noFill/>
-          <a:ln/>
-        </p:spPr>
-        <p:txBody>
-          <a:bodyPr wrap="square" lIns="0" tIns="0" rIns="0" bIns="0" rtlCol="0" anchor="ctr"/>
-          <a:lstStyle/>
-          <a:p>
-            <a:pPr algn="ctr" indent="0" marL="0">
-              <a:buNone/>
-            </a:pPr>
-            <a:r>
-              <a:rPr lang="en-US" sz="900" b="1" dirty="0">
-                <a:solidFill>
-                  <a:srgbClr val="9D174D"/>
-                </a:solidFill>
-                <a:latin typeface="Trebuchet MS" pitchFamily="34" charset="0"/>
-                <a:ea typeface="Trebuchet MS" pitchFamily="34" charset="-122"/>
-                <a:cs typeface="Trebuchet MS" pitchFamily="34" charset="-120"/>
-              </a:rPr>
-              <a:t>t</a:t>
-            </a:r>
-            <a:endParaRPr lang="en-US" sz="900" dirty="0"/>
-          </a:p>
-        </p:txBody>
-      </p:sp>
-      <p:sp>
-        <p:nvSpPr>
-          <p:cNvPr id="47" name="Shape 45"/>
-          <p:cNvSpPr/>
-          <p:nvPr/>
-        </p:nvSpPr>
-        <p:spPr>
-          <a:xfrm>
-            <a:off x="5759577" y="4169664"/>
-            <a:ext cx="685800" cy="475488"/>
-          </a:xfrm>
-          <a:prstGeom prst="rect">
-            <a:avLst>
-              <a:gd name="adj" fmla="val 7692"/>
-            </a:avLst>
-          </a:prstGeom>
-          <a:solidFill>
-            <a:srgbClr val="FFFFFF"/>
-          </a:solidFill>
-          <a:ln w="12700">
-            <a:solidFill>
-              <a:srgbClr val="DB2777"/>
-            </a:solidFill>
-            <a:prstDash val="solid"/>
-          </a:ln>
-        </p:spPr>
-      </p:sp>
-      <p:sp>
-        <p:nvSpPr>
-          <p:cNvPr id="48" name="Text 46"/>
-          <p:cNvSpPr/>
-          <p:nvPr/>
-        </p:nvSpPr>
-        <p:spPr>
-          <a:xfrm>
-            <a:off x="5759577" y="4169664"/>
-            <a:ext cx="685800" cy="475488"/>
-          </a:xfrm>
-          <a:prstGeom prst="rect">
-            <a:avLst/>
-          </a:prstGeom>
-          <a:noFill/>
-          <a:ln/>
-        </p:spPr>
-        <p:txBody>
-          <a:bodyPr wrap="square" lIns="0" tIns="0" rIns="0" bIns="0" rtlCol="0" anchor="ctr"/>
-          <a:lstStyle/>
-          <a:p>
-            <a:pPr algn="ctr" indent="0" marL="0">
-              <a:buNone/>
-            </a:pPr>
-            <a:r>
-              <a:rPr lang="en-US" sz="900" b="1" dirty="0">
-                <a:solidFill>
-                  <a:srgbClr val="9D174D"/>
-                </a:solidFill>
-                <a:latin typeface="Trebuchet MS" pitchFamily="34" charset="0"/>
-                <a:ea typeface="Trebuchet MS" pitchFamily="34" charset="-122"/>
-                <a:cs typeface="Trebuchet MS" pitchFamily="34" charset="-120"/>
-              </a:rPr>
-              <a:t>ar</a:t>
-            </a:r>
-            <a:endParaRPr lang="en-US" sz="900" dirty="0"/>
-          </a:p>
-        </p:txBody>
-      </p:sp>
-      <p:sp>
-        <p:nvSpPr>
-          <p:cNvPr id="49" name="Shape 47"/>
-          <p:cNvSpPr/>
-          <p:nvPr/>
-        </p:nvSpPr>
-        <p:spPr>
-          <a:xfrm>
-            <a:off x="6668262" y="4169664"/>
-            <a:ext cx="685800" cy="475488"/>
-          </a:xfrm>
-          <a:prstGeom prst="rect">
-            <a:avLst>
-              <a:gd name="adj" fmla="val 7692"/>
-            </a:avLst>
-          </a:prstGeom>
-          <a:solidFill>
-            <a:srgbClr val="FFFFFF"/>
-          </a:solidFill>
-          <a:ln w="12700">
-            <a:solidFill>
-              <a:srgbClr val="DB2777"/>
-            </a:solidFill>
-            <a:prstDash val="solid"/>
-          </a:ln>
-        </p:spPr>
-      </p:sp>
-      <p:sp>
-        <p:nvSpPr>
-          <p:cNvPr id="50" name="Text 48"/>
-          <p:cNvSpPr/>
-          <p:nvPr/>
-        </p:nvSpPr>
-        <p:spPr>
-          <a:xfrm>
-            <a:off x="6668262" y="4169664"/>
-            <a:ext cx="685800" cy="475488"/>
-          </a:xfrm>
-          <a:prstGeom prst="rect">
-            <a:avLst/>
-          </a:prstGeom>
-          <a:noFill/>
-          <a:ln/>
-        </p:spPr>
-        <p:txBody>
-          <a:bodyPr wrap="square" lIns="0" tIns="0" rIns="0" bIns="0" rtlCol="0" anchor="ctr"/>
-          <a:lstStyle/>
-          <a:p>
-            <a:pPr algn="ctr" indent="0" marL="0">
-              <a:buNone/>
-            </a:pPr>
-            <a:r>
-              <a:rPr lang="en-US" sz="900" b="1" dirty="0">
-                <a:solidFill>
-                  <a:srgbClr val="9D174D"/>
-                </a:solidFill>
-                <a:latin typeface="Trebuchet MS" pitchFamily="34" charset="0"/>
-                <a:ea typeface="Trebuchet MS" pitchFamily="34" charset="-122"/>
-                <a:cs typeface="Trebuchet MS" pitchFamily="34" charset="-120"/>
-              </a:rPr>
-              <a:t>t</a:t>
-            </a:r>
-            <a:endParaRPr lang="en-US" sz="900" dirty="0"/>
-          </a:p>
-        </p:txBody>
-      </p:sp>
-      <p:sp>
-        <p:nvSpPr>
-          <p:cNvPr id="51" name="Shape 49"/>
-          <p:cNvSpPr/>
-          <p:nvPr/>
-        </p:nvSpPr>
-        <p:spPr>
-          <a:xfrm>
-            <a:off x="7576947" y="4169664"/>
-            <a:ext cx="685800" cy="475488"/>
-          </a:xfrm>
-          <a:prstGeom prst="rect">
-            <a:avLst>
-              <a:gd name="adj" fmla="val 7692"/>
-            </a:avLst>
-          </a:prstGeom>
-          <a:solidFill>
-            <a:srgbClr val="FFFFFF"/>
-          </a:solidFill>
-          <a:ln w="12700">
-            <a:solidFill>
-              <a:srgbClr val="DB2777"/>
-            </a:solidFill>
-            <a:prstDash val="solid"/>
-          </a:ln>
-        </p:spPr>
-      </p:sp>
-      <p:sp>
-        <p:nvSpPr>
-          <p:cNvPr id="52" name="Text 50"/>
-          <p:cNvSpPr/>
-          <p:nvPr/>
-        </p:nvSpPr>
-        <p:spPr>
-          <a:xfrm>
-            <a:off x="7576947" y="4169664"/>
-            <a:ext cx="685800" cy="475488"/>
-          </a:xfrm>
-          <a:prstGeom prst="rect">
-            <a:avLst/>
-          </a:prstGeom>
-          <a:noFill/>
-          <a:ln/>
-        </p:spPr>
-        <p:txBody>
-          <a:bodyPr wrap="square" lIns="0" tIns="0" rIns="0" bIns="0" rtlCol="0" anchor="ctr"/>
-          <a:lstStyle/>
-          <a:p>
-            <a:pPr algn="ctr" indent="0" marL="0">
-              <a:buNone/>
-            </a:pPr>
-            <a:r>
-              <a:rPr lang="en-US" sz="900" b="1" dirty="0">
-                <a:solidFill>
-                  <a:srgbClr val="9D174D"/>
-                </a:solidFill>
-                <a:latin typeface="Trebuchet MS" pitchFamily="34" charset="0"/>
-                <a:ea typeface="Trebuchet MS" pitchFamily="34" charset="-122"/>
-                <a:cs typeface="Trebuchet MS" pitchFamily="34" charset="-120"/>
-              </a:rPr>
-              <a:t>ed</a:t>
+              <a:t>d</a:t>
             </a:r>
             <a:endParaRPr lang="en-US" sz="900" dirty="0"/>
           </a:p>
@@ -32808,7 +31920,7 @@
                 <a:ea typeface="Calibri" pitchFamily="34" charset="-122"/>
                 <a:cs typeface="Calibri" pitchFamily="34" charset="-120"/>
               </a:rPr>
-              <a:t>Word Labs  •  wordlabs.app  •  Root: 'start' = begin, move suddenly, jump</a:t>
+              <a:t>Word Labs  •  wordlabs.app  •  Root: 'start' = begin, move suddenly, set going</a:t>
             </a:r>
             <a:endParaRPr lang="en-US" sz="800" dirty="0"/>
           </a:p>
@@ -33977,7 +33089,7 @@
                 <a:ea typeface="Calibri" pitchFamily="34" charset="-122"/>
                 <a:cs typeface="Calibri" pitchFamily="34" charset="-120"/>
               </a:rPr>
-              <a:t>Word Labs  •  wordlabs.app  •  Root: 'start' = begin, move suddenly, jump</a:t>
+              <a:t>Word Labs  •  wordlabs.app  •  Root: 'start' = begin, move suddenly, set going</a:t>
             </a:r>
             <a:endParaRPr lang="en-US" sz="800" dirty="0"/>
           </a:p>
@@ -34776,7 +33888,7 @@
                 <a:ea typeface="Trebuchet MS" pitchFamily="34" charset="-122"/>
                 <a:cs typeface="Trebuchet MS" pitchFamily="34" charset="-120"/>
               </a:rPr>
-              <a:t>jump-</a:t>
+              <a:t>down-</a:t>
             </a:r>
             <a:endParaRPr lang="en-US" sz="1300" dirty="0"/>
           </a:p>
@@ -34929,7 +34041,7 @@
                 <a:ea typeface="Trebuchet MS" pitchFamily="34" charset="-122"/>
                 <a:cs typeface="Trebuchet MS" pitchFamily="34" charset="-120"/>
               </a:rPr>
-              <a:t>false-</a:t>
+              <a:t>out-</a:t>
             </a:r>
             <a:endParaRPr lang="en-US" sz="1300" dirty="0"/>
           </a:p>
@@ -35018,7 +34130,7 @@
                 <a:ea typeface="Trebuchet MS" pitchFamily="34" charset="-122"/>
                 <a:cs typeface="Trebuchet MS" pitchFamily="34" charset="-120"/>
               </a:rPr>
-              <a:t>-le</a:t>
+              <a:t>-ling</a:t>
             </a:r>
             <a:endParaRPr lang="en-US" sz="1300" dirty="0"/>
           </a:p>
@@ -35519,7 +34631,7 @@
                 <a:ea typeface="Trebuchet MS" pitchFamily="34" charset="-122"/>
                 <a:cs typeface="Trebuchet MS" pitchFamily="34" charset="-120"/>
               </a:rPr>
-              <a:t>jumpstart</a:t>
+              <a:t>startling</a:t>
             </a:r>
             <a:endParaRPr lang="en-US" sz="1200" dirty="0"/>
           </a:p>
@@ -35585,7 +34697,7 @@
                 <a:ea typeface="Trebuchet MS" pitchFamily="34" charset="-122"/>
                 <a:cs typeface="Trebuchet MS" pitchFamily="34" charset="-120"/>
               </a:rPr>
-              <a:t>upstart</a:t>
+              <a:t>downstart</a:t>
             </a:r>
             <a:endParaRPr lang="en-US" sz="1200" dirty="0"/>
           </a:p>
@@ -35877,7 +34989,7 @@
                 <a:ea typeface="Calibri" pitchFamily="34" charset="-122"/>
                 <a:cs typeface="Calibri" pitchFamily="34" charset="-120"/>
               </a:rPr>
-              <a:t>Word Labs  •  wordlabs.app  •  Root: 'start' = begin, move suddenly, jump</a:t>
+              <a:t>Word Labs  •  wordlabs.app  •  Root: 'start' = begin, move suddenly, set going</a:t>
             </a:r>
             <a:endParaRPr lang="en-US" sz="800" dirty="0"/>
           </a:p>
@@ -36041,7 +35153,7 @@
                 <a:ea typeface="Calibri" pitchFamily="34" charset="-122"/>
                 <a:cs typeface="Calibri" pitchFamily="34" charset="-120"/>
               </a:rPr>
-              <a:t>The core part of a word carrying its basic meaning. For example, 'start' means 'begin, move suddenly, jump'.</a:t>
+              <a:t>The core part of a word carrying its basic meaning. For example, 'start' means 'begin, move suddenly, set going'.</a:t>
             </a:r>
             <a:endParaRPr lang="en-US" sz="1350" dirty="0"/>
           </a:p>
@@ -36661,7 +35773,7 @@
                 <a:ea typeface="Calibri" pitchFamily="34" charset="-122"/>
                 <a:cs typeface="Calibri" pitchFamily="34" charset="-120"/>
               </a:rPr>
-              <a:t>Word Labs  •  wordlabs.app  •  Root: 'start' = begin, move suddenly, jump</a:t>
+              <a:t>Word Labs  •  wordlabs.app  •  Root: 'start' = begin, move suddenly, set going</a:t>
             </a:r>
             <a:endParaRPr lang="en-US" sz="800" dirty="0"/>
           </a:p>
@@ -36773,7 +35885,7 @@
                 <a:ea typeface="Calibri" pitchFamily="34" charset="-122"/>
                 <a:cs typeface="Calibri" pitchFamily="34" charset="-120"/>
               </a:rPr>
-              <a:t>1.  The word 'restart' means to begin something again.</a:t>
+              <a:t>1.  A 'headstart' means you get to begin before everyone else.</a:t>
             </a:r>
             <a:endParaRPr lang="en-US" sz="1300" dirty="0"/>
           </a:p>
@@ -36912,7 +36024,7 @@
                 <a:ea typeface="Calibri" pitchFamily="34" charset="-122"/>
                 <a:cs typeface="Calibri" pitchFamily="34" charset="-120"/>
               </a:rPr>
-              <a:t>2.  The suffix '-er' in 'starter' means the same as the prefix 're-'.</a:t>
+              <a:t>2.  The suffix '-er' in 'starter' means to do something again.</a:t>
             </a:r>
             <a:endParaRPr lang="en-US" sz="1300" dirty="0"/>
           </a:p>
@@ -37051,7 +36163,7 @@
                 <a:ea typeface="Calibri" pitchFamily="34" charset="-122"/>
                 <a:cs typeface="Calibri" pitchFamily="34" charset="-120"/>
               </a:rPr>
-              <a:t>3.  A 'headstart' means you begin before everyone else, giving you an advantage.</a:t>
+              <a:t>3.  The word 'restart' contains the root 'start' meaning to begin again.</a:t>
             </a:r>
             <a:endParaRPr lang="en-US" sz="1300" dirty="0"/>
           </a:p>
@@ -37190,7 +36302,7 @@
                 <a:ea typeface="Calibri" pitchFamily="34" charset="-122"/>
                 <a:cs typeface="Calibri" pitchFamily="34" charset="-120"/>
               </a:rPr>
-              <a:t>4.  The word 'starting' uses the suffix '-ing' to show something is happening right now.</a:t>
+              <a:t>4.  The root 'start' comes from the ancient Greek word for running.</a:t>
             </a:r>
             <a:endParaRPr lang="en-US" sz="1300" dirty="0"/>
           </a:p>
@@ -37213,11 +36325,11 @@
             </a:avLst>
           </a:prstGeom>
           <a:solidFill>
-            <a:srgbClr val="DCFCE7"/>
-          </a:solidFill>
-          <a:ln w="12700">
-            <a:solidFill>
-              <a:srgbClr val="16A34A"/>
+            <a:srgbClr val="FEE2E2"/>
+          </a:solidFill>
+          <a:ln w="12700">
+            <a:solidFill>
+              <a:srgbClr val="DC2626"/>
             </a:solidFill>
             <a:prstDash val="solid"/>
           </a:ln>
@@ -37250,13 +36362,13 @@
             <a:r>
               <a:rPr lang="en-US" sz="1100" b="1" dirty="0">
                 <a:solidFill>
-                  <a:srgbClr val="16A34A"/>
+                  <a:srgbClr val="DC2626"/>
                 </a:solidFill>
                 <a:latin typeface="Trebuchet MS" pitchFamily="34" charset="0"/>
                 <a:ea typeface="Trebuchet MS" pitchFamily="34" charset="-122"/>
                 <a:cs typeface="Trebuchet MS" pitchFamily="34" charset="-120"/>
               </a:rPr>
-              <a:t>TRUE</a:t>
+              <a:t>FALSE</a:t>
             </a:r>
             <a:endParaRPr lang="en-US" sz="1100" dirty="0"/>
           </a:p>
@@ -37329,7 +36441,7 @@
                 <a:ea typeface="Calibri" pitchFamily="34" charset="-122"/>
                 <a:cs typeface="Calibri" pitchFamily="34" charset="-120"/>
               </a:rPr>
-              <a:t>5.  The word 'started' means something is about to begin in the future.</a:t>
+              <a:t>5.  Adding the suffix '-ing' to 'start' makes the word 'starting'.</a:t>
             </a:r>
             <a:endParaRPr lang="en-US" sz="1300" dirty="0"/>
           </a:p>
@@ -37352,11 +36464,11 @@
             </a:avLst>
           </a:prstGeom>
           <a:solidFill>
-            <a:srgbClr val="FEE2E2"/>
-          </a:solidFill>
-          <a:ln w="12700">
-            <a:solidFill>
-              <a:srgbClr val="DC2626"/>
+            <a:srgbClr val="DCFCE7"/>
+          </a:solidFill>
+          <a:ln w="12700">
+            <a:solidFill>
+              <a:srgbClr val="16A34A"/>
             </a:solidFill>
             <a:prstDash val="solid"/>
           </a:ln>
@@ -37389,13 +36501,13 @@
             <a:r>
               <a:rPr lang="en-US" sz="1100" b="1" dirty="0">
                 <a:solidFill>
-                  <a:srgbClr val="DC2626"/>
+                  <a:srgbClr val="16A34A"/>
                 </a:solidFill>
                 <a:latin typeface="Trebuchet MS" pitchFamily="34" charset="0"/>
                 <a:ea typeface="Trebuchet MS" pitchFamily="34" charset="-122"/>
                 <a:cs typeface="Trebuchet MS" pitchFamily="34" charset="-120"/>
               </a:rPr>
-              <a:t>FALSE</a:t>
+              <a:t>TRUE</a:t>
             </a:r>
             <a:endParaRPr lang="en-US" sz="1100" dirty="0"/>
           </a:p>
@@ -37687,7 +36799,7 @@
                 <a:ea typeface="Calibri" pitchFamily="34" charset="-122"/>
                 <a:cs typeface="Calibri" pitchFamily="34" charset="-120"/>
               </a:rPr>
-              <a:t>Word Labs  •  wordlabs.app  •  Root: 'start' = begin, move suddenly, jump</a:t>
+              <a:t>Word Labs  •  wordlabs.app  •  Root: 'start' = begin, move suddenly, set going</a:t>
             </a:r>
             <a:endParaRPr lang="en-US" sz="800" dirty="0"/>
           </a:p>
@@ -37824,7 +36936,7 @@
                 <a:ea typeface="Trebuchet MS" pitchFamily="34" charset="-122"/>
                 <a:cs typeface="Trebuchet MS" pitchFamily="34" charset="-120"/>
               </a:rPr>
-              <a:t>begin, move suddenly, jump</a:t>
+              <a:t>begin, move suddenly, set going</a:t>
             </a:r>
             <a:endParaRPr lang="en-US" sz="2000" dirty="0"/>
           </a:p>
@@ -37863,7 +36975,7 @@
                 <a:ea typeface="Calibri" pitchFamily="34" charset="-122"/>
                 <a:cs typeface="Calibri" pitchFamily="34" charset="-120"/>
               </a:rPr>
-              <a:t>Origin: Old English: styrtan</a:t>
+              <a:t>Origin: Latin: startare</a:t>
             </a:r>
             <a:endParaRPr lang="en-US" sz="1100" dirty="0"/>
           </a:p>
@@ -38364,7 +37476,7 @@
                 <a:ea typeface="Trebuchet MS" pitchFamily="34" charset="-122"/>
                 <a:cs typeface="Trebuchet MS" pitchFamily="34" charset="-120"/>
               </a:rPr>
-              <a:t>jumpstart</a:t>
+              <a:t>startling</a:t>
             </a:r>
             <a:endParaRPr lang="en-US" sz="1300" dirty="0"/>
           </a:p>
@@ -38656,7 +37768,7 @@
                 <a:ea typeface="Calibri" pitchFamily="34" charset="-122"/>
                 <a:cs typeface="Calibri" pitchFamily="34" charset="-120"/>
               </a:rPr>
-              <a:t>Word Labs  •  wordlabs.app  •  Root: 'start' = begin, move suddenly, jump</a:t>
+              <a:t>Word Labs  •  wordlabs.app  •  Root: 'start' = begin, move suddenly, set going</a:t>
             </a:r>
             <a:endParaRPr lang="en-US" sz="800" dirty="0"/>
           </a:p>
@@ -39455,7 +38567,7 @@
                 <a:ea typeface="Trebuchet MS" pitchFamily="34" charset="-122"/>
                 <a:cs typeface="Trebuchet MS" pitchFamily="34" charset="-120"/>
               </a:rPr>
-              <a:t>jump-</a:t>
+              <a:t>down-</a:t>
             </a:r>
             <a:endParaRPr lang="en-US" sz="1300" dirty="0"/>
           </a:p>
@@ -39608,7 +38720,7 @@
                 <a:ea typeface="Trebuchet MS" pitchFamily="34" charset="-122"/>
                 <a:cs typeface="Trebuchet MS" pitchFamily="34" charset="-120"/>
               </a:rPr>
-              <a:t>false-</a:t>
+              <a:t>out-</a:t>
             </a:r>
             <a:endParaRPr lang="en-US" sz="1300" dirty="0"/>
           </a:p>
@@ -39697,7 +38809,7 @@
                 <a:ea typeface="Trebuchet MS" pitchFamily="34" charset="-122"/>
                 <a:cs typeface="Trebuchet MS" pitchFamily="34" charset="-120"/>
               </a:rPr>
-              <a:t>-le</a:t>
+              <a:t>-ling</a:t>
             </a:r>
             <a:endParaRPr lang="en-US" sz="1300" dirty="0"/>
           </a:p>
@@ -40430,7 +39542,7 @@
                 <a:ea typeface="Calibri" pitchFamily="34" charset="-122"/>
                 <a:cs typeface="Calibri" pitchFamily="34" charset="-120"/>
               </a:rPr>
-              <a:t>Word Labs  •  wordlabs.app  •  Root: 'start' = begin, move suddenly, jump</a:t>
+              <a:t>Word Labs  •  wordlabs.app  •  Root: 'start' = begin, move suddenly, set going</a:t>
             </a:r>
             <a:endParaRPr lang="en-US" sz="800" dirty="0"/>
           </a:p>
@@ -40608,7 +39720,7 @@
                 <a:ea typeface="Calibri" pitchFamily="34" charset="-122"/>
                 <a:cs typeface="Calibri" pitchFamily="34" charset="-120"/>
               </a:rPr>
-              <a:t>To start a car using another car's battery, or to quickly get something going.</a:t>
+              <a:t>Something that surprises or shocks you suddenly.</a:t>
             </a:r>
             <a:endParaRPr lang="en-US" sz="1200" dirty="0"/>
           </a:p>
@@ -40747,7 +39859,7 @@
                 <a:ea typeface="Calibri" pitchFamily="34" charset="-122"/>
                 <a:cs typeface="Calibri" pitchFamily="34" charset="-120"/>
               </a:rPr>
-              <a:t>To start something quickly and with energy, or to start a motorbike with a kick.</a:t>
+              <a:t>To start something quickly with a strong push or kick.</a:t>
             </a:r>
             <a:endParaRPr lang="en-US" sz="1200" dirty="0"/>
           </a:p>
@@ -41025,7 +40137,7 @@
                 <a:ea typeface="Calibri" pitchFamily="34" charset="-122"/>
                 <a:cs typeface="Calibri" pitchFamily="34" charset="-120"/>
               </a:rPr>
-              <a:t>An advantage you get by beginning before everyone else.</a:t>
+              <a:t>An advantage given to someone by letting them begin before others.</a:t>
             </a:r>
             <a:endParaRPr lang="en-US" sz="1200" dirty="0"/>
           </a:p>
@@ -41164,7 +40276,7 @@
                 <a:ea typeface="Calibri" pitchFamily="34" charset="-122"/>
                 <a:cs typeface="Calibri" pitchFamily="34" charset="-120"/>
               </a:rPr>
-              <a:t>A person or thing that begins something, or the first part of a meal.</a:t>
+              <a:t>A person or thing that begins something, like the first course of a meal.</a:t>
             </a:r>
             <a:endParaRPr lang="en-US" sz="1200" dirty="0"/>
           </a:p>
@@ -41303,7 +40415,7 @@
                 <a:ea typeface="Calibri" pitchFamily="34" charset="-122"/>
                 <a:cs typeface="Calibri" pitchFamily="34" charset="-120"/>
               </a:rPr>
-              <a:t>When something has already begun, like a race that already started.</a:t>
+              <a:t>When something began or got going in the past.</a:t>
             </a:r>
             <a:endParaRPr lang="en-US" sz="1200" dirty="0"/>
           </a:p>
@@ -41376,7 +40488,7 @@
                 <a:ea typeface="Trebuchet MS" pitchFamily="34" charset="-122"/>
                 <a:cs typeface="Trebuchet MS" pitchFamily="34" charset="-120"/>
               </a:rPr>
-              <a:t>jumpstart</a:t>
+              <a:t>startling</a:t>
             </a:r>
             <a:endParaRPr lang="en-US" sz="1200" dirty="0"/>
           </a:p>
@@ -41442,7 +40554,7 @@
                 <a:ea typeface="Calibri" pitchFamily="34" charset="-122"/>
                 <a:cs typeface="Calibri" pitchFamily="34" charset="-120"/>
               </a:rPr>
-              <a:t>In the middle of beginning something, like starting your homework.</a:t>
+              <a:t>When something is beginning right now or about to begin.</a:t>
             </a:r>
             <a:endParaRPr lang="en-US" sz="1200" dirty="0"/>
           </a:p>
@@ -41734,7 +40846,7 @@
                 <a:ea typeface="Calibri" pitchFamily="34" charset="-122"/>
                 <a:cs typeface="Calibri" pitchFamily="34" charset="-120"/>
               </a:rPr>
-              <a:t>Word Labs  •  wordlabs.app  •  Root: 'start' = begin, move suddenly, jump</a:t>
+              <a:t>Word Labs  •  wordlabs.app  •  Root: 'start' = begin, move suddenly, set going</a:t>
             </a:r>
             <a:endParaRPr lang="en-US" sz="800" dirty="0"/>
           </a:p>
@@ -41937,7 +41049,7 @@
                 <a:ea typeface="Calibri" pitchFamily="34" charset="-122"/>
                 <a:cs typeface="Calibri" pitchFamily="34" charset="-120"/>
               </a:rPr>
-              <a:t>The teacher asked everyone to restart their computers before the lesson began.</a:t>
+              <a:t>The students were given a head start in the race because they were the youngest competitors.</a:t>
             </a:r>
             <a:endParaRPr lang="en-US" sz="1500" dirty="0"/>
           </a:p>
@@ -42101,7 +41213,7 @@
                 <a:ea typeface="Calibri" pitchFamily="34" charset="-122"/>
                 <a:cs typeface="Calibri" pitchFamily="34" charset="-120"/>
               </a:rPr>
-              <a:t>Mia had a headstart in the race because she was allowed to begin ten seconds early.</a:t>
+              <a:t>The teacher asked everyone to restart the activity after the fire drill interrupted the class.</a:t>
             </a:r>
             <a:endParaRPr lang="en-US" sz="1500" dirty="0"/>
           </a:p>
@@ -42265,7 +41377,7 @@
                 <a:ea typeface="Calibri" pitchFamily="34" charset="-122"/>
                 <a:cs typeface="Calibri" pitchFamily="34" charset="-120"/>
               </a:rPr>
-              <a:t>The starting signal for the swimming carnival was a loud horn that echoed across the pool.</a:t>
+              <a:t>The startling noise from the thunderstorm made the whole class jump in their seats.</a:t>
             </a:r>
             <a:endParaRPr lang="en-US" sz="1500" dirty="0"/>
           </a:p>

--- a/output/wordlabs-start-3day.pptx
+++ b/output/wordlabs-start-3day.pptx
@@ -4240,7 +4240,7 @@
                 <a:ea typeface="Calibri" pitchFamily="34" charset="-122"/>
                 <a:cs typeface="Calibri" pitchFamily="34" charset="-120"/>
               </a:rPr>
-              <a:t>"begin, move suddenly, set going"</a:t>
+              <a:t>"to begin"</a:t>
             </a:r>
             <a:endParaRPr lang="en-US" sz="2200" dirty="0"/>
           </a:p>
@@ -4279,7 +4279,7 @@
                 <a:ea typeface="Calibri" pitchFamily="34" charset="-122"/>
                 <a:cs typeface="Calibri" pitchFamily="34" charset="-120"/>
               </a:rPr>
-              <a:t>Origin: Latin: startare</a:t>
+              <a:t>Origin: Anglo-Saxon (Old English) root</a:t>
             </a:r>
             <a:endParaRPr lang="en-US" sz="1300" dirty="0"/>
           </a:p>
@@ -5288,7 +5288,7 @@
                 <a:ea typeface="Calibri" pitchFamily="34" charset="-122"/>
                 <a:cs typeface="Calibri" pitchFamily="34" charset="-120"/>
               </a:rPr>
-              <a:t>Word Labs  •  wordlabs.app  •  Root: 'start' = begin, move suddenly, set going</a:t>
+              <a:t>Word Labs  •  wordlabs.app  •  Root: 'start' = to begin</a:t>
             </a:r>
             <a:endParaRPr lang="en-US" sz="800" dirty="0"/>
           </a:p>
@@ -5622,7 +5622,7 @@
                 <a:ea typeface="Trebuchet MS" pitchFamily="34" charset="-122"/>
                 <a:cs typeface="Trebuchet MS" pitchFamily="34" charset="-120"/>
               </a:rPr>
-              <a:t>1</a:t>
+              <a:t>0</a:t>
             </a:r>
             <a:pPr algn="ctr" indent="0" marL="0">
               <a:buNone/>
@@ -5928,7 +5928,7 @@
                 <a:ea typeface="Calibri" pitchFamily="34" charset="-122"/>
                 <a:cs typeface="Calibri" pitchFamily="34" charset="-120"/>
               </a:rPr>
-              <a:t>Word Labs  •  wordlabs.app  •  Root: 'start' = begin, move suddenly, set going</a:t>
+              <a:t>Word Labs  •  wordlabs.app  •  Root: 'start' = to begin</a:t>
             </a:r>
             <a:endParaRPr lang="en-US" sz="800" dirty="0"/>
           </a:p>
@@ -6040,7 +6040,7 @@
                 <a:ea typeface="Calibri" pitchFamily="34" charset="-122"/>
                 <a:cs typeface="Calibri" pitchFamily="34" charset="-120"/>
               </a:rPr>
-              <a:t>We had to </a:t>
+              <a:t>We ordered soup as our </a:t>
             </a:r>
             <a:pPr algn="l" indent="0" marL="0">
               <a:buNone/>
@@ -6057,7 +6057,7 @@
                 <a:ea typeface="Calibri" pitchFamily="34" charset="-122"/>
                 <a:cs typeface="Calibri" pitchFamily="34" charset="-120"/>
               </a:rPr>
-              <a:t>restart</a:t>
+              <a:t>starter</a:t>
             </a:r>
             <a:pPr algn="l" indent="0" marL="0">
               <a:buNone/>
@@ -6071,7 +6071,7 @@
                 <a:ea typeface="Calibri" pitchFamily="34" charset="-122"/>
                 <a:cs typeface="Calibri" pitchFamily="34" charset="-120"/>
               </a:rPr>
-              <a:t> the game after the power went out, but the quick </a:t>
+              <a:t> before the main course. The waiter brought our </a:t>
             </a:r>
             <a:pPr algn="l" indent="0" marL="0">
               <a:buNone/>
@@ -6088,7 +6088,7 @@
                 <a:ea typeface="Calibri" pitchFamily="34" charset="-122"/>
                 <a:cs typeface="Calibri" pitchFamily="34" charset="-120"/>
               </a:rPr>
-              <a:t>restart</a:t>
+              <a:t>starters</a:t>
             </a:r>
             <a:pPr algn="l" indent="0" marL="0">
               <a:buNone/>
@@ -6102,7 +6102,7 @@
                 <a:ea typeface="Calibri" pitchFamily="34" charset="-122"/>
                 <a:cs typeface="Calibri" pitchFamily="34" charset="-120"/>
               </a:rPr>
-              <a:t> meant we didn't lose much time.</a:t>
+              <a:t> to the table.</a:t>
             </a:r>
             <a:endParaRPr lang="en-US" sz="1800" dirty="0"/>
           </a:p>
@@ -6257,7 +6257,7 @@
                 <a:ea typeface="Trebuchet MS" pitchFamily="34" charset="-122"/>
                 <a:cs typeface="Trebuchet MS" pitchFamily="34" charset="-120"/>
               </a:rPr>
-              <a:t>restart</a:t>
+              <a:t>starter</a:t>
             </a:r>
             <a:endParaRPr lang="en-US" sz="1400" dirty="0"/>
           </a:p>
@@ -6385,7 +6385,7 @@
                 <a:ea typeface="Trebuchet MS" pitchFamily="34" charset="-122"/>
                 <a:cs typeface="Trebuchet MS" pitchFamily="34" charset="-120"/>
               </a:rPr>
-              <a:t>starting</a:t>
+              <a:t>starters</a:t>
             </a:r>
             <a:endParaRPr lang="en-US" sz="1400" dirty="0"/>
           </a:p>
@@ -6716,7 +6716,7 @@
                 <a:ea typeface="Calibri" pitchFamily="34" charset="-122"/>
                 <a:cs typeface="Calibri" pitchFamily="34" charset="-120"/>
               </a:rPr>
-              <a:t>Word Labs  •  wordlabs.app  •  Root: 'start' = begin, move suddenly, set going</a:t>
+              <a:t>Word Labs  •  wordlabs.app  •  Root: 'start' = to begin</a:t>
             </a:r>
             <a:endParaRPr lang="en-US" sz="800" dirty="0"/>
           </a:p>
@@ -6855,7 +6855,7 @@
                 <a:ea typeface="Trebuchet MS" pitchFamily="34" charset="-122"/>
                 <a:cs typeface="Trebuchet MS" pitchFamily="34" charset="-120"/>
               </a:rPr>
-              <a:t>restart</a:t>
+              <a:t>starter</a:t>
             </a:r>
             <a:endParaRPr lang="en-US" sz="2800" dirty="0"/>
           </a:p>
@@ -7543,7 +7543,7 @@
                 <a:ea typeface="Calibri" pitchFamily="34" charset="-122"/>
                 <a:cs typeface="Calibri" pitchFamily="34" charset="-120"/>
               </a:rPr>
-              <a:t>Word Labs  •  wordlabs.app  •  Root: 'start' = begin, move suddenly, set going</a:t>
+              <a:t>Word Labs  •  wordlabs.app  •  Root: 'start' = to begin</a:t>
             </a:r>
             <a:endParaRPr lang="en-US" sz="800" dirty="0"/>
           </a:p>
@@ -7682,7 +7682,7 @@
                 <a:ea typeface="Trebuchet MS" pitchFamily="34" charset="-122"/>
                 <a:cs typeface="Trebuchet MS" pitchFamily="34" charset="-120"/>
               </a:rPr>
-              <a:t>restart</a:t>
+              <a:t>starter</a:t>
             </a:r>
             <a:endParaRPr lang="en-US" sz="2800" dirty="0"/>
           </a:p>
@@ -7771,11 +7771,11 @@
             </a:avLst>
           </a:prstGeom>
           <a:solidFill>
-            <a:srgbClr val="DDD6FE"/>
+            <a:srgbClr val="CCFBF1"/>
           </a:solidFill>
           <a:ln w="19050">
             <a:solidFill>
-              <a:srgbClr val="7C3AED"/>
+              <a:srgbClr val="0D9488"/>
             </a:solidFill>
             <a:prstDash val="solid"/>
           </a:ln>
@@ -7815,13 +7815,13 @@
             <a:r>
               <a:rPr lang="en-US" sz="1300" b="1" dirty="0">
                 <a:solidFill>
-                  <a:srgbClr val="4C1D95"/>
+                  <a:srgbClr val="0F766E"/>
                 </a:solidFill>
                 <a:latin typeface="Trebuchet MS" pitchFamily="34" charset="0"/>
                 <a:ea typeface="Trebuchet MS" pitchFamily="34" charset="-122"/>
                 <a:cs typeface="Trebuchet MS" pitchFamily="34" charset="-120"/>
               </a:rPr>
-              <a:t>re</a:t>
+              <a:t>start</a:t>
             </a:r>
             <a:endParaRPr lang="en-US" sz="1300" dirty="0"/>
           </a:p>
@@ -7860,7 +7860,7 @@
                 <a:ea typeface="Calibri" pitchFamily="34" charset="-122"/>
                 <a:cs typeface="Calibri" pitchFamily="34" charset="-120"/>
               </a:rPr>
-              <a:t>again</a:t>
+              <a:t>to begin</a:t>
             </a:r>
             <a:endParaRPr lang="en-US" sz="850" dirty="0"/>
           </a:p>
@@ -7883,11 +7883,11 @@
             </a:avLst>
           </a:prstGeom>
           <a:solidFill>
-            <a:srgbClr val="CCFBF1"/>
+            <a:srgbClr val="FCE7F3"/>
           </a:solidFill>
           <a:ln w="19050">
             <a:solidFill>
-              <a:srgbClr val="0D9488"/>
+              <a:srgbClr val="DB2777"/>
             </a:solidFill>
             <a:prstDash val="solid"/>
           </a:ln>
@@ -7927,13 +7927,13 @@
             <a:r>
               <a:rPr lang="en-US" sz="1300" b="1" dirty="0">
                 <a:solidFill>
-                  <a:srgbClr val="0F766E"/>
+                  <a:srgbClr val="9D174D"/>
                 </a:solidFill>
                 <a:latin typeface="Trebuchet MS" pitchFamily="34" charset="0"/>
                 <a:ea typeface="Trebuchet MS" pitchFamily="34" charset="-122"/>
                 <a:cs typeface="Trebuchet MS" pitchFamily="34" charset="-120"/>
               </a:rPr>
-              <a:t>start</a:t>
+              <a:t>er</a:t>
             </a:r>
             <a:endParaRPr lang="en-US" sz="1300" dirty="0"/>
           </a:p>
@@ -7972,7 +7972,7 @@
                 <a:ea typeface="Calibri" pitchFamily="34" charset="-122"/>
                 <a:cs typeface="Calibri" pitchFamily="34" charset="-120"/>
               </a:rPr>
-              <a:t>begin</a:t>
+              <a:t>person who; more</a:t>
             </a:r>
             <a:endParaRPr lang="en-US" sz="850" dirty="0"/>
           </a:p>
@@ -8528,7 +8528,7 @@
                 <a:ea typeface="Calibri" pitchFamily="34" charset="-122"/>
                 <a:cs typeface="Calibri" pitchFamily="34" charset="-120"/>
               </a:rPr>
-              <a:t>Word Labs  •  wordlabs.app  •  Root: 'start' = begin, move suddenly, set going</a:t>
+              <a:t>Word Labs  •  wordlabs.app  •  Root: 'start' = to begin</a:t>
             </a:r>
             <a:endParaRPr lang="en-US" sz="800" dirty="0"/>
           </a:p>
@@ -8667,7 +8667,7 @@
                 <a:ea typeface="Trebuchet MS" pitchFamily="34" charset="-122"/>
                 <a:cs typeface="Trebuchet MS" pitchFamily="34" charset="-120"/>
               </a:rPr>
-              <a:t>restart</a:t>
+              <a:t>starter</a:t>
             </a:r>
             <a:endParaRPr lang="en-US" sz="2800" dirty="0"/>
           </a:p>
@@ -8756,11 +8756,11 @@
             </a:avLst>
           </a:prstGeom>
           <a:solidFill>
-            <a:srgbClr val="DDD6FE"/>
+            <a:srgbClr val="CCFBF1"/>
           </a:solidFill>
           <a:ln w="19050">
             <a:solidFill>
-              <a:srgbClr val="7C3AED"/>
+              <a:srgbClr val="0D9488"/>
             </a:solidFill>
             <a:prstDash val="solid"/>
           </a:ln>
@@ -8800,13 +8800,13 @@
             <a:r>
               <a:rPr lang="en-US" sz="1300" b="1" dirty="0">
                 <a:solidFill>
-                  <a:srgbClr val="4C1D95"/>
+                  <a:srgbClr val="0F766E"/>
                 </a:solidFill>
                 <a:latin typeface="Trebuchet MS" pitchFamily="34" charset="0"/>
                 <a:ea typeface="Trebuchet MS" pitchFamily="34" charset="-122"/>
                 <a:cs typeface="Trebuchet MS" pitchFamily="34" charset="-120"/>
               </a:rPr>
-              <a:t>re</a:t>
+              <a:t>start</a:t>
             </a:r>
             <a:endParaRPr lang="en-US" sz="1300" dirty="0"/>
           </a:p>
@@ -8845,7 +8845,7 @@
                 <a:ea typeface="Calibri" pitchFamily="34" charset="-122"/>
                 <a:cs typeface="Calibri" pitchFamily="34" charset="-120"/>
               </a:rPr>
-              <a:t>again</a:t>
+              <a:t>to begin</a:t>
             </a:r>
             <a:endParaRPr lang="en-US" sz="850" dirty="0"/>
           </a:p>
@@ -8868,11 +8868,11 @@
             </a:avLst>
           </a:prstGeom>
           <a:solidFill>
-            <a:srgbClr val="CCFBF1"/>
+            <a:srgbClr val="FCE7F3"/>
           </a:solidFill>
           <a:ln w="19050">
             <a:solidFill>
-              <a:srgbClr val="0D9488"/>
+              <a:srgbClr val="DB2777"/>
             </a:solidFill>
             <a:prstDash val="solid"/>
           </a:ln>
@@ -8912,13 +8912,13 @@
             <a:r>
               <a:rPr lang="en-US" sz="1300" b="1" dirty="0">
                 <a:solidFill>
-                  <a:srgbClr val="0F766E"/>
+                  <a:srgbClr val="9D174D"/>
                 </a:solidFill>
                 <a:latin typeface="Trebuchet MS" pitchFamily="34" charset="0"/>
                 <a:ea typeface="Trebuchet MS" pitchFamily="34" charset="-122"/>
                 <a:cs typeface="Trebuchet MS" pitchFamily="34" charset="-120"/>
               </a:rPr>
-              <a:t>start</a:t>
+              <a:t>er</a:t>
             </a:r>
             <a:endParaRPr lang="en-US" sz="1300" dirty="0"/>
           </a:p>
@@ -8957,7 +8957,7 @@
                 <a:ea typeface="Calibri" pitchFamily="34" charset="-122"/>
                 <a:cs typeface="Calibri" pitchFamily="34" charset="-120"/>
               </a:rPr>
-              <a:t>begin</a:t>
+              <a:t>person who; more</a:t>
             </a:r>
             <a:endParaRPr lang="en-US" sz="850" dirty="0"/>
           </a:p>
@@ -9116,7 +9116,7 @@
                 <a:ea typeface="Trebuchet MS" pitchFamily="34" charset="-122"/>
                 <a:cs typeface="Trebuchet MS" pitchFamily="34" charset="-120"/>
               </a:rPr>
-              <a:t>re</a:t>
+              <a:t>start</a:t>
             </a:r>
             <a:endParaRPr lang="en-US" sz="1400" dirty="0"/>
           </a:p>
@@ -9221,7 +9221,7 @@
                 <a:ea typeface="Trebuchet MS" pitchFamily="34" charset="-122"/>
                 <a:cs typeface="Trebuchet MS" pitchFamily="34" charset="-120"/>
               </a:rPr>
-              <a:t>start</a:t>
+              <a:t>er</a:t>
             </a:r>
             <a:endParaRPr lang="en-US" sz="1400" dirty="0"/>
           </a:p>
@@ -9645,7 +9645,7 @@
                 <a:ea typeface="Calibri" pitchFamily="34" charset="-122"/>
                 <a:cs typeface="Calibri" pitchFamily="34" charset="-120"/>
               </a:rPr>
-              <a:t>Word Labs  •  wordlabs.app  •  Root: 'start' = begin, move suddenly, set going</a:t>
+              <a:t>Word Labs  •  wordlabs.app  •  Root: 'start' = to begin</a:t>
             </a:r>
             <a:endParaRPr lang="en-US" sz="800" dirty="0"/>
           </a:p>
@@ -9784,7 +9784,7 @@
                 <a:ea typeface="Trebuchet MS" pitchFamily="34" charset="-122"/>
                 <a:cs typeface="Trebuchet MS" pitchFamily="34" charset="-120"/>
               </a:rPr>
-              <a:t>restart</a:t>
+              <a:t>starter</a:t>
             </a:r>
             <a:endParaRPr lang="en-US" sz="2800" dirty="0"/>
           </a:p>
@@ -9873,11 +9873,11 @@
             </a:avLst>
           </a:prstGeom>
           <a:solidFill>
-            <a:srgbClr val="DDD6FE"/>
+            <a:srgbClr val="CCFBF1"/>
           </a:solidFill>
           <a:ln w="19050">
             <a:solidFill>
-              <a:srgbClr val="7C3AED"/>
+              <a:srgbClr val="0D9488"/>
             </a:solidFill>
             <a:prstDash val="solid"/>
           </a:ln>
@@ -9917,13 +9917,13 @@
             <a:r>
               <a:rPr lang="en-US" sz="1300" b="1" dirty="0">
                 <a:solidFill>
-                  <a:srgbClr val="4C1D95"/>
+                  <a:srgbClr val="0F766E"/>
                 </a:solidFill>
                 <a:latin typeface="Trebuchet MS" pitchFamily="34" charset="0"/>
                 <a:ea typeface="Trebuchet MS" pitchFamily="34" charset="-122"/>
                 <a:cs typeface="Trebuchet MS" pitchFamily="34" charset="-120"/>
               </a:rPr>
-              <a:t>re</a:t>
+              <a:t>start</a:t>
             </a:r>
             <a:endParaRPr lang="en-US" sz="1300" dirty="0"/>
           </a:p>
@@ -9962,7 +9962,7 @@
                 <a:ea typeface="Calibri" pitchFamily="34" charset="-122"/>
                 <a:cs typeface="Calibri" pitchFamily="34" charset="-120"/>
               </a:rPr>
-              <a:t>again</a:t>
+              <a:t>to begin</a:t>
             </a:r>
             <a:endParaRPr lang="en-US" sz="850" dirty="0"/>
           </a:p>
@@ -9985,11 +9985,11 @@
             </a:avLst>
           </a:prstGeom>
           <a:solidFill>
-            <a:srgbClr val="CCFBF1"/>
+            <a:srgbClr val="FCE7F3"/>
           </a:solidFill>
           <a:ln w="19050">
             <a:solidFill>
-              <a:srgbClr val="0D9488"/>
+              <a:srgbClr val="DB2777"/>
             </a:solidFill>
             <a:prstDash val="solid"/>
           </a:ln>
@@ -10029,13 +10029,13 @@
             <a:r>
               <a:rPr lang="en-US" sz="1300" b="1" dirty="0">
                 <a:solidFill>
-                  <a:srgbClr val="0F766E"/>
+                  <a:srgbClr val="9D174D"/>
                 </a:solidFill>
                 <a:latin typeface="Trebuchet MS" pitchFamily="34" charset="0"/>
                 <a:ea typeface="Trebuchet MS" pitchFamily="34" charset="-122"/>
                 <a:cs typeface="Trebuchet MS" pitchFamily="34" charset="-120"/>
               </a:rPr>
-              <a:t>start</a:t>
+              <a:t>er</a:t>
             </a:r>
             <a:endParaRPr lang="en-US" sz="1300" dirty="0"/>
           </a:p>
@@ -10074,7 +10074,7 @@
                 <a:ea typeface="Calibri" pitchFamily="34" charset="-122"/>
                 <a:cs typeface="Calibri" pitchFamily="34" charset="-120"/>
               </a:rPr>
-              <a:t>begin</a:t>
+              <a:t>person who; more</a:t>
             </a:r>
             <a:endParaRPr lang="en-US" sz="850" dirty="0"/>
           </a:p>
@@ -10233,7 +10233,7 @@
                 <a:ea typeface="Trebuchet MS" pitchFamily="34" charset="-122"/>
                 <a:cs typeface="Trebuchet MS" pitchFamily="34" charset="-120"/>
               </a:rPr>
-              <a:t>re</a:t>
+              <a:t>start</a:t>
             </a:r>
             <a:endParaRPr lang="en-US" sz="1400" dirty="0"/>
           </a:p>
@@ -10338,7 +10338,7 @@
                 <a:ea typeface="Trebuchet MS" pitchFamily="34" charset="-122"/>
                 <a:cs typeface="Trebuchet MS" pitchFamily="34" charset="-120"/>
               </a:rPr>
-              <a:t>start</a:t>
+              <a:t>er</a:t>
             </a:r>
             <a:endParaRPr lang="en-US" sz="1400" dirty="0"/>
           </a:p>
@@ -10497,7 +10497,7 @@
                 <a:ea typeface="Trebuchet MS" pitchFamily="34" charset="-122"/>
                 <a:cs typeface="Trebuchet MS" pitchFamily="34" charset="-120"/>
               </a:rPr>
-              <a:t>r</a:t>
+              <a:t>s</a:t>
             </a:r>
             <a:endParaRPr lang="en-US" sz="900" dirty="0"/>
           </a:p>
@@ -10563,7 +10563,7 @@
                 <a:ea typeface="Trebuchet MS" pitchFamily="34" charset="-122"/>
                 <a:cs typeface="Trebuchet MS" pitchFamily="34" charset="-120"/>
               </a:rPr>
-              <a:t>e</a:t>
+              <a:t>t</a:t>
             </a:r>
             <a:endParaRPr lang="en-US" sz="900" dirty="0"/>
           </a:p>
@@ -10629,7 +10629,7 @@
                 <a:ea typeface="Trebuchet MS" pitchFamily="34" charset="-122"/>
                 <a:cs typeface="Trebuchet MS" pitchFamily="34" charset="-120"/>
               </a:rPr>
-              <a:t>s</a:t>
+              <a:t>a</a:t>
             </a:r>
             <a:endParaRPr lang="en-US" sz="900" dirty="0"/>
           </a:p>
@@ -10695,7 +10695,7 @@
                 <a:ea typeface="Trebuchet MS" pitchFamily="34" charset="-122"/>
                 <a:cs typeface="Trebuchet MS" pitchFamily="34" charset="-120"/>
               </a:rPr>
-              <a:t>t</a:t>
+              <a:t>r</a:t>
             </a:r>
             <a:endParaRPr lang="en-US" sz="900" dirty="0"/>
           </a:p>
@@ -10761,7 +10761,7 @@
                 <a:ea typeface="Trebuchet MS" pitchFamily="34" charset="-122"/>
                 <a:cs typeface="Trebuchet MS" pitchFamily="34" charset="-120"/>
               </a:rPr>
-              <a:t>ar</a:t>
+              <a:t>t</a:t>
             </a:r>
             <a:endParaRPr lang="en-US" sz="900" dirty="0"/>
           </a:p>
@@ -10827,7 +10827,7 @@
                 <a:ea typeface="Trebuchet MS" pitchFamily="34" charset="-122"/>
                 <a:cs typeface="Trebuchet MS" pitchFamily="34" charset="-120"/>
               </a:rPr>
-              <a:t>t</a:t>
+              <a:t>er</a:t>
             </a:r>
             <a:endParaRPr lang="en-US" sz="900" dirty="0"/>
           </a:p>
@@ -11119,7 +11119,7 @@
                 <a:ea typeface="Calibri" pitchFamily="34" charset="-122"/>
                 <a:cs typeface="Calibri" pitchFamily="34" charset="-120"/>
               </a:rPr>
-              <a:t>Word Labs  •  wordlabs.app  •  Root: 'start' = begin, move suddenly, set going</a:t>
+              <a:t>Word Labs  •  wordlabs.app  •  Root: 'start' = to begin</a:t>
             </a:r>
             <a:endParaRPr lang="en-US" sz="800" dirty="0"/>
           </a:p>
@@ -11258,7 +11258,7 @@
                 <a:ea typeface="Trebuchet MS" pitchFamily="34" charset="-122"/>
                 <a:cs typeface="Trebuchet MS" pitchFamily="34" charset="-120"/>
               </a:rPr>
-              <a:t>starting</a:t>
+              <a:t>starters</a:t>
             </a:r>
             <a:endParaRPr lang="en-US" sz="2800" dirty="0"/>
           </a:p>
@@ -11946,7 +11946,7 @@
                 <a:ea typeface="Calibri" pitchFamily="34" charset="-122"/>
                 <a:cs typeface="Calibri" pitchFamily="34" charset="-120"/>
               </a:rPr>
-              <a:t>Word Labs  •  wordlabs.app  •  Root: 'start' = begin, move suddenly, set going</a:t>
+              <a:t>Word Labs  •  wordlabs.app  •  Root: 'start' = to begin</a:t>
             </a:r>
             <a:endParaRPr lang="en-US" sz="800" dirty="0"/>
           </a:p>
@@ -12085,7 +12085,7 @@
                 <a:ea typeface="Trebuchet MS" pitchFamily="34" charset="-122"/>
                 <a:cs typeface="Trebuchet MS" pitchFamily="34" charset="-120"/>
               </a:rPr>
-              <a:t>starting</a:t>
+              <a:t>starters</a:t>
             </a:r>
             <a:endParaRPr lang="en-US" sz="2800" dirty="0"/>
           </a:p>
@@ -12165,7 +12165,7 @@
         </p:nvSpPr>
         <p:spPr>
           <a:xfrm>
-            <a:off x="2938272" y="2258568"/>
+            <a:off x="2221992" y="2258568"/>
             <a:ext cx="1828800" cy="292608"/>
           </a:xfrm>
           <a:prstGeom prst="rect">
@@ -12199,7 +12199,7 @@
         </p:nvSpPr>
         <p:spPr>
           <a:xfrm>
-            <a:off x="2938272" y="2258568"/>
+            <a:off x="2221992" y="2258568"/>
             <a:ext cx="1828800" cy="292608"/>
           </a:xfrm>
           <a:prstGeom prst="rect">
@@ -12238,7 +12238,7 @@
         </p:nvSpPr>
         <p:spPr>
           <a:xfrm>
-            <a:off x="2938272" y="2569464"/>
+            <a:off x="2221992" y="2569464"/>
             <a:ext cx="1828800" cy="201168"/>
           </a:xfrm>
           <a:prstGeom prst="rect">
@@ -12263,7 +12263,7 @@
                 <a:ea typeface="Calibri" pitchFamily="34" charset="-122"/>
                 <a:cs typeface="Calibri" pitchFamily="34" charset="-120"/>
               </a:rPr>
-              <a:t>begin</a:t>
+              <a:t>to begin</a:t>
             </a:r>
             <a:endParaRPr lang="en-US" sz="850" dirty="0"/>
           </a:p>
@@ -12277,7 +12277,7 @@
         </p:nvSpPr>
         <p:spPr>
           <a:xfrm>
-            <a:off x="5803392" y="2258568"/>
+            <a:off x="4370832" y="2258568"/>
             <a:ext cx="1828800" cy="292608"/>
           </a:xfrm>
           <a:prstGeom prst="rect">
@@ -12311,7 +12311,7 @@
         </p:nvSpPr>
         <p:spPr>
           <a:xfrm>
-            <a:off x="5803392" y="2258568"/>
+            <a:off x="4370832" y="2258568"/>
             <a:ext cx="1828800" cy="292608"/>
           </a:xfrm>
           <a:prstGeom prst="rect">
@@ -12336,7 +12336,7 @@
                 <a:ea typeface="Trebuchet MS" pitchFamily="34" charset="-122"/>
                 <a:cs typeface="Trebuchet MS" pitchFamily="34" charset="-120"/>
               </a:rPr>
-              <a:t>ing</a:t>
+              <a:t>er</a:t>
             </a:r>
             <a:endParaRPr lang="en-US" sz="1300" dirty="0"/>
           </a:p>
@@ -12350,7 +12350,7 @@
         </p:nvSpPr>
         <p:spPr>
           <a:xfrm>
-            <a:off x="5803392" y="2569464"/>
+            <a:off x="4370832" y="2569464"/>
             <a:ext cx="1828800" cy="201168"/>
           </a:xfrm>
           <a:prstGeom prst="rect">
@@ -12375,7 +12375,7 @@
                 <a:ea typeface="Calibri" pitchFamily="34" charset="-122"/>
                 <a:cs typeface="Calibri" pitchFamily="34" charset="-120"/>
               </a:rPr>
-              <a:t>action happening now</a:t>
+              <a:t>person who; more</a:t>
             </a:r>
             <a:endParaRPr lang="en-US" sz="850" dirty="0"/>
           </a:p>
@@ -12384,6 +12384,118 @@
       <p:sp>
         <p:nvSpPr>
           <p:cNvPr id="22" name="Shape 20"/>
+          <p:cNvSpPr/>
+          <p:nvPr/>
+        </p:nvSpPr>
+        <p:spPr>
+          <a:xfrm>
+            <a:off x="6519672" y="2258568"/>
+            <a:ext cx="1828800" cy="292608"/>
+          </a:xfrm>
+          <a:prstGeom prst="rect">
+            <a:avLst>
+              <a:gd name="adj" fmla="val 25000"/>
+            </a:avLst>
+          </a:prstGeom>
+          <a:solidFill>
+            <a:srgbClr val="FCE7F3"/>
+          </a:solidFill>
+          <a:ln w="19050">
+            <a:solidFill>
+              <a:srgbClr val="DB2777"/>
+            </a:solidFill>
+            <a:prstDash val="solid"/>
+          </a:ln>
+          <a:effectLst>
+            <a:outerShdw sx="100000" sy="100000" kx="0" ky="0" algn="bl" rotWithShape="0" blurRad="101600" dist="38100" dir="8100000">
+              <a:srgbClr val="000000">
+                <a:alpha val="12000"/>
+              </a:srgbClr>
+            </a:outerShdw>
+          </a:effectLst>
+        </p:spPr>
+      </p:sp>
+      <p:sp>
+        <p:nvSpPr>
+          <p:cNvPr id="23" name="Text 21"/>
+          <p:cNvSpPr/>
+          <p:nvPr/>
+        </p:nvSpPr>
+        <p:spPr>
+          <a:xfrm>
+            <a:off x="6519672" y="2258568"/>
+            <a:ext cx="1828800" cy="292608"/>
+          </a:xfrm>
+          <a:prstGeom prst="rect">
+            <a:avLst/>
+          </a:prstGeom>
+          <a:noFill/>
+          <a:ln/>
+        </p:spPr>
+        <p:txBody>
+          <a:bodyPr wrap="square" lIns="0" tIns="0" rIns="0" bIns="0" rtlCol="0" anchor="ctr"/>
+          <a:lstStyle/>
+          <a:p>
+            <a:pPr algn="ctr" indent="0" marL="0">
+              <a:buNone/>
+            </a:pPr>
+            <a:r>
+              <a:rPr lang="en-US" sz="1300" b="1" dirty="0">
+                <a:solidFill>
+                  <a:srgbClr val="9D174D"/>
+                </a:solidFill>
+                <a:latin typeface="Trebuchet MS" pitchFamily="34" charset="0"/>
+                <a:ea typeface="Trebuchet MS" pitchFamily="34" charset="-122"/>
+                <a:cs typeface="Trebuchet MS" pitchFamily="34" charset="-120"/>
+              </a:rPr>
+              <a:t>s</a:t>
+            </a:r>
+            <a:endParaRPr lang="en-US" sz="1300" dirty="0"/>
+          </a:p>
+        </p:txBody>
+      </p:sp>
+      <p:sp>
+        <p:nvSpPr>
+          <p:cNvPr id="24" name="Text 22"/>
+          <p:cNvSpPr/>
+          <p:nvPr/>
+        </p:nvSpPr>
+        <p:spPr>
+          <a:xfrm>
+            <a:off x="6519672" y="2569464"/>
+            <a:ext cx="1828800" cy="201168"/>
+          </a:xfrm>
+          <a:prstGeom prst="rect">
+            <a:avLst/>
+          </a:prstGeom>
+          <a:noFill/>
+          <a:ln/>
+        </p:spPr>
+        <p:txBody>
+          <a:bodyPr wrap="square" lIns="0" tIns="0" rIns="0" bIns="0" rtlCol="0" anchor="t"/>
+          <a:lstStyle/>
+          <a:p>
+            <a:pPr algn="ctr" indent="0" marL="0">
+              <a:buNone/>
+            </a:pPr>
+            <a:r>
+              <a:rPr lang="en-US" sz="850" dirty="0">
+                <a:solidFill>
+                  <a:srgbClr val="475569"/>
+                </a:solidFill>
+                <a:latin typeface="Calibri" pitchFamily="34" charset="0"/>
+                <a:ea typeface="Calibri" pitchFamily="34" charset="-122"/>
+                <a:cs typeface="Calibri" pitchFamily="34" charset="-120"/>
+              </a:rPr>
+              <a:t>plural or present tense</a:t>
+            </a:r>
+            <a:endParaRPr lang="en-US" sz="850" dirty="0"/>
+          </a:p>
+        </p:txBody>
+      </p:sp>
+      <p:sp>
+        <p:nvSpPr>
+          <p:cNvPr id="25" name="Shape 23"/>
           <p:cNvSpPr/>
           <p:nvPr/>
         </p:nvSpPr>
@@ -12410,7 +12522,7 @@
       </p:sp>
       <p:sp>
         <p:nvSpPr>
-          <p:cNvPr id="23" name="Text 21"/>
+          <p:cNvPr id="26" name="Text 24"/>
           <p:cNvSpPr/>
           <p:nvPr/>
         </p:nvSpPr>
@@ -12449,7 +12561,7 @@
       </p:sp>
       <p:sp>
         <p:nvSpPr>
-          <p:cNvPr id="24" name="Shape 22"/>
+          <p:cNvPr id="27" name="Shape 25"/>
           <p:cNvSpPr/>
           <p:nvPr/>
         </p:nvSpPr>
@@ -12476,7 +12588,7 @@
       </p:sp>
       <p:sp>
         <p:nvSpPr>
-          <p:cNvPr id="25" name="Text 23"/>
+          <p:cNvPr id="28" name="Text 26"/>
           <p:cNvSpPr/>
           <p:nvPr/>
         </p:nvSpPr>
@@ -12515,7 +12627,7 @@
       </p:sp>
       <p:sp>
         <p:nvSpPr>
-          <p:cNvPr id="26" name="Shape 24"/>
+          <p:cNvPr id="29" name="Shape 27"/>
           <p:cNvSpPr/>
           <p:nvPr/>
         </p:nvSpPr>
@@ -12542,7 +12654,7 @@
       </p:sp>
       <p:sp>
         <p:nvSpPr>
-          <p:cNvPr id="27" name="Text 25"/>
+          <p:cNvPr id="30" name="Text 28"/>
           <p:cNvSpPr/>
           <p:nvPr/>
         </p:nvSpPr>
@@ -12581,7 +12693,7 @@
       </p:sp>
       <p:sp>
         <p:nvSpPr>
-          <p:cNvPr id="28" name="Shape 26"/>
+          <p:cNvPr id="31" name="Shape 29"/>
           <p:cNvSpPr/>
           <p:nvPr/>
         </p:nvSpPr>
@@ -12608,7 +12720,7 @@
       </p:sp>
       <p:sp>
         <p:nvSpPr>
-          <p:cNvPr id="29" name="Text 27"/>
+          <p:cNvPr id="32" name="Text 30"/>
           <p:cNvSpPr/>
           <p:nvPr/>
         </p:nvSpPr>
@@ -12931,7 +13043,7 @@
                 <a:ea typeface="Calibri" pitchFamily="34" charset="-122"/>
                 <a:cs typeface="Calibri" pitchFamily="34" charset="-120"/>
               </a:rPr>
-              <a:t>Word Labs  •  wordlabs.app  •  Root: 'start' = begin, move suddenly, set going</a:t>
+              <a:t>Word Labs  •  wordlabs.app  •  Root: 'start' = to begin</a:t>
             </a:r>
             <a:endParaRPr lang="en-US" sz="800" dirty="0"/>
           </a:p>
@@ -13070,7 +13182,7 @@
                 <a:ea typeface="Trebuchet MS" pitchFamily="34" charset="-122"/>
                 <a:cs typeface="Trebuchet MS" pitchFamily="34" charset="-120"/>
               </a:rPr>
-              <a:t>starting</a:t>
+              <a:t>starters</a:t>
             </a:r>
             <a:endParaRPr lang="en-US" sz="2800" dirty="0"/>
           </a:p>
@@ -13150,7 +13262,7 @@
         </p:nvSpPr>
         <p:spPr>
           <a:xfrm>
-            <a:off x="2938272" y="2258568"/>
+            <a:off x="2221992" y="2258568"/>
             <a:ext cx="1828800" cy="292608"/>
           </a:xfrm>
           <a:prstGeom prst="rect">
@@ -13184,7 +13296,7 @@
         </p:nvSpPr>
         <p:spPr>
           <a:xfrm>
-            <a:off x="2938272" y="2258568"/>
+            <a:off x="2221992" y="2258568"/>
             <a:ext cx="1828800" cy="292608"/>
           </a:xfrm>
           <a:prstGeom prst="rect">
@@ -13223,7 +13335,7 @@
         </p:nvSpPr>
         <p:spPr>
           <a:xfrm>
-            <a:off x="2938272" y="2569464"/>
+            <a:off x="2221992" y="2569464"/>
             <a:ext cx="1828800" cy="201168"/>
           </a:xfrm>
           <a:prstGeom prst="rect">
@@ -13248,7 +13360,7 @@
                 <a:ea typeface="Calibri" pitchFamily="34" charset="-122"/>
                 <a:cs typeface="Calibri" pitchFamily="34" charset="-120"/>
               </a:rPr>
-              <a:t>begin</a:t>
+              <a:t>to begin</a:t>
             </a:r>
             <a:endParaRPr lang="en-US" sz="850" dirty="0"/>
           </a:p>
@@ -13262,7 +13374,7 @@
         </p:nvSpPr>
         <p:spPr>
           <a:xfrm>
-            <a:off x="5803392" y="2258568"/>
+            <a:off x="4370832" y="2258568"/>
             <a:ext cx="1828800" cy="292608"/>
           </a:xfrm>
           <a:prstGeom prst="rect">
@@ -13296,7 +13408,7 @@
         </p:nvSpPr>
         <p:spPr>
           <a:xfrm>
-            <a:off x="5803392" y="2258568"/>
+            <a:off x="4370832" y="2258568"/>
             <a:ext cx="1828800" cy="292608"/>
           </a:xfrm>
           <a:prstGeom prst="rect">
@@ -13321,7 +13433,7 @@
                 <a:ea typeface="Trebuchet MS" pitchFamily="34" charset="-122"/>
                 <a:cs typeface="Trebuchet MS" pitchFamily="34" charset="-120"/>
               </a:rPr>
-              <a:t>ing</a:t>
+              <a:t>er</a:t>
             </a:r>
             <a:endParaRPr lang="en-US" sz="1300" dirty="0"/>
           </a:p>
@@ -13335,7 +13447,7 @@
         </p:nvSpPr>
         <p:spPr>
           <a:xfrm>
-            <a:off x="5803392" y="2569464"/>
+            <a:off x="4370832" y="2569464"/>
             <a:ext cx="1828800" cy="201168"/>
           </a:xfrm>
           <a:prstGeom prst="rect">
@@ -13360,7 +13472,7 @@
                 <a:ea typeface="Calibri" pitchFamily="34" charset="-122"/>
                 <a:cs typeface="Calibri" pitchFamily="34" charset="-120"/>
               </a:rPr>
-              <a:t>action happening now</a:t>
+              <a:t>person who; more</a:t>
             </a:r>
             <a:endParaRPr lang="en-US" sz="850" dirty="0"/>
           </a:p>
@@ -13369,6 +13481,118 @@
       <p:sp>
         <p:nvSpPr>
           <p:cNvPr id="22" name="Shape 20"/>
+          <p:cNvSpPr/>
+          <p:nvPr/>
+        </p:nvSpPr>
+        <p:spPr>
+          <a:xfrm>
+            <a:off x="6519672" y="2258568"/>
+            <a:ext cx="1828800" cy="292608"/>
+          </a:xfrm>
+          <a:prstGeom prst="rect">
+            <a:avLst>
+              <a:gd name="adj" fmla="val 25000"/>
+            </a:avLst>
+          </a:prstGeom>
+          <a:solidFill>
+            <a:srgbClr val="FCE7F3"/>
+          </a:solidFill>
+          <a:ln w="19050">
+            <a:solidFill>
+              <a:srgbClr val="DB2777"/>
+            </a:solidFill>
+            <a:prstDash val="solid"/>
+          </a:ln>
+          <a:effectLst>
+            <a:outerShdw sx="100000" sy="100000" kx="0" ky="0" algn="bl" rotWithShape="0" blurRad="101600" dist="38100" dir="8100000">
+              <a:srgbClr val="000000">
+                <a:alpha val="12000"/>
+              </a:srgbClr>
+            </a:outerShdw>
+          </a:effectLst>
+        </p:spPr>
+      </p:sp>
+      <p:sp>
+        <p:nvSpPr>
+          <p:cNvPr id="23" name="Text 21"/>
+          <p:cNvSpPr/>
+          <p:nvPr/>
+        </p:nvSpPr>
+        <p:spPr>
+          <a:xfrm>
+            <a:off x="6519672" y="2258568"/>
+            <a:ext cx="1828800" cy="292608"/>
+          </a:xfrm>
+          <a:prstGeom prst="rect">
+            <a:avLst/>
+          </a:prstGeom>
+          <a:noFill/>
+          <a:ln/>
+        </p:spPr>
+        <p:txBody>
+          <a:bodyPr wrap="square" lIns="0" tIns="0" rIns="0" bIns="0" rtlCol="0" anchor="ctr"/>
+          <a:lstStyle/>
+          <a:p>
+            <a:pPr algn="ctr" indent="0" marL="0">
+              <a:buNone/>
+            </a:pPr>
+            <a:r>
+              <a:rPr lang="en-US" sz="1300" b="1" dirty="0">
+                <a:solidFill>
+                  <a:srgbClr val="9D174D"/>
+                </a:solidFill>
+                <a:latin typeface="Trebuchet MS" pitchFamily="34" charset="0"/>
+                <a:ea typeface="Trebuchet MS" pitchFamily="34" charset="-122"/>
+                <a:cs typeface="Trebuchet MS" pitchFamily="34" charset="-120"/>
+              </a:rPr>
+              <a:t>s</a:t>
+            </a:r>
+            <a:endParaRPr lang="en-US" sz="1300" dirty="0"/>
+          </a:p>
+        </p:txBody>
+      </p:sp>
+      <p:sp>
+        <p:nvSpPr>
+          <p:cNvPr id="24" name="Text 22"/>
+          <p:cNvSpPr/>
+          <p:nvPr/>
+        </p:nvSpPr>
+        <p:spPr>
+          <a:xfrm>
+            <a:off x="6519672" y="2569464"/>
+            <a:ext cx="1828800" cy="201168"/>
+          </a:xfrm>
+          <a:prstGeom prst="rect">
+            <a:avLst/>
+          </a:prstGeom>
+          <a:noFill/>
+          <a:ln/>
+        </p:spPr>
+        <p:txBody>
+          <a:bodyPr wrap="square" lIns="0" tIns="0" rIns="0" bIns="0" rtlCol="0" anchor="t"/>
+          <a:lstStyle/>
+          <a:p>
+            <a:pPr algn="ctr" indent="0" marL="0">
+              <a:buNone/>
+            </a:pPr>
+            <a:r>
+              <a:rPr lang="en-US" sz="850" dirty="0">
+                <a:solidFill>
+                  <a:srgbClr val="475569"/>
+                </a:solidFill>
+                <a:latin typeface="Calibri" pitchFamily="34" charset="0"/>
+                <a:ea typeface="Calibri" pitchFamily="34" charset="-122"/>
+                <a:cs typeface="Calibri" pitchFamily="34" charset="-120"/>
+              </a:rPr>
+              <a:t>plural or present tense</a:t>
+            </a:r>
+            <a:endParaRPr lang="en-US" sz="850" dirty="0"/>
+          </a:p>
+        </p:txBody>
+      </p:sp>
+      <p:sp>
+        <p:nvSpPr>
+          <p:cNvPr id="25" name="Shape 23"/>
           <p:cNvSpPr/>
           <p:nvPr/>
         </p:nvSpPr>
@@ -13395,7 +13619,7 @@
       </p:sp>
       <p:sp>
         <p:nvSpPr>
-          <p:cNvPr id="23" name="Text 21"/>
+          <p:cNvPr id="26" name="Text 24"/>
           <p:cNvSpPr/>
           <p:nvPr/>
         </p:nvSpPr>
@@ -13434,7 +13658,7 @@
       </p:sp>
       <p:sp>
         <p:nvSpPr>
-          <p:cNvPr id="24" name="Shape 22"/>
+          <p:cNvPr id="27" name="Shape 25"/>
           <p:cNvSpPr/>
           <p:nvPr/>
         </p:nvSpPr>
@@ -13461,7 +13685,7 @@
       </p:sp>
       <p:sp>
         <p:nvSpPr>
-          <p:cNvPr id="25" name="Shape 23"/>
+          <p:cNvPr id="28" name="Shape 26"/>
           <p:cNvSpPr/>
           <p:nvPr/>
         </p:nvSpPr>
@@ -13488,7 +13712,7 @@
       </p:sp>
       <p:sp>
         <p:nvSpPr>
-          <p:cNvPr id="26" name="Text 24"/>
+          <p:cNvPr id="29" name="Text 27"/>
           <p:cNvSpPr/>
           <p:nvPr/>
         </p:nvSpPr>
@@ -13519,7 +13743,7 @@
                 <a:ea typeface="Trebuchet MS" pitchFamily="34" charset="-122"/>
                 <a:cs typeface="Trebuchet MS" pitchFamily="34" charset="-120"/>
               </a:rPr>
-              <a:t>star</a:t>
+              <a:t>start</a:t>
             </a:r>
             <a:endParaRPr lang="en-US" sz="1400" dirty="0"/>
           </a:p>
@@ -13527,7 +13751,7 @@
       </p:sp>
       <p:sp>
         <p:nvSpPr>
-          <p:cNvPr id="27" name="Text 25"/>
+          <p:cNvPr id="30" name="Text 28"/>
           <p:cNvSpPr/>
           <p:nvPr/>
         </p:nvSpPr>
@@ -13566,7 +13790,7 @@
       </p:sp>
       <p:sp>
         <p:nvSpPr>
-          <p:cNvPr id="28" name="Shape 26"/>
+          <p:cNvPr id="31" name="Shape 29"/>
           <p:cNvSpPr/>
           <p:nvPr/>
         </p:nvSpPr>
@@ -13593,7 +13817,7 @@
       </p:sp>
       <p:sp>
         <p:nvSpPr>
-          <p:cNvPr id="29" name="Text 27"/>
+          <p:cNvPr id="32" name="Text 30"/>
           <p:cNvSpPr/>
           <p:nvPr/>
         </p:nvSpPr>
@@ -13624,7 +13848,7 @@
                 <a:ea typeface="Trebuchet MS" pitchFamily="34" charset="-122"/>
                 <a:cs typeface="Trebuchet MS" pitchFamily="34" charset="-120"/>
               </a:rPr>
-              <a:t>ting</a:t>
+              <a:t>ers</a:t>
             </a:r>
             <a:endParaRPr lang="en-US" sz="1400" dirty="0"/>
           </a:p>
@@ -13632,7 +13856,7 @@
       </p:sp>
       <p:sp>
         <p:nvSpPr>
-          <p:cNvPr id="30" name="Shape 28"/>
+          <p:cNvPr id="33" name="Shape 31"/>
           <p:cNvSpPr/>
           <p:nvPr/>
         </p:nvSpPr>
@@ -13659,7 +13883,7 @@
       </p:sp>
       <p:sp>
         <p:nvSpPr>
-          <p:cNvPr id="31" name="Text 29"/>
+          <p:cNvPr id="34" name="Text 32"/>
           <p:cNvSpPr/>
           <p:nvPr/>
         </p:nvSpPr>
@@ -13698,7 +13922,7 @@
       </p:sp>
       <p:sp>
         <p:nvSpPr>
-          <p:cNvPr id="32" name="Shape 30"/>
+          <p:cNvPr id="35" name="Shape 33"/>
           <p:cNvSpPr/>
           <p:nvPr/>
         </p:nvSpPr>
@@ -13725,7 +13949,7 @@
       </p:sp>
       <p:sp>
         <p:nvSpPr>
-          <p:cNvPr id="33" name="Text 31"/>
+          <p:cNvPr id="36" name="Text 34"/>
           <p:cNvSpPr/>
           <p:nvPr/>
         </p:nvSpPr>
@@ -13957,7 +14181,7 @@
                 <a:ea typeface="Calibri" pitchFamily="34" charset="-122"/>
                 <a:cs typeface="Calibri" pitchFamily="34" charset="-120"/>
               </a:rPr>
-              <a:t>Root 'start' — begin, move suddenly, set going</a:t>
+              <a:t>Root 'start' — to begin</a:t>
             </a:r>
             <a:endParaRPr lang="en-US" sz="1600" dirty="0"/>
           </a:p>
@@ -14313,7 +14537,7 @@
                 <a:ea typeface="Calibri" pitchFamily="34" charset="-122"/>
                 <a:cs typeface="Calibri" pitchFamily="34" charset="-120"/>
               </a:rPr>
-              <a:t>Word Labs  •  wordlabs.app  •  Root: 'start' = begin, move suddenly, set going</a:t>
+              <a:t>Word Labs  •  wordlabs.app  •  Root: 'start' = to begin</a:t>
             </a:r>
             <a:endParaRPr lang="en-US" sz="800" dirty="0"/>
           </a:p>
@@ -14452,7 +14676,7 @@
                 <a:ea typeface="Trebuchet MS" pitchFamily="34" charset="-122"/>
                 <a:cs typeface="Trebuchet MS" pitchFamily="34" charset="-120"/>
               </a:rPr>
-              <a:t>starting</a:t>
+              <a:t>starters</a:t>
             </a:r>
             <a:endParaRPr lang="en-US" sz="2800" dirty="0"/>
           </a:p>
@@ -14532,7 +14756,7 @@
         </p:nvSpPr>
         <p:spPr>
           <a:xfrm>
-            <a:off x="2938272" y="2258568"/>
+            <a:off x="2221992" y="2258568"/>
             <a:ext cx="1828800" cy="292608"/>
           </a:xfrm>
           <a:prstGeom prst="rect">
@@ -14566,7 +14790,7 @@
         </p:nvSpPr>
         <p:spPr>
           <a:xfrm>
-            <a:off x="2938272" y="2258568"/>
+            <a:off x="2221992" y="2258568"/>
             <a:ext cx="1828800" cy="292608"/>
           </a:xfrm>
           <a:prstGeom prst="rect">
@@ -14605,7 +14829,7 @@
         </p:nvSpPr>
         <p:spPr>
           <a:xfrm>
-            <a:off x="2938272" y="2569464"/>
+            <a:off x="2221992" y="2569464"/>
             <a:ext cx="1828800" cy="201168"/>
           </a:xfrm>
           <a:prstGeom prst="rect">
@@ -14630,7 +14854,7 @@
                 <a:ea typeface="Calibri" pitchFamily="34" charset="-122"/>
                 <a:cs typeface="Calibri" pitchFamily="34" charset="-120"/>
               </a:rPr>
-              <a:t>begin</a:t>
+              <a:t>to begin</a:t>
             </a:r>
             <a:endParaRPr lang="en-US" sz="850" dirty="0"/>
           </a:p>
@@ -14644,7 +14868,7 @@
         </p:nvSpPr>
         <p:spPr>
           <a:xfrm>
-            <a:off x="5803392" y="2258568"/>
+            <a:off x="4370832" y="2258568"/>
             <a:ext cx="1828800" cy="292608"/>
           </a:xfrm>
           <a:prstGeom prst="rect">
@@ -14678,7 +14902,7 @@
         </p:nvSpPr>
         <p:spPr>
           <a:xfrm>
-            <a:off x="5803392" y="2258568"/>
+            <a:off x="4370832" y="2258568"/>
             <a:ext cx="1828800" cy="292608"/>
           </a:xfrm>
           <a:prstGeom prst="rect">
@@ -14703,7 +14927,7 @@
                 <a:ea typeface="Trebuchet MS" pitchFamily="34" charset="-122"/>
                 <a:cs typeface="Trebuchet MS" pitchFamily="34" charset="-120"/>
               </a:rPr>
-              <a:t>ing</a:t>
+              <a:t>er</a:t>
             </a:r>
             <a:endParaRPr lang="en-US" sz="1300" dirty="0"/>
           </a:p>
@@ -14717,7 +14941,7 @@
         </p:nvSpPr>
         <p:spPr>
           <a:xfrm>
-            <a:off x="5803392" y="2569464"/>
+            <a:off x="4370832" y="2569464"/>
             <a:ext cx="1828800" cy="201168"/>
           </a:xfrm>
           <a:prstGeom prst="rect">
@@ -14742,7 +14966,7 @@
                 <a:ea typeface="Calibri" pitchFamily="34" charset="-122"/>
                 <a:cs typeface="Calibri" pitchFamily="34" charset="-120"/>
               </a:rPr>
-              <a:t>action happening now</a:t>
+              <a:t>person who; more</a:t>
             </a:r>
             <a:endParaRPr lang="en-US" sz="850" dirty="0"/>
           </a:p>
@@ -14751,6 +14975,118 @@
       <p:sp>
         <p:nvSpPr>
           <p:cNvPr id="22" name="Shape 20"/>
+          <p:cNvSpPr/>
+          <p:nvPr/>
+        </p:nvSpPr>
+        <p:spPr>
+          <a:xfrm>
+            <a:off x="6519672" y="2258568"/>
+            <a:ext cx="1828800" cy="292608"/>
+          </a:xfrm>
+          <a:prstGeom prst="rect">
+            <a:avLst>
+              <a:gd name="adj" fmla="val 25000"/>
+            </a:avLst>
+          </a:prstGeom>
+          <a:solidFill>
+            <a:srgbClr val="FCE7F3"/>
+          </a:solidFill>
+          <a:ln w="19050">
+            <a:solidFill>
+              <a:srgbClr val="DB2777"/>
+            </a:solidFill>
+            <a:prstDash val="solid"/>
+          </a:ln>
+          <a:effectLst>
+            <a:outerShdw sx="100000" sy="100000" kx="0" ky="0" algn="bl" rotWithShape="0" blurRad="101600" dist="38100" dir="8100000">
+              <a:srgbClr val="000000">
+                <a:alpha val="12000"/>
+              </a:srgbClr>
+            </a:outerShdw>
+          </a:effectLst>
+        </p:spPr>
+      </p:sp>
+      <p:sp>
+        <p:nvSpPr>
+          <p:cNvPr id="23" name="Text 21"/>
+          <p:cNvSpPr/>
+          <p:nvPr/>
+        </p:nvSpPr>
+        <p:spPr>
+          <a:xfrm>
+            <a:off x="6519672" y="2258568"/>
+            <a:ext cx="1828800" cy="292608"/>
+          </a:xfrm>
+          <a:prstGeom prst="rect">
+            <a:avLst/>
+          </a:prstGeom>
+          <a:noFill/>
+          <a:ln/>
+        </p:spPr>
+        <p:txBody>
+          <a:bodyPr wrap="square" lIns="0" tIns="0" rIns="0" bIns="0" rtlCol="0" anchor="ctr"/>
+          <a:lstStyle/>
+          <a:p>
+            <a:pPr algn="ctr" indent="0" marL="0">
+              <a:buNone/>
+            </a:pPr>
+            <a:r>
+              <a:rPr lang="en-US" sz="1300" b="1" dirty="0">
+                <a:solidFill>
+                  <a:srgbClr val="9D174D"/>
+                </a:solidFill>
+                <a:latin typeface="Trebuchet MS" pitchFamily="34" charset="0"/>
+                <a:ea typeface="Trebuchet MS" pitchFamily="34" charset="-122"/>
+                <a:cs typeface="Trebuchet MS" pitchFamily="34" charset="-120"/>
+              </a:rPr>
+              <a:t>s</a:t>
+            </a:r>
+            <a:endParaRPr lang="en-US" sz="1300" dirty="0"/>
+          </a:p>
+        </p:txBody>
+      </p:sp>
+      <p:sp>
+        <p:nvSpPr>
+          <p:cNvPr id="24" name="Text 22"/>
+          <p:cNvSpPr/>
+          <p:nvPr/>
+        </p:nvSpPr>
+        <p:spPr>
+          <a:xfrm>
+            <a:off x="6519672" y="2569464"/>
+            <a:ext cx="1828800" cy="201168"/>
+          </a:xfrm>
+          <a:prstGeom prst="rect">
+            <a:avLst/>
+          </a:prstGeom>
+          <a:noFill/>
+          <a:ln/>
+        </p:spPr>
+        <p:txBody>
+          <a:bodyPr wrap="square" lIns="0" tIns="0" rIns="0" bIns="0" rtlCol="0" anchor="t"/>
+          <a:lstStyle/>
+          <a:p>
+            <a:pPr algn="ctr" indent="0" marL="0">
+              <a:buNone/>
+            </a:pPr>
+            <a:r>
+              <a:rPr lang="en-US" sz="850" dirty="0">
+                <a:solidFill>
+                  <a:srgbClr val="475569"/>
+                </a:solidFill>
+                <a:latin typeface="Calibri" pitchFamily="34" charset="0"/>
+                <a:ea typeface="Calibri" pitchFamily="34" charset="-122"/>
+                <a:cs typeface="Calibri" pitchFamily="34" charset="-120"/>
+              </a:rPr>
+              <a:t>plural or present tense</a:t>
+            </a:r>
+            <a:endParaRPr lang="en-US" sz="850" dirty="0"/>
+          </a:p>
+        </p:txBody>
+      </p:sp>
+      <p:sp>
+        <p:nvSpPr>
+          <p:cNvPr id="25" name="Shape 23"/>
           <p:cNvSpPr/>
           <p:nvPr/>
         </p:nvSpPr>
@@ -14777,7 +15113,7 @@
       </p:sp>
       <p:sp>
         <p:nvSpPr>
-          <p:cNvPr id="23" name="Text 21"/>
+          <p:cNvPr id="26" name="Text 24"/>
           <p:cNvSpPr/>
           <p:nvPr/>
         </p:nvSpPr>
@@ -14816,7 +15152,7 @@
       </p:sp>
       <p:sp>
         <p:nvSpPr>
-          <p:cNvPr id="24" name="Shape 22"/>
+          <p:cNvPr id="27" name="Shape 25"/>
           <p:cNvSpPr/>
           <p:nvPr/>
         </p:nvSpPr>
@@ -14843,7 +15179,7 @@
       </p:sp>
       <p:sp>
         <p:nvSpPr>
-          <p:cNvPr id="25" name="Shape 23"/>
+          <p:cNvPr id="28" name="Shape 26"/>
           <p:cNvSpPr/>
           <p:nvPr/>
         </p:nvSpPr>
@@ -14870,7 +15206,7 @@
       </p:sp>
       <p:sp>
         <p:nvSpPr>
-          <p:cNvPr id="26" name="Text 24"/>
+          <p:cNvPr id="29" name="Text 27"/>
           <p:cNvSpPr/>
           <p:nvPr/>
         </p:nvSpPr>
@@ -14901,7 +15237,7 @@
                 <a:ea typeface="Trebuchet MS" pitchFamily="34" charset="-122"/>
                 <a:cs typeface="Trebuchet MS" pitchFamily="34" charset="-120"/>
               </a:rPr>
-              <a:t>star</a:t>
+              <a:t>start</a:t>
             </a:r>
             <a:endParaRPr lang="en-US" sz="1400" dirty="0"/>
           </a:p>
@@ -14909,7 +15245,7 @@
       </p:sp>
       <p:sp>
         <p:nvSpPr>
-          <p:cNvPr id="27" name="Text 25"/>
+          <p:cNvPr id="30" name="Text 28"/>
           <p:cNvSpPr/>
           <p:nvPr/>
         </p:nvSpPr>
@@ -14948,7 +15284,7 @@
       </p:sp>
       <p:sp>
         <p:nvSpPr>
-          <p:cNvPr id="28" name="Shape 26"/>
+          <p:cNvPr id="31" name="Shape 29"/>
           <p:cNvSpPr/>
           <p:nvPr/>
         </p:nvSpPr>
@@ -14975,7 +15311,7 @@
       </p:sp>
       <p:sp>
         <p:nvSpPr>
-          <p:cNvPr id="29" name="Text 27"/>
+          <p:cNvPr id="32" name="Text 30"/>
           <p:cNvSpPr/>
           <p:nvPr/>
         </p:nvSpPr>
@@ -15006,7 +15342,7 @@
                 <a:ea typeface="Trebuchet MS" pitchFamily="34" charset="-122"/>
                 <a:cs typeface="Trebuchet MS" pitchFamily="34" charset="-120"/>
               </a:rPr>
-              <a:t>ting</a:t>
+              <a:t>ers</a:t>
             </a:r>
             <a:endParaRPr lang="en-US" sz="1400" dirty="0"/>
           </a:p>
@@ -15014,7 +15350,7 @@
       </p:sp>
       <p:sp>
         <p:nvSpPr>
-          <p:cNvPr id="30" name="Shape 28"/>
+          <p:cNvPr id="33" name="Shape 31"/>
           <p:cNvSpPr/>
           <p:nvPr/>
         </p:nvSpPr>
@@ -15041,7 +15377,7 @@
       </p:sp>
       <p:sp>
         <p:nvSpPr>
-          <p:cNvPr id="31" name="Text 29"/>
+          <p:cNvPr id="34" name="Text 32"/>
           <p:cNvSpPr/>
           <p:nvPr/>
         </p:nvSpPr>
@@ -15080,7 +15416,7 @@
       </p:sp>
       <p:sp>
         <p:nvSpPr>
-          <p:cNvPr id="32" name="Shape 30"/>
+          <p:cNvPr id="35" name="Shape 33"/>
           <p:cNvSpPr/>
           <p:nvPr/>
         </p:nvSpPr>
@@ -15107,13 +15443,13 @@
       </p:sp>
       <p:sp>
         <p:nvSpPr>
-          <p:cNvPr id="33" name="Shape 31"/>
-          <p:cNvSpPr/>
-          <p:nvPr/>
-        </p:nvSpPr>
-        <p:spPr>
-          <a:xfrm>
-            <a:off x="2254649" y="4169664"/>
+          <p:cNvPr id="36" name="Shape 34"/>
+          <p:cNvSpPr/>
+          <p:nvPr/>
+        </p:nvSpPr>
+        <p:spPr>
+          <a:xfrm>
+            <a:off x="2124837" y="4169664"/>
             <a:ext cx="685800" cy="475488"/>
           </a:xfrm>
           <a:prstGeom prst="rect">
@@ -15134,13 +15470,13 @@
       </p:sp>
       <p:sp>
         <p:nvSpPr>
-          <p:cNvPr id="34" name="Text 32"/>
-          <p:cNvSpPr/>
-          <p:nvPr/>
-        </p:nvSpPr>
-        <p:spPr>
-          <a:xfrm>
-            <a:off x="2254649" y="4169664"/>
+          <p:cNvPr id="37" name="Text 35"/>
+          <p:cNvSpPr/>
+          <p:nvPr/>
+        </p:nvSpPr>
+        <p:spPr>
+          <a:xfrm>
+            <a:off x="2124837" y="4169664"/>
             <a:ext cx="685800" cy="475488"/>
           </a:xfrm>
           <a:prstGeom prst="rect">
@@ -15173,13 +15509,13 @@
       </p:sp>
       <p:sp>
         <p:nvSpPr>
-          <p:cNvPr id="35" name="Shape 33"/>
-          <p:cNvSpPr/>
-          <p:nvPr/>
-        </p:nvSpPr>
-        <p:spPr>
-          <a:xfrm>
-            <a:off x="3293146" y="4169664"/>
+          <p:cNvPr id="38" name="Shape 36"/>
+          <p:cNvSpPr/>
+          <p:nvPr/>
+        </p:nvSpPr>
+        <p:spPr>
+          <a:xfrm>
+            <a:off x="3033522" y="4169664"/>
             <a:ext cx="685800" cy="475488"/>
           </a:xfrm>
           <a:prstGeom prst="rect">
@@ -15200,13 +15536,13 @@
       </p:sp>
       <p:sp>
         <p:nvSpPr>
-          <p:cNvPr id="36" name="Text 34"/>
-          <p:cNvSpPr/>
-          <p:nvPr/>
-        </p:nvSpPr>
-        <p:spPr>
-          <a:xfrm>
-            <a:off x="3293146" y="4169664"/>
+          <p:cNvPr id="39" name="Text 37"/>
+          <p:cNvSpPr/>
+          <p:nvPr/>
+        </p:nvSpPr>
+        <p:spPr>
+          <a:xfrm>
+            <a:off x="3033522" y="4169664"/>
             <a:ext cx="685800" cy="475488"/>
           </a:xfrm>
           <a:prstGeom prst="rect">
@@ -15239,13 +15575,13 @@
       </p:sp>
       <p:sp>
         <p:nvSpPr>
-          <p:cNvPr id="37" name="Shape 35"/>
-          <p:cNvSpPr/>
-          <p:nvPr/>
-        </p:nvSpPr>
-        <p:spPr>
-          <a:xfrm>
-            <a:off x="4331643" y="4169664"/>
+          <p:cNvPr id="40" name="Shape 38"/>
+          <p:cNvSpPr/>
+          <p:nvPr/>
+        </p:nvSpPr>
+        <p:spPr>
+          <a:xfrm>
+            <a:off x="3942207" y="4169664"/>
             <a:ext cx="685800" cy="475488"/>
           </a:xfrm>
           <a:prstGeom prst="rect">
@@ -15266,13 +15602,13 @@
       </p:sp>
       <p:sp>
         <p:nvSpPr>
-          <p:cNvPr id="38" name="Text 36"/>
-          <p:cNvSpPr/>
-          <p:nvPr/>
-        </p:nvSpPr>
-        <p:spPr>
-          <a:xfrm>
-            <a:off x="4331643" y="4169664"/>
+          <p:cNvPr id="41" name="Text 39"/>
+          <p:cNvSpPr/>
+          <p:nvPr/>
+        </p:nvSpPr>
+        <p:spPr>
+          <a:xfrm>
+            <a:off x="3942207" y="4169664"/>
             <a:ext cx="685800" cy="475488"/>
           </a:xfrm>
           <a:prstGeom prst="rect">
@@ -15297,7 +15633,7 @@
                 <a:ea typeface="Trebuchet MS" pitchFamily="34" charset="-122"/>
                 <a:cs typeface="Trebuchet MS" pitchFamily="34" charset="-120"/>
               </a:rPr>
-              <a:t>ar</a:t>
+              <a:t>a</a:t>
             </a:r>
             <a:endParaRPr lang="en-US" sz="900" dirty="0"/>
           </a:p>
@@ -15305,13 +15641,13 @@
       </p:sp>
       <p:sp>
         <p:nvSpPr>
-          <p:cNvPr id="39" name="Shape 37"/>
-          <p:cNvSpPr/>
-          <p:nvPr/>
-        </p:nvSpPr>
-        <p:spPr>
-          <a:xfrm>
-            <a:off x="5370141" y="4169664"/>
+          <p:cNvPr id="42" name="Shape 40"/>
+          <p:cNvSpPr/>
+          <p:nvPr/>
+        </p:nvSpPr>
+        <p:spPr>
+          <a:xfrm>
+            <a:off x="4850892" y="4169664"/>
             <a:ext cx="685800" cy="475488"/>
           </a:xfrm>
           <a:prstGeom prst="rect">
@@ -15332,13 +15668,13 @@
       </p:sp>
       <p:sp>
         <p:nvSpPr>
-          <p:cNvPr id="40" name="Text 38"/>
-          <p:cNvSpPr/>
-          <p:nvPr/>
-        </p:nvSpPr>
-        <p:spPr>
-          <a:xfrm>
-            <a:off x="5370141" y="4169664"/>
+          <p:cNvPr id="43" name="Text 41"/>
+          <p:cNvSpPr/>
+          <p:nvPr/>
+        </p:nvSpPr>
+        <p:spPr>
+          <a:xfrm>
+            <a:off x="4850892" y="4169664"/>
             <a:ext cx="685800" cy="475488"/>
           </a:xfrm>
           <a:prstGeom prst="rect">
@@ -15363,7 +15699,7 @@
                 <a:ea typeface="Trebuchet MS" pitchFamily="34" charset="-122"/>
                 <a:cs typeface="Trebuchet MS" pitchFamily="34" charset="-120"/>
               </a:rPr>
-              <a:t>t</a:t>
+              <a:t>r</a:t>
             </a:r>
             <a:endParaRPr lang="en-US" sz="900" dirty="0"/>
           </a:p>
@@ -15371,13 +15707,13 @@
       </p:sp>
       <p:sp>
         <p:nvSpPr>
-          <p:cNvPr id="41" name="Shape 39"/>
-          <p:cNvSpPr/>
-          <p:nvPr/>
-        </p:nvSpPr>
-        <p:spPr>
-          <a:xfrm>
-            <a:off x="6408638" y="4169664"/>
+          <p:cNvPr id="44" name="Shape 42"/>
+          <p:cNvSpPr/>
+          <p:nvPr/>
+        </p:nvSpPr>
+        <p:spPr>
+          <a:xfrm>
+            <a:off x="5759577" y="4169664"/>
             <a:ext cx="685800" cy="475488"/>
           </a:xfrm>
           <a:prstGeom prst="rect">
@@ -15398,13 +15734,13 @@
       </p:sp>
       <p:sp>
         <p:nvSpPr>
-          <p:cNvPr id="42" name="Text 40"/>
-          <p:cNvSpPr/>
-          <p:nvPr/>
-        </p:nvSpPr>
-        <p:spPr>
-          <a:xfrm>
-            <a:off x="6408638" y="4169664"/>
+          <p:cNvPr id="45" name="Text 43"/>
+          <p:cNvSpPr/>
+          <p:nvPr/>
+        </p:nvSpPr>
+        <p:spPr>
+          <a:xfrm>
+            <a:off x="5759577" y="4169664"/>
             <a:ext cx="685800" cy="475488"/>
           </a:xfrm>
           <a:prstGeom prst="rect">
@@ -15429,7 +15765,7 @@
                 <a:ea typeface="Trebuchet MS" pitchFamily="34" charset="-122"/>
                 <a:cs typeface="Trebuchet MS" pitchFamily="34" charset="-120"/>
               </a:rPr>
-              <a:t>i</a:t>
+              <a:t>t</a:t>
             </a:r>
             <a:endParaRPr lang="en-US" sz="900" dirty="0"/>
           </a:p>
@@ -15437,13 +15773,13 @@
       </p:sp>
       <p:sp>
         <p:nvSpPr>
-          <p:cNvPr id="43" name="Shape 41"/>
-          <p:cNvSpPr/>
-          <p:nvPr/>
-        </p:nvSpPr>
-        <p:spPr>
-          <a:xfrm>
-            <a:off x="7447135" y="4169664"/>
+          <p:cNvPr id="46" name="Shape 44"/>
+          <p:cNvSpPr/>
+          <p:nvPr/>
+        </p:nvSpPr>
+        <p:spPr>
+          <a:xfrm>
+            <a:off x="6668262" y="4169664"/>
             <a:ext cx="685800" cy="475488"/>
           </a:xfrm>
           <a:prstGeom prst="rect">
@@ -15464,13 +15800,13 @@
       </p:sp>
       <p:sp>
         <p:nvSpPr>
-          <p:cNvPr id="44" name="Text 42"/>
-          <p:cNvSpPr/>
-          <p:nvPr/>
-        </p:nvSpPr>
-        <p:spPr>
-          <a:xfrm>
-            <a:off x="7447135" y="4169664"/>
+          <p:cNvPr id="47" name="Text 45"/>
+          <p:cNvSpPr/>
+          <p:nvPr/>
+        </p:nvSpPr>
+        <p:spPr>
+          <a:xfrm>
+            <a:off x="6668262" y="4169664"/>
             <a:ext cx="685800" cy="475488"/>
           </a:xfrm>
           <a:prstGeom prst="rect">
@@ -15495,7 +15831,73 @@
                 <a:ea typeface="Trebuchet MS" pitchFamily="34" charset="-122"/>
                 <a:cs typeface="Trebuchet MS" pitchFamily="34" charset="-120"/>
               </a:rPr>
-              <a:t>ng</a:t>
+              <a:t>er</a:t>
+            </a:r>
+            <a:endParaRPr lang="en-US" sz="900" dirty="0"/>
+          </a:p>
+        </p:txBody>
+      </p:sp>
+      <p:sp>
+        <p:nvSpPr>
+          <p:cNvPr id="48" name="Shape 46"/>
+          <p:cNvSpPr/>
+          <p:nvPr/>
+        </p:nvSpPr>
+        <p:spPr>
+          <a:xfrm>
+            <a:off x="7576947" y="4169664"/>
+            <a:ext cx="685800" cy="475488"/>
+          </a:xfrm>
+          <a:prstGeom prst="rect">
+            <a:avLst>
+              <a:gd name="adj" fmla="val 7692"/>
+            </a:avLst>
+          </a:prstGeom>
+          <a:solidFill>
+            <a:srgbClr val="FFFFFF"/>
+          </a:solidFill>
+          <a:ln w="12700">
+            <a:solidFill>
+              <a:srgbClr val="DB2777"/>
+            </a:solidFill>
+            <a:prstDash val="solid"/>
+          </a:ln>
+        </p:spPr>
+      </p:sp>
+      <p:sp>
+        <p:nvSpPr>
+          <p:cNvPr id="49" name="Text 47"/>
+          <p:cNvSpPr/>
+          <p:nvPr/>
+        </p:nvSpPr>
+        <p:spPr>
+          <a:xfrm>
+            <a:off x="7576947" y="4169664"/>
+            <a:ext cx="685800" cy="475488"/>
+          </a:xfrm>
+          <a:prstGeom prst="rect">
+            <a:avLst/>
+          </a:prstGeom>
+          <a:noFill/>
+          <a:ln/>
+        </p:spPr>
+        <p:txBody>
+          <a:bodyPr wrap="square" lIns="0" tIns="0" rIns="0" bIns="0" rtlCol="0" anchor="ctr"/>
+          <a:lstStyle/>
+          <a:p>
+            <a:pPr algn="ctr" indent="0" marL="0">
+              <a:buNone/>
+            </a:pPr>
+            <a:r>
+              <a:rPr lang="en-US" sz="900" b="1" dirty="0">
+                <a:solidFill>
+                  <a:srgbClr val="9D174D"/>
+                </a:solidFill>
+                <a:latin typeface="Trebuchet MS" pitchFamily="34" charset="0"/>
+                <a:ea typeface="Trebuchet MS" pitchFamily="34" charset="-122"/>
+                <a:cs typeface="Trebuchet MS" pitchFamily="34" charset="-120"/>
+              </a:rPr>
+              <a:t>s</a:t>
             </a:r>
             <a:endParaRPr lang="en-US" sz="900" dirty="0"/>
           </a:p>
@@ -16069,7 +16471,7 @@
                 <a:ea typeface="Calibri" pitchFamily="34" charset="-122"/>
                 <a:cs typeface="Calibri" pitchFamily="34" charset="-120"/>
               </a:rPr>
-              <a:t>Word Labs  •  wordlabs.app  •  Root: 'start' = begin, move suddenly, set going</a:t>
+              <a:t>Word Labs  •  wordlabs.app  •  Root: 'start' = to begin</a:t>
             </a:r>
             <a:endParaRPr lang="en-US" sz="800" dirty="0"/>
           </a:p>
@@ -16403,7 +16805,7 @@
                 <a:ea typeface="Trebuchet MS" pitchFamily="34" charset="-122"/>
                 <a:cs typeface="Trebuchet MS" pitchFamily="34" charset="-120"/>
               </a:rPr>
-              <a:t>2</a:t>
+              <a:t>0</a:t>
             </a:r>
             <a:pPr algn="ctr" indent="0" marL="0">
               <a:buNone/>
@@ -16417,7 +16819,7 @@
                 <a:ea typeface="Trebuchet MS" pitchFamily="34" charset="-122"/>
                 <a:cs typeface="Trebuchet MS" pitchFamily="34" charset="-120"/>
               </a:rPr>
-              <a:t>  punctuation marks</a:t>
+              <a:t>  punctuation mark</a:t>
             </a:r>
             <a:endParaRPr lang="en-US" sz="2800" dirty="0"/>
           </a:p>
@@ -16709,7 +17111,7 @@
                 <a:ea typeface="Calibri" pitchFamily="34" charset="-122"/>
                 <a:cs typeface="Calibri" pitchFamily="34" charset="-120"/>
               </a:rPr>
-              <a:t>Word Labs  •  wordlabs.app  •  Root: 'start' = begin, move suddenly, set going</a:t>
+              <a:t>Word Labs  •  wordlabs.app  •  Root: 'start' = to begin</a:t>
             </a:r>
             <a:endParaRPr lang="en-US" sz="800" dirty="0"/>
           </a:p>
@@ -16821,7 +17223,7 @@
                 <a:ea typeface="Calibri" pitchFamily="34" charset="-122"/>
                 <a:cs typeface="Calibri" pitchFamily="34" charset="-120"/>
               </a:rPr>
-              <a:t>The </a:t>
+              <a:t>We are </a:t>
             </a:r>
             <a:pPr algn="l" indent="0" marL="0">
               <a:buNone/>
@@ -16838,7 +17240,7 @@
                 <a:ea typeface="Calibri" pitchFamily="34" charset="-122"/>
                 <a:cs typeface="Calibri" pitchFamily="34" charset="-120"/>
               </a:rPr>
-              <a:t>starter</a:t>
+              <a:t>starting</a:t>
             </a:r>
             <a:pPr algn="l" indent="0" marL="0">
               <a:buNone/>
@@ -16852,7 +17254,7 @@
                 <a:ea typeface="Calibri" pitchFamily="34" charset="-122"/>
                 <a:cs typeface="Calibri" pitchFamily="34" charset="-120"/>
               </a:rPr>
-              <a:t> fired the gun, and the </a:t>
+              <a:t> the game in five minutes. The game </a:t>
             </a:r>
             <a:pPr algn="l" indent="0" marL="0">
               <a:buNone/>
@@ -16869,7 +17271,7 @@
                 <a:ea typeface="Calibri" pitchFamily="34" charset="-122"/>
                 <a:cs typeface="Calibri" pitchFamily="34" charset="-120"/>
               </a:rPr>
-              <a:t>startling</a:t>
+              <a:t>restarted</a:t>
             </a:r>
             <a:pPr algn="l" indent="0" marL="0">
               <a:buNone/>
@@ -16883,7 +17285,7 @@
                 <a:ea typeface="Calibri" pitchFamily="34" charset="-122"/>
                 <a:cs typeface="Calibri" pitchFamily="34" charset="-120"/>
               </a:rPr>
-              <a:t> bang sent the runners sprinting, each one </a:t>
+              <a:t> as soon as the power came back on. The teacher was </a:t>
             </a:r>
             <a:pPr algn="l" indent="0" marL="0">
               <a:buNone/>
@@ -16900,7 +17302,7 @@
                 <a:ea typeface="Calibri" pitchFamily="34" charset="-122"/>
                 <a:cs typeface="Calibri" pitchFamily="34" charset="-120"/>
               </a:rPr>
-              <a:t>started</a:t>
+              <a:t>restarting</a:t>
             </a:r>
             <a:pPr algn="l" indent="0" marL="0">
               <a:buNone/>
@@ -16914,7 +17316,7 @@
                 <a:ea typeface="Calibri" pitchFamily="34" charset="-122"/>
                 <a:cs typeface="Calibri" pitchFamily="34" charset="-120"/>
               </a:rPr>
-              <a:t> on their very best performance.</a:t>
+              <a:t> the video from the very beginning.</a:t>
             </a:r>
             <a:endParaRPr lang="en-US" sz="1800" dirty="0"/>
           </a:p>
@@ -17069,7 +17471,7 @@
                 <a:ea typeface="Trebuchet MS" pitchFamily="34" charset="-122"/>
                 <a:cs typeface="Trebuchet MS" pitchFamily="34" charset="-120"/>
               </a:rPr>
-              <a:t>starter</a:t>
+              <a:t>starting</a:t>
             </a:r>
             <a:endParaRPr lang="en-US" sz="1400" dirty="0"/>
           </a:p>
@@ -17197,7 +17599,7 @@
                 <a:ea typeface="Trebuchet MS" pitchFamily="34" charset="-122"/>
                 <a:cs typeface="Trebuchet MS" pitchFamily="34" charset="-120"/>
               </a:rPr>
-              <a:t>startling</a:t>
+              <a:t>restarted</a:t>
             </a:r>
             <a:endParaRPr lang="en-US" sz="1400" dirty="0"/>
           </a:p>
@@ -17325,7 +17727,7 @@
                 <a:ea typeface="Trebuchet MS" pitchFamily="34" charset="-122"/>
                 <a:cs typeface="Trebuchet MS" pitchFamily="34" charset="-120"/>
               </a:rPr>
-              <a:t>started</a:t>
+              <a:t>restarting</a:t>
             </a:r>
             <a:endParaRPr lang="en-US" sz="1400" dirty="0"/>
           </a:p>
@@ -17656,7 +18058,7 @@
                 <a:ea typeface="Calibri" pitchFamily="34" charset="-122"/>
                 <a:cs typeface="Calibri" pitchFamily="34" charset="-120"/>
               </a:rPr>
-              <a:t>Word Labs  •  wordlabs.app  •  Root: 'start' = begin, move suddenly, set going</a:t>
+              <a:t>Word Labs  •  wordlabs.app  •  Root: 'start' = to begin</a:t>
             </a:r>
             <a:endParaRPr lang="en-US" sz="800" dirty="0"/>
           </a:p>
@@ -17795,7 +18197,7 @@
                 <a:ea typeface="Trebuchet MS" pitchFamily="34" charset="-122"/>
                 <a:cs typeface="Trebuchet MS" pitchFamily="34" charset="-120"/>
               </a:rPr>
-              <a:t>starter</a:t>
+              <a:t>starting</a:t>
             </a:r>
             <a:endParaRPr lang="en-US" sz="2800" dirty="0"/>
           </a:p>
@@ -18483,7 +18885,7 @@
                 <a:ea typeface="Calibri" pitchFamily="34" charset="-122"/>
                 <a:cs typeface="Calibri" pitchFamily="34" charset="-120"/>
               </a:rPr>
-              <a:t>Word Labs  •  wordlabs.app  •  Root: 'start' = begin, move suddenly, set going</a:t>
+              <a:t>Word Labs  •  wordlabs.app  •  Root: 'start' = to begin</a:t>
             </a:r>
             <a:endParaRPr lang="en-US" sz="800" dirty="0"/>
           </a:p>
@@ -18622,7 +19024,7 @@
                 <a:ea typeface="Trebuchet MS" pitchFamily="34" charset="-122"/>
                 <a:cs typeface="Trebuchet MS" pitchFamily="34" charset="-120"/>
               </a:rPr>
-              <a:t>starter</a:t>
+              <a:t>starting</a:t>
             </a:r>
             <a:endParaRPr lang="en-US" sz="2800" dirty="0"/>
           </a:p>
@@ -18800,7 +19202,7 @@
                 <a:ea typeface="Calibri" pitchFamily="34" charset="-122"/>
                 <a:cs typeface="Calibri" pitchFamily="34" charset="-120"/>
               </a:rPr>
-              <a:t>begin</a:t>
+              <a:t>to begin</a:t>
             </a:r>
             <a:endParaRPr lang="en-US" sz="850" dirty="0"/>
           </a:p>
@@ -18873,7 +19275,7 @@
                 <a:ea typeface="Trebuchet MS" pitchFamily="34" charset="-122"/>
                 <a:cs typeface="Trebuchet MS" pitchFamily="34" charset="-120"/>
               </a:rPr>
-              <a:t>er</a:t>
+              <a:t>ing</a:t>
             </a:r>
             <a:endParaRPr lang="en-US" sz="1300" dirty="0"/>
           </a:p>
@@ -18912,7 +19314,7 @@
                 <a:ea typeface="Calibri" pitchFamily="34" charset="-122"/>
                 <a:cs typeface="Calibri" pitchFamily="34" charset="-120"/>
               </a:rPr>
-              <a:t>person who does something</a:t>
+              <a:t>happening now</a:t>
             </a:r>
             <a:endParaRPr lang="en-US" sz="850" dirty="0"/>
           </a:p>
@@ -19468,7 +19870,7 @@
                 <a:ea typeface="Calibri" pitchFamily="34" charset="-122"/>
                 <a:cs typeface="Calibri" pitchFamily="34" charset="-120"/>
               </a:rPr>
-              <a:t>Word Labs  •  wordlabs.app  •  Root: 'start' = begin, move suddenly, set going</a:t>
+              <a:t>Word Labs  •  wordlabs.app  •  Root: 'start' = to begin</a:t>
             </a:r>
             <a:endParaRPr lang="en-US" sz="800" dirty="0"/>
           </a:p>
@@ -19607,7 +20009,7 @@
                 <a:ea typeface="Trebuchet MS" pitchFamily="34" charset="-122"/>
                 <a:cs typeface="Trebuchet MS" pitchFamily="34" charset="-120"/>
               </a:rPr>
-              <a:t>starter</a:t>
+              <a:t>starting</a:t>
             </a:r>
             <a:endParaRPr lang="en-US" sz="2800" dirty="0"/>
           </a:p>
@@ -19785,7 +20187,7 @@
                 <a:ea typeface="Calibri" pitchFamily="34" charset="-122"/>
                 <a:cs typeface="Calibri" pitchFamily="34" charset="-120"/>
               </a:rPr>
-              <a:t>begin</a:t>
+              <a:t>to begin</a:t>
             </a:r>
             <a:endParaRPr lang="en-US" sz="850" dirty="0"/>
           </a:p>
@@ -19858,7 +20260,7 @@
                 <a:ea typeface="Trebuchet MS" pitchFamily="34" charset="-122"/>
                 <a:cs typeface="Trebuchet MS" pitchFamily="34" charset="-120"/>
               </a:rPr>
-              <a:t>er</a:t>
+              <a:t>ing</a:t>
             </a:r>
             <a:endParaRPr lang="en-US" sz="1300" dirty="0"/>
           </a:p>
@@ -19897,7 +20299,7 @@
                 <a:ea typeface="Calibri" pitchFamily="34" charset="-122"/>
                 <a:cs typeface="Calibri" pitchFamily="34" charset="-120"/>
               </a:rPr>
-              <a:t>person who does something</a:t>
+              <a:t>happening now</a:t>
             </a:r>
             <a:endParaRPr lang="en-US" sz="850" dirty="0"/>
           </a:p>
@@ -20056,7 +20458,7 @@
                 <a:ea typeface="Trebuchet MS" pitchFamily="34" charset="-122"/>
                 <a:cs typeface="Trebuchet MS" pitchFamily="34" charset="-120"/>
               </a:rPr>
-              <a:t>star</a:t>
+              <a:t>start</a:t>
             </a:r>
             <a:endParaRPr lang="en-US" sz="1400" dirty="0"/>
           </a:p>
@@ -20161,7 +20563,7 @@
                 <a:ea typeface="Trebuchet MS" pitchFamily="34" charset="-122"/>
                 <a:cs typeface="Trebuchet MS" pitchFamily="34" charset="-120"/>
               </a:rPr>
-              <a:t>ter</a:t>
+              <a:t>ing</a:t>
             </a:r>
             <a:endParaRPr lang="en-US" sz="1400" dirty="0"/>
           </a:p>
@@ -20585,7 +20987,7 @@
                 <a:ea typeface="Calibri" pitchFamily="34" charset="-122"/>
                 <a:cs typeface="Calibri" pitchFamily="34" charset="-120"/>
               </a:rPr>
-              <a:t>Word Labs  •  wordlabs.app  •  Root: 'start' = begin, move suddenly, set going</a:t>
+              <a:t>Word Labs  •  wordlabs.app  •  Root: 'start' = to begin</a:t>
             </a:r>
             <a:endParaRPr lang="en-US" sz="800" dirty="0"/>
           </a:p>
@@ -20724,7 +21126,7 @@
                 <a:ea typeface="Trebuchet MS" pitchFamily="34" charset="-122"/>
                 <a:cs typeface="Trebuchet MS" pitchFamily="34" charset="-120"/>
               </a:rPr>
-              <a:t>starter</a:t>
+              <a:t>starting</a:t>
             </a:r>
             <a:endParaRPr lang="en-US" sz="2800" dirty="0"/>
           </a:p>
@@ -20902,7 +21304,7 @@
                 <a:ea typeface="Calibri" pitchFamily="34" charset="-122"/>
                 <a:cs typeface="Calibri" pitchFamily="34" charset="-120"/>
               </a:rPr>
-              <a:t>begin</a:t>
+              <a:t>to begin</a:t>
             </a:r>
             <a:endParaRPr lang="en-US" sz="850" dirty="0"/>
           </a:p>
@@ -20975,7 +21377,7 @@
                 <a:ea typeface="Trebuchet MS" pitchFamily="34" charset="-122"/>
                 <a:cs typeface="Trebuchet MS" pitchFamily="34" charset="-120"/>
               </a:rPr>
-              <a:t>er</a:t>
+              <a:t>ing</a:t>
             </a:r>
             <a:endParaRPr lang="en-US" sz="1300" dirty="0"/>
           </a:p>
@@ -21014,7 +21416,7 @@
                 <a:ea typeface="Calibri" pitchFamily="34" charset="-122"/>
                 <a:cs typeface="Calibri" pitchFamily="34" charset="-120"/>
               </a:rPr>
-              <a:t>person who does something</a:t>
+              <a:t>happening now</a:t>
             </a:r>
             <a:endParaRPr lang="en-US" sz="850" dirty="0"/>
           </a:p>
@@ -21173,7 +21575,7 @@
                 <a:ea typeface="Trebuchet MS" pitchFamily="34" charset="-122"/>
                 <a:cs typeface="Trebuchet MS" pitchFamily="34" charset="-120"/>
               </a:rPr>
-              <a:t>star</a:t>
+              <a:t>start</a:t>
             </a:r>
             <a:endParaRPr lang="en-US" sz="1400" dirty="0"/>
           </a:p>
@@ -21278,7 +21680,7 @@
                 <a:ea typeface="Trebuchet MS" pitchFamily="34" charset="-122"/>
                 <a:cs typeface="Trebuchet MS" pitchFamily="34" charset="-120"/>
               </a:rPr>
-              <a:t>ter</a:t>
+              <a:t>ing</a:t>
             </a:r>
             <a:endParaRPr lang="en-US" sz="1400" dirty="0"/>
           </a:p>
@@ -21385,7 +21787,7 @@
         </p:nvSpPr>
         <p:spPr>
           <a:xfrm>
-            <a:off x="2427732" y="4169664"/>
+            <a:off x="2124837" y="4169664"/>
             <a:ext cx="685800" cy="475488"/>
           </a:xfrm>
           <a:prstGeom prst="rect">
@@ -21412,7 +21814,7 @@
         </p:nvSpPr>
         <p:spPr>
           <a:xfrm>
-            <a:off x="2427732" y="4169664"/>
+            <a:off x="2124837" y="4169664"/>
             <a:ext cx="685800" cy="475488"/>
           </a:xfrm>
           <a:prstGeom prst="rect">
@@ -21451,7 +21853,7 @@
         </p:nvSpPr>
         <p:spPr>
           <a:xfrm>
-            <a:off x="3639312" y="4169664"/>
+            <a:off x="3033522" y="4169664"/>
             <a:ext cx="685800" cy="475488"/>
           </a:xfrm>
           <a:prstGeom prst="rect">
@@ -21478,7 +21880,7 @@
         </p:nvSpPr>
         <p:spPr>
           <a:xfrm>
-            <a:off x="3639312" y="4169664"/>
+            <a:off x="3033522" y="4169664"/>
             <a:ext cx="685800" cy="475488"/>
           </a:xfrm>
           <a:prstGeom prst="rect">
@@ -21517,7 +21919,7 @@
         </p:nvSpPr>
         <p:spPr>
           <a:xfrm>
-            <a:off x="4850892" y="4169664"/>
+            <a:off x="3942207" y="4169664"/>
             <a:ext cx="685800" cy="475488"/>
           </a:xfrm>
           <a:prstGeom prst="rect">
@@ -21544,7 +21946,7 @@
         </p:nvSpPr>
         <p:spPr>
           <a:xfrm>
-            <a:off x="4850892" y="4169664"/>
+            <a:off x="3942207" y="4169664"/>
             <a:ext cx="685800" cy="475488"/>
           </a:xfrm>
           <a:prstGeom prst="rect">
@@ -21569,7 +21971,7 @@
                 <a:ea typeface="Trebuchet MS" pitchFamily="34" charset="-122"/>
                 <a:cs typeface="Trebuchet MS" pitchFamily="34" charset="-120"/>
               </a:rPr>
-              <a:t>ar</a:t>
+              <a:t>a</a:t>
             </a:r>
             <a:endParaRPr lang="en-US" sz="900" dirty="0"/>
           </a:p>
@@ -21583,7 +21985,7 @@
         </p:nvSpPr>
         <p:spPr>
           <a:xfrm>
-            <a:off x="6062472" y="4169664"/>
+            <a:off x="4850892" y="4169664"/>
             <a:ext cx="685800" cy="475488"/>
           </a:xfrm>
           <a:prstGeom prst="rect">
@@ -21610,7 +22012,7 @@
         </p:nvSpPr>
         <p:spPr>
           <a:xfrm>
-            <a:off x="6062472" y="4169664"/>
+            <a:off x="4850892" y="4169664"/>
             <a:ext cx="685800" cy="475488"/>
           </a:xfrm>
           <a:prstGeom prst="rect">
@@ -21635,7 +22037,7 @@
                 <a:ea typeface="Trebuchet MS" pitchFamily="34" charset="-122"/>
                 <a:cs typeface="Trebuchet MS" pitchFamily="34" charset="-120"/>
               </a:rPr>
-              <a:t>t</a:t>
+              <a:t>r</a:t>
             </a:r>
             <a:endParaRPr lang="en-US" sz="900" dirty="0"/>
           </a:p>
@@ -21649,7 +22051,7 @@
         </p:nvSpPr>
         <p:spPr>
           <a:xfrm>
-            <a:off x="7274052" y="4169664"/>
+            <a:off x="5759577" y="4169664"/>
             <a:ext cx="685800" cy="475488"/>
           </a:xfrm>
           <a:prstGeom prst="rect">
@@ -21676,7 +22078,7 @@
         </p:nvSpPr>
         <p:spPr>
           <a:xfrm>
-            <a:off x="7274052" y="4169664"/>
+            <a:off x="5759577" y="4169664"/>
             <a:ext cx="685800" cy="475488"/>
           </a:xfrm>
           <a:prstGeom prst="rect">
@@ -21701,7 +22103,139 @@
                 <a:ea typeface="Trebuchet MS" pitchFamily="34" charset="-122"/>
                 <a:cs typeface="Trebuchet MS" pitchFamily="34" charset="-120"/>
               </a:rPr>
-              <a:t>er</a:t>
+              <a:t>t</a:t>
+            </a:r>
+            <a:endParaRPr lang="en-US" sz="900" dirty="0"/>
+          </a:p>
+        </p:txBody>
+      </p:sp>
+      <p:sp>
+        <p:nvSpPr>
+          <p:cNvPr id="43" name="Shape 41"/>
+          <p:cNvSpPr/>
+          <p:nvPr/>
+        </p:nvSpPr>
+        <p:spPr>
+          <a:xfrm>
+            <a:off x="6668262" y="4169664"/>
+            <a:ext cx="685800" cy="475488"/>
+          </a:xfrm>
+          <a:prstGeom prst="rect">
+            <a:avLst>
+              <a:gd name="adj" fmla="val 7692"/>
+            </a:avLst>
+          </a:prstGeom>
+          <a:solidFill>
+            <a:srgbClr val="FFFFFF"/>
+          </a:solidFill>
+          <a:ln w="12700">
+            <a:solidFill>
+              <a:srgbClr val="DB2777"/>
+            </a:solidFill>
+            <a:prstDash val="solid"/>
+          </a:ln>
+        </p:spPr>
+      </p:sp>
+      <p:sp>
+        <p:nvSpPr>
+          <p:cNvPr id="44" name="Text 42"/>
+          <p:cNvSpPr/>
+          <p:nvPr/>
+        </p:nvSpPr>
+        <p:spPr>
+          <a:xfrm>
+            <a:off x="6668262" y="4169664"/>
+            <a:ext cx="685800" cy="475488"/>
+          </a:xfrm>
+          <a:prstGeom prst="rect">
+            <a:avLst/>
+          </a:prstGeom>
+          <a:noFill/>
+          <a:ln/>
+        </p:spPr>
+        <p:txBody>
+          <a:bodyPr wrap="square" lIns="0" tIns="0" rIns="0" bIns="0" rtlCol="0" anchor="ctr"/>
+          <a:lstStyle/>
+          <a:p>
+            <a:pPr algn="ctr" indent="0" marL="0">
+              <a:buNone/>
+            </a:pPr>
+            <a:r>
+              <a:rPr lang="en-US" sz="900" b="1" dirty="0">
+                <a:solidFill>
+                  <a:srgbClr val="9D174D"/>
+                </a:solidFill>
+                <a:latin typeface="Trebuchet MS" pitchFamily="34" charset="0"/>
+                <a:ea typeface="Trebuchet MS" pitchFamily="34" charset="-122"/>
+                <a:cs typeface="Trebuchet MS" pitchFamily="34" charset="-120"/>
+              </a:rPr>
+              <a:t>i</a:t>
+            </a:r>
+            <a:endParaRPr lang="en-US" sz="900" dirty="0"/>
+          </a:p>
+        </p:txBody>
+      </p:sp>
+      <p:sp>
+        <p:nvSpPr>
+          <p:cNvPr id="45" name="Shape 43"/>
+          <p:cNvSpPr/>
+          <p:nvPr/>
+        </p:nvSpPr>
+        <p:spPr>
+          <a:xfrm>
+            <a:off x="7576947" y="4169664"/>
+            <a:ext cx="685800" cy="475488"/>
+          </a:xfrm>
+          <a:prstGeom prst="rect">
+            <a:avLst>
+              <a:gd name="adj" fmla="val 7692"/>
+            </a:avLst>
+          </a:prstGeom>
+          <a:solidFill>
+            <a:srgbClr val="FFFFFF"/>
+          </a:solidFill>
+          <a:ln w="12700">
+            <a:solidFill>
+              <a:srgbClr val="DB2777"/>
+            </a:solidFill>
+            <a:prstDash val="solid"/>
+          </a:ln>
+        </p:spPr>
+      </p:sp>
+      <p:sp>
+        <p:nvSpPr>
+          <p:cNvPr id="46" name="Text 44"/>
+          <p:cNvSpPr/>
+          <p:nvPr/>
+        </p:nvSpPr>
+        <p:spPr>
+          <a:xfrm>
+            <a:off x="7576947" y="4169664"/>
+            <a:ext cx="685800" cy="475488"/>
+          </a:xfrm>
+          <a:prstGeom prst="rect">
+            <a:avLst/>
+          </a:prstGeom>
+          <a:noFill/>
+          <a:ln/>
+        </p:spPr>
+        <p:txBody>
+          <a:bodyPr wrap="square" lIns="0" tIns="0" rIns="0" bIns="0" rtlCol="0" anchor="ctr"/>
+          <a:lstStyle/>
+          <a:p>
+            <a:pPr algn="ctr" indent="0" marL="0">
+              <a:buNone/>
+            </a:pPr>
+            <a:r>
+              <a:rPr lang="en-US" sz="900" b="1" dirty="0">
+                <a:solidFill>
+                  <a:srgbClr val="9D174D"/>
+                </a:solidFill>
+                <a:latin typeface="Trebuchet MS" pitchFamily="34" charset="0"/>
+                <a:ea typeface="Trebuchet MS" pitchFamily="34" charset="-122"/>
+                <a:cs typeface="Trebuchet MS" pitchFamily="34" charset="-120"/>
+              </a:rPr>
+              <a:t>ng</a:t>
             </a:r>
             <a:endParaRPr lang="en-US" sz="900" dirty="0"/>
           </a:p>
@@ -21993,7 +22527,7 @@
                 <a:ea typeface="Calibri" pitchFamily="34" charset="-122"/>
                 <a:cs typeface="Calibri" pitchFamily="34" charset="-120"/>
               </a:rPr>
-              <a:t>Word Labs  •  wordlabs.app  •  Root: 'start' = begin, move suddenly, set going</a:t>
+              <a:t>Word Labs  •  wordlabs.app  •  Root: 'start' = to begin</a:t>
             </a:r>
             <a:endParaRPr lang="en-US" sz="800" dirty="0"/>
           </a:p>
@@ -22132,7 +22666,7 @@
                 <a:ea typeface="Trebuchet MS" pitchFamily="34" charset="-122"/>
                 <a:cs typeface="Trebuchet MS" pitchFamily="34" charset="-120"/>
               </a:rPr>
-              <a:t>startling</a:t>
+              <a:t>restarted</a:t>
             </a:r>
             <a:endParaRPr lang="en-US" sz="2800" dirty="0"/>
           </a:p>
@@ -22820,7 +23354,7 @@
                 <a:ea typeface="Calibri" pitchFamily="34" charset="-122"/>
                 <a:cs typeface="Calibri" pitchFamily="34" charset="-120"/>
               </a:rPr>
-              <a:t>Word Labs  •  wordlabs.app  •  Root: 'start' = begin, move suddenly, set going</a:t>
+              <a:t>Word Labs  •  wordlabs.app  •  Root: 'start' = to begin</a:t>
             </a:r>
             <a:endParaRPr lang="en-US" sz="800" dirty="0"/>
           </a:p>
@@ -22959,7 +23493,7 @@
                 <a:ea typeface="Trebuchet MS" pitchFamily="34" charset="-122"/>
                 <a:cs typeface="Trebuchet MS" pitchFamily="34" charset="-120"/>
               </a:rPr>
-              <a:t>startling</a:t>
+              <a:t>restarted</a:t>
             </a:r>
             <a:endParaRPr lang="en-US" sz="2800" dirty="0"/>
           </a:p>
@@ -23048,11 +23582,11 @@
             </a:avLst>
           </a:prstGeom>
           <a:solidFill>
-            <a:srgbClr val="CCFBF1"/>
+            <a:srgbClr val="DDD6FE"/>
           </a:solidFill>
           <a:ln w="19050">
             <a:solidFill>
-              <a:srgbClr val="0D9488"/>
+              <a:srgbClr val="7C3AED"/>
             </a:solidFill>
             <a:prstDash val="solid"/>
           </a:ln>
@@ -23092,13 +23626,13 @@
             <a:r>
               <a:rPr lang="en-US" sz="1300" b="1" dirty="0">
                 <a:solidFill>
-                  <a:srgbClr val="0F766E"/>
+                  <a:srgbClr val="4C1D95"/>
                 </a:solidFill>
                 <a:latin typeface="Trebuchet MS" pitchFamily="34" charset="0"/>
                 <a:ea typeface="Trebuchet MS" pitchFamily="34" charset="-122"/>
                 <a:cs typeface="Trebuchet MS" pitchFamily="34" charset="-120"/>
               </a:rPr>
-              <a:t>start</a:t>
+              <a:t>re</a:t>
             </a:r>
             <a:endParaRPr lang="en-US" sz="1300" dirty="0"/>
           </a:p>
@@ -23137,7 +23671,7 @@
                 <a:ea typeface="Calibri" pitchFamily="34" charset="-122"/>
                 <a:cs typeface="Calibri" pitchFamily="34" charset="-120"/>
               </a:rPr>
-              <a:t>move suddenly</a:t>
+              <a:t>again</a:t>
             </a:r>
             <a:endParaRPr lang="en-US" sz="850" dirty="0"/>
           </a:p>
@@ -23160,11 +23694,11 @@
             </a:avLst>
           </a:prstGeom>
           <a:solidFill>
-            <a:srgbClr val="FCE7F3"/>
+            <a:srgbClr val="CCFBF1"/>
           </a:solidFill>
           <a:ln w="19050">
             <a:solidFill>
-              <a:srgbClr val="DB2777"/>
+              <a:srgbClr val="0D9488"/>
             </a:solidFill>
             <a:prstDash val="solid"/>
           </a:ln>
@@ -23204,13 +23738,13 @@
             <a:r>
               <a:rPr lang="en-US" sz="1300" b="1" dirty="0">
                 <a:solidFill>
-                  <a:srgbClr val="9D174D"/>
+                  <a:srgbClr val="0F766E"/>
                 </a:solidFill>
                 <a:latin typeface="Trebuchet MS" pitchFamily="34" charset="0"/>
                 <a:ea typeface="Trebuchet MS" pitchFamily="34" charset="-122"/>
                 <a:cs typeface="Trebuchet MS" pitchFamily="34" charset="-120"/>
               </a:rPr>
-              <a:t>l</a:t>
+              <a:t>start</a:t>
             </a:r>
             <a:endParaRPr lang="en-US" sz="1300" dirty="0"/>
           </a:p>
@@ -23249,7 +23783,7 @@
                 <a:ea typeface="Calibri" pitchFamily="34" charset="-122"/>
                 <a:cs typeface="Calibri" pitchFamily="34" charset="-120"/>
               </a:rPr>
-              <a:t>connecting sound</a:t>
+              <a:t>to begin</a:t>
             </a:r>
             <a:endParaRPr lang="en-US" sz="850" dirty="0"/>
           </a:p>
@@ -23322,7 +23856,7 @@
                 <a:ea typeface="Trebuchet MS" pitchFamily="34" charset="-122"/>
                 <a:cs typeface="Trebuchet MS" pitchFamily="34" charset="-120"/>
               </a:rPr>
-              <a:t>ing</a:t>
+              <a:t>ed</a:t>
             </a:r>
             <a:endParaRPr lang="en-US" sz="1300" dirty="0"/>
           </a:p>
@@ -23361,7 +23895,7 @@
                 <a:ea typeface="Calibri" pitchFamily="34" charset="-122"/>
                 <a:cs typeface="Calibri" pitchFamily="34" charset="-120"/>
               </a:rPr>
-              <a:t>action or quality</a:t>
+              <a:t>past tense</a:t>
             </a:r>
             <a:endParaRPr lang="en-US" sz="850" dirty="0"/>
           </a:p>
@@ -23917,7 +24451,7 @@
                 <a:ea typeface="Calibri" pitchFamily="34" charset="-122"/>
                 <a:cs typeface="Calibri" pitchFamily="34" charset="-120"/>
               </a:rPr>
-              <a:t>Word Labs  •  wordlabs.app  •  Root: 'start' = begin, move suddenly, set going</a:t>
+              <a:t>Word Labs  •  wordlabs.app  •  Root: 'start' = to begin</a:t>
             </a:r>
             <a:endParaRPr lang="en-US" sz="800" dirty="0"/>
           </a:p>
@@ -23990,7 +24524,7 @@
                 <a:ea typeface="Trebuchet MS" pitchFamily="34" charset="-122"/>
                 <a:cs typeface="Trebuchet MS" pitchFamily="34" charset="-120"/>
               </a:rPr>
-              <a:t>We are learning that the root 'start' means 'begin, move suddenly, set going'.</a:t>
+              <a:t>We are learning that the root 'start' means 'to begin'.</a:t>
             </a:r>
             <a:endParaRPr lang="en-US" sz="2000" dirty="0"/>
           </a:p>
@@ -24636,7 +25170,7 @@
                 <a:ea typeface="Calibri" pitchFamily="34" charset="-122"/>
                 <a:cs typeface="Calibri" pitchFamily="34" charset="-120"/>
               </a:rPr>
-              <a:t>Word Labs  •  wordlabs.app  •  Root: 'start' = begin, move suddenly, set going</a:t>
+              <a:t>Word Labs  •  wordlabs.app  •  Root: 'start' = to begin</a:t>
             </a:r>
             <a:endParaRPr lang="en-US" sz="800" dirty="0"/>
           </a:p>
@@ -24775,7 +25309,7 @@
                 <a:ea typeface="Trebuchet MS" pitchFamily="34" charset="-122"/>
                 <a:cs typeface="Trebuchet MS" pitchFamily="34" charset="-120"/>
               </a:rPr>
-              <a:t>startling</a:t>
+              <a:t>restarted</a:t>
             </a:r>
             <a:endParaRPr lang="en-US" sz="2800" dirty="0"/>
           </a:p>
@@ -24864,11 +25398,11 @@
             </a:avLst>
           </a:prstGeom>
           <a:solidFill>
-            <a:srgbClr val="CCFBF1"/>
+            <a:srgbClr val="DDD6FE"/>
           </a:solidFill>
           <a:ln w="19050">
             <a:solidFill>
-              <a:srgbClr val="0D9488"/>
+              <a:srgbClr val="7C3AED"/>
             </a:solidFill>
             <a:prstDash val="solid"/>
           </a:ln>
@@ -24908,13 +25442,13 @@
             <a:r>
               <a:rPr lang="en-US" sz="1300" b="1" dirty="0">
                 <a:solidFill>
-                  <a:srgbClr val="0F766E"/>
+                  <a:srgbClr val="4C1D95"/>
                 </a:solidFill>
                 <a:latin typeface="Trebuchet MS" pitchFamily="34" charset="0"/>
                 <a:ea typeface="Trebuchet MS" pitchFamily="34" charset="-122"/>
                 <a:cs typeface="Trebuchet MS" pitchFamily="34" charset="-120"/>
               </a:rPr>
-              <a:t>start</a:t>
+              <a:t>re</a:t>
             </a:r>
             <a:endParaRPr lang="en-US" sz="1300" dirty="0"/>
           </a:p>
@@ -24953,7 +25487,7 @@
                 <a:ea typeface="Calibri" pitchFamily="34" charset="-122"/>
                 <a:cs typeface="Calibri" pitchFamily="34" charset="-120"/>
               </a:rPr>
-              <a:t>move suddenly</a:t>
+              <a:t>again</a:t>
             </a:r>
             <a:endParaRPr lang="en-US" sz="850" dirty="0"/>
           </a:p>
@@ -24976,11 +25510,11 @@
             </a:avLst>
           </a:prstGeom>
           <a:solidFill>
-            <a:srgbClr val="FCE7F3"/>
+            <a:srgbClr val="CCFBF1"/>
           </a:solidFill>
           <a:ln w="19050">
             <a:solidFill>
-              <a:srgbClr val="DB2777"/>
+              <a:srgbClr val="0D9488"/>
             </a:solidFill>
             <a:prstDash val="solid"/>
           </a:ln>
@@ -25020,13 +25554,13 @@
             <a:r>
               <a:rPr lang="en-US" sz="1300" b="1" dirty="0">
                 <a:solidFill>
-                  <a:srgbClr val="9D174D"/>
+                  <a:srgbClr val="0F766E"/>
                 </a:solidFill>
                 <a:latin typeface="Trebuchet MS" pitchFamily="34" charset="0"/>
                 <a:ea typeface="Trebuchet MS" pitchFamily="34" charset="-122"/>
                 <a:cs typeface="Trebuchet MS" pitchFamily="34" charset="-120"/>
               </a:rPr>
-              <a:t>l</a:t>
+              <a:t>start</a:t>
             </a:r>
             <a:endParaRPr lang="en-US" sz="1300" dirty="0"/>
           </a:p>
@@ -25065,7 +25599,7 @@
                 <a:ea typeface="Calibri" pitchFamily="34" charset="-122"/>
                 <a:cs typeface="Calibri" pitchFamily="34" charset="-120"/>
               </a:rPr>
-              <a:t>connecting sound</a:t>
+              <a:t>to begin</a:t>
             </a:r>
             <a:endParaRPr lang="en-US" sz="850" dirty="0"/>
           </a:p>
@@ -25138,7 +25672,7 @@
                 <a:ea typeface="Trebuchet MS" pitchFamily="34" charset="-122"/>
                 <a:cs typeface="Trebuchet MS" pitchFamily="34" charset="-120"/>
               </a:rPr>
-              <a:t>ing</a:t>
+              <a:t>ed</a:t>
             </a:r>
             <a:endParaRPr lang="en-US" sz="1300" dirty="0"/>
           </a:p>
@@ -25177,7 +25711,7 @@
                 <a:ea typeface="Calibri" pitchFamily="34" charset="-122"/>
                 <a:cs typeface="Calibri" pitchFamily="34" charset="-120"/>
               </a:rPr>
-              <a:t>action or quality</a:t>
+              <a:t>past tense</a:t>
             </a:r>
             <a:endParaRPr lang="en-US" sz="850" dirty="0"/>
           </a:p>
@@ -25284,7 +25818,7 @@
         </p:nvSpPr>
         <p:spPr>
           <a:xfrm>
-            <a:off x="2999232" y="3364992"/>
+            <a:off x="2313432" y="3364992"/>
             <a:ext cx="1645920" cy="475488"/>
           </a:xfrm>
           <a:prstGeom prst="rect">
@@ -25311,7 +25845,7 @@
         </p:nvSpPr>
         <p:spPr>
           <a:xfrm>
-            <a:off x="2999232" y="3364992"/>
+            <a:off x="2313432" y="3364992"/>
             <a:ext cx="1645920" cy="475488"/>
           </a:xfrm>
           <a:prstGeom prst="rect">
@@ -25336,7 +25870,7 @@
                 <a:ea typeface="Trebuchet MS" pitchFamily="34" charset="-122"/>
                 <a:cs typeface="Trebuchet MS" pitchFamily="34" charset="-120"/>
               </a:rPr>
-              <a:t>start</a:t>
+              <a:t>re</a:t>
             </a:r>
             <a:endParaRPr lang="en-US" sz="1400" dirty="0"/>
           </a:p>
@@ -25350,8 +25884,8 @@
         </p:nvSpPr>
         <p:spPr>
           <a:xfrm>
-            <a:off x="4645152" y="3364992"/>
-            <a:ext cx="1097280" cy="475488"/>
+            <a:off x="3959352" y="3364992"/>
+            <a:ext cx="411480" cy="475488"/>
           </a:xfrm>
           <a:prstGeom prst="rect">
             <a:avLst/>
@@ -25389,7 +25923,7 @@
         </p:nvSpPr>
         <p:spPr>
           <a:xfrm>
-            <a:off x="5742432" y="3364992"/>
+            <a:off x="4370832" y="3364992"/>
             <a:ext cx="1645920" cy="475488"/>
           </a:xfrm>
           <a:prstGeom prst="rect">
@@ -25416,7 +25950,7 @@
         </p:nvSpPr>
         <p:spPr>
           <a:xfrm>
-            <a:off x="5742432" y="3364992"/>
+            <a:off x="4370832" y="3364992"/>
             <a:ext cx="1645920" cy="475488"/>
           </a:xfrm>
           <a:prstGeom prst="rect">
@@ -25441,7 +25975,7 @@
                 <a:ea typeface="Trebuchet MS" pitchFamily="34" charset="-122"/>
                 <a:cs typeface="Trebuchet MS" pitchFamily="34" charset="-120"/>
               </a:rPr>
-              <a:t>ling</a:t>
+              <a:t>start</a:t>
             </a:r>
             <a:endParaRPr lang="en-US" sz="1400" dirty="0"/>
           </a:p>
@@ -25449,7 +25983,112 @@
       </p:sp>
       <p:sp>
         <p:nvSpPr>
-          <p:cNvPr id="33" name="Shape 31"/>
+          <p:cNvPr id="33" name="Text 31"/>
+          <p:cNvSpPr/>
+          <p:nvPr/>
+        </p:nvSpPr>
+        <p:spPr>
+          <a:xfrm>
+            <a:off x="6016752" y="3364992"/>
+            <a:ext cx="411480" cy="475488"/>
+          </a:xfrm>
+          <a:prstGeom prst="rect">
+            <a:avLst/>
+          </a:prstGeom>
+          <a:noFill/>
+          <a:ln/>
+        </p:spPr>
+        <p:txBody>
+          <a:bodyPr wrap="square" lIns="0" tIns="0" rIns="0" bIns="0" rtlCol="0" anchor="ctr"/>
+          <a:lstStyle/>
+          <a:p>
+            <a:pPr algn="ctr" indent="0" marL="0">
+              <a:buNone/>
+            </a:pPr>
+            <a:r>
+              <a:rPr lang="en-US" sz="1600" b="1" dirty="0">
+                <a:solidFill>
+                  <a:srgbClr val="0D9488"/>
+                </a:solidFill>
+                <a:latin typeface="Trebuchet MS" pitchFamily="34" charset="0"/>
+                <a:ea typeface="Trebuchet MS" pitchFamily="34" charset="-122"/>
+                <a:cs typeface="Trebuchet MS" pitchFamily="34" charset="-120"/>
+              </a:rPr>
+              <a:t>·</a:t>
+            </a:r>
+            <a:endParaRPr lang="en-US" sz="1600" dirty="0"/>
+          </a:p>
+        </p:txBody>
+      </p:sp>
+      <p:sp>
+        <p:nvSpPr>
+          <p:cNvPr id="34" name="Shape 32"/>
+          <p:cNvSpPr/>
+          <p:nvPr/>
+        </p:nvSpPr>
+        <p:spPr>
+          <a:xfrm>
+            <a:off x="6428232" y="3364992"/>
+            <a:ext cx="1645920" cy="475488"/>
+          </a:xfrm>
+          <a:prstGeom prst="rect">
+            <a:avLst>
+              <a:gd name="adj" fmla="val 9615"/>
+            </a:avLst>
+          </a:prstGeom>
+          <a:solidFill>
+            <a:srgbClr val="FFFFFF"/>
+          </a:solidFill>
+          <a:ln w="12700">
+            <a:solidFill>
+              <a:srgbClr val="0D9488"/>
+            </a:solidFill>
+            <a:prstDash val="solid"/>
+          </a:ln>
+        </p:spPr>
+      </p:sp>
+      <p:sp>
+        <p:nvSpPr>
+          <p:cNvPr id="35" name="Text 33"/>
+          <p:cNvSpPr/>
+          <p:nvPr/>
+        </p:nvSpPr>
+        <p:spPr>
+          <a:xfrm>
+            <a:off x="6428232" y="3364992"/>
+            <a:ext cx="1645920" cy="475488"/>
+          </a:xfrm>
+          <a:prstGeom prst="rect">
+            <a:avLst/>
+          </a:prstGeom>
+          <a:noFill/>
+          <a:ln/>
+        </p:spPr>
+        <p:txBody>
+          <a:bodyPr wrap="square" lIns="0" tIns="0" rIns="0" bIns="0" rtlCol="0" anchor="ctr"/>
+          <a:lstStyle/>
+          <a:p>
+            <a:pPr algn="ctr" indent="0" marL="0">
+              <a:buNone/>
+            </a:pPr>
+            <a:r>
+              <a:rPr lang="en-US" sz="1400" b="1" dirty="0">
+                <a:solidFill>
+                  <a:srgbClr val="0D9488"/>
+                </a:solidFill>
+                <a:latin typeface="Trebuchet MS" pitchFamily="34" charset="0"/>
+                <a:ea typeface="Trebuchet MS" pitchFamily="34" charset="-122"/>
+                <a:cs typeface="Trebuchet MS" pitchFamily="34" charset="-120"/>
+              </a:rPr>
+              <a:t>ed</a:t>
+            </a:r>
+            <a:endParaRPr lang="en-US" sz="1400" dirty="0"/>
+          </a:p>
+        </p:txBody>
+      </p:sp>
+      <p:sp>
+        <p:nvSpPr>
+          <p:cNvPr id="36" name="Shape 34"/>
           <p:cNvSpPr/>
           <p:nvPr/>
         </p:nvSpPr>
@@ -25476,7 +26115,7 @@
       </p:sp>
       <p:sp>
         <p:nvSpPr>
-          <p:cNvPr id="34" name="Text 32"/>
+          <p:cNvPr id="37" name="Text 35"/>
           <p:cNvSpPr/>
           <p:nvPr/>
         </p:nvSpPr>
@@ -25515,7 +26154,7 @@
       </p:sp>
       <p:sp>
         <p:nvSpPr>
-          <p:cNvPr id="35" name="Shape 33"/>
+          <p:cNvPr id="38" name="Shape 36"/>
           <p:cNvSpPr/>
           <p:nvPr/>
         </p:nvSpPr>
@@ -25542,7 +26181,7 @@
       </p:sp>
       <p:sp>
         <p:nvSpPr>
-          <p:cNvPr id="36" name="Text 34"/>
+          <p:cNvPr id="39" name="Text 37"/>
           <p:cNvSpPr/>
           <p:nvPr/>
         </p:nvSpPr>
@@ -25865,7 +26504,7 @@
                 <a:ea typeface="Calibri" pitchFamily="34" charset="-122"/>
                 <a:cs typeface="Calibri" pitchFamily="34" charset="-120"/>
               </a:rPr>
-              <a:t>Word Labs  •  wordlabs.app  •  Root: 'start' = begin, move suddenly, set going</a:t>
+              <a:t>Word Labs  •  wordlabs.app  •  Root: 'start' = to begin</a:t>
             </a:r>
             <a:endParaRPr lang="en-US" sz="800" dirty="0"/>
           </a:p>
@@ -26004,7 +26643,7 @@
                 <a:ea typeface="Trebuchet MS" pitchFamily="34" charset="-122"/>
                 <a:cs typeface="Trebuchet MS" pitchFamily="34" charset="-120"/>
               </a:rPr>
-              <a:t>startling</a:t>
+              <a:t>restarted</a:t>
             </a:r>
             <a:endParaRPr lang="en-US" sz="2800" dirty="0"/>
           </a:p>
@@ -26093,11 +26732,11 @@
             </a:avLst>
           </a:prstGeom>
           <a:solidFill>
-            <a:srgbClr val="CCFBF1"/>
+            <a:srgbClr val="DDD6FE"/>
           </a:solidFill>
           <a:ln w="19050">
             <a:solidFill>
-              <a:srgbClr val="0D9488"/>
+              <a:srgbClr val="7C3AED"/>
             </a:solidFill>
             <a:prstDash val="solid"/>
           </a:ln>
@@ -26137,13 +26776,13 @@
             <a:r>
               <a:rPr lang="en-US" sz="1300" b="1" dirty="0">
                 <a:solidFill>
-                  <a:srgbClr val="0F766E"/>
+                  <a:srgbClr val="4C1D95"/>
                 </a:solidFill>
                 <a:latin typeface="Trebuchet MS" pitchFamily="34" charset="0"/>
                 <a:ea typeface="Trebuchet MS" pitchFamily="34" charset="-122"/>
                 <a:cs typeface="Trebuchet MS" pitchFamily="34" charset="-120"/>
               </a:rPr>
-              <a:t>start</a:t>
+              <a:t>re</a:t>
             </a:r>
             <a:endParaRPr lang="en-US" sz="1300" dirty="0"/>
           </a:p>
@@ -26182,7 +26821,7 @@
                 <a:ea typeface="Calibri" pitchFamily="34" charset="-122"/>
                 <a:cs typeface="Calibri" pitchFamily="34" charset="-120"/>
               </a:rPr>
-              <a:t>move suddenly</a:t>
+              <a:t>again</a:t>
             </a:r>
             <a:endParaRPr lang="en-US" sz="850" dirty="0"/>
           </a:p>
@@ -26205,11 +26844,11 @@
             </a:avLst>
           </a:prstGeom>
           <a:solidFill>
-            <a:srgbClr val="FCE7F3"/>
+            <a:srgbClr val="CCFBF1"/>
           </a:solidFill>
           <a:ln w="19050">
             <a:solidFill>
-              <a:srgbClr val="DB2777"/>
+              <a:srgbClr val="0D9488"/>
             </a:solidFill>
             <a:prstDash val="solid"/>
           </a:ln>
@@ -26249,13 +26888,13 @@
             <a:r>
               <a:rPr lang="en-US" sz="1300" b="1" dirty="0">
                 <a:solidFill>
-                  <a:srgbClr val="9D174D"/>
+                  <a:srgbClr val="0F766E"/>
                 </a:solidFill>
                 <a:latin typeface="Trebuchet MS" pitchFamily="34" charset="0"/>
                 <a:ea typeface="Trebuchet MS" pitchFamily="34" charset="-122"/>
                 <a:cs typeface="Trebuchet MS" pitchFamily="34" charset="-120"/>
               </a:rPr>
-              <a:t>l</a:t>
+              <a:t>start</a:t>
             </a:r>
             <a:endParaRPr lang="en-US" sz="1300" dirty="0"/>
           </a:p>
@@ -26294,7 +26933,7 @@
                 <a:ea typeface="Calibri" pitchFamily="34" charset="-122"/>
                 <a:cs typeface="Calibri" pitchFamily="34" charset="-120"/>
               </a:rPr>
-              <a:t>connecting sound</a:t>
+              <a:t>to begin</a:t>
             </a:r>
             <a:endParaRPr lang="en-US" sz="850" dirty="0"/>
           </a:p>
@@ -26367,7 +27006,7 @@
                 <a:ea typeface="Trebuchet MS" pitchFamily="34" charset="-122"/>
                 <a:cs typeface="Trebuchet MS" pitchFamily="34" charset="-120"/>
               </a:rPr>
-              <a:t>ing</a:t>
+              <a:t>ed</a:t>
             </a:r>
             <a:endParaRPr lang="en-US" sz="1300" dirty="0"/>
           </a:p>
@@ -26406,7 +27045,7 @@
                 <a:ea typeface="Calibri" pitchFamily="34" charset="-122"/>
                 <a:cs typeface="Calibri" pitchFamily="34" charset="-120"/>
               </a:rPr>
-              <a:t>action or quality</a:t>
+              <a:t>past tense</a:t>
             </a:r>
             <a:endParaRPr lang="en-US" sz="850" dirty="0"/>
           </a:p>
@@ -26513,7 +27152,7 @@
         </p:nvSpPr>
         <p:spPr>
           <a:xfrm>
-            <a:off x="2999232" y="3364992"/>
+            <a:off x="2313432" y="3364992"/>
             <a:ext cx="1645920" cy="475488"/>
           </a:xfrm>
           <a:prstGeom prst="rect">
@@ -26540,7 +27179,7 @@
         </p:nvSpPr>
         <p:spPr>
           <a:xfrm>
-            <a:off x="2999232" y="3364992"/>
+            <a:off x="2313432" y="3364992"/>
             <a:ext cx="1645920" cy="475488"/>
           </a:xfrm>
           <a:prstGeom prst="rect">
@@ -26565,7 +27204,7 @@
                 <a:ea typeface="Trebuchet MS" pitchFamily="34" charset="-122"/>
                 <a:cs typeface="Trebuchet MS" pitchFamily="34" charset="-120"/>
               </a:rPr>
-              <a:t>start</a:t>
+              <a:t>re</a:t>
             </a:r>
             <a:endParaRPr lang="en-US" sz="1400" dirty="0"/>
           </a:p>
@@ -26579,8 +27218,8 @@
         </p:nvSpPr>
         <p:spPr>
           <a:xfrm>
-            <a:off x="4645152" y="3364992"/>
-            <a:ext cx="1097280" cy="475488"/>
+            <a:off x="3959352" y="3364992"/>
+            <a:ext cx="411480" cy="475488"/>
           </a:xfrm>
           <a:prstGeom prst="rect">
             <a:avLst/>
@@ -26618,7 +27257,7 @@
         </p:nvSpPr>
         <p:spPr>
           <a:xfrm>
-            <a:off x="5742432" y="3364992"/>
+            <a:off x="4370832" y="3364992"/>
             <a:ext cx="1645920" cy="475488"/>
           </a:xfrm>
           <a:prstGeom prst="rect">
@@ -26645,7 +27284,7 @@
         </p:nvSpPr>
         <p:spPr>
           <a:xfrm>
-            <a:off x="5742432" y="3364992"/>
+            <a:off x="4370832" y="3364992"/>
             <a:ext cx="1645920" cy="475488"/>
           </a:xfrm>
           <a:prstGeom prst="rect">
@@ -26670,7 +27309,7 @@
                 <a:ea typeface="Trebuchet MS" pitchFamily="34" charset="-122"/>
                 <a:cs typeface="Trebuchet MS" pitchFamily="34" charset="-120"/>
               </a:rPr>
-              <a:t>ling</a:t>
+              <a:t>start</a:t>
             </a:r>
             <a:endParaRPr lang="en-US" sz="1400" dirty="0"/>
           </a:p>
@@ -26678,7 +27317,112 @@
       </p:sp>
       <p:sp>
         <p:nvSpPr>
-          <p:cNvPr id="33" name="Shape 31"/>
+          <p:cNvPr id="33" name="Text 31"/>
+          <p:cNvSpPr/>
+          <p:nvPr/>
+        </p:nvSpPr>
+        <p:spPr>
+          <a:xfrm>
+            <a:off x="6016752" y="3364992"/>
+            <a:ext cx="411480" cy="475488"/>
+          </a:xfrm>
+          <a:prstGeom prst="rect">
+            <a:avLst/>
+          </a:prstGeom>
+          <a:noFill/>
+          <a:ln/>
+        </p:spPr>
+        <p:txBody>
+          <a:bodyPr wrap="square" lIns="0" tIns="0" rIns="0" bIns="0" rtlCol="0" anchor="ctr"/>
+          <a:lstStyle/>
+          <a:p>
+            <a:pPr algn="ctr" indent="0" marL="0">
+              <a:buNone/>
+            </a:pPr>
+            <a:r>
+              <a:rPr lang="en-US" sz="1600" b="1" dirty="0">
+                <a:solidFill>
+                  <a:srgbClr val="0D9488"/>
+                </a:solidFill>
+                <a:latin typeface="Trebuchet MS" pitchFamily="34" charset="0"/>
+                <a:ea typeface="Trebuchet MS" pitchFamily="34" charset="-122"/>
+                <a:cs typeface="Trebuchet MS" pitchFamily="34" charset="-120"/>
+              </a:rPr>
+              <a:t>·</a:t>
+            </a:r>
+            <a:endParaRPr lang="en-US" sz="1600" dirty="0"/>
+          </a:p>
+        </p:txBody>
+      </p:sp>
+      <p:sp>
+        <p:nvSpPr>
+          <p:cNvPr id="34" name="Shape 32"/>
+          <p:cNvSpPr/>
+          <p:nvPr/>
+        </p:nvSpPr>
+        <p:spPr>
+          <a:xfrm>
+            <a:off x="6428232" y="3364992"/>
+            <a:ext cx="1645920" cy="475488"/>
+          </a:xfrm>
+          <a:prstGeom prst="rect">
+            <a:avLst>
+              <a:gd name="adj" fmla="val 9615"/>
+            </a:avLst>
+          </a:prstGeom>
+          <a:solidFill>
+            <a:srgbClr val="FFFFFF"/>
+          </a:solidFill>
+          <a:ln w="12700">
+            <a:solidFill>
+              <a:srgbClr val="0D9488"/>
+            </a:solidFill>
+            <a:prstDash val="solid"/>
+          </a:ln>
+        </p:spPr>
+      </p:sp>
+      <p:sp>
+        <p:nvSpPr>
+          <p:cNvPr id="35" name="Text 33"/>
+          <p:cNvSpPr/>
+          <p:nvPr/>
+        </p:nvSpPr>
+        <p:spPr>
+          <a:xfrm>
+            <a:off x="6428232" y="3364992"/>
+            <a:ext cx="1645920" cy="475488"/>
+          </a:xfrm>
+          <a:prstGeom prst="rect">
+            <a:avLst/>
+          </a:prstGeom>
+          <a:noFill/>
+          <a:ln/>
+        </p:spPr>
+        <p:txBody>
+          <a:bodyPr wrap="square" lIns="0" tIns="0" rIns="0" bIns="0" rtlCol="0" anchor="ctr"/>
+          <a:lstStyle/>
+          <a:p>
+            <a:pPr algn="ctr" indent="0" marL="0">
+              <a:buNone/>
+            </a:pPr>
+            <a:r>
+              <a:rPr lang="en-US" sz="1400" b="1" dirty="0">
+                <a:solidFill>
+                  <a:srgbClr val="0D9488"/>
+                </a:solidFill>
+                <a:latin typeface="Trebuchet MS" pitchFamily="34" charset="0"/>
+                <a:ea typeface="Trebuchet MS" pitchFamily="34" charset="-122"/>
+                <a:cs typeface="Trebuchet MS" pitchFamily="34" charset="-120"/>
+              </a:rPr>
+              <a:t>ed</a:t>
+            </a:r>
+            <a:endParaRPr lang="en-US" sz="1400" dirty="0"/>
+          </a:p>
+        </p:txBody>
+      </p:sp>
+      <p:sp>
+        <p:nvSpPr>
+          <p:cNvPr id="36" name="Shape 34"/>
           <p:cNvSpPr/>
           <p:nvPr/>
         </p:nvSpPr>
@@ -26705,7 +27449,7 @@
       </p:sp>
       <p:sp>
         <p:nvSpPr>
-          <p:cNvPr id="34" name="Text 32"/>
+          <p:cNvPr id="37" name="Text 35"/>
           <p:cNvSpPr/>
           <p:nvPr/>
         </p:nvSpPr>
@@ -26744,7 +27488,7 @@
       </p:sp>
       <p:sp>
         <p:nvSpPr>
-          <p:cNvPr id="35" name="Shape 33"/>
+          <p:cNvPr id="38" name="Shape 36"/>
           <p:cNvSpPr/>
           <p:nvPr/>
         </p:nvSpPr>
@@ -26771,13 +27515,13 @@
       </p:sp>
       <p:sp>
         <p:nvSpPr>
-          <p:cNvPr id="36" name="Shape 34"/>
-          <p:cNvSpPr/>
-          <p:nvPr/>
-        </p:nvSpPr>
-        <p:spPr>
-          <a:xfrm>
-            <a:off x="2124837" y="4169664"/>
+          <p:cNvPr id="39" name="Shape 37"/>
+          <p:cNvSpPr/>
+          <p:nvPr/>
+        </p:nvSpPr>
+        <p:spPr>
+          <a:xfrm>
+            <a:off x="2023872" y="4169664"/>
             <a:ext cx="685800" cy="475488"/>
           </a:xfrm>
           <a:prstGeom prst="rect">
@@ -26798,13 +27542,13 @@
       </p:sp>
       <p:sp>
         <p:nvSpPr>
-          <p:cNvPr id="37" name="Text 35"/>
-          <p:cNvSpPr/>
-          <p:nvPr/>
-        </p:nvSpPr>
-        <p:spPr>
-          <a:xfrm>
-            <a:off x="2124837" y="4169664"/>
+          <p:cNvPr id="40" name="Text 38"/>
+          <p:cNvSpPr/>
+          <p:nvPr/>
+        </p:nvSpPr>
+        <p:spPr>
+          <a:xfrm>
+            <a:off x="2023872" y="4169664"/>
             <a:ext cx="685800" cy="475488"/>
           </a:xfrm>
           <a:prstGeom prst="rect">
@@ -26829,7 +27573,7 @@
                 <a:ea typeface="Trebuchet MS" pitchFamily="34" charset="-122"/>
                 <a:cs typeface="Trebuchet MS" pitchFamily="34" charset="-120"/>
               </a:rPr>
-              <a:t>s</a:t>
+              <a:t>r</a:t>
             </a:r>
             <a:endParaRPr lang="en-US" sz="900" dirty="0"/>
           </a:p>
@@ -26837,13 +27581,13 @@
       </p:sp>
       <p:sp>
         <p:nvSpPr>
-          <p:cNvPr id="38" name="Shape 36"/>
-          <p:cNvSpPr/>
-          <p:nvPr/>
-        </p:nvSpPr>
-        <p:spPr>
-          <a:xfrm>
-            <a:off x="3033522" y="4169664"/>
+          <p:cNvPr id="41" name="Shape 39"/>
+          <p:cNvSpPr/>
+          <p:nvPr/>
+        </p:nvSpPr>
+        <p:spPr>
+          <a:xfrm>
+            <a:off x="2831592" y="4169664"/>
             <a:ext cx="685800" cy="475488"/>
           </a:xfrm>
           <a:prstGeom prst="rect">
@@ -26864,13 +27608,13 @@
       </p:sp>
       <p:sp>
         <p:nvSpPr>
-          <p:cNvPr id="39" name="Text 37"/>
-          <p:cNvSpPr/>
-          <p:nvPr/>
-        </p:nvSpPr>
-        <p:spPr>
-          <a:xfrm>
-            <a:off x="3033522" y="4169664"/>
+          <p:cNvPr id="42" name="Text 40"/>
+          <p:cNvSpPr/>
+          <p:nvPr/>
+        </p:nvSpPr>
+        <p:spPr>
+          <a:xfrm>
+            <a:off x="2831592" y="4169664"/>
             <a:ext cx="685800" cy="475488"/>
           </a:xfrm>
           <a:prstGeom prst="rect">
@@ -26895,7 +27639,7 @@
                 <a:ea typeface="Trebuchet MS" pitchFamily="34" charset="-122"/>
                 <a:cs typeface="Trebuchet MS" pitchFamily="34" charset="-120"/>
               </a:rPr>
-              <a:t>t</a:t>
+              <a:t>e</a:t>
             </a:r>
             <a:endParaRPr lang="en-US" sz="900" dirty="0"/>
           </a:p>
@@ -26903,13 +27647,13 @@
       </p:sp>
       <p:sp>
         <p:nvSpPr>
-          <p:cNvPr id="40" name="Shape 38"/>
-          <p:cNvSpPr/>
-          <p:nvPr/>
-        </p:nvSpPr>
-        <p:spPr>
-          <a:xfrm>
-            <a:off x="3942207" y="4169664"/>
+          <p:cNvPr id="43" name="Shape 41"/>
+          <p:cNvSpPr/>
+          <p:nvPr/>
+        </p:nvSpPr>
+        <p:spPr>
+          <a:xfrm>
+            <a:off x="3639312" y="4169664"/>
             <a:ext cx="685800" cy="475488"/>
           </a:xfrm>
           <a:prstGeom prst="rect">
@@ -26930,13 +27674,13 @@
       </p:sp>
       <p:sp>
         <p:nvSpPr>
-          <p:cNvPr id="41" name="Text 39"/>
-          <p:cNvSpPr/>
-          <p:nvPr/>
-        </p:nvSpPr>
-        <p:spPr>
-          <a:xfrm>
-            <a:off x="3942207" y="4169664"/>
+          <p:cNvPr id="44" name="Text 42"/>
+          <p:cNvSpPr/>
+          <p:nvPr/>
+        </p:nvSpPr>
+        <p:spPr>
+          <a:xfrm>
+            <a:off x="3639312" y="4169664"/>
             <a:ext cx="685800" cy="475488"/>
           </a:xfrm>
           <a:prstGeom prst="rect">
@@ -26961,7 +27705,7 @@
                 <a:ea typeface="Trebuchet MS" pitchFamily="34" charset="-122"/>
                 <a:cs typeface="Trebuchet MS" pitchFamily="34" charset="-120"/>
               </a:rPr>
-              <a:t>ar</a:t>
+              <a:t>s</a:t>
             </a:r>
             <a:endParaRPr lang="en-US" sz="900" dirty="0"/>
           </a:p>
@@ -26969,13 +27713,13 @@
       </p:sp>
       <p:sp>
         <p:nvSpPr>
-          <p:cNvPr id="42" name="Shape 40"/>
-          <p:cNvSpPr/>
-          <p:nvPr/>
-        </p:nvSpPr>
-        <p:spPr>
-          <a:xfrm>
-            <a:off x="4850892" y="4169664"/>
+          <p:cNvPr id="45" name="Shape 43"/>
+          <p:cNvSpPr/>
+          <p:nvPr/>
+        </p:nvSpPr>
+        <p:spPr>
+          <a:xfrm>
+            <a:off x="4447032" y="4169664"/>
             <a:ext cx="685800" cy="475488"/>
           </a:xfrm>
           <a:prstGeom prst="rect">
@@ -26996,13 +27740,13 @@
       </p:sp>
       <p:sp>
         <p:nvSpPr>
-          <p:cNvPr id="43" name="Text 41"/>
-          <p:cNvSpPr/>
-          <p:nvPr/>
-        </p:nvSpPr>
-        <p:spPr>
-          <a:xfrm>
-            <a:off x="4850892" y="4169664"/>
+          <p:cNvPr id="46" name="Text 44"/>
+          <p:cNvSpPr/>
+          <p:nvPr/>
+        </p:nvSpPr>
+        <p:spPr>
+          <a:xfrm>
+            <a:off x="4447032" y="4169664"/>
             <a:ext cx="685800" cy="475488"/>
           </a:xfrm>
           <a:prstGeom prst="rect">
@@ -27035,13 +27779,13 @@
       </p:sp>
       <p:sp>
         <p:nvSpPr>
-          <p:cNvPr id="44" name="Shape 42"/>
-          <p:cNvSpPr/>
-          <p:nvPr/>
-        </p:nvSpPr>
-        <p:spPr>
-          <a:xfrm>
-            <a:off x="5759577" y="4169664"/>
+          <p:cNvPr id="47" name="Shape 45"/>
+          <p:cNvSpPr/>
+          <p:nvPr/>
+        </p:nvSpPr>
+        <p:spPr>
+          <a:xfrm>
+            <a:off x="5254752" y="4169664"/>
             <a:ext cx="685800" cy="475488"/>
           </a:xfrm>
           <a:prstGeom prst="rect">
@@ -27062,13 +27806,13 @@
       </p:sp>
       <p:sp>
         <p:nvSpPr>
-          <p:cNvPr id="45" name="Text 43"/>
-          <p:cNvSpPr/>
-          <p:nvPr/>
-        </p:nvSpPr>
-        <p:spPr>
-          <a:xfrm>
-            <a:off x="5759577" y="4169664"/>
+          <p:cNvPr id="48" name="Text 46"/>
+          <p:cNvSpPr/>
+          <p:nvPr/>
+        </p:nvSpPr>
+        <p:spPr>
+          <a:xfrm>
+            <a:off x="5254752" y="4169664"/>
             <a:ext cx="685800" cy="475488"/>
           </a:xfrm>
           <a:prstGeom prst="rect">
@@ -27093,7 +27837,7 @@
                 <a:ea typeface="Trebuchet MS" pitchFamily="34" charset="-122"/>
                 <a:cs typeface="Trebuchet MS" pitchFamily="34" charset="-120"/>
               </a:rPr>
-              <a:t>l</a:t>
+              <a:t>a</a:t>
             </a:r>
             <a:endParaRPr lang="en-US" sz="900" dirty="0"/>
           </a:p>
@@ -27101,13 +27845,13 @@
       </p:sp>
       <p:sp>
         <p:nvSpPr>
-          <p:cNvPr id="46" name="Shape 44"/>
-          <p:cNvSpPr/>
-          <p:nvPr/>
-        </p:nvSpPr>
-        <p:spPr>
-          <a:xfrm>
-            <a:off x="6668262" y="4169664"/>
+          <p:cNvPr id="49" name="Shape 47"/>
+          <p:cNvSpPr/>
+          <p:nvPr/>
+        </p:nvSpPr>
+        <p:spPr>
+          <a:xfrm>
+            <a:off x="6062472" y="4169664"/>
             <a:ext cx="685800" cy="475488"/>
           </a:xfrm>
           <a:prstGeom prst="rect">
@@ -27128,13 +27872,13 @@
       </p:sp>
       <p:sp>
         <p:nvSpPr>
-          <p:cNvPr id="47" name="Text 45"/>
-          <p:cNvSpPr/>
-          <p:nvPr/>
-        </p:nvSpPr>
-        <p:spPr>
-          <a:xfrm>
-            <a:off x="6668262" y="4169664"/>
+          <p:cNvPr id="50" name="Text 48"/>
+          <p:cNvSpPr/>
+          <p:nvPr/>
+        </p:nvSpPr>
+        <p:spPr>
+          <a:xfrm>
+            <a:off x="6062472" y="4169664"/>
             <a:ext cx="685800" cy="475488"/>
           </a:xfrm>
           <a:prstGeom prst="rect">
@@ -27159,7 +27903,7 @@
                 <a:ea typeface="Trebuchet MS" pitchFamily="34" charset="-122"/>
                 <a:cs typeface="Trebuchet MS" pitchFamily="34" charset="-120"/>
               </a:rPr>
-              <a:t>i</a:t>
+              <a:t>r</a:t>
             </a:r>
             <a:endParaRPr lang="en-US" sz="900" dirty="0"/>
           </a:p>
@@ -27167,13 +27911,13 @@
       </p:sp>
       <p:sp>
         <p:nvSpPr>
-          <p:cNvPr id="48" name="Shape 46"/>
-          <p:cNvSpPr/>
-          <p:nvPr/>
-        </p:nvSpPr>
-        <p:spPr>
-          <a:xfrm>
-            <a:off x="7576947" y="4169664"/>
+          <p:cNvPr id="51" name="Shape 49"/>
+          <p:cNvSpPr/>
+          <p:nvPr/>
+        </p:nvSpPr>
+        <p:spPr>
+          <a:xfrm>
+            <a:off x="6870192" y="4169664"/>
             <a:ext cx="685800" cy="475488"/>
           </a:xfrm>
           <a:prstGeom prst="rect">
@@ -27194,13 +27938,13 @@
       </p:sp>
       <p:sp>
         <p:nvSpPr>
-          <p:cNvPr id="49" name="Text 47"/>
-          <p:cNvSpPr/>
-          <p:nvPr/>
-        </p:nvSpPr>
-        <p:spPr>
-          <a:xfrm>
-            <a:off x="7576947" y="4169664"/>
+          <p:cNvPr id="52" name="Text 50"/>
+          <p:cNvSpPr/>
+          <p:nvPr/>
+        </p:nvSpPr>
+        <p:spPr>
+          <a:xfrm>
+            <a:off x="6870192" y="4169664"/>
             <a:ext cx="685800" cy="475488"/>
           </a:xfrm>
           <a:prstGeom prst="rect">
@@ -27225,7 +27969,73 @@
                 <a:ea typeface="Trebuchet MS" pitchFamily="34" charset="-122"/>
                 <a:cs typeface="Trebuchet MS" pitchFamily="34" charset="-120"/>
               </a:rPr>
-              <a:t>ng</a:t>
+              <a:t>t</a:t>
+            </a:r>
+            <a:endParaRPr lang="en-US" sz="900" dirty="0"/>
+          </a:p>
+        </p:txBody>
+      </p:sp>
+      <p:sp>
+        <p:nvSpPr>
+          <p:cNvPr id="53" name="Shape 51"/>
+          <p:cNvSpPr/>
+          <p:nvPr/>
+        </p:nvSpPr>
+        <p:spPr>
+          <a:xfrm>
+            <a:off x="7677912" y="4169664"/>
+            <a:ext cx="685800" cy="475488"/>
+          </a:xfrm>
+          <a:prstGeom prst="rect">
+            <a:avLst>
+              <a:gd name="adj" fmla="val 7692"/>
+            </a:avLst>
+          </a:prstGeom>
+          <a:solidFill>
+            <a:srgbClr val="FFFFFF"/>
+          </a:solidFill>
+          <a:ln w="12700">
+            <a:solidFill>
+              <a:srgbClr val="DB2777"/>
+            </a:solidFill>
+            <a:prstDash val="solid"/>
+          </a:ln>
+        </p:spPr>
+      </p:sp>
+      <p:sp>
+        <p:nvSpPr>
+          <p:cNvPr id="54" name="Text 52"/>
+          <p:cNvSpPr/>
+          <p:nvPr/>
+        </p:nvSpPr>
+        <p:spPr>
+          <a:xfrm>
+            <a:off x="7677912" y="4169664"/>
+            <a:ext cx="685800" cy="475488"/>
+          </a:xfrm>
+          <a:prstGeom prst="rect">
+            <a:avLst/>
+          </a:prstGeom>
+          <a:noFill/>
+          <a:ln/>
+        </p:spPr>
+        <p:txBody>
+          <a:bodyPr wrap="square" lIns="0" tIns="0" rIns="0" bIns="0" rtlCol="0" anchor="ctr"/>
+          <a:lstStyle/>
+          <a:p>
+            <a:pPr algn="ctr" indent="0" marL="0">
+              <a:buNone/>
+            </a:pPr>
+            <a:r>
+              <a:rPr lang="en-US" sz="900" b="1" dirty="0">
+                <a:solidFill>
+                  <a:srgbClr val="9D174D"/>
+                </a:solidFill>
+                <a:latin typeface="Trebuchet MS" pitchFamily="34" charset="0"/>
+                <a:ea typeface="Trebuchet MS" pitchFamily="34" charset="-122"/>
+                <a:cs typeface="Trebuchet MS" pitchFamily="34" charset="-120"/>
+              </a:rPr>
+              <a:t>ed</a:t>
             </a:r>
             <a:endParaRPr lang="en-US" sz="900" dirty="0"/>
           </a:p>
@@ -27517,7 +28327,7 @@
                 <a:ea typeface="Calibri" pitchFamily="34" charset="-122"/>
                 <a:cs typeface="Calibri" pitchFamily="34" charset="-120"/>
               </a:rPr>
-              <a:t>Word Labs  •  wordlabs.app  •  Root: 'start' = begin, move suddenly, set going</a:t>
+              <a:t>Word Labs  •  wordlabs.app  •  Root: 'start' = to begin</a:t>
             </a:r>
             <a:endParaRPr lang="en-US" sz="800" dirty="0"/>
           </a:p>
@@ -27656,7 +28466,7 @@
                 <a:ea typeface="Trebuchet MS" pitchFamily="34" charset="-122"/>
                 <a:cs typeface="Trebuchet MS" pitchFamily="34" charset="-120"/>
               </a:rPr>
-              <a:t>started</a:t>
+              <a:t>restarting</a:t>
             </a:r>
             <a:endParaRPr lang="en-US" sz="2800" dirty="0"/>
           </a:p>
@@ -28344,7 +29154,7 @@
                 <a:ea typeface="Calibri" pitchFamily="34" charset="-122"/>
                 <a:cs typeface="Calibri" pitchFamily="34" charset="-120"/>
               </a:rPr>
-              <a:t>Word Labs  •  wordlabs.app  •  Root: 'start' = begin, move suddenly, set going</a:t>
+              <a:t>Word Labs  •  wordlabs.app  •  Root: 'start' = to begin</a:t>
             </a:r>
             <a:endParaRPr lang="en-US" sz="800" dirty="0"/>
           </a:p>
@@ -28483,7 +29293,7 @@
                 <a:ea typeface="Trebuchet MS" pitchFamily="34" charset="-122"/>
                 <a:cs typeface="Trebuchet MS" pitchFamily="34" charset="-120"/>
               </a:rPr>
-              <a:t>started</a:t>
+              <a:t>restarting</a:t>
             </a:r>
             <a:endParaRPr lang="en-US" sz="2800" dirty="0"/>
           </a:p>
@@ -28563,7 +29373,7 @@
         </p:nvSpPr>
         <p:spPr>
           <a:xfrm>
-            <a:off x="2938272" y="2258568"/>
+            <a:off x="2221992" y="2258568"/>
             <a:ext cx="1828800" cy="292608"/>
           </a:xfrm>
           <a:prstGeom prst="rect">
@@ -28572,11 +29382,11 @@
             </a:avLst>
           </a:prstGeom>
           <a:solidFill>
-            <a:srgbClr val="CCFBF1"/>
+            <a:srgbClr val="DDD6FE"/>
           </a:solidFill>
           <a:ln w="19050">
             <a:solidFill>
-              <a:srgbClr val="0D9488"/>
+              <a:srgbClr val="7C3AED"/>
             </a:solidFill>
             <a:prstDash val="solid"/>
           </a:ln>
@@ -28597,7 +29407,7 @@
         </p:nvSpPr>
         <p:spPr>
           <a:xfrm>
-            <a:off x="2938272" y="2258568"/>
+            <a:off x="2221992" y="2258568"/>
             <a:ext cx="1828800" cy="292608"/>
           </a:xfrm>
           <a:prstGeom prst="rect">
@@ -28616,13 +29426,13 @@
             <a:r>
               <a:rPr lang="en-US" sz="1300" b="1" dirty="0">
                 <a:solidFill>
-                  <a:srgbClr val="0F766E"/>
+                  <a:srgbClr val="4C1D95"/>
                 </a:solidFill>
                 <a:latin typeface="Trebuchet MS" pitchFamily="34" charset="0"/>
                 <a:ea typeface="Trebuchet MS" pitchFamily="34" charset="-122"/>
                 <a:cs typeface="Trebuchet MS" pitchFamily="34" charset="-120"/>
               </a:rPr>
-              <a:t>start</a:t>
+              <a:t>re</a:t>
             </a:r>
             <a:endParaRPr lang="en-US" sz="1300" dirty="0"/>
           </a:p>
@@ -28636,7 +29446,7 @@
         </p:nvSpPr>
         <p:spPr>
           <a:xfrm>
-            <a:off x="2938272" y="2569464"/>
+            <a:off x="2221992" y="2569464"/>
             <a:ext cx="1828800" cy="201168"/>
           </a:xfrm>
           <a:prstGeom prst="rect">
@@ -28661,7 +29471,7 @@
                 <a:ea typeface="Calibri" pitchFamily="34" charset="-122"/>
                 <a:cs typeface="Calibri" pitchFamily="34" charset="-120"/>
               </a:rPr>
-              <a:t>begin</a:t>
+              <a:t>again</a:t>
             </a:r>
             <a:endParaRPr lang="en-US" sz="850" dirty="0"/>
           </a:p>
@@ -28675,7 +29485,7 @@
         </p:nvSpPr>
         <p:spPr>
           <a:xfrm>
-            <a:off x="5803392" y="2258568"/>
+            <a:off x="4370832" y="2258568"/>
             <a:ext cx="1828800" cy="292608"/>
           </a:xfrm>
           <a:prstGeom prst="rect">
@@ -28684,11 +29494,11 @@
             </a:avLst>
           </a:prstGeom>
           <a:solidFill>
-            <a:srgbClr val="FCE7F3"/>
+            <a:srgbClr val="CCFBF1"/>
           </a:solidFill>
           <a:ln w="19050">
             <a:solidFill>
-              <a:srgbClr val="DB2777"/>
+              <a:srgbClr val="0D9488"/>
             </a:solidFill>
             <a:prstDash val="solid"/>
           </a:ln>
@@ -28709,7 +29519,7 @@
         </p:nvSpPr>
         <p:spPr>
           <a:xfrm>
-            <a:off x="5803392" y="2258568"/>
+            <a:off x="4370832" y="2258568"/>
             <a:ext cx="1828800" cy="292608"/>
           </a:xfrm>
           <a:prstGeom prst="rect">
@@ -28728,13 +29538,13 @@
             <a:r>
               <a:rPr lang="en-US" sz="1300" b="1" dirty="0">
                 <a:solidFill>
-                  <a:srgbClr val="9D174D"/>
+                  <a:srgbClr val="0F766E"/>
                 </a:solidFill>
                 <a:latin typeface="Trebuchet MS" pitchFamily="34" charset="0"/>
                 <a:ea typeface="Trebuchet MS" pitchFamily="34" charset="-122"/>
                 <a:cs typeface="Trebuchet MS" pitchFamily="34" charset="-120"/>
               </a:rPr>
-              <a:t>ed</a:t>
+              <a:t>start</a:t>
             </a:r>
             <a:endParaRPr lang="en-US" sz="1300" dirty="0"/>
           </a:p>
@@ -28748,7 +29558,7 @@
         </p:nvSpPr>
         <p:spPr>
           <a:xfrm>
-            <a:off x="5803392" y="2569464"/>
+            <a:off x="4370832" y="2569464"/>
             <a:ext cx="1828800" cy="201168"/>
           </a:xfrm>
           <a:prstGeom prst="rect">
@@ -28773,7 +29583,7 @@
                 <a:ea typeface="Calibri" pitchFamily="34" charset="-122"/>
                 <a:cs typeface="Calibri" pitchFamily="34" charset="-120"/>
               </a:rPr>
-              <a:t>happened in the past</a:t>
+              <a:t>to begin</a:t>
             </a:r>
             <a:endParaRPr lang="en-US" sz="850" dirty="0"/>
           </a:p>
@@ -28782,6 +29592,118 @@
       <p:sp>
         <p:nvSpPr>
           <p:cNvPr id="22" name="Shape 20"/>
+          <p:cNvSpPr/>
+          <p:nvPr/>
+        </p:nvSpPr>
+        <p:spPr>
+          <a:xfrm>
+            <a:off x="6519672" y="2258568"/>
+            <a:ext cx="1828800" cy="292608"/>
+          </a:xfrm>
+          <a:prstGeom prst="rect">
+            <a:avLst>
+              <a:gd name="adj" fmla="val 25000"/>
+            </a:avLst>
+          </a:prstGeom>
+          <a:solidFill>
+            <a:srgbClr val="FCE7F3"/>
+          </a:solidFill>
+          <a:ln w="19050">
+            <a:solidFill>
+              <a:srgbClr val="DB2777"/>
+            </a:solidFill>
+            <a:prstDash val="solid"/>
+          </a:ln>
+          <a:effectLst>
+            <a:outerShdw sx="100000" sy="100000" kx="0" ky="0" algn="bl" rotWithShape="0" blurRad="101600" dist="38100" dir="8100000">
+              <a:srgbClr val="000000">
+                <a:alpha val="12000"/>
+              </a:srgbClr>
+            </a:outerShdw>
+          </a:effectLst>
+        </p:spPr>
+      </p:sp>
+      <p:sp>
+        <p:nvSpPr>
+          <p:cNvPr id="23" name="Text 21"/>
+          <p:cNvSpPr/>
+          <p:nvPr/>
+        </p:nvSpPr>
+        <p:spPr>
+          <a:xfrm>
+            <a:off x="6519672" y="2258568"/>
+            <a:ext cx="1828800" cy="292608"/>
+          </a:xfrm>
+          <a:prstGeom prst="rect">
+            <a:avLst/>
+          </a:prstGeom>
+          <a:noFill/>
+          <a:ln/>
+        </p:spPr>
+        <p:txBody>
+          <a:bodyPr wrap="square" lIns="0" tIns="0" rIns="0" bIns="0" rtlCol="0" anchor="ctr"/>
+          <a:lstStyle/>
+          <a:p>
+            <a:pPr algn="ctr" indent="0" marL="0">
+              <a:buNone/>
+            </a:pPr>
+            <a:r>
+              <a:rPr lang="en-US" sz="1300" b="1" dirty="0">
+                <a:solidFill>
+                  <a:srgbClr val="9D174D"/>
+                </a:solidFill>
+                <a:latin typeface="Trebuchet MS" pitchFamily="34" charset="0"/>
+                <a:ea typeface="Trebuchet MS" pitchFamily="34" charset="-122"/>
+                <a:cs typeface="Trebuchet MS" pitchFamily="34" charset="-120"/>
+              </a:rPr>
+              <a:t>ing</a:t>
+            </a:r>
+            <a:endParaRPr lang="en-US" sz="1300" dirty="0"/>
+          </a:p>
+        </p:txBody>
+      </p:sp>
+      <p:sp>
+        <p:nvSpPr>
+          <p:cNvPr id="24" name="Text 22"/>
+          <p:cNvSpPr/>
+          <p:nvPr/>
+        </p:nvSpPr>
+        <p:spPr>
+          <a:xfrm>
+            <a:off x="6519672" y="2569464"/>
+            <a:ext cx="1828800" cy="201168"/>
+          </a:xfrm>
+          <a:prstGeom prst="rect">
+            <a:avLst/>
+          </a:prstGeom>
+          <a:noFill/>
+          <a:ln/>
+        </p:spPr>
+        <p:txBody>
+          <a:bodyPr wrap="square" lIns="0" tIns="0" rIns="0" bIns="0" rtlCol="0" anchor="t"/>
+          <a:lstStyle/>
+          <a:p>
+            <a:pPr algn="ctr" indent="0" marL="0">
+              <a:buNone/>
+            </a:pPr>
+            <a:r>
+              <a:rPr lang="en-US" sz="850" dirty="0">
+                <a:solidFill>
+                  <a:srgbClr val="475569"/>
+                </a:solidFill>
+                <a:latin typeface="Calibri" pitchFamily="34" charset="0"/>
+                <a:ea typeface="Calibri" pitchFamily="34" charset="-122"/>
+                <a:cs typeface="Calibri" pitchFamily="34" charset="-120"/>
+              </a:rPr>
+              <a:t>happening now</a:t>
+            </a:r>
+            <a:endParaRPr lang="en-US" sz="850" dirty="0"/>
+          </a:p>
+        </p:txBody>
+      </p:sp>
+      <p:sp>
+        <p:nvSpPr>
+          <p:cNvPr id="25" name="Shape 23"/>
           <p:cNvSpPr/>
           <p:nvPr/>
         </p:nvSpPr>
@@ -28808,7 +29730,7 @@
       </p:sp>
       <p:sp>
         <p:nvSpPr>
-          <p:cNvPr id="23" name="Text 21"/>
+          <p:cNvPr id="26" name="Text 24"/>
           <p:cNvSpPr/>
           <p:nvPr/>
         </p:nvSpPr>
@@ -28847,7 +29769,7 @@
       </p:sp>
       <p:sp>
         <p:nvSpPr>
-          <p:cNvPr id="24" name="Shape 22"/>
+          <p:cNvPr id="27" name="Shape 25"/>
           <p:cNvSpPr/>
           <p:nvPr/>
         </p:nvSpPr>
@@ -28874,7 +29796,7 @@
       </p:sp>
       <p:sp>
         <p:nvSpPr>
-          <p:cNvPr id="25" name="Text 23"/>
+          <p:cNvPr id="28" name="Text 26"/>
           <p:cNvSpPr/>
           <p:nvPr/>
         </p:nvSpPr>
@@ -28913,7 +29835,7 @@
       </p:sp>
       <p:sp>
         <p:nvSpPr>
-          <p:cNvPr id="26" name="Shape 24"/>
+          <p:cNvPr id="29" name="Shape 27"/>
           <p:cNvSpPr/>
           <p:nvPr/>
         </p:nvSpPr>
@@ -28940,7 +29862,7 @@
       </p:sp>
       <p:sp>
         <p:nvSpPr>
-          <p:cNvPr id="27" name="Text 25"/>
+          <p:cNvPr id="30" name="Text 28"/>
           <p:cNvSpPr/>
           <p:nvPr/>
         </p:nvSpPr>
@@ -28979,7 +29901,7 @@
       </p:sp>
       <p:sp>
         <p:nvSpPr>
-          <p:cNvPr id="28" name="Shape 26"/>
+          <p:cNvPr id="31" name="Shape 29"/>
           <p:cNvSpPr/>
           <p:nvPr/>
         </p:nvSpPr>
@@ -29006,7 +29928,7 @@
       </p:sp>
       <p:sp>
         <p:nvSpPr>
-          <p:cNvPr id="29" name="Text 27"/>
+          <p:cNvPr id="32" name="Text 30"/>
           <p:cNvSpPr/>
           <p:nvPr/>
         </p:nvSpPr>
@@ -29329,7 +30251,7 @@
                 <a:ea typeface="Calibri" pitchFamily="34" charset="-122"/>
                 <a:cs typeface="Calibri" pitchFamily="34" charset="-120"/>
               </a:rPr>
-              <a:t>Word Labs  •  wordlabs.app  •  Root: 'start' = begin, move suddenly, set going</a:t>
+              <a:t>Word Labs  •  wordlabs.app  •  Root: 'start' = to begin</a:t>
             </a:r>
             <a:endParaRPr lang="en-US" sz="800" dirty="0"/>
           </a:p>
@@ -29468,7 +30390,7 @@
                 <a:ea typeface="Trebuchet MS" pitchFamily="34" charset="-122"/>
                 <a:cs typeface="Trebuchet MS" pitchFamily="34" charset="-120"/>
               </a:rPr>
-              <a:t>started</a:t>
+              <a:t>restarting</a:t>
             </a:r>
             <a:endParaRPr lang="en-US" sz="2800" dirty="0"/>
           </a:p>
@@ -29548,7 +30470,7 @@
         </p:nvSpPr>
         <p:spPr>
           <a:xfrm>
-            <a:off x="2938272" y="2258568"/>
+            <a:off x="2221992" y="2258568"/>
             <a:ext cx="1828800" cy="292608"/>
           </a:xfrm>
           <a:prstGeom prst="rect">
@@ -29557,11 +30479,11 @@
             </a:avLst>
           </a:prstGeom>
           <a:solidFill>
-            <a:srgbClr val="CCFBF1"/>
+            <a:srgbClr val="DDD6FE"/>
           </a:solidFill>
           <a:ln w="19050">
             <a:solidFill>
-              <a:srgbClr val="0D9488"/>
+              <a:srgbClr val="7C3AED"/>
             </a:solidFill>
             <a:prstDash val="solid"/>
           </a:ln>
@@ -29582,7 +30504,7 @@
         </p:nvSpPr>
         <p:spPr>
           <a:xfrm>
-            <a:off x="2938272" y="2258568"/>
+            <a:off x="2221992" y="2258568"/>
             <a:ext cx="1828800" cy="292608"/>
           </a:xfrm>
           <a:prstGeom prst="rect">
@@ -29601,13 +30523,13 @@
             <a:r>
               <a:rPr lang="en-US" sz="1300" b="1" dirty="0">
                 <a:solidFill>
-                  <a:srgbClr val="0F766E"/>
+                  <a:srgbClr val="4C1D95"/>
                 </a:solidFill>
                 <a:latin typeface="Trebuchet MS" pitchFamily="34" charset="0"/>
                 <a:ea typeface="Trebuchet MS" pitchFamily="34" charset="-122"/>
                 <a:cs typeface="Trebuchet MS" pitchFamily="34" charset="-120"/>
               </a:rPr>
-              <a:t>start</a:t>
+              <a:t>re</a:t>
             </a:r>
             <a:endParaRPr lang="en-US" sz="1300" dirty="0"/>
           </a:p>
@@ -29621,7 +30543,7 @@
         </p:nvSpPr>
         <p:spPr>
           <a:xfrm>
-            <a:off x="2938272" y="2569464"/>
+            <a:off x="2221992" y="2569464"/>
             <a:ext cx="1828800" cy="201168"/>
           </a:xfrm>
           <a:prstGeom prst="rect">
@@ -29646,7 +30568,7 @@
                 <a:ea typeface="Calibri" pitchFamily="34" charset="-122"/>
                 <a:cs typeface="Calibri" pitchFamily="34" charset="-120"/>
               </a:rPr>
-              <a:t>begin</a:t>
+              <a:t>again</a:t>
             </a:r>
             <a:endParaRPr lang="en-US" sz="850" dirty="0"/>
           </a:p>
@@ -29660,7 +30582,7 @@
         </p:nvSpPr>
         <p:spPr>
           <a:xfrm>
-            <a:off x="5803392" y="2258568"/>
+            <a:off x="4370832" y="2258568"/>
             <a:ext cx="1828800" cy="292608"/>
           </a:xfrm>
           <a:prstGeom prst="rect">
@@ -29669,11 +30591,11 @@
             </a:avLst>
           </a:prstGeom>
           <a:solidFill>
-            <a:srgbClr val="FCE7F3"/>
+            <a:srgbClr val="CCFBF1"/>
           </a:solidFill>
           <a:ln w="19050">
             <a:solidFill>
-              <a:srgbClr val="DB2777"/>
+              <a:srgbClr val="0D9488"/>
             </a:solidFill>
             <a:prstDash val="solid"/>
           </a:ln>
@@ -29694,7 +30616,7 @@
         </p:nvSpPr>
         <p:spPr>
           <a:xfrm>
-            <a:off x="5803392" y="2258568"/>
+            <a:off x="4370832" y="2258568"/>
             <a:ext cx="1828800" cy="292608"/>
           </a:xfrm>
           <a:prstGeom prst="rect">
@@ -29713,13 +30635,13 @@
             <a:r>
               <a:rPr lang="en-US" sz="1300" b="1" dirty="0">
                 <a:solidFill>
-                  <a:srgbClr val="9D174D"/>
+                  <a:srgbClr val="0F766E"/>
                 </a:solidFill>
                 <a:latin typeface="Trebuchet MS" pitchFamily="34" charset="0"/>
                 <a:ea typeface="Trebuchet MS" pitchFamily="34" charset="-122"/>
                 <a:cs typeface="Trebuchet MS" pitchFamily="34" charset="-120"/>
               </a:rPr>
-              <a:t>ed</a:t>
+              <a:t>start</a:t>
             </a:r>
             <a:endParaRPr lang="en-US" sz="1300" dirty="0"/>
           </a:p>
@@ -29733,7 +30655,7 @@
         </p:nvSpPr>
         <p:spPr>
           <a:xfrm>
-            <a:off x="5803392" y="2569464"/>
+            <a:off x="4370832" y="2569464"/>
             <a:ext cx="1828800" cy="201168"/>
           </a:xfrm>
           <a:prstGeom prst="rect">
@@ -29758,7 +30680,7 @@
                 <a:ea typeface="Calibri" pitchFamily="34" charset="-122"/>
                 <a:cs typeface="Calibri" pitchFamily="34" charset="-120"/>
               </a:rPr>
-              <a:t>happened in the past</a:t>
+              <a:t>to begin</a:t>
             </a:r>
             <a:endParaRPr lang="en-US" sz="850" dirty="0"/>
           </a:p>
@@ -29767,6 +30689,118 @@
       <p:sp>
         <p:nvSpPr>
           <p:cNvPr id="22" name="Shape 20"/>
+          <p:cNvSpPr/>
+          <p:nvPr/>
+        </p:nvSpPr>
+        <p:spPr>
+          <a:xfrm>
+            <a:off x="6519672" y="2258568"/>
+            <a:ext cx="1828800" cy="292608"/>
+          </a:xfrm>
+          <a:prstGeom prst="rect">
+            <a:avLst>
+              <a:gd name="adj" fmla="val 25000"/>
+            </a:avLst>
+          </a:prstGeom>
+          <a:solidFill>
+            <a:srgbClr val="FCE7F3"/>
+          </a:solidFill>
+          <a:ln w="19050">
+            <a:solidFill>
+              <a:srgbClr val="DB2777"/>
+            </a:solidFill>
+            <a:prstDash val="solid"/>
+          </a:ln>
+          <a:effectLst>
+            <a:outerShdw sx="100000" sy="100000" kx="0" ky="0" algn="bl" rotWithShape="0" blurRad="101600" dist="38100" dir="8100000">
+              <a:srgbClr val="000000">
+                <a:alpha val="12000"/>
+              </a:srgbClr>
+            </a:outerShdw>
+          </a:effectLst>
+        </p:spPr>
+      </p:sp>
+      <p:sp>
+        <p:nvSpPr>
+          <p:cNvPr id="23" name="Text 21"/>
+          <p:cNvSpPr/>
+          <p:nvPr/>
+        </p:nvSpPr>
+        <p:spPr>
+          <a:xfrm>
+            <a:off x="6519672" y="2258568"/>
+            <a:ext cx="1828800" cy="292608"/>
+          </a:xfrm>
+          <a:prstGeom prst="rect">
+            <a:avLst/>
+          </a:prstGeom>
+          <a:noFill/>
+          <a:ln/>
+        </p:spPr>
+        <p:txBody>
+          <a:bodyPr wrap="square" lIns="0" tIns="0" rIns="0" bIns="0" rtlCol="0" anchor="ctr"/>
+          <a:lstStyle/>
+          <a:p>
+            <a:pPr algn="ctr" indent="0" marL="0">
+              <a:buNone/>
+            </a:pPr>
+            <a:r>
+              <a:rPr lang="en-US" sz="1300" b="1" dirty="0">
+                <a:solidFill>
+                  <a:srgbClr val="9D174D"/>
+                </a:solidFill>
+                <a:latin typeface="Trebuchet MS" pitchFamily="34" charset="0"/>
+                <a:ea typeface="Trebuchet MS" pitchFamily="34" charset="-122"/>
+                <a:cs typeface="Trebuchet MS" pitchFamily="34" charset="-120"/>
+              </a:rPr>
+              <a:t>ing</a:t>
+            </a:r>
+            <a:endParaRPr lang="en-US" sz="1300" dirty="0"/>
+          </a:p>
+        </p:txBody>
+      </p:sp>
+      <p:sp>
+        <p:nvSpPr>
+          <p:cNvPr id="24" name="Text 22"/>
+          <p:cNvSpPr/>
+          <p:nvPr/>
+        </p:nvSpPr>
+        <p:spPr>
+          <a:xfrm>
+            <a:off x="6519672" y="2569464"/>
+            <a:ext cx="1828800" cy="201168"/>
+          </a:xfrm>
+          <a:prstGeom prst="rect">
+            <a:avLst/>
+          </a:prstGeom>
+          <a:noFill/>
+          <a:ln/>
+        </p:spPr>
+        <p:txBody>
+          <a:bodyPr wrap="square" lIns="0" tIns="0" rIns="0" bIns="0" rtlCol="0" anchor="t"/>
+          <a:lstStyle/>
+          <a:p>
+            <a:pPr algn="ctr" indent="0" marL="0">
+              <a:buNone/>
+            </a:pPr>
+            <a:r>
+              <a:rPr lang="en-US" sz="850" dirty="0">
+                <a:solidFill>
+                  <a:srgbClr val="475569"/>
+                </a:solidFill>
+                <a:latin typeface="Calibri" pitchFamily="34" charset="0"/>
+                <a:ea typeface="Calibri" pitchFamily="34" charset="-122"/>
+                <a:cs typeface="Calibri" pitchFamily="34" charset="-120"/>
+              </a:rPr>
+              <a:t>happening now</a:t>
+            </a:r>
+            <a:endParaRPr lang="en-US" sz="850" dirty="0"/>
+          </a:p>
+        </p:txBody>
+      </p:sp>
+      <p:sp>
+        <p:nvSpPr>
+          <p:cNvPr id="25" name="Shape 23"/>
           <p:cNvSpPr/>
           <p:nvPr/>
         </p:nvSpPr>
@@ -29793,7 +30827,7 @@
       </p:sp>
       <p:sp>
         <p:nvSpPr>
-          <p:cNvPr id="23" name="Text 21"/>
+          <p:cNvPr id="26" name="Text 24"/>
           <p:cNvSpPr/>
           <p:nvPr/>
         </p:nvSpPr>
@@ -29832,7 +30866,7 @@
       </p:sp>
       <p:sp>
         <p:nvSpPr>
-          <p:cNvPr id="24" name="Shape 22"/>
+          <p:cNvPr id="27" name="Shape 25"/>
           <p:cNvSpPr/>
           <p:nvPr/>
         </p:nvSpPr>
@@ -29859,13 +30893,13 @@
       </p:sp>
       <p:sp>
         <p:nvSpPr>
-          <p:cNvPr id="25" name="Shape 23"/>
-          <p:cNvSpPr/>
-          <p:nvPr/>
-        </p:nvSpPr>
-        <p:spPr>
-          <a:xfrm>
-            <a:off x="2999232" y="3364992"/>
+          <p:cNvPr id="28" name="Shape 26"/>
+          <p:cNvSpPr/>
+          <p:nvPr/>
+        </p:nvSpPr>
+        <p:spPr>
+          <a:xfrm>
+            <a:off x="2313432" y="3364992"/>
             <a:ext cx="1645920" cy="475488"/>
           </a:xfrm>
           <a:prstGeom prst="rect">
@@ -29886,13 +30920,13 @@
       </p:sp>
       <p:sp>
         <p:nvSpPr>
-          <p:cNvPr id="26" name="Text 24"/>
-          <p:cNvSpPr/>
-          <p:nvPr/>
-        </p:nvSpPr>
-        <p:spPr>
-          <a:xfrm>
-            <a:off x="2999232" y="3364992"/>
+          <p:cNvPr id="29" name="Text 27"/>
+          <p:cNvSpPr/>
+          <p:nvPr/>
+        </p:nvSpPr>
+        <p:spPr>
+          <a:xfrm>
+            <a:off x="2313432" y="3364992"/>
             <a:ext cx="1645920" cy="475488"/>
           </a:xfrm>
           <a:prstGeom prst="rect">
@@ -29917,7 +30951,7 @@
                 <a:ea typeface="Trebuchet MS" pitchFamily="34" charset="-122"/>
                 <a:cs typeface="Trebuchet MS" pitchFamily="34" charset="-120"/>
               </a:rPr>
-              <a:t>star</a:t>
+              <a:t>re</a:t>
             </a:r>
             <a:endParaRPr lang="en-US" sz="1400" dirty="0"/>
           </a:p>
@@ -29925,14 +30959,14 @@
       </p:sp>
       <p:sp>
         <p:nvSpPr>
-          <p:cNvPr id="27" name="Text 25"/>
-          <p:cNvSpPr/>
-          <p:nvPr/>
-        </p:nvSpPr>
-        <p:spPr>
-          <a:xfrm>
-            <a:off x="4645152" y="3364992"/>
-            <a:ext cx="1097280" cy="475488"/>
+          <p:cNvPr id="30" name="Text 28"/>
+          <p:cNvSpPr/>
+          <p:nvPr/>
+        </p:nvSpPr>
+        <p:spPr>
+          <a:xfrm>
+            <a:off x="3959352" y="3364992"/>
+            <a:ext cx="411480" cy="475488"/>
           </a:xfrm>
           <a:prstGeom prst="rect">
             <a:avLst/>
@@ -29964,13 +30998,13 @@
       </p:sp>
       <p:sp>
         <p:nvSpPr>
-          <p:cNvPr id="28" name="Shape 26"/>
-          <p:cNvSpPr/>
-          <p:nvPr/>
-        </p:nvSpPr>
-        <p:spPr>
-          <a:xfrm>
-            <a:off x="5742432" y="3364992"/>
+          <p:cNvPr id="31" name="Shape 29"/>
+          <p:cNvSpPr/>
+          <p:nvPr/>
+        </p:nvSpPr>
+        <p:spPr>
+          <a:xfrm>
+            <a:off x="4370832" y="3364992"/>
             <a:ext cx="1645920" cy="475488"/>
           </a:xfrm>
           <a:prstGeom prst="rect">
@@ -29991,13 +31025,13 @@
       </p:sp>
       <p:sp>
         <p:nvSpPr>
-          <p:cNvPr id="29" name="Text 27"/>
-          <p:cNvSpPr/>
-          <p:nvPr/>
-        </p:nvSpPr>
-        <p:spPr>
-          <a:xfrm>
-            <a:off x="5742432" y="3364992"/>
+          <p:cNvPr id="32" name="Text 30"/>
+          <p:cNvSpPr/>
+          <p:nvPr/>
+        </p:nvSpPr>
+        <p:spPr>
+          <a:xfrm>
+            <a:off x="4370832" y="3364992"/>
             <a:ext cx="1645920" cy="475488"/>
           </a:xfrm>
           <a:prstGeom prst="rect">
@@ -30022,7 +31056,7 @@
                 <a:ea typeface="Trebuchet MS" pitchFamily="34" charset="-122"/>
                 <a:cs typeface="Trebuchet MS" pitchFamily="34" charset="-120"/>
               </a:rPr>
-              <a:t>ted</a:t>
+              <a:t>start</a:t>
             </a:r>
             <a:endParaRPr lang="en-US" sz="1400" dirty="0"/>
           </a:p>
@@ -30030,7 +31064,112 @@
       </p:sp>
       <p:sp>
         <p:nvSpPr>
-          <p:cNvPr id="30" name="Shape 28"/>
+          <p:cNvPr id="33" name="Text 31"/>
+          <p:cNvSpPr/>
+          <p:nvPr/>
+        </p:nvSpPr>
+        <p:spPr>
+          <a:xfrm>
+            <a:off x="6016752" y="3364992"/>
+            <a:ext cx="411480" cy="475488"/>
+          </a:xfrm>
+          <a:prstGeom prst="rect">
+            <a:avLst/>
+          </a:prstGeom>
+          <a:noFill/>
+          <a:ln/>
+        </p:spPr>
+        <p:txBody>
+          <a:bodyPr wrap="square" lIns="0" tIns="0" rIns="0" bIns="0" rtlCol="0" anchor="ctr"/>
+          <a:lstStyle/>
+          <a:p>
+            <a:pPr algn="ctr" indent="0" marL="0">
+              <a:buNone/>
+            </a:pPr>
+            <a:r>
+              <a:rPr lang="en-US" sz="1600" b="1" dirty="0">
+                <a:solidFill>
+                  <a:srgbClr val="0D9488"/>
+                </a:solidFill>
+                <a:latin typeface="Trebuchet MS" pitchFamily="34" charset="0"/>
+                <a:ea typeface="Trebuchet MS" pitchFamily="34" charset="-122"/>
+                <a:cs typeface="Trebuchet MS" pitchFamily="34" charset="-120"/>
+              </a:rPr>
+              <a:t>·</a:t>
+            </a:r>
+            <a:endParaRPr lang="en-US" sz="1600" dirty="0"/>
+          </a:p>
+        </p:txBody>
+      </p:sp>
+      <p:sp>
+        <p:nvSpPr>
+          <p:cNvPr id="34" name="Shape 32"/>
+          <p:cNvSpPr/>
+          <p:nvPr/>
+        </p:nvSpPr>
+        <p:spPr>
+          <a:xfrm>
+            <a:off x="6428232" y="3364992"/>
+            <a:ext cx="1645920" cy="475488"/>
+          </a:xfrm>
+          <a:prstGeom prst="rect">
+            <a:avLst>
+              <a:gd name="adj" fmla="val 9615"/>
+            </a:avLst>
+          </a:prstGeom>
+          <a:solidFill>
+            <a:srgbClr val="FFFFFF"/>
+          </a:solidFill>
+          <a:ln w="12700">
+            <a:solidFill>
+              <a:srgbClr val="0D9488"/>
+            </a:solidFill>
+            <a:prstDash val="solid"/>
+          </a:ln>
+        </p:spPr>
+      </p:sp>
+      <p:sp>
+        <p:nvSpPr>
+          <p:cNvPr id="35" name="Text 33"/>
+          <p:cNvSpPr/>
+          <p:nvPr/>
+        </p:nvSpPr>
+        <p:spPr>
+          <a:xfrm>
+            <a:off x="6428232" y="3364992"/>
+            <a:ext cx="1645920" cy="475488"/>
+          </a:xfrm>
+          <a:prstGeom prst="rect">
+            <a:avLst/>
+          </a:prstGeom>
+          <a:noFill/>
+          <a:ln/>
+        </p:spPr>
+        <p:txBody>
+          <a:bodyPr wrap="square" lIns="0" tIns="0" rIns="0" bIns="0" rtlCol="0" anchor="ctr"/>
+          <a:lstStyle/>
+          <a:p>
+            <a:pPr algn="ctr" indent="0" marL="0">
+              <a:buNone/>
+            </a:pPr>
+            <a:r>
+              <a:rPr lang="en-US" sz="1400" b="1" dirty="0">
+                <a:solidFill>
+                  <a:srgbClr val="0D9488"/>
+                </a:solidFill>
+                <a:latin typeface="Trebuchet MS" pitchFamily="34" charset="0"/>
+                <a:ea typeface="Trebuchet MS" pitchFamily="34" charset="-122"/>
+                <a:cs typeface="Trebuchet MS" pitchFamily="34" charset="-120"/>
+              </a:rPr>
+              <a:t>ing</a:t>
+            </a:r>
+            <a:endParaRPr lang="en-US" sz="1400" dirty="0"/>
+          </a:p>
+        </p:txBody>
+      </p:sp>
+      <p:sp>
+        <p:nvSpPr>
+          <p:cNvPr id="36" name="Shape 34"/>
           <p:cNvSpPr/>
           <p:nvPr/>
         </p:nvSpPr>
@@ -30057,7 +31196,7 @@
       </p:sp>
       <p:sp>
         <p:nvSpPr>
-          <p:cNvPr id="31" name="Text 29"/>
+          <p:cNvPr id="37" name="Text 35"/>
           <p:cNvSpPr/>
           <p:nvPr/>
         </p:nvSpPr>
@@ -30096,7 +31235,7 @@
       </p:sp>
       <p:sp>
         <p:nvSpPr>
-          <p:cNvPr id="32" name="Shape 30"/>
+          <p:cNvPr id="38" name="Shape 36"/>
           <p:cNvSpPr/>
           <p:nvPr/>
         </p:nvSpPr>
@@ -30123,7 +31262,7 @@
       </p:sp>
       <p:sp>
         <p:nvSpPr>
-          <p:cNvPr id="33" name="Text 31"/>
+          <p:cNvPr id="39" name="Text 37"/>
           <p:cNvSpPr/>
           <p:nvPr/>
         </p:nvSpPr>
@@ -30446,7 +31585,7 @@
                 <a:ea typeface="Calibri" pitchFamily="34" charset="-122"/>
                 <a:cs typeface="Calibri" pitchFamily="34" charset="-120"/>
               </a:rPr>
-              <a:t>Word Labs  •  wordlabs.app  •  Root: 'start' = begin, move suddenly, set going</a:t>
+              <a:t>Word Labs  •  wordlabs.app  •  Root: 'start' = to begin</a:t>
             </a:r>
             <a:endParaRPr lang="en-US" sz="800" dirty="0"/>
           </a:p>
@@ -30585,7 +31724,7 @@
                 <a:ea typeface="Trebuchet MS" pitchFamily="34" charset="-122"/>
                 <a:cs typeface="Trebuchet MS" pitchFamily="34" charset="-120"/>
               </a:rPr>
-              <a:t>started</a:t>
+              <a:t>restarting</a:t>
             </a:r>
             <a:endParaRPr lang="en-US" sz="2800" dirty="0"/>
           </a:p>
@@ -30665,7 +31804,7 @@
         </p:nvSpPr>
         <p:spPr>
           <a:xfrm>
-            <a:off x="2938272" y="2258568"/>
+            <a:off x="2221992" y="2258568"/>
             <a:ext cx="1828800" cy="292608"/>
           </a:xfrm>
           <a:prstGeom prst="rect">
@@ -30674,11 +31813,11 @@
             </a:avLst>
           </a:prstGeom>
           <a:solidFill>
-            <a:srgbClr val="CCFBF1"/>
+            <a:srgbClr val="DDD6FE"/>
           </a:solidFill>
           <a:ln w="19050">
             <a:solidFill>
-              <a:srgbClr val="0D9488"/>
+              <a:srgbClr val="7C3AED"/>
             </a:solidFill>
             <a:prstDash val="solid"/>
           </a:ln>
@@ -30699,7 +31838,7 @@
         </p:nvSpPr>
         <p:spPr>
           <a:xfrm>
-            <a:off x="2938272" y="2258568"/>
+            <a:off x="2221992" y="2258568"/>
             <a:ext cx="1828800" cy="292608"/>
           </a:xfrm>
           <a:prstGeom prst="rect">
@@ -30718,13 +31857,13 @@
             <a:r>
               <a:rPr lang="en-US" sz="1300" b="1" dirty="0">
                 <a:solidFill>
-                  <a:srgbClr val="0F766E"/>
+                  <a:srgbClr val="4C1D95"/>
                 </a:solidFill>
                 <a:latin typeface="Trebuchet MS" pitchFamily="34" charset="0"/>
                 <a:ea typeface="Trebuchet MS" pitchFamily="34" charset="-122"/>
                 <a:cs typeface="Trebuchet MS" pitchFamily="34" charset="-120"/>
               </a:rPr>
-              <a:t>start</a:t>
+              <a:t>re</a:t>
             </a:r>
             <a:endParaRPr lang="en-US" sz="1300" dirty="0"/>
           </a:p>
@@ -30738,7 +31877,7 @@
         </p:nvSpPr>
         <p:spPr>
           <a:xfrm>
-            <a:off x="2938272" y="2569464"/>
+            <a:off x="2221992" y="2569464"/>
             <a:ext cx="1828800" cy="201168"/>
           </a:xfrm>
           <a:prstGeom prst="rect">
@@ -30763,7 +31902,7 @@
                 <a:ea typeface="Calibri" pitchFamily="34" charset="-122"/>
                 <a:cs typeface="Calibri" pitchFamily="34" charset="-120"/>
               </a:rPr>
-              <a:t>begin</a:t>
+              <a:t>again</a:t>
             </a:r>
             <a:endParaRPr lang="en-US" sz="850" dirty="0"/>
           </a:p>
@@ -30777,7 +31916,7 @@
         </p:nvSpPr>
         <p:spPr>
           <a:xfrm>
-            <a:off x="5803392" y="2258568"/>
+            <a:off x="4370832" y="2258568"/>
             <a:ext cx="1828800" cy="292608"/>
           </a:xfrm>
           <a:prstGeom prst="rect">
@@ -30786,11 +31925,11 @@
             </a:avLst>
           </a:prstGeom>
           <a:solidFill>
-            <a:srgbClr val="FCE7F3"/>
+            <a:srgbClr val="CCFBF1"/>
           </a:solidFill>
           <a:ln w="19050">
             <a:solidFill>
-              <a:srgbClr val="DB2777"/>
+              <a:srgbClr val="0D9488"/>
             </a:solidFill>
             <a:prstDash val="solid"/>
           </a:ln>
@@ -30811,7 +31950,7 @@
         </p:nvSpPr>
         <p:spPr>
           <a:xfrm>
-            <a:off x="5803392" y="2258568"/>
+            <a:off x="4370832" y="2258568"/>
             <a:ext cx="1828800" cy="292608"/>
           </a:xfrm>
           <a:prstGeom prst="rect">
@@ -30830,13 +31969,13 @@
             <a:r>
               <a:rPr lang="en-US" sz="1300" b="1" dirty="0">
                 <a:solidFill>
-                  <a:srgbClr val="9D174D"/>
+                  <a:srgbClr val="0F766E"/>
                 </a:solidFill>
                 <a:latin typeface="Trebuchet MS" pitchFamily="34" charset="0"/>
                 <a:ea typeface="Trebuchet MS" pitchFamily="34" charset="-122"/>
                 <a:cs typeface="Trebuchet MS" pitchFamily="34" charset="-120"/>
               </a:rPr>
-              <a:t>ed</a:t>
+              <a:t>start</a:t>
             </a:r>
             <a:endParaRPr lang="en-US" sz="1300" dirty="0"/>
           </a:p>
@@ -30850,7 +31989,7 @@
         </p:nvSpPr>
         <p:spPr>
           <a:xfrm>
-            <a:off x="5803392" y="2569464"/>
+            <a:off x="4370832" y="2569464"/>
             <a:ext cx="1828800" cy="201168"/>
           </a:xfrm>
           <a:prstGeom prst="rect">
@@ -30875,7 +32014,7 @@
                 <a:ea typeface="Calibri" pitchFamily="34" charset="-122"/>
                 <a:cs typeface="Calibri" pitchFamily="34" charset="-120"/>
               </a:rPr>
-              <a:t>happened in the past</a:t>
+              <a:t>to begin</a:t>
             </a:r>
             <a:endParaRPr lang="en-US" sz="850" dirty="0"/>
           </a:p>
@@ -30884,6 +32023,118 @@
       <p:sp>
         <p:nvSpPr>
           <p:cNvPr id="22" name="Shape 20"/>
+          <p:cNvSpPr/>
+          <p:nvPr/>
+        </p:nvSpPr>
+        <p:spPr>
+          <a:xfrm>
+            <a:off x="6519672" y="2258568"/>
+            <a:ext cx="1828800" cy="292608"/>
+          </a:xfrm>
+          <a:prstGeom prst="rect">
+            <a:avLst>
+              <a:gd name="adj" fmla="val 25000"/>
+            </a:avLst>
+          </a:prstGeom>
+          <a:solidFill>
+            <a:srgbClr val="FCE7F3"/>
+          </a:solidFill>
+          <a:ln w="19050">
+            <a:solidFill>
+              <a:srgbClr val="DB2777"/>
+            </a:solidFill>
+            <a:prstDash val="solid"/>
+          </a:ln>
+          <a:effectLst>
+            <a:outerShdw sx="100000" sy="100000" kx="0" ky="0" algn="bl" rotWithShape="0" blurRad="101600" dist="38100" dir="8100000">
+              <a:srgbClr val="000000">
+                <a:alpha val="12000"/>
+              </a:srgbClr>
+            </a:outerShdw>
+          </a:effectLst>
+        </p:spPr>
+      </p:sp>
+      <p:sp>
+        <p:nvSpPr>
+          <p:cNvPr id="23" name="Text 21"/>
+          <p:cNvSpPr/>
+          <p:nvPr/>
+        </p:nvSpPr>
+        <p:spPr>
+          <a:xfrm>
+            <a:off x="6519672" y="2258568"/>
+            <a:ext cx="1828800" cy="292608"/>
+          </a:xfrm>
+          <a:prstGeom prst="rect">
+            <a:avLst/>
+          </a:prstGeom>
+          <a:noFill/>
+          <a:ln/>
+        </p:spPr>
+        <p:txBody>
+          <a:bodyPr wrap="square" lIns="0" tIns="0" rIns="0" bIns="0" rtlCol="0" anchor="ctr"/>
+          <a:lstStyle/>
+          <a:p>
+            <a:pPr algn="ctr" indent="0" marL="0">
+              <a:buNone/>
+            </a:pPr>
+            <a:r>
+              <a:rPr lang="en-US" sz="1300" b="1" dirty="0">
+                <a:solidFill>
+                  <a:srgbClr val="9D174D"/>
+                </a:solidFill>
+                <a:latin typeface="Trebuchet MS" pitchFamily="34" charset="0"/>
+                <a:ea typeface="Trebuchet MS" pitchFamily="34" charset="-122"/>
+                <a:cs typeface="Trebuchet MS" pitchFamily="34" charset="-120"/>
+              </a:rPr>
+              <a:t>ing</a:t>
+            </a:r>
+            <a:endParaRPr lang="en-US" sz="1300" dirty="0"/>
+          </a:p>
+        </p:txBody>
+      </p:sp>
+      <p:sp>
+        <p:nvSpPr>
+          <p:cNvPr id="24" name="Text 22"/>
+          <p:cNvSpPr/>
+          <p:nvPr/>
+        </p:nvSpPr>
+        <p:spPr>
+          <a:xfrm>
+            <a:off x="6519672" y="2569464"/>
+            <a:ext cx="1828800" cy="201168"/>
+          </a:xfrm>
+          <a:prstGeom prst="rect">
+            <a:avLst/>
+          </a:prstGeom>
+          <a:noFill/>
+          <a:ln/>
+        </p:spPr>
+        <p:txBody>
+          <a:bodyPr wrap="square" lIns="0" tIns="0" rIns="0" bIns="0" rtlCol="0" anchor="t"/>
+          <a:lstStyle/>
+          <a:p>
+            <a:pPr algn="ctr" indent="0" marL="0">
+              <a:buNone/>
+            </a:pPr>
+            <a:r>
+              <a:rPr lang="en-US" sz="850" dirty="0">
+                <a:solidFill>
+                  <a:srgbClr val="475569"/>
+                </a:solidFill>
+                <a:latin typeface="Calibri" pitchFamily="34" charset="0"/>
+                <a:ea typeface="Calibri" pitchFamily="34" charset="-122"/>
+                <a:cs typeface="Calibri" pitchFamily="34" charset="-120"/>
+              </a:rPr>
+              <a:t>happening now</a:t>
+            </a:r>
+            <a:endParaRPr lang="en-US" sz="850" dirty="0"/>
+          </a:p>
+        </p:txBody>
+      </p:sp>
+      <p:sp>
+        <p:nvSpPr>
+          <p:cNvPr id="25" name="Shape 23"/>
           <p:cNvSpPr/>
           <p:nvPr/>
         </p:nvSpPr>
@@ -30910,7 +32161,7 @@
       </p:sp>
       <p:sp>
         <p:nvSpPr>
-          <p:cNvPr id="23" name="Text 21"/>
+          <p:cNvPr id="26" name="Text 24"/>
           <p:cNvSpPr/>
           <p:nvPr/>
         </p:nvSpPr>
@@ -30949,7 +32200,7 @@
       </p:sp>
       <p:sp>
         <p:nvSpPr>
-          <p:cNvPr id="24" name="Shape 22"/>
+          <p:cNvPr id="27" name="Shape 25"/>
           <p:cNvSpPr/>
           <p:nvPr/>
         </p:nvSpPr>
@@ -30976,13 +32227,13 @@
       </p:sp>
       <p:sp>
         <p:nvSpPr>
-          <p:cNvPr id="25" name="Shape 23"/>
-          <p:cNvSpPr/>
-          <p:nvPr/>
-        </p:nvSpPr>
-        <p:spPr>
-          <a:xfrm>
-            <a:off x="2999232" y="3364992"/>
+          <p:cNvPr id="28" name="Shape 26"/>
+          <p:cNvSpPr/>
+          <p:nvPr/>
+        </p:nvSpPr>
+        <p:spPr>
+          <a:xfrm>
+            <a:off x="2313432" y="3364992"/>
             <a:ext cx="1645920" cy="475488"/>
           </a:xfrm>
           <a:prstGeom prst="rect">
@@ -31003,13 +32254,13 @@
       </p:sp>
       <p:sp>
         <p:nvSpPr>
-          <p:cNvPr id="26" name="Text 24"/>
-          <p:cNvSpPr/>
-          <p:nvPr/>
-        </p:nvSpPr>
-        <p:spPr>
-          <a:xfrm>
-            <a:off x="2999232" y="3364992"/>
+          <p:cNvPr id="29" name="Text 27"/>
+          <p:cNvSpPr/>
+          <p:nvPr/>
+        </p:nvSpPr>
+        <p:spPr>
+          <a:xfrm>
+            <a:off x="2313432" y="3364992"/>
             <a:ext cx="1645920" cy="475488"/>
           </a:xfrm>
           <a:prstGeom prst="rect">
@@ -31034,7 +32285,7 @@
                 <a:ea typeface="Trebuchet MS" pitchFamily="34" charset="-122"/>
                 <a:cs typeface="Trebuchet MS" pitchFamily="34" charset="-120"/>
               </a:rPr>
-              <a:t>star</a:t>
+              <a:t>re</a:t>
             </a:r>
             <a:endParaRPr lang="en-US" sz="1400" dirty="0"/>
           </a:p>
@@ -31042,14 +32293,14 @@
       </p:sp>
       <p:sp>
         <p:nvSpPr>
-          <p:cNvPr id="27" name="Text 25"/>
-          <p:cNvSpPr/>
-          <p:nvPr/>
-        </p:nvSpPr>
-        <p:spPr>
-          <a:xfrm>
-            <a:off x="4645152" y="3364992"/>
-            <a:ext cx="1097280" cy="475488"/>
+          <p:cNvPr id="30" name="Text 28"/>
+          <p:cNvSpPr/>
+          <p:nvPr/>
+        </p:nvSpPr>
+        <p:spPr>
+          <a:xfrm>
+            <a:off x="3959352" y="3364992"/>
+            <a:ext cx="411480" cy="475488"/>
           </a:xfrm>
           <a:prstGeom prst="rect">
             <a:avLst/>
@@ -31081,13 +32332,13 @@
       </p:sp>
       <p:sp>
         <p:nvSpPr>
-          <p:cNvPr id="28" name="Shape 26"/>
-          <p:cNvSpPr/>
-          <p:nvPr/>
-        </p:nvSpPr>
-        <p:spPr>
-          <a:xfrm>
-            <a:off x="5742432" y="3364992"/>
+          <p:cNvPr id="31" name="Shape 29"/>
+          <p:cNvSpPr/>
+          <p:nvPr/>
+        </p:nvSpPr>
+        <p:spPr>
+          <a:xfrm>
+            <a:off x="4370832" y="3364992"/>
             <a:ext cx="1645920" cy="475488"/>
           </a:xfrm>
           <a:prstGeom prst="rect">
@@ -31108,13 +32359,13 @@
       </p:sp>
       <p:sp>
         <p:nvSpPr>
-          <p:cNvPr id="29" name="Text 27"/>
-          <p:cNvSpPr/>
-          <p:nvPr/>
-        </p:nvSpPr>
-        <p:spPr>
-          <a:xfrm>
-            <a:off x="5742432" y="3364992"/>
+          <p:cNvPr id="32" name="Text 30"/>
+          <p:cNvSpPr/>
+          <p:nvPr/>
+        </p:nvSpPr>
+        <p:spPr>
+          <a:xfrm>
+            <a:off x="4370832" y="3364992"/>
             <a:ext cx="1645920" cy="475488"/>
           </a:xfrm>
           <a:prstGeom prst="rect">
@@ -31139,7 +32390,7 @@
                 <a:ea typeface="Trebuchet MS" pitchFamily="34" charset="-122"/>
                 <a:cs typeface="Trebuchet MS" pitchFamily="34" charset="-120"/>
               </a:rPr>
-              <a:t>ted</a:t>
+              <a:t>start</a:t>
             </a:r>
             <a:endParaRPr lang="en-US" sz="1400" dirty="0"/>
           </a:p>
@@ -31147,7 +32398,112 @@
       </p:sp>
       <p:sp>
         <p:nvSpPr>
-          <p:cNvPr id="30" name="Shape 28"/>
+          <p:cNvPr id="33" name="Text 31"/>
+          <p:cNvSpPr/>
+          <p:nvPr/>
+        </p:nvSpPr>
+        <p:spPr>
+          <a:xfrm>
+            <a:off x="6016752" y="3364992"/>
+            <a:ext cx="411480" cy="475488"/>
+          </a:xfrm>
+          <a:prstGeom prst="rect">
+            <a:avLst/>
+          </a:prstGeom>
+          <a:noFill/>
+          <a:ln/>
+        </p:spPr>
+        <p:txBody>
+          <a:bodyPr wrap="square" lIns="0" tIns="0" rIns="0" bIns="0" rtlCol="0" anchor="ctr"/>
+          <a:lstStyle/>
+          <a:p>
+            <a:pPr algn="ctr" indent="0" marL="0">
+              <a:buNone/>
+            </a:pPr>
+            <a:r>
+              <a:rPr lang="en-US" sz="1600" b="1" dirty="0">
+                <a:solidFill>
+                  <a:srgbClr val="0D9488"/>
+                </a:solidFill>
+                <a:latin typeface="Trebuchet MS" pitchFamily="34" charset="0"/>
+                <a:ea typeface="Trebuchet MS" pitchFamily="34" charset="-122"/>
+                <a:cs typeface="Trebuchet MS" pitchFamily="34" charset="-120"/>
+              </a:rPr>
+              <a:t>·</a:t>
+            </a:r>
+            <a:endParaRPr lang="en-US" sz="1600" dirty="0"/>
+          </a:p>
+        </p:txBody>
+      </p:sp>
+      <p:sp>
+        <p:nvSpPr>
+          <p:cNvPr id="34" name="Shape 32"/>
+          <p:cNvSpPr/>
+          <p:nvPr/>
+        </p:nvSpPr>
+        <p:spPr>
+          <a:xfrm>
+            <a:off x="6428232" y="3364992"/>
+            <a:ext cx="1645920" cy="475488"/>
+          </a:xfrm>
+          <a:prstGeom prst="rect">
+            <a:avLst>
+              <a:gd name="adj" fmla="val 9615"/>
+            </a:avLst>
+          </a:prstGeom>
+          <a:solidFill>
+            <a:srgbClr val="FFFFFF"/>
+          </a:solidFill>
+          <a:ln w="12700">
+            <a:solidFill>
+              <a:srgbClr val="0D9488"/>
+            </a:solidFill>
+            <a:prstDash val="solid"/>
+          </a:ln>
+        </p:spPr>
+      </p:sp>
+      <p:sp>
+        <p:nvSpPr>
+          <p:cNvPr id="35" name="Text 33"/>
+          <p:cNvSpPr/>
+          <p:nvPr/>
+        </p:nvSpPr>
+        <p:spPr>
+          <a:xfrm>
+            <a:off x="6428232" y="3364992"/>
+            <a:ext cx="1645920" cy="475488"/>
+          </a:xfrm>
+          <a:prstGeom prst="rect">
+            <a:avLst/>
+          </a:prstGeom>
+          <a:noFill/>
+          <a:ln/>
+        </p:spPr>
+        <p:txBody>
+          <a:bodyPr wrap="square" lIns="0" tIns="0" rIns="0" bIns="0" rtlCol="0" anchor="ctr"/>
+          <a:lstStyle/>
+          <a:p>
+            <a:pPr algn="ctr" indent="0" marL="0">
+              <a:buNone/>
+            </a:pPr>
+            <a:r>
+              <a:rPr lang="en-US" sz="1400" b="1" dirty="0">
+                <a:solidFill>
+                  <a:srgbClr val="0D9488"/>
+                </a:solidFill>
+                <a:latin typeface="Trebuchet MS" pitchFamily="34" charset="0"/>
+                <a:ea typeface="Trebuchet MS" pitchFamily="34" charset="-122"/>
+                <a:cs typeface="Trebuchet MS" pitchFamily="34" charset="-120"/>
+              </a:rPr>
+              <a:t>ing</a:t>
+            </a:r>
+            <a:endParaRPr lang="en-US" sz="1400" dirty="0"/>
+          </a:p>
+        </p:txBody>
+      </p:sp>
+      <p:sp>
+        <p:nvSpPr>
+          <p:cNvPr id="36" name="Shape 34"/>
           <p:cNvSpPr/>
           <p:nvPr/>
         </p:nvSpPr>
@@ -31174,7 +32530,7 @@
       </p:sp>
       <p:sp>
         <p:nvSpPr>
-          <p:cNvPr id="31" name="Text 29"/>
+          <p:cNvPr id="37" name="Text 35"/>
           <p:cNvSpPr/>
           <p:nvPr/>
         </p:nvSpPr>
@@ -31213,7 +32569,7 @@
       </p:sp>
       <p:sp>
         <p:nvSpPr>
-          <p:cNvPr id="32" name="Shape 30"/>
+          <p:cNvPr id="38" name="Shape 36"/>
           <p:cNvSpPr/>
           <p:nvPr/>
         </p:nvSpPr>
@@ -31240,14 +32596,14 @@
       </p:sp>
       <p:sp>
         <p:nvSpPr>
-          <p:cNvPr id="33" name="Shape 31"/>
-          <p:cNvSpPr/>
-          <p:nvPr/>
-        </p:nvSpPr>
-        <p:spPr>
-          <a:xfrm>
-            <a:off x="2254649" y="4169664"/>
-            <a:ext cx="685800" cy="475488"/>
+          <p:cNvPr id="39" name="Shape 37"/>
+          <p:cNvSpPr/>
+          <p:nvPr/>
+        </p:nvSpPr>
+        <p:spPr>
+          <a:xfrm>
+            <a:off x="1951330" y="4169664"/>
+            <a:ext cx="676656" cy="475488"/>
           </a:xfrm>
           <a:prstGeom prst="rect">
             <a:avLst>
@@ -31267,14 +32623,14 @@
       </p:sp>
       <p:sp>
         <p:nvSpPr>
-          <p:cNvPr id="34" name="Text 32"/>
-          <p:cNvSpPr/>
-          <p:nvPr/>
-        </p:nvSpPr>
-        <p:spPr>
-          <a:xfrm>
-            <a:off x="2254649" y="4169664"/>
-            <a:ext cx="685800" cy="475488"/>
+          <p:cNvPr id="40" name="Text 38"/>
+          <p:cNvSpPr/>
+          <p:nvPr/>
+        </p:nvSpPr>
+        <p:spPr>
+          <a:xfrm>
+            <a:off x="1951330" y="4169664"/>
+            <a:ext cx="676656" cy="475488"/>
           </a:xfrm>
           <a:prstGeom prst="rect">
             <a:avLst/>
@@ -31298,7 +32654,7 @@
                 <a:ea typeface="Trebuchet MS" pitchFamily="34" charset="-122"/>
                 <a:cs typeface="Trebuchet MS" pitchFamily="34" charset="-120"/>
               </a:rPr>
-              <a:t>s</a:t>
+              <a:t>r</a:t>
             </a:r>
             <a:endParaRPr lang="en-US" sz="900" dirty="0"/>
           </a:p>
@@ -31306,14 +32662,14 @@
       </p:sp>
       <p:sp>
         <p:nvSpPr>
-          <p:cNvPr id="35" name="Shape 33"/>
-          <p:cNvSpPr/>
-          <p:nvPr/>
-        </p:nvSpPr>
-        <p:spPr>
-          <a:xfrm>
-            <a:off x="3293146" y="4169664"/>
-            <a:ext cx="685800" cy="475488"/>
+          <p:cNvPr id="41" name="Shape 39"/>
+          <p:cNvSpPr/>
+          <p:nvPr/>
+        </p:nvSpPr>
+        <p:spPr>
+          <a:xfrm>
+            <a:off x="2677363" y="4169664"/>
+            <a:ext cx="676656" cy="475488"/>
           </a:xfrm>
           <a:prstGeom prst="rect">
             <a:avLst>
@@ -31333,14 +32689,14 @@
       </p:sp>
       <p:sp>
         <p:nvSpPr>
-          <p:cNvPr id="36" name="Text 34"/>
-          <p:cNvSpPr/>
-          <p:nvPr/>
-        </p:nvSpPr>
-        <p:spPr>
-          <a:xfrm>
-            <a:off x="3293146" y="4169664"/>
-            <a:ext cx="685800" cy="475488"/>
+          <p:cNvPr id="42" name="Text 40"/>
+          <p:cNvSpPr/>
+          <p:nvPr/>
+        </p:nvSpPr>
+        <p:spPr>
+          <a:xfrm>
+            <a:off x="2677363" y="4169664"/>
+            <a:ext cx="676656" cy="475488"/>
           </a:xfrm>
           <a:prstGeom prst="rect">
             <a:avLst/>
@@ -31364,7 +32720,7 @@
                 <a:ea typeface="Trebuchet MS" pitchFamily="34" charset="-122"/>
                 <a:cs typeface="Trebuchet MS" pitchFamily="34" charset="-120"/>
               </a:rPr>
-              <a:t>t</a:t>
+              <a:t>e</a:t>
             </a:r>
             <a:endParaRPr lang="en-US" sz="900" dirty="0"/>
           </a:p>
@@ -31372,14 +32728,14 @@
       </p:sp>
       <p:sp>
         <p:nvSpPr>
-          <p:cNvPr id="37" name="Shape 35"/>
-          <p:cNvSpPr/>
-          <p:nvPr/>
-        </p:nvSpPr>
-        <p:spPr>
-          <a:xfrm>
-            <a:off x="4331643" y="4169664"/>
-            <a:ext cx="685800" cy="475488"/>
+          <p:cNvPr id="43" name="Shape 41"/>
+          <p:cNvSpPr/>
+          <p:nvPr/>
+        </p:nvSpPr>
+        <p:spPr>
+          <a:xfrm>
+            <a:off x="3403397" y="4169664"/>
+            <a:ext cx="676656" cy="475488"/>
           </a:xfrm>
           <a:prstGeom prst="rect">
             <a:avLst>
@@ -31399,14 +32755,14 @@
       </p:sp>
       <p:sp>
         <p:nvSpPr>
-          <p:cNvPr id="38" name="Text 36"/>
-          <p:cNvSpPr/>
-          <p:nvPr/>
-        </p:nvSpPr>
-        <p:spPr>
-          <a:xfrm>
-            <a:off x="4331643" y="4169664"/>
-            <a:ext cx="685800" cy="475488"/>
+          <p:cNvPr id="44" name="Text 42"/>
+          <p:cNvSpPr/>
+          <p:nvPr/>
+        </p:nvSpPr>
+        <p:spPr>
+          <a:xfrm>
+            <a:off x="3403397" y="4169664"/>
+            <a:ext cx="676656" cy="475488"/>
           </a:xfrm>
           <a:prstGeom prst="rect">
             <a:avLst/>
@@ -31430,7 +32786,7 @@
                 <a:ea typeface="Trebuchet MS" pitchFamily="34" charset="-122"/>
                 <a:cs typeface="Trebuchet MS" pitchFamily="34" charset="-120"/>
               </a:rPr>
-              <a:t>ar</a:t>
+              <a:t>s</a:t>
             </a:r>
             <a:endParaRPr lang="en-US" sz="900" dirty="0"/>
           </a:p>
@@ -31438,14 +32794,14 @@
       </p:sp>
       <p:sp>
         <p:nvSpPr>
-          <p:cNvPr id="39" name="Shape 37"/>
-          <p:cNvSpPr/>
-          <p:nvPr/>
-        </p:nvSpPr>
-        <p:spPr>
-          <a:xfrm>
-            <a:off x="5370141" y="4169664"/>
-            <a:ext cx="685800" cy="475488"/>
+          <p:cNvPr id="45" name="Shape 43"/>
+          <p:cNvSpPr/>
+          <p:nvPr/>
+        </p:nvSpPr>
+        <p:spPr>
+          <a:xfrm>
+            <a:off x="4129430" y="4169664"/>
+            <a:ext cx="676656" cy="475488"/>
           </a:xfrm>
           <a:prstGeom prst="rect">
             <a:avLst>
@@ -31465,14 +32821,14 @@
       </p:sp>
       <p:sp>
         <p:nvSpPr>
-          <p:cNvPr id="40" name="Text 38"/>
-          <p:cNvSpPr/>
-          <p:nvPr/>
-        </p:nvSpPr>
-        <p:spPr>
-          <a:xfrm>
-            <a:off x="5370141" y="4169664"/>
-            <a:ext cx="685800" cy="475488"/>
+          <p:cNvPr id="46" name="Text 44"/>
+          <p:cNvSpPr/>
+          <p:nvPr/>
+        </p:nvSpPr>
+        <p:spPr>
+          <a:xfrm>
+            <a:off x="4129430" y="4169664"/>
+            <a:ext cx="676656" cy="475488"/>
           </a:xfrm>
           <a:prstGeom prst="rect">
             <a:avLst/>
@@ -31504,14 +32860,14 @@
       </p:sp>
       <p:sp>
         <p:nvSpPr>
-          <p:cNvPr id="41" name="Shape 39"/>
-          <p:cNvSpPr/>
-          <p:nvPr/>
-        </p:nvSpPr>
-        <p:spPr>
-          <a:xfrm>
-            <a:off x="6408638" y="4169664"/>
-            <a:ext cx="685800" cy="475488"/>
+          <p:cNvPr id="47" name="Shape 45"/>
+          <p:cNvSpPr/>
+          <p:nvPr/>
+        </p:nvSpPr>
+        <p:spPr>
+          <a:xfrm>
+            <a:off x="4855464" y="4169664"/>
+            <a:ext cx="676656" cy="475488"/>
           </a:xfrm>
           <a:prstGeom prst="rect">
             <a:avLst>
@@ -31531,14 +32887,14 @@
       </p:sp>
       <p:sp>
         <p:nvSpPr>
-          <p:cNvPr id="42" name="Text 40"/>
-          <p:cNvSpPr/>
-          <p:nvPr/>
-        </p:nvSpPr>
-        <p:spPr>
-          <a:xfrm>
-            <a:off x="6408638" y="4169664"/>
-            <a:ext cx="685800" cy="475488"/>
+          <p:cNvPr id="48" name="Text 46"/>
+          <p:cNvSpPr/>
+          <p:nvPr/>
+        </p:nvSpPr>
+        <p:spPr>
+          <a:xfrm>
+            <a:off x="4855464" y="4169664"/>
+            <a:ext cx="676656" cy="475488"/>
           </a:xfrm>
           <a:prstGeom prst="rect">
             <a:avLst/>
@@ -31562,7 +32918,7 @@
                 <a:ea typeface="Trebuchet MS" pitchFamily="34" charset="-122"/>
                 <a:cs typeface="Trebuchet MS" pitchFamily="34" charset="-120"/>
               </a:rPr>
-              <a:t>e</a:t>
+              <a:t>a</a:t>
             </a:r>
             <a:endParaRPr lang="en-US" sz="900" dirty="0"/>
           </a:p>
@@ -31570,14 +32926,14 @@
       </p:sp>
       <p:sp>
         <p:nvSpPr>
-          <p:cNvPr id="43" name="Shape 41"/>
-          <p:cNvSpPr/>
-          <p:nvPr/>
-        </p:nvSpPr>
-        <p:spPr>
-          <a:xfrm>
-            <a:off x="7447135" y="4169664"/>
-            <a:ext cx="685800" cy="475488"/>
+          <p:cNvPr id="49" name="Shape 47"/>
+          <p:cNvSpPr/>
+          <p:nvPr/>
+        </p:nvSpPr>
+        <p:spPr>
+          <a:xfrm>
+            <a:off x="5581498" y="4169664"/>
+            <a:ext cx="676656" cy="475488"/>
           </a:xfrm>
           <a:prstGeom prst="rect">
             <a:avLst>
@@ -31597,14 +32953,14 @@
       </p:sp>
       <p:sp>
         <p:nvSpPr>
-          <p:cNvPr id="44" name="Text 42"/>
-          <p:cNvSpPr/>
-          <p:nvPr/>
-        </p:nvSpPr>
-        <p:spPr>
-          <a:xfrm>
-            <a:off x="7447135" y="4169664"/>
-            <a:ext cx="685800" cy="475488"/>
+          <p:cNvPr id="50" name="Text 48"/>
+          <p:cNvSpPr/>
+          <p:nvPr/>
+        </p:nvSpPr>
+        <p:spPr>
+          <a:xfrm>
+            <a:off x="5581498" y="4169664"/>
+            <a:ext cx="676656" cy="475488"/>
           </a:xfrm>
           <a:prstGeom prst="rect">
             <a:avLst/>
@@ -31628,7 +32984,205 @@
                 <a:ea typeface="Trebuchet MS" pitchFamily="34" charset="-122"/>
                 <a:cs typeface="Trebuchet MS" pitchFamily="34" charset="-120"/>
               </a:rPr>
-              <a:t>d</a:t>
+              <a:t>r</a:t>
+            </a:r>
+            <a:endParaRPr lang="en-US" sz="900" dirty="0"/>
+          </a:p>
+        </p:txBody>
+      </p:sp>
+      <p:sp>
+        <p:nvSpPr>
+          <p:cNvPr id="51" name="Shape 49"/>
+          <p:cNvSpPr/>
+          <p:nvPr/>
+        </p:nvSpPr>
+        <p:spPr>
+          <a:xfrm>
+            <a:off x="6307531" y="4169664"/>
+            <a:ext cx="676656" cy="475488"/>
+          </a:xfrm>
+          <a:prstGeom prst="rect">
+            <a:avLst>
+              <a:gd name="adj" fmla="val 7692"/>
+            </a:avLst>
+          </a:prstGeom>
+          <a:solidFill>
+            <a:srgbClr val="FFFFFF"/>
+          </a:solidFill>
+          <a:ln w="12700">
+            <a:solidFill>
+              <a:srgbClr val="DB2777"/>
+            </a:solidFill>
+            <a:prstDash val="solid"/>
+          </a:ln>
+        </p:spPr>
+      </p:sp>
+      <p:sp>
+        <p:nvSpPr>
+          <p:cNvPr id="52" name="Text 50"/>
+          <p:cNvSpPr/>
+          <p:nvPr/>
+        </p:nvSpPr>
+        <p:spPr>
+          <a:xfrm>
+            <a:off x="6307531" y="4169664"/>
+            <a:ext cx="676656" cy="475488"/>
+          </a:xfrm>
+          <a:prstGeom prst="rect">
+            <a:avLst/>
+          </a:prstGeom>
+          <a:noFill/>
+          <a:ln/>
+        </p:spPr>
+        <p:txBody>
+          <a:bodyPr wrap="square" lIns="0" tIns="0" rIns="0" bIns="0" rtlCol="0" anchor="ctr"/>
+          <a:lstStyle/>
+          <a:p>
+            <a:pPr algn="ctr" indent="0" marL="0">
+              <a:buNone/>
+            </a:pPr>
+            <a:r>
+              <a:rPr lang="en-US" sz="900" b="1" dirty="0">
+                <a:solidFill>
+                  <a:srgbClr val="9D174D"/>
+                </a:solidFill>
+                <a:latin typeface="Trebuchet MS" pitchFamily="34" charset="0"/>
+                <a:ea typeface="Trebuchet MS" pitchFamily="34" charset="-122"/>
+                <a:cs typeface="Trebuchet MS" pitchFamily="34" charset="-120"/>
+              </a:rPr>
+              <a:t>t</a:t>
+            </a:r>
+            <a:endParaRPr lang="en-US" sz="900" dirty="0"/>
+          </a:p>
+        </p:txBody>
+      </p:sp>
+      <p:sp>
+        <p:nvSpPr>
+          <p:cNvPr id="53" name="Shape 51"/>
+          <p:cNvSpPr/>
+          <p:nvPr/>
+        </p:nvSpPr>
+        <p:spPr>
+          <a:xfrm>
+            <a:off x="7033565" y="4169664"/>
+            <a:ext cx="676656" cy="475488"/>
+          </a:xfrm>
+          <a:prstGeom prst="rect">
+            <a:avLst>
+              <a:gd name="adj" fmla="val 7692"/>
+            </a:avLst>
+          </a:prstGeom>
+          <a:solidFill>
+            <a:srgbClr val="FFFFFF"/>
+          </a:solidFill>
+          <a:ln w="12700">
+            <a:solidFill>
+              <a:srgbClr val="DB2777"/>
+            </a:solidFill>
+            <a:prstDash val="solid"/>
+          </a:ln>
+        </p:spPr>
+      </p:sp>
+      <p:sp>
+        <p:nvSpPr>
+          <p:cNvPr id="54" name="Text 52"/>
+          <p:cNvSpPr/>
+          <p:nvPr/>
+        </p:nvSpPr>
+        <p:spPr>
+          <a:xfrm>
+            <a:off x="7033565" y="4169664"/>
+            <a:ext cx="676656" cy="475488"/>
+          </a:xfrm>
+          <a:prstGeom prst="rect">
+            <a:avLst/>
+          </a:prstGeom>
+          <a:noFill/>
+          <a:ln/>
+        </p:spPr>
+        <p:txBody>
+          <a:bodyPr wrap="square" lIns="0" tIns="0" rIns="0" bIns="0" rtlCol="0" anchor="ctr"/>
+          <a:lstStyle/>
+          <a:p>
+            <a:pPr algn="ctr" indent="0" marL="0">
+              <a:buNone/>
+            </a:pPr>
+            <a:r>
+              <a:rPr lang="en-US" sz="900" b="1" dirty="0">
+                <a:solidFill>
+                  <a:srgbClr val="9D174D"/>
+                </a:solidFill>
+                <a:latin typeface="Trebuchet MS" pitchFamily="34" charset="0"/>
+                <a:ea typeface="Trebuchet MS" pitchFamily="34" charset="-122"/>
+                <a:cs typeface="Trebuchet MS" pitchFamily="34" charset="-120"/>
+              </a:rPr>
+              <a:t>i</a:t>
+            </a:r>
+            <a:endParaRPr lang="en-US" sz="900" dirty="0"/>
+          </a:p>
+        </p:txBody>
+      </p:sp>
+      <p:sp>
+        <p:nvSpPr>
+          <p:cNvPr id="55" name="Shape 53"/>
+          <p:cNvSpPr/>
+          <p:nvPr/>
+        </p:nvSpPr>
+        <p:spPr>
+          <a:xfrm>
+            <a:off x="7759598" y="4169664"/>
+            <a:ext cx="676656" cy="475488"/>
+          </a:xfrm>
+          <a:prstGeom prst="rect">
+            <a:avLst>
+              <a:gd name="adj" fmla="val 7692"/>
+            </a:avLst>
+          </a:prstGeom>
+          <a:solidFill>
+            <a:srgbClr val="FFFFFF"/>
+          </a:solidFill>
+          <a:ln w="12700">
+            <a:solidFill>
+              <a:srgbClr val="DB2777"/>
+            </a:solidFill>
+            <a:prstDash val="solid"/>
+          </a:ln>
+        </p:spPr>
+      </p:sp>
+      <p:sp>
+        <p:nvSpPr>
+          <p:cNvPr id="56" name="Text 54"/>
+          <p:cNvSpPr/>
+          <p:nvPr/>
+        </p:nvSpPr>
+        <p:spPr>
+          <a:xfrm>
+            <a:off x="7759598" y="4169664"/>
+            <a:ext cx="676656" cy="475488"/>
+          </a:xfrm>
+          <a:prstGeom prst="rect">
+            <a:avLst/>
+          </a:prstGeom>
+          <a:noFill/>
+          <a:ln/>
+        </p:spPr>
+        <p:txBody>
+          <a:bodyPr wrap="square" lIns="0" tIns="0" rIns="0" bIns="0" rtlCol="0" anchor="ctr"/>
+          <a:lstStyle/>
+          <a:p>
+            <a:pPr algn="ctr" indent="0" marL="0">
+              <a:buNone/>
+            </a:pPr>
+            <a:r>
+              <a:rPr lang="en-US" sz="900" b="1" dirty="0">
+                <a:solidFill>
+                  <a:srgbClr val="9D174D"/>
+                </a:solidFill>
+                <a:latin typeface="Trebuchet MS" pitchFamily="34" charset="0"/>
+                <a:ea typeface="Trebuchet MS" pitchFamily="34" charset="-122"/>
+                <a:cs typeface="Trebuchet MS" pitchFamily="34" charset="-120"/>
+              </a:rPr>
+              <a:t>ng</a:t>
             </a:r>
             <a:endParaRPr lang="en-US" sz="900" dirty="0"/>
           </a:p>
@@ -31920,7 +33474,7 @@
                 <a:ea typeface="Calibri" pitchFamily="34" charset="-122"/>
                 <a:cs typeface="Calibri" pitchFamily="34" charset="-120"/>
               </a:rPr>
-              <a:t>Word Labs  •  wordlabs.app  •  Root: 'start' = begin, move suddenly, set going</a:t>
+              <a:t>Word Labs  •  wordlabs.app  •  Root: 'start' = to begin</a:t>
             </a:r>
             <a:endParaRPr lang="en-US" sz="800" dirty="0"/>
           </a:p>
@@ -33089,7 +34643,7 @@
                 <a:ea typeface="Calibri" pitchFamily="34" charset="-122"/>
                 <a:cs typeface="Calibri" pitchFamily="34" charset="-120"/>
               </a:rPr>
-              <a:t>Word Labs  •  wordlabs.app  •  Root: 'start' = begin, move suddenly, set going</a:t>
+              <a:t>Word Labs  •  wordlabs.app  •  Root: 'start' = to begin</a:t>
             </a:r>
             <a:endParaRPr lang="en-US" sz="800" dirty="0"/>
           </a:p>
@@ -33539,7 +35093,7 @@
             <a:avLst/>
           </a:prstGeom>
           <a:solidFill>
-            <a:srgbClr val="DDD6FE"/>
+            <a:srgbClr val="F1F5F9"/>
           </a:solidFill>
           <a:ln w="12700">
             <a:solidFill>
@@ -33551,14 +35105,64 @@
       </p:sp>
       <p:sp>
         <p:nvSpPr>
-          <p:cNvPr id="24" name="Text 22"/>
-          <p:cNvSpPr/>
-          <p:nvPr/>
-        </p:nvSpPr>
-        <p:spPr>
-          <a:xfrm>
-            <a:off x="365760" y="1984248"/>
-            <a:ext cx="2468880" cy="402336"/>
+          <p:cNvPr id="24" name="Shape 22"/>
+          <p:cNvSpPr/>
+          <p:nvPr/>
+        </p:nvSpPr>
+        <p:spPr>
+          <a:xfrm>
+            <a:off x="2971800" y="1984248"/>
+            <a:ext cx="2834640" cy="402336"/>
+          </a:xfrm>
+          <a:prstGeom prst="rect">
+            <a:avLst/>
+          </a:prstGeom>
+          <a:solidFill>
+            <a:srgbClr val="F1F5F9"/>
+          </a:solidFill>
+          <a:ln w="12700">
+            <a:solidFill>
+              <a:srgbClr val="E2E8F0"/>
+            </a:solidFill>
+            <a:prstDash val="solid"/>
+          </a:ln>
+        </p:spPr>
+      </p:sp>
+      <p:sp>
+        <p:nvSpPr>
+          <p:cNvPr id="25" name="Shape 23"/>
+          <p:cNvSpPr/>
+          <p:nvPr/>
+        </p:nvSpPr>
+        <p:spPr>
+          <a:xfrm>
+            <a:off x="5943600" y="1984248"/>
+            <a:ext cx="2834640" cy="402336"/>
+          </a:xfrm>
+          <a:prstGeom prst="rect">
+            <a:avLst/>
+          </a:prstGeom>
+          <a:solidFill>
+            <a:srgbClr val="FCE7F3"/>
+          </a:solidFill>
+          <a:ln w="12700">
+            <a:solidFill>
+              <a:srgbClr val="E2E8F0"/>
+            </a:solidFill>
+            <a:prstDash val="solid"/>
+          </a:ln>
+        </p:spPr>
+      </p:sp>
+      <p:sp>
+        <p:nvSpPr>
+          <p:cNvPr id="26" name="Text 24"/>
+          <p:cNvSpPr/>
+          <p:nvPr/>
+        </p:nvSpPr>
+        <p:spPr>
+          <a:xfrm>
+            <a:off x="5943600" y="1984248"/>
+            <a:ext cx="2834640" cy="402336"/>
           </a:xfrm>
           <a:prstGeom prst="rect">
             <a:avLst/>
@@ -33576,13 +35180,13 @@
             <a:r>
               <a:rPr lang="en-US" sz="1300" b="1" dirty="0">
                 <a:solidFill>
-                  <a:srgbClr val="4C1D95"/>
+                  <a:srgbClr val="9D174D"/>
                 </a:solidFill>
                 <a:latin typeface="Trebuchet MS" pitchFamily="34" charset="0"/>
                 <a:ea typeface="Trebuchet MS" pitchFamily="34" charset="-122"/>
                 <a:cs typeface="Trebuchet MS" pitchFamily="34" charset="-120"/>
               </a:rPr>
-              <a:t>kick-</a:t>
+              <a:t>-ing</a:t>
             </a:r>
             <a:endParaRPr lang="en-US" sz="1300" dirty="0"/>
           </a:p>
@@ -33590,20 +35194,45 @@
       </p:sp>
       <p:sp>
         <p:nvSpPr>
-          <p:cNvPr id="25" name="Shape 23"/>
-          <p:cNvSpPr/>
-          <p:nvPr/>
-        </p:nvSpPr>
-        <p:spPr>
-          <a:xfrm>
-            <a:off x="2971800" y="1984248"/>
+          <p:cNvPr id="27" name="Shape 25"/>
+          <p:cNvSpPr/>
+          <p:nvPr/>
+        </p:nvSpPr>
+        <p:spPr>
+          <a:xfrm>
+            <a:off x="365760" y="2404872"/>
+            <a:ext cx="2468880" cy="402336"/>
+          </a:xfrm>
+          <a:prstGeom prst="rect">
+            <a:avLst/>
+          </a:prstGeom>
+          <a:solidFill>
+            <a:srgbClr val="F8FAFC"/>
+          </a:solidFill>
+          <a:ln w="12700">
+            <a:solidFill>
+              <a:srgbClr val="E2E8F0"/>
+            </a:solidFill>
+            <a:prstDash val="solid"/>
+          </a:ln>
+        </p:spPr>
+      </p:sp>
+      <p:sp>
+        <p:nvSpPr>
+          <p:cNvPr id="28" name="Shape 26"/>
+          <p:cNvSpPr/>
+          <p:nvPr/>
+        </p:nvSpPr>
+        <p:spPr>
+          <a:xfrm>
+            <a:off x="2971800" y="2404872"/>
             <a:ext cx="2834640" cy="402336"/>
           </a:xfrm>
           <a:prstGeom prst="rect">
             <a:avLst/>
           </a:prstGeom>
           <a:solidFill>
-            <a:srgbClr val="F1F5F9"/>
+            <a:srgbClr val="F8FAFC"/>
           </a:solidFill>
           <a:ln w="12700">
             <a:solidFill>
@@ -33615,13 +35244,13 @@
       </p:sp>
       <p:sp>
         <p:nvSpPr>
-          <p:cNvPr id="26" name="Shape 24"/>
-          <p:cNvSpPr/>
-          <p:nvPr/>
-        </p:nvSpPr>
-        <p:spPr>
-          <a:xfrm>
-            <a:off x="5943600" y="1984248"/>
+          <p:cNvPr id="29" name="Shape 27"/>
+          <p:cNvSpPr/>
+          <p:nvPr/>
+        </p:nvSpPr>
+        <p:spPr>
+          <a:xfrm>
+            <a:off x="5943600" y="2404872"/>
             <a:ext cx="2834640" cy="402336"/>
           </a:xfrm>
           <a:prstGeom prst="rect">
@@ -33640,13 +35269,13 @@
       </p:sp>
       <p:sp>
         <p:nvSpPr>
-          <p:cNvPr id="27" name="Text 25"/>
-          <p:cNvSpPr/>
-          <p:nvPr/>
-        </p:nvSpPr>
-        <p:spPr>
-          <a:xfrm>
-            <a:off x="5943600" y="1984248"/>
+          <p:cNvPr id="30" name="Text 28"/>
+          <p:cNvSpPr/>
+          <p:nvPr/>
+        </p:nvSpPr>
+        <p:spPr>
+          <a:xfrm>
+            <a:off x="5943600" y="2404872"/>
             <a:ext cx="2834640" cy="402336"/>
           </a:xfrm>
           <a:prstGeom prst="rect">
@@ -33671,7 +35300,7 @@
                 <a:ea typeface="Trebuchet MS" pitchFamily="34" charset="-122"/>
                 <a:cs typeface="Trebuchet MS" pitchFamily="34" charset="-120"/>
               </a:rPr>
-              <a:t>-ing</a:t>
+              <a:t>-er</a:t>
             </a:r>
             <a:endParaRPr lang="en-US" sz="1300" dirty="0"/>
           </a:p>
@@ -33679,20 +35308,20 @@
       </p:sp>
       <p:sp>
         <p:nvSpPr>
-          <p:cNvPr id="28" name="Shape 26"/>
-          <p:cNvSpPr/>
-          <p:nvPr/>
-        </p:nvSpPr>
-        <p:spPr>
-          <a:xfrm>
-            <a:off x="365760" y="2404872"/>
+          <p:cNvPr id="31" name="Shape 29"/>
+          <p:cNvSpPr/>
+          <p:nvPr/>
+        </p:nvSpPr>
+        <p:spPr>
+          <a:xfrm>
+            <a:off x="365760" y="2825496"/>
             <a:ext cx="2468880" cy="402336"/>
           </a:xfrm>
           <a:prstGeom prst="rect">
             <a:avLst/>
           </a:prstGeom>
           <a:solidFill>
-            <a:srgbClr val="DDD6FE"/>
+            <a:srgbClr val="F1F5F9"/>
           </a:solidFill>
           <a:ln w="12700">
             <a:solidFill>
@@ -33704,14 +35333,64 @@
       </p:sp>
       <p:sp>
         <p:nvSpPr>
-          <p:cNvPr id="29" name="Text 27"/>
-          <p:cNvSpPr/>
-          <p:nvPr/>
-        </p:nvSpPr>
-        <p:spPr>
-          <a:xfrm>
-            <a:off x="365760" y="2404872"/>
-            <a:ext cx="2468880" cy="402336"/>
+          <p:cNvPr id="32" name="Shape 30"/>
+          <p:cNvSpPr/>
+          <p:nvPr/>
+        </p:nvSpPr>
+        <p:spPr>
+          <a:xfrm>
+            <a:off x="2971800" y="2825496"/>
+            <a:ext cx="2834640" cy="402336"/>
+          </a:xfrm>
+          <a:prstGeom prst="rect">
+            <a:avLst/>
+          </a:prstGeom>
+          <a:solidFill>
+            <a:srgbClr val="F1F5F9"/>
+          </a:solidFill>
+          <a:ln w="12700">
+            <a:solidFill>
+              <a:srgbClr val="E2E8F0"/>
+            </a:solidFill>
+            <a:prstDash val="solid"/>
+          </a:ln>
+        </p:spPr>
+      </p:sp>
+      <p:sp>
+        <p:nvSpPr>
+          <p:cNvPr id="33" name="Shape 31"/>
+          <p:cNvSpPr/>
+          <p:nvPr/>
+        </p:nvSpPr>
+        <p:spPr>
+          <a:xfrm>
+            <a:off x="5943600" y="2825496"/>
+            <a:ext cx="2834640" cy="402336"/>
+          </a:xfrm>
+          <a:prstGeom prst="rect">
+            <a:avLst/>
+          </a:prstGeom>
+          <a:solidFill>
+            <a:srgbClr val="FCE7F3"/>
+          </a:solidFill>
+          <a:ln w="12700">
+            <a:solidFill>
+              <a:srgbClr val="E2E8F0"/>
+            </a:solidFill>
+            <a:prstDash val="solid"/>
+          </a:ln>
+        </p:spPr>
+      </p:sp>
+      <p:sp>
+        <p:nvSpPr>
+          <p:cNvPr id="34" name="Text 32"/>
+          <p:cNvSpPr/>
+          <p:nvPr/>
+        </p:nvSpPr>
+        <p:spPr>
+          <a:xfrm>
+            <a:off x="5943600" y="2825496"/>
+            <a:ext cx="2834640" cy="402336"/>
           </a:xfrm>
           <a:prstGeom prst="rect">
             <a:avLst/>
@@ -33729,13 +35408,13 @@
             <a:r>
               <a:rPr lang="en-US" sz="1300" b="1" dirty="0">
                 <a:solidFill>
-                  <a:srgbClr val="4C1D95"/>
+                  <a:srgbClr val="9D174D"/>
                 </a:solidFill>
                 <a:latin typeface="Trebuchet MS" pitchFamily="34" charset="0"/>
                 <a:ea typeface="Trebuchet MS" pitchFamily="34" charset="-122"/>
                 <a:cs typeface="Trebuchet MS" pitchFamily="34" charset="-120"/>
               </a:rPr>
-              <a:t>head-</a:t>
+              <a:t>-s</a:t>
             </a:r>
             <a:endParaRPr lang="en-US" sz="1300" dirty="0"/>
           </a:p>
@@ -33743,64 +35422,14 @@
       </p:sp>
       <p:sp>
         <p:nvSpPr>
-          <p:cNvPr id="30" name="Shape 28"/>
-          <p:cNvSpPr/>
-          <p:nvPr/>
-        </p:nvSpPr>
-        <p:spPr>
-          <a:xfrm>
-            <a:off x="2971800" y="2404872"/>
-            <a:ext cx="2834640" cy="402336"/>
-          </a:xfrm>
-          <a:prstGeom prst="rect">
-            <a:avLst/>
-          </a:prstGeom>
-          <a:solidFill>
-            <a:srgbClr val="F8FAFC"/>
-          </a:solidFill>
-          <a:ln w="12700">
-            <a:solidFill>
-              <a:srgbClr val="E2E8F0"/>
-            </a:solidFill>
-            <a:prstDash val="solid"/>
-          </a:ln>
-        </p:spPr>
-      </p:sp>
-      <p:sp>
-        <p:nvSpPr>
-          <p:cNvPr id="31" name="Shape 29"/>
-          <p:cNvSpPr/>
-          <p:nvPr/>
-        </p:nvSpPr>
-        <p:spPr>
-          <a:xfrm>
-            <a:off x="5943600" y="2404872"/>
-            <a:ext cx="2834640" cy="402336"/>
-          </a:xfrm>
-          <a:prstGeom prst="rect">
-            <a:avLst/>
-          </a:prstGeom>
-          <a:solidFill>
-            <a:srgbClr val="FCE7F3"/>
-          </a:solidFill>
-          <a:ln w="12700">
-            <a:solidFill>
-              <a:srgbClr val="E2E8F0"/>
-            </a:solidFill>
-            <a:prstDash val="solid"/>
-          </a:ln>
-        </p:spPr>
-      </p:sp>
-      <p:sp>
-        <p:nvSpPr>
-          <p:cNvPr id="32" name="Text 30"/>
-          <p:cNvSpPr/>
-          <p:nvPr/>
-        </p:nvSpPr>
-        <p:spPr>
-          <a:xfrm>
-            <a:off x="5943600" y="2404872"/>
-            <a:ext cx="2834640" cy="402336"/>
+          <p:cNvPr id="35" name="Text 33"/>
+          <p:cNvSpPr/>
+          <p:nvPr/>
+        </p:nvSpPr>
+        <p:spPr>
+          <a:xfrm>
+            <a:off x="365760" y="3611880"/>
+            <a:ext cx="1828800" cy="347472"/>
           </a:xfrm>
           <a:prstGeom prst="rect">
             <a:avLst/>
@@ -33812,59 +35441,61 @@
           <a:bodyPr wrap="square" lIns="0" tIns="0" rIns="0" bIns="0" rtlCol="0" anchor="ctr"/>
           <a:lstStyle/>
           <a:p>
-            <a:pPr algn="ctr" indent="0" marL="0">
-              <a:buNone/>
-            </a:pPr>
-            <a:r>
-              <a:rPr lang="en-US" sz="1300" b="1" dirty="0">
-                <a:solidFill>
-                  <a:srgbClr val="9D174D"/>
+            <a:pPr algn="l" indent="0" marL="0">
+              <a:buNone/>
+            </a:pPr>
+            <a:r>
+              <a:rPr lang="en-US" sz="1200" b="1" dirty="0">
+                <a:solidFill>
+                  <a:srgbClr val="0F172A"/>
                 </a:solidFill>
                 <a:latin typeface="Trebuchet MS" pitchFamily="34" charset="0"/>
                 <a:ea typeface="Trebuchet MS" pitchFamily="34" charset="-122"/>
                 <a:cs typeface="Trebuchet MS" pitchFamily="34" charset="-120"/>
               </a:rPr>
-              <a:t>-er</a:t>
-            </a:r>
-            <a:endParaRPr lang="en-US" sz="1300" dirty="0"/>
-          </a:p>
-        </p:txBody>
-      </p:sp>
-      <p:sp>
-        <p:nvSpPr>
-          <p:cNvPr id="33" name="Shape 31"/>
-          <p:cNvSpPr/>
-          <p:nvPr/>
-        </p:nvSpPr>
-        <p:spPr>
-          <a:xfrm>
-            <a:off x="365760" y="2825496"/>
-            <a:ext cx="2468880" cy="402336"/>
-          </a:xfrm>
-          <a:prstGeom prst="rect">
-            <a:avLst/>
-          </a:prstGeom>
-          <a:solidFill>
-            <a:srgbClr val="DDD6FE"/>
-          </a:solidFill>
-          <a:ln w="12700">
-            <a:solidFill>
-              <a:srgbClr val="E2E8F0"/>
-            </a:solidFill>
-            <a:prstDash val="solid"/>
-          </a:ln>
-        </p:spPr>
-      </p:sp>
-      <p:sp>
-        <p:nvSpPr>
-          <p:cNvPr id="34" name="Text 32"/>
-          <p:cNvSpPr/>
-          <p:nvPr/>
-        </p:nvSpPr>
-        <p:spPr>
-          <a:xfrm>
-            <a:off x="365760" y="2825496"/>
-            <a:ext cx="2468880" cy="402336"/>
+              <a:t>Sample words:</a:t>
+            </a:r>
+            <a:endParaRPr lang="en-US" sz="1200" dirty="0"/>
+          </a:p>
+        </p:txBody>
+      </p:sp>
+      <p:sp>
+        <p:nvSpPr>
+          <p:cNvPr id="36" name="Shape 34"/>
+          <p:cNvSpPr/>
+          <p:nvPr/>
+        </p:nvSpPr>
+        <p:spPr>
+          <a:xfrm>
+            <a:off x="365760" y="4023360"/>
+            <a:ext cx="2011680" cy="402336"/>
+          </a:xfrm>
+          <a:prstGeom prst="rect">
+            <a:avLst>
+              <a:gd name="adj" fmla="val 13636"/>
+            </a:avLst>
+          </a:prstGeom>
+          <a:solidFill>
+            <a:srgbClr val="EEF2FF"/>
+          </a:solidFill>
+          <a:ln w="12700">
+            <a:solidFill>
+              <a:srgbClr val="6366F1"/>
+            </a:solidFill>
+            <a:prstDash val="solid"/>
+          </a:ln>
+        </p:spPr>
+      </p:sp>
+      <p:sp>
+        <p:nvSpPr>
+          <p:cNvPr id="37" name="Text 35"/>
+          <p:cNvSpPr/>
+          <p:nvPr/>
+        </p:nvSpPr>
+        <p:spPr>
+          <a:xfrm>
+            <a:off x="365760" y="4023360"/>
+            <a:ext cx="2011680" cy="402336"/>
           </a:xfrm>
           <a:prstGeom prst="rect">
             <a:avLst/>
@@ -33880,80 +35511,57 @@
               <a:buNone/>
             </a:pPr>
             <a:r>
-              <a:rPr lang="en-US" sz="1300" b="1" dirty="0">
-                <a:solidFill>
-                  <a:srgbClr val="4C1D95"/>
+              <a:rPr lang="en-US" sz="1200" b="1" dirty="0">
+                <a:solidFill>
+                  <a:srgbClr val="4338CA"/>
                 </a:solidFill>
                 <a:latin typeface="Trebuchet MS" pitchFamily="34" charset="0"/>
                 <a:ea typeface="Trebuchet MS" pitchFamily="34" charset="-122"/>
                 <a:cs typeface="Trebuchet MS" pitchFamily="34" charset="-120"/>
               </a:rPr>
-              <a:t>down-</a:t>
-            </a:r>
-            <a:endParaRPr lang="en-US" sz="1300" dirty="0"/>
-          </a:p>
-        </p:txBody>
-      </p:sp>
-      <p:sp>
-        <p:nvSpPr>
-          <p:cNvPr id="35" name="Shape 33"/>
-          <p:cNvSpPr/>
-          <p:nvPr/>
-        </p:nvSpPr>
-        <p:spPr>
-          <a:xfrm>
-            <a:off x="2971800" y="2825496"/>
-            <a:ext cx="2834640" cy="402336"/>
-          </a:xfrm>
-          <a:prstGeom prst="rect">
-            <a:avLst/>
-          </a:prstGeom>
-          <a:solidFill>
-            <a:srgbClr val="F1F5F9"/>
-          </a:solidFill>
-          <a:ln w="12700">
-            <a:solidFill>
-              <a:srgbClr val="E2E8F0"/>
-            </a:solidFill>
-            <a:prstDash val="solid"/>
-          </a:ln>
-        </p:spPr>
-      </p:sp>
-      <p:sp>
-        <p:nvSpPr>
-          <p:cNvPr id="36" name="Shape 34"/>
-          <p:cNvSpPr/>
-          <p:nvPr/>
-        </p:nvSpPr>
-        <p:spPr>
-          <a:xfrm>
-            <a:off x="5943600" y="2825496"/>
-            <a:ext cx="2834640" cy="402336"/>
-          </a:xfrm>
-          <a:prstGeom prst="rect">
-            <a:avLst/>
-          </a:prstGeom>
-          <a:solidFill>
-            <a:srgbClr val="FCE7F3"/>
-          </a:solidFill>
-          <a:ln w="12700">
-            <a:solidFill>
-              <a:srgbClr val="E2E8F0"/>
-            </a:solidFill>
-            <a:prstDash val="solid"/>
-          </a:ln>
-        </p:spPr>
-      </p:sp>
-      <p:sp>
-        <p:nvSpPr>
-          <p:cNvPr id="37" name="Text 35"/>
-          <p:cNvSpPr/>
-          <p:nvPr/>
-        </p:nvSpPr>
-        <p:spPr>
-          <a:xfrm>
-            <a:off x="5943600" y="2825496"/>
-            <a:ext cx="2834640" cy="402336"/>
+              <a:t>start</a:t>
+            </a:r>
+            <a:endParaRPr lang="en-US" sz="1200" dirty="0"/>
+          </a:p>
+        </p:txBody>
+      </p:sp>
+      <p:sp>
+        <p:nvSpPr>
+          <p:cNvPr id="38" name="Shape 36"/>
+          <p:cNvSpPr/>
+          <p:nvPr/>
+        </p:nvSpPr>
+        <p:spPr>
+          <a:xfrm>
+            <a:off x="2542032" y="4023360"/>
+            <a:ext cx="2011680" cy="402336"/>
+          </a:xfrm>
+          <a:prstGeom prst="rect">
+            <a:avLst>
+              <a:gd name="adj" fmla="val 13636"/>
+            </a:avLst>
+          </a:prstGeom>
+          <a:solidFill>
+            <a:srgbClr val="EEF2FF"/>
+          </a:solidFill>
+          <a:ln w="12700">
+            <a:solidFill>
+              <a:srgbClr val="6366F1"/>
+            </a:solidFill>
+            <a:prstDash val="solid"/>
+          </a:ln>
+        </p:spPr>
+      </p:sp>
+      <p:sp>
+        <p:nvSpPr>
+          <p:cNvPr id="39" name="Text 37"/>
+          <p:cNvSpPr/>
+          <p:nvPr/>
+        </p:nvSpPr>
+        <p:spPr>
+          <a:xfrm>
+            <a:off x="2542032" y="4023360"/>
+            <a:ext cx="2011680" cy="402336"/>
           </a:xfrm>
           <a:prstGeom prst="rect">
             <a:avLst/>
@@ -33969,55 +35577,57 @@
               <a:buNone/>
             </a:pPr>
             <a:r>
-              <a:rPr lang="en-US" sz="1300" b="1" dirty="0">
-                <a:solidFill>
-                  <a:srgbClr val="9D174D"/>
+              <a:rPr lang="en-US" sz="1200" b="1" dirty="0">
+                <a:solidFill>
+                  <a:srgbClr val="4338CA"/>
                 </a:solidFill>
                 <a:latin typeface="Trebuchet MS" pitchFamily="34" charset="0"/>
                 <a:ea typeface="Trebuchet MS" pitchFamily="34" charset="-122"/>
                 <a:cs typeface="Trebuchet MS" pitchFamily="34" charset="-120"/>
               </a:rPr>
-              <a:t>-s</a:t>
-            </a:r>
-            <a:endParaRPr lang="en-US" sz="1300" dirty="0"/>
-          </a:p>
-        </p:txBody>
-      </p:sp>
-      <p:sp>
-        <p:nvSpPr>
-          <p:cNvPr id="38" name="Shape 36"/>
-          <p:cNvSpPr/>
-          <p:nvPr/>
-        </p:nvSpPr>
-        <p:spPr>
-          <a:xfrm>
-            <a:off x="365760" y="3246120"/>
-            <a:ext cx="2468880" cy="402336"/>
-          </a:xfrm>
-          <a:prstGeom prst="rect">
-            <a:avLst/>
-          </a:prstGeom>
-          <a:solidFill>
-            <a:srgbClr val="DDD6FE"/>
-          </a:solidFill>
-          <a:ln w="12700">
-            <a:solidFill>
-              <a:srgbClr val="E2E8F0"/>
-            </a:solidFill>
-            <a:prstDash val="solid"/>
-          </a:ln>
-        </p:spPr>
-      </p:sp>
-      <p:sp>
-        <p:nvSpPr>
-          <p:cNvPr id="39" name="Text 37"/>
-          <p:cNvSpPr/>
-          <p:nvPr/>
-        </p:nvSpPr>
-        <p:spPr>
-          <a:xfrm>
-            <a:off x="365760" y="3246120"/>
-            <a:ext cx="2468880" cy="402336"/>
+              <a:t>starts</a:t>
+            </a:r>
+            <a:endParaRPr lang="en-US" sz="1200" dirty="0"/>
+          </a:p>
+        </p:txBody>
+      </p:sp>
+      <p:sp>
+        <p:nvSpPr>
+          <p:cNvPr id="40" name="Shape 38"/>
+          <p:cNvSpPr/>
+          <p:nvPr/>
+        </p:nvSpPr>
+        <p:spPr>
+          <a:xfrm>
+            <a:off x="4718304" y="4023360"/>
+            <a:ext cx="2011680" cy="402336"/>
+          </a:xfrm>
+          <a:prstGeom prst="rect">
+            <a:avLst>
+              <a:gd name="adj" fmla="val 13636"/>
+            </a:avLst>
+          </a:prstGeom>
+          <a:solidFill>
+            <a:srgbClr val="EEF2FF"/>
+          </a:solidFill>
+          <a:ln w="12700">
+            <a:solidFill>
+              <a:srgbClr val="6366F1"/>
+            </a:solidFill>
+            <a:prstDash val="solid"/>
+          </a:ln>
+        </p:spPr>
+      </p:sp>
+      <p:sp>
+        <p:nvSpPr>
+          <p:cNvPr id="41" name="Text 39"/>
+          <p:cNvSpPr/>
+          <p:nvPr/>
+        </p:nvSpPr>
+        <p:spPr>
+          <a:xfrm>
+            <a:off x="4718304" y="4023360"/>
+            <a:ext cx="2011680" cy="402336"/>
           </a:xfrm>
           <a:prstGeom prst="rect">
             <a:avLst/>
@@ -34033,80 +35643,57 @@
               <a:buNone/>
             </a:pPr>
             <a:r>
-              <a:rPr lang="en-US" sz="1300" b="1" dirty="0">
-                <a:solidFill>
-                  <a:srgbClr val="4C1D95"/>
+              <a:rPr lang="en-US" sz="1200" b="1" dirty="0">
+                <a:solidFill>
+                  <a:srgbClr val="4338CA"/>
                 </a:solidFill>
                 <a:latin typeface="Trebuchet MS" pitchFamily="34" charset="0"/>
                 <a:ea typeface="Trebuchet MS" pitchFamily="34" charset="-122"/>
                 <a:cs typeface="Trebuchet MS" pitchFamily="34" charset="-120"/>
               </a:rPr>
-              <a:t>out-</a:t>
-            </a:r>
-            <a:endParaRPr lang="en-US" sz="1300" dirty="0"/>
-          </a:p>
-        </p:txBody>
-      </p:sp>
-      <p:sp>
-        <p:nvSpPr>
-          <p:cNvPr id="40" name="Shape 38"/>
-          <p:cNvSpPr/>
-          <p:nvPr/>
-        </p:nvSpPr>
-        <p:spPr>
-          <a:xfrm>
-            <a:off x="2971800" y="3246120"/>
-            <a:ext cx="2834640" cy="402336"/>
-          </a:xfrm>
-          <a:prstGeom prst="rect">
-            <a:avLst/>
-          </a:prstGeom>
-          <a:solidFill>
-            <a:srgbClr val="F8FAFC"/>
-          </a:solidFill>
-          <a:ln w="12700">
-            <a:solidFill>
-              <a:srgbClr val="E2E8F0"/>
-            </a:solidFill>
-            <a:prstDash val="solid"/>
-          </a:ln>
-        </p:spPr>
-      </p:sp>
-      <p:sp>
-        <p:nvSpPr>
-          <p:cNvPr id="41" name="Shape 39"/>
-          <p:cNvSpPr/>
-          <p:nvPr/>
-        </p:nvSpPr>
-        <p:spPr>
-          <a:xfrm>
-            <a:off x="5943600" y="3246120"/>
-            <a:ext cx="2834640" cy="402336"/>
-          </a:xfrm>
-          <a:prstGeom prst="rect">
-            <a:avLst/>
-          </a:prstGeom>
-          <a:solidFill>
-            <a:srgbClr val="FCE7F3"/>
-          </a:solidFill>
-          <a:ln w="12700">
-            <a:solidFill>
-              <a:srgbClr val="E2E8F0"/>
-            </a:solidFill>
-            <a:prstDash val="solid"/>
-          </a:ln>
-        </p:spPr>
-      </p:sp>
-      <p:sp>
-        <p:nvSpPr>
-          <p:cNvPr id="42" name="Text 40"/>
-          <p:cNvSpPr/>
-          <p:nvPr/>
-        </p:nvSpPr>
-        <p:spPr>
-          <a:xfrm>
-            <a:off x="5943600" y="3246120"/>
-            <a:ext cx="2834640" cy="402336"/>
+              <a:t>restart</a:t>
+            </a:r>
+            <a:endParaRPr lang="en-US" sz="1200" dirty="0"/>
+          </a:p>
+        </p:txBody>
+      </p:sp>
+      <p:sp>
+        <p:nvSpPr>
+          <p:cNvPr id="42" name="Shape 40"/>
+          <p:cNvSpPr/>
+          <p:nvPr/>
+        </p:nvSpPr>
+        <p:spPr>
+          <a:xfrm>
+            <a:off x="6894576" y="4023360"/>
+            <a:ext cx="2011680" cy="402336"/>
+          </a:xfrm>
+          <a:prstGeom prst="rect">
+            <a:avLst>
+              <a:gd name="adj" fmla="val 13636"/>
+            </a:avLst>
+          </a:prstGeom>
+          <a:solidFill>
+            <a:srgbClr val="EEF2FF"/>
+          </a:solidFill>
+          <a:ln w="12700">
+            <a:solidFill>
+              <a:srgbClr val="6366F1"/>
+            </a:solidFill>
+            <a:prstDash val="solid"/>
+          </a:ln>
+        </p:spPr>
+      </p:sp>
+      <p:sp>
+        <p:nvSpPr>
+          <p:cNvPr id="43" name="Text 41"/>
+          <p:cNvSpPr/>
+          <p:nvPr/>
+        </p:nvSpPr>
+        <p:spPr>
+          <a:xfrm>
+            <a:off x="6894576" y="4023360"/>
+            <a:ext cx="2011680" cy="402336"/>
           </a:xfrm>
           <a:prstGeom prst="rect">
             <a:avLst/>
@@ -34122,582 +35709,15 @@
               <a:buNone/>
             </a:pPr>
             <a:r>
-              <a:rPr lang="en-US" sz="1300" b="1" dirty="0">
-                <a:solidFill>
-                  <a:srgbClr val="9D174D"/>
+              <a:rPr lang="en-US" sz="1200" b="1" dirty="0">
+                <a:solidFill>
+                  <a:srgbClr val="4338CA"/>
                 </a:solidFill>
                 <a:latin typeface="Trebuchet MS" pitchFamily="34" charset="0"/>
                 <a:ea typeface="Trebuchet MS" pitchFamily="34" charset="-122"/>
                 <a:cs typeface="Trebuchet MS" pitchFamily="34" charset="-120"/>
               </a:rPr>
-              <a:t>-ling</a:t>
-            </a:r>
-            <a:endParaRPr lang="en-US" sz="1300" dirty="0"/>
-          </a:p>
-        </p:txBody>
-      </p:sp>
-      <p:sp>
-        <p:nvSpPr>
-          <p:cNvPr id="43" name="Text 41"/>
-          <p:cNvSpPr/>
-          <p:nvPr/>
-        </p:nvSpPr>
-        <p:spPr>
-          <a:xfrm>
-            <a:off x="365760" y="3611880"/>
-            <a:ext cx="1828800" cy="347472"/>
-          </a:xfrm>
-          <a:prstGeom prst="rect">
-            <a:avLst/>
-          </a:prstGeom>
-          <a:noFill/>
-          <a:ln/>
-        </p:spPr>
-        <p:txBody>
-          <a:bodyPr wrap="square" lIns="0" tIns="0" rIns="0" bIns="0" rtlCol="0" anchor="ctr"/>
-          <a:lstStyle/>
-          <a:p>
-            <a:pPr algn="l" indent="0" marL="0">
-              <a:buNone/>
-            </a:pPr>
-            <a:r>
-              <a:rPr lang="en-US" sz="1200" b="1" dirty="0">
-                <a:solidFill>
-                  <a:srgbClr val="0F172A"/>
-                </a:solidFill>
-                <a:latin typeface="Trebuchet MS" pitchFamily="34" charset="0"/>
-                <a:ea typeface="Trebuchet MS" pitchFamily="34" charset="-122"/>
-                <a:cs typeface="Trebuchet MS" pitchFamily="34" charset="-120"/>
-              </a:rPr>
-              <a:t>Sample words:</a:t>
-            </a:r>
-            <a:endParaRPr lang="en-US" sz="1200" dirty="0"/>
-          </a:p>
-        </p:txBody>
-      </p:sp>
-      <p:sp>
-        <p:nvSpPr>
-          <p:cNvPr id="44" name="Shape 42"/>
-          <p:cNvSpPr/>
-          <p:nvPr/>
-        </p:nvSpPr>
-        <p:spPr>
-          <a:xfrm>
-            <a:off x="365760" y="4023360"/>
-            <a:ext cx="2011680" cy="402336"/>
-          </a:xfrm>
-          <a:prstGeom prst="rect">
-            <a:avLst>
-              <a:gd name="adj" fmla="val 13636"/>
-            </a:avLst>
-          </a:prstGeom>
-          <a:solidFill>
-            <a:srgbClr val="EEF2FF"/>
-          </a:solidFill>
-          <a:ln w="12700">
-            <a:solidFill>
-              <a:srgbClr val="6366F1"/>
-            </a:solidFill>
-            <a:prstDash val="solid"/>
-          </a:ln>
-        </p:spPr>
-      </p:sp>
-      <p:sp>
-        <p:nvSpPr>
-          <p:cNvPr id="45" name="Text 43"/>
-          <p:cNvSpPr/>
-          <p:nvPr/>
-        </p:nvSpPr>
-        <p:spPr>
-          <a:xfrm>
-            <a:off x="365760" y="4023360"/>
-            <a:ext cx="2011680" cy="402336"/>
-          </a:xfrm>
-          <a:prstGeom prst="rect">
-            <a:avLst/>
-          </a:prstGeom>
-          <a:noFill/>
-          <a:ln/>
-        </p:spPr>
-        <p:txBody>
-          <a:bodyPr wrap="square" lIns="0" tIns="0" rIns="0" bIns="0" rtlCol="0" anchor="ctr"/>
-          <a:lstStyle/>
-          <a:p>
-            <a:pPr algn="ctr" indent="0" marL="0">
-              <a:buNone/>
-            </a:pPr>
-            <a:r>
-              <a:rPr lang="en-US" sz="1200" b="1" dirty="0">
-                <a:solidFill>
-                  <a:srgbClr val="4338CA"/>
-                </a:solidFill>
-                <a:latin typeface="Trebuchet MS" pitchFamily="34" charset="0"/>
-                <a:ea typeface="Trebuchet MS" pitchFamily="34" charset="-122"/>
-                <a:cs typeface="Trebuchet MS" pitchFamily="34" charset="-120"/>
-              </a:rPr>
               <a:t>started</a:t>
-            </a:r>
-            <a:endParaRPr lang="en-US" sz="1200" dirty="0"/>
-          </a:p>
-        </p:txBody>
-      </p:sp>
-      <p:sp>
-        <p:nvSpPr>
-          <p:cNvPr id="46" name="Shape 44"/>
-          <p:cNvSpPr/>
-          <p:nvPr/>
-        </p:nvSpPr>
-        <p:spPr>
-          <a:xfrm>
-            <a:off x="2542032" y="4023360"/>
-            <a:ext cx="2011680" cy="402336"/>
-          </a:xfrm>
-          <a:prstGeom prst="rect">
-            <a:avLst>
-              <a:gd name="adj" fmla="val 13636"/>
-            </a:avLst>
-          </a:prstGeom>
-          <a:solidFill>
-            <a:srgbClr val="EEF2FF"/>
-          </a:solidFill>
-          <a:ln w="12700">
-            <a:solidFill>
-              <a:srgbClr val="6366F1"/>
-            </a:solidFill>
-            <a:prstDash val="solid"/>
-          </a:ln>
-        </p:spPr>
-      </p:sp>
-      <p:sp>
-        <p:nvSpPr>
-          <p:cNvPr id="47" name="Text 45"/>
-          <p:cNvSpPr/>
-          <p:nvPr/>
-        </p:nvSpPr>
-        <p:spPr>
-          <a:xfrm>
-            <a:off x="2542032" y="4023360"/>
-            <a:ext cx="2011680" cy="402336"/>
-          </a:xfrm>
-          <a:prstGeom prst="rect">
-            <a:avLst/>
-          </a:prstGeom>
-          <a:noFill/>
-          <a:ln/>
-        </p:spPr>
-        <p:txBody>
-          <a:bodyPr wrap="square" lIns="0" tIns="0" rIns="0" bIns="0" rtlCol="0" anchor="ctr"/>
-          <a:lstStyle/>
-          <a:p>
-            <a:pPr algn="ctr" indent="0" marL="0">
-              <a:buNone/>
-            </a:pPr>
-            <a:r>
-              <a:rPr lang="en-US" sz="1200" b="1" dirty="0">
-                <a:solidFill>
-                  <a:srgbClr val="4338CA"/>
-                </a:solidFill>
-                <a:latin typeface="Trebuchet MS" pitchFamily="34" charset="0"/>
-                <a:ea typeface="Trebuchet MS" pitchFamily="34" charset="-122"/>
-                <a:cs typeface="Trebuchet MS" pitchFamily="34" charset="-120"/>
-              </a:rPr>
-              <a:t>starting</a:t>
-            </a:r>
-            <a:endParaRPr lang="en-US" sz="1200" dirty="0"/>
-          </a:p>
-        </p:txBody>
-      </p:sp>
-      <p:sp>
-        <p:nvSpPr>
-          <p:cNvPr id="48" name="Shape 46"/>
-          <p:cNvSpPr/>
-          <p:nvPr/>
-        </p:nvSpPr>
-        <p:spPr>
-          <a:xfrm>
-            <a:off x="4718304" y="4023360"/>
-            <a:ext cx="2011680" cy="402336"/>
-          </a:xfrm>
-          <a:prstGeom prst="rect">
-            <a:avLst>
-              <a:gd name="adj" fmla="val 13636"/>
-            </a:avLst>
-          </a:prstGeom>
-          <a:solidFill>
-            <a:srgbClr val="EEF2FF"/>
-          </a:solidFill>
-          <a:ln w="12700">
-            <a:solidFill>
-              <a:srgbClr val="6366F1"/>
-            </a:solidFill>
-            <a:prstDash val="solid"/>
-          </a:ln>
-        </p:spPr>
-      </p:sp>
-      <p:sp>
-        <p:nvSpPr>
-          <p:cNvPr id="49" name="Text 47"/>
-          <p:cNvSpPr/>
-          <p:nvPr/>
-        </p:nvSpPr>
-        <p:spPr>
-          <a:xfrm>
-            <a:off x="4718304" y="4023360"/>
-            <a:ext cx="2011680" cy="402336"/>
-          </a:xfrm>
-          <a:prstGeom prst="rect">
-            <a:avLst/>
-          </a:prstGeom>
-          <a:noFill/>
-          <a:ln/>
-        </p:spPr>
-        <p:txBody>
-          <a:bodyPr wrap="square" lIns="0" tIns="0" rIns="0" bIns="0" rtlCol="0" anchor="ctr"/>
-          <a:lstStyle/>
-          <a:p>
-            <a:pPr algn="ctr" indent="0" marL="0">
-              <a:buNone/>
-            </a:pPr>
-            <a:r>
-              <a:rPr lang="en-US" sz="1200" b="1" dirty="0">
-                <a:solidFill>
-                  <a:srgbClr val="4338CA"/>
-                </a:solidFill>
-                <a:latin typeface="Trebuchet MS" pitchFamily="34" charset="0"/>
-                <a:ea typeface="Trebuchet MS" pitchFamily="34" charset="-122"/>
-                <a:cs typeface="Trebuchet MS" pitchFamily="34" charset="-120"/>
-              </a:rPr>
-              <a:t>starter</a:t>
-            </a:r>
-            <a:endParaRPr lang="en-US" sz="1200" dirty="0"/>
-          </a:p>
-        </p:txBody>
-      </p:sp>
-      <p:sp>
-        <p:nvSpPr>
-          <p:cNvPr id="50" name="Shape 48"/>
-          <p:cNvSpPr/>
-          <p:nvPr/>
-        </p:nvSpPr>
-        <p:spPr>
-          <a:xfrm>
-            <a:off x="6894576" y="4023360"/>
-            <a:ext cx="2011680" cy="402336"/>
-          </a:xfrm>
-          <a:prstGeom prst="rect">
-            <a:avLst>
-              <a:gd name="adj" fmla="val 13636"/>
-            </a:avLst>
-          </a:prstGeom>
-          <a:solidFill>
-            <a:srgbClr val="EEF2FF"/>
-          </a:solidFill>
-          <a:ln w="12700">
-            <a:solidFill>
-              <a:srgbClr val="6366F1"/>
-            </a:solidFill>
-            <a:prstDash val="solid"/>
-          </a:ln>
-        </p:spPr>
-      </p:sp>
-      <p:sp>
-        <p:nvSpPr>
-          <p:cNvPr id="51" name="Text 49"/>
-          <p:cNvSpPr/>
-          <p:nvPr/>
-        </p:nvSpPr>
-        <p:spPr>
-          <a:xfrm>
-            <a:off x="6894576" y="4023360"/>
-            <a:ext cx="2011680" cy="402336"/>
-          </a:xfrm>
-          <a:prstGeom prst="rect">
-            <a:avLst/>
-          </a:prstGeom>
-          <a:noFill/>
-          <a:ln/>
-        </p:spPr>
-        <p:txBody>
-          <a:bodyPr wrap="square" lIns="0" tIns="0" rIns="0" bIns="0" rtlCol="0" anchor="ctr"/>
-          <a:lstStyle/>
-          <a:p>
-            <a:pPr algn="ctr" indent="0" marL="0">
-              <a:buNone/>
-            </a:pPr>
-            <a:r>
-              <a:rPr lang="en-US" sz="1200" b="1" dirty="0">
-                <a:solidFill>
-                  <a:srgbClr val="4338CA"/>
-                </a:solidFill>
-                <a:latin typeface="Trebuchet MS" pitchFamily="34" charset="0"/>
-                <a:ea typeface="Trebuchet MS" pitchFamily="34" charset="-122"/>
-                <a:cs typeface="Trebuchet MS" pitchFamily="34" charset="-120"/>
-              </a:rPr>
-              <a:t>restart</a:t>
-            </a:r>
-            <a:endParaRPr lang="en-US" sz="1200" dirty="0"/>
-          </a:p>
-        </p:txBody>
-      </p:sp>
-      <p:sp>
-        <p:nvSpPr>
-          <p:cNvPr id="52" name="Shape 50"/>
-          <p:cNvSpPr/>
-          <p:nvPr/>
-        </p:nvSpPr>
-        <p:spPr>
-          <a:xfrm>
-            <a:off x="365760" y="4498848"/>
-            <a:ext cx="2011680" cy="402336"/>
-          </a:xfrm>
-          <a:prstGeom prst="rect">
-            <a:avLst>
-              <a:gd name="adj" fmla="val 13636"/>
-            </a:avLst>
-          </a:prstGeom>
-          <a:solidFill>
-            <a:srgbClr val="EEF2FF"/>
-          </a:solidFill>
-          <a:ln w="12700">
-            <a:solidFill>
-              <a:srgbClr val="6366F1"/>
-            </a:solidFill>
-            <a:prstDash val="solid"/>
-          </a:ln>
-        </p:spPr>
-      </p:sp>
-      <p:sp>
-        <p:nvSpPr>
-          <p:cNvPr id="53" name="Text 51"/>
-          <p:cNvSpPr/>
-          <p:nvPr/>
-        </p:nvSpPr>
-        <p:spPr>
-          <a:xfrm>
-            <a:off x="365760" y="4498848"/>
-            <a:ext cx="2011680" cy="402336"/>
-          </a:xfrm>
-          <a:prstGeom prst="rect">
-            <a:avLst/>
-          </a:prstGeom>
-          <a:noFill/>
-          <a:ln/>
-        </p:spPr>
-        <p:txBody>
-          <a:bodyPr wrap="square" lIns="0" tIns="0" rIns="0" bIns="0" rtlCol="0" anchor="ctr"/>
-          <a:lstStyle/>
-          <a:p>
-            <a:pPr algn="ctr" indent="0" marL="0">
-              <a:buNone/>
-            </a:pPr>
-            <a:r>
-              <a:rPr lang="en-US" sz="1200" b="1" dirty="0">
-                <a:solidFill>
-                  <a:srgbClr val="4338CA"/>
-                </a:solidFill>
-                <a:latin typeface="Trebuchet MS" pitchFamily="34" charset="0"/>
-                <a:ea typeface="Trebuchet MS" pitchFamily="34" charset="-122"/>
-                <a:cs typeface="Trebuchet MS" pitchFamily="34" charset="-120"/>
-              </a:rPr>
-              <a:t>kickstart</a:t>
-            </a:r>
-            <a:endParaRPr lang="en-US" sz="1200" dirty="0"/>
-          </a:p>
-        </p:txBody>
-      </p:sp>
-      <p:sp>
-        <p:nvSpPr>
-          <p:cNvPr id="54" name="Shape 52"/>
-          <p:cNvSpPr/>
-          <p:nvPr/>
-        </p:nvSpPr>
-        <p:spPr>
-          <a:xfrm>
-            <a:off x="2542032" y="4498848"/>
-            <a:ext cx="2011680" cy="402336"/>
-          </a:xfrm>
-          <a:prstGeom prst="rect">
-            <a:avLst>
-              <a:gd name="adj" fmla="val 13636"/>
-            </a:avLst>
-          </a:prstGeom>
-          <a:solidFill>
-            <a:srgbClr val="EEF2FF"/>
-          </a:solidFill>
-          <a:ln w="12700">
-            <a:solidFill>
-              <a:srgbClr val="6366F1"/>
-            </a:solidFill>
-            <a:prstDash val="solid"/>
-          </a:ln>
-        </p:spPr>
-      </p:sp>
-      <p:sp>
-        <p:nvSpPr>
-          <p:cNvPr id="55" name="Text 53"/>
-          <p:cNvSpPr/>
-          <p:nvPr/>
-        </p:nvSpPr>
-        <p:spPr>
-          <a:xfrm>
-            <a:off x="2542032" y="4498848"/>
-            <a:ext cx="2011680" cy="402336"/>
-          </a:xfrm>
-          <a:prstGeom prst="rect">
-            <a:avLst/>
-          </a:prstGeom>
-          <a:noFill/>
-          <a:ln/>
-        </p:spPr>
-        <p:txBody>
-          <a:bodyPr wrap="square" lIns="0" tIns="0" rIns="0" bIns="0" rtlCol="0" anchor="ctr"/>
-          <a:lstStyle/>
-          <a:p>
-            <a:pPr algn="ctr" indent="0" marL="0">
-              <a:buNone/>
-            </a:pPr>
-            <a:r>
-              <a:rPr lang="en-US" sz="1200" b="1" dirty="0">
-                <a:solidFill>
-                  <a:srgbClr val="4338CA"/>
-                </a:solidFill>
-                <a:latin typeface="Trebuchet MS" pitchFamily="34" charset="0"/>
-                <a:ea typeface="Trebuchet MS" pitchFamily="34" charset="-122"/>
-                <a:cs typeface="Trebuchet MS" pitchFamily="34" charset="-120"/>
-              </a:rPr>
-              <a:t>headstart</a:t>
-            </a:r>
-            <a:endParaRPr lang="en-US" sz="1200" dirty="0"/>
-          </a:p>
-        </p:txBody>
-      </p:sp>
-      <p:sp>
-        <p:nvSpPr>
-          <p:cNvPr id="56" name="Shape 54"/>
-          <p:cNvSpPr/>
-          <p:nvPr/>
-        </p:nvSpPr>
-        <p:spPr>
-          <a:xfrm>
-            <a:off x="4718304" y="4498848"/>
-            <a:ext cx="2011680" cy="402336"/>
-          </a:xfrm>
-          <a:prstGeom prst="rect">
-            <a:avLst>
-              <a:gd name="adj" fmla="val 13636"/>
-            </a:avLst>
-          </a:prstGeom>
-          <a:solidFill>
-            <a:srgbClr val="EEF2FF"/>
-          </a:solidFill>
-          <a:ln w="12700">
-            <a:solidFill>
-              <a:srgbClr val="6366F1"/>
-            </a:solidFill>
-            <a:prstDash val="solid"/>
-          </a:ln>
-        </p:spPr>
-      </p:sp>
-      <p:sp>
-        <p:nvSpPr>
-          <p:cNvPr id="57" name="Text 55"/>
-          <p:cNvSpPr/>
-          <p:nvPr/>
-        </p:nvSpPr>
-        <p:spPr>
-          <a:xfrm>
-            <a:off x="4718304" y="4498848"/>
-            <a:ext cx="2011680" cy="402336"/>
-          </a:xfrm>
-          <a:prstGeom prst="rect">
-            <a:avLst/>
-          </a:prstGeom>
-          <a:noFill/>
-          <a:ln/>
-        </p:spPr>
-        <p:txBody>
-          <a:bodyPr wrap="square" lIns="0" tIns="0" rIns="0" bIns="0" rtlCol="0" anchor="ctr"/>
-          <a:lstStyle/>
-          <a:p>
-            <a:pPr algn="ctr" indent="0" marL="0">
-              <a:buNone/>
-            </a:pPr>
-            <a:r>
-              <a:rPr lang="en-US" sz="1200" b="1" dirty="0">
-                <a:solidFill>
-                  <a:srgbClr val="4338CA"/>
-                </a:solidFill>
-                <a:latin typeface="Trebuchet MS" pitchFamily="34" charset="0"/>
-                <a:ea typeface="Trebuchet MS" pitchFamily="34" charset="-122"/>
-                <a:cs typeface="Trebuchet MS" pitchFamily="34" charset="-120"/>
-              </a:rPr>
-              <a:t>startling</a:t>
-            </a:r>
-            <a:endParaRPr lang="en-US" sz="1200" dirty="0"/>
-          </a:p>
-        </p:txBody>
-      </p:sp>
-      <p:sp>
-        <p:nvSpPr>
-          <p:cNvPr id="58" name="Shape 56"/>
-          <p:cNvSpPr/>
-          <p:nvPr/>
-        </p:nvSpPr>
-        <p:spPr>
-          <a:xfrm>
-            <a:off x="6894576" y="4498848"/>
-            <a:ext cx="2011680" cy="402336"/>
-          </a:xfrm>
-          <a:prstGeom prst="rect">
-            <a:avLst>
-              <a:gd name="adj" fmla="val 13636"/>
-            </a:avLst>
-          </a:prstGeom>
-          <a:solidFill>
-            <a:srgbClr val="EEF2FF"/>
-          </a:solidFill>
-          <a:ln w="12700">
-            <a:solidFill>
-              <a:srgbClr val="6366F1"/>
-            </a:solidFill>
-            <a:prstDash val="solid"/>
-          </a:ln>
-        </p:spPr>
-      </p:sp>
-      <p:sp>
-        <p:nvSpPr>
-          <p:cNvPr id="59" name="Text 57"/>
-          <p:cNvSpPr/>
-          <p:nvPr/>
-        </p:nvSpPr>
-        <p:spPr>
-          <a:xfrm>
-            <a:off x="6894576" y="4498848"/>
-            <a:ext cx="2011680" cy="402336"/>
-          </a:xfrm>
-          <a:prstGeom prst="rect">
-            <a:avLst/>
-          </a:prstGeom>
-          <a:noFill/>
-          <a:ln/>
-        </p:spPr>
-        <p:txBody>
-          <a:bodyPr wrap="square" lIns="0" tIns="0" rIns="0" bIns="0" rtlCol="0" anchor="ctr"/>
-          <a:lstStyle/>
-          <a:p>
-            <a:pPr algn="ctr" indent="0" marL="0">
-              <a:buNone/>
-            </a:pPr>
-            <a:r>
-              <a:rPr lang="en-US" sz="1200" b="1" dirty="0">
-                <a:solidFill>
-                  <a:srgbClr val="4338CA"/>
-                </a:solidFill>
-                <a:latin typeface="Trebuchet MS" pitchFamily="34" charset="0"/>
-                <a:ea typeface="Trebuchet MS" pitchFamily="34" charset="-122"/>
-                <a:cs typeface="Trebuchet MS" pitchFamily="34" charset="-120"/>
-              </a:rPr>
-              <a:t>downstart</a:t>
             </a:r>
             <a:endParaRPr lang="en-US" sz="1200" dirty="0"/>
           </a:p>
@@ -34989,7 +36009,7 @@
                 <a:ea typeface="Calibri" pitchFamily="34" charset="-122"/>
                 <a:cs typeface="Calibri" pitchFamily="34" charset="-120"/>
               </a:rPr>
-              <a:t>Word Labs  •  wordlabs.app  •  Root: 'start' = begin, move suddenly, set going</a:t>
+              <a:t>Word Labs  •  wordlabs.app  •  Root: 'start' = to begin</a:t>
             </a:r>
             <a:endParaRPr lang="en-US" sz="800" dirty="0"/>
           </a:p>
@@ -35153,7 +36173,7 @@
                 <a:ea typeface="Calibri" pitchFamily="34" charset="-122"/>
                 <a:cs typeface="Calibri" pitchFamily="34" charset="-120"/>
               </a:rPr>
-              <a:t>The core part of a word carrying its basic meaning. For example, 'start' means 'begin, move suddenly, set going'.</a:t>
+              <a:t>The core part of a word carrying its basic meaning. For example, 'start' means 'to begin'.</a:t>
             </a:r>
             <a:endParaRPr lang="en-US" sz="1350" dirty="0"/>
           </a:p>
@@ -35773,7 +36793,7 @@
                 <a:ea typeface="Calibri" pitchFamily="34" charset="-122"/>
                 <a:cs typeface="Calibri" pitchFamily="34" charset="-120"/>
               </a:rPr>
-              <a:t>Word Labs  •  wordlabs.app  •  Root: 'start' = begin, move suddenly, set going</a:t>
+              <a:t>Word Labs  •  wordlabs.app  •  Root: 'start' = to begin</a:t>
             </a:r>
             <a:endParaRPr lang="en-US" sz="800" dirty="0"/>
           </a:p>
@@ -35885,7 +36905,7 @@
                 <a:ea typeface="Calibri" pitchFamily="34" charset="-122"/>
                 <a:cs typeface="Calibri" pitchFamily="34" charset="-120"/>
               </a:rPr>
-              <a:t>1.  A 'headstart' means you get to begin before everyone else.</a:t>
+              <a:t>1.  'starts' means 'begins'.</a:t>
             </a:r>
             <a:endParaRPr lang="en-US" sz="1300" dirty="0"/>
           </a:p>
@@ -36024,7 +37044,7 @@
                 <a:ea typeface="Calibri" pitchFamily="34" charset="-122"/>
                 <a:cs typeface="Calibri" pitchFamily="34" charset="-120"/>
               </a:rPr>
-              <a:t>2.  The suffix '-er' in 'starter' means to do something again.</a:t>
+              <a:t>2.  'starts' means 'finishes completely'.</a:t>
             </a:r>
             <a:endParaRPr lang="en-US" sz="1300" dirty="0"/>
           </a:p>
@@ -36163,7 +37183,7 @@
                 <a:ea typeface="Calibri" pitchFamily="34" charset="-122"/>
                 <a:cs typeface="Calibri" pitchFamily="34" charset="-120"/>
               </a:rPr>
-              <a:t>3.  The word 'restart' contains the root 'start' meaning to begin again.</a:t>
+              <a:t>3.  'start' means 'the ending of something'.</a:t>
             </a:r>
             <a:endParaRPr lang="en-US" sz="1300" dirty="0"/>
           </a:p>
@@ -36186,11 +37206,11 @@
             </a:avLst>
           </a:prstGeom>
           <a:solidFill>
-            <a:srgbClr val="DCFCE7"/>
-          </a:solidFill>
-          <a:ln w="12700">
-            <a:solidFill>
-              <a:srgbClr val="16A34A"/>
+            <a:srgbClr val="FEE2E2"/>
+          </a:solidFill>
+          <a:ln w="12700">
+            <a:solidFill>
+              <a:srgbClr val="DC2626"/>
             </a:solidFill>
             <a:prstDash val="solid"/>
           </a:ln>
@@ -36223,13 +37243,13 @@
             <a:r>
               <a:rPr lang="en-US" sz="1100" b="1" dirty="0">
                 <a:solidFill>
-                  <a:srgbClr val="16A34A"/>
+                  <a:srgbClr val="DC2626"/>
                 </a:solidFill>
                 <a:latin typeface="Trebuchet MS" pitchFamily="34" charset="0"/>
                 <a:ea typeface="Trebuchet MS" pitchFamily="34" charset="-122"/>
                 <a:cs typeface="Trebuchet MS" pitchFamily="34" charset="-120"/>
               </a:rPr>
-              <a:t>TRUE</a:t>
+              <a:t>FALSE</a:t>
             </a:r>
             <a:endParaRPr lang="en-US" sz="1100" dirty="0"/>
           </a:p>
@@ -36302,7 +37322,7 @@
                 <a:ea typeface="Calibri" pitchFamily="34" charset="-122"/>
                 <a:cs typeface="Calibri" pitchFamily="34" charset="-120"/>
               </a:rPr>
-              <a:t>4.  The root 'start' comes from the ancient Greek word for running.</a:t>
+              <a:t>4.  'start' means 'the beginning of something'.</a:t>
             </a:r>
             <a:endParaRPr lang="en-US" sz="1300" dirty="0"/>
           </a:p>
@@ -36325,11 +37345,11 @@
             </a:avLst>
           </a:prstGeom>
           <a:solidFill>
-            <a:srgbClr val="FEE2E2"/>
-          </a:solidFill>
-          <a:ln w="12700">
-            <a:solidFill>
-              <a:srgbClr val="DC2626"/>
+            <a:srgbClr val="DCFCE7"/>
+          </a:solidFill>
+          <a:ln w="12700">
+            <a:solidFill>
+              <a:srgbClr val="16A34A"/>
             </a:solidFill>
             <a:prstDash val="solid"/>
           </a:ln>
@@ -36362,13 +37382,13 @@
             <a:r>
               <a:rPr lang="en-US" sz="1100" b="1" dirty="0">
                 <a:solidFill>
-                  <a:srgbClr val="DC2626"/>
+                  <a:srgbClr val="16A34A"/>
                 </a:solidFill>
                 <a:latin typeface="Trebuchet MS" pitchFamily="34" charset="0"/>
                 <a:ea typeface="Trebuchet MS" pitchFamily="34" charset="-122"/>
                 <a:cs typeface="Trebuchet MS" pitchFamily="34" charset="-120"/>
               </a:rPr>
-              <a:t>FALSE</a:t>
+              <a:t>TRUE</a:t>
             </a:r>
             <a:endParaRPr lang="en-US" sz="1100" dirty="0"/>
           </a:p>
@@ -36441,7 +37461,7 @@
                 <a:ea typeface="Calibri" pitchFamily="34" charset="-122"/>
                 <a:cs typeface="Calibri" pitchFamily="34" charset="-120"/>
               </a:rPr>
-              <a:t>5.  Adding the suffix '-ing' to 'start' makes the word 'starting'.</a:t>
+              <a:t>5.  'start' means 'to begin'.</a:t>
             </a:r>
             <a:endParaRPr lang="en-US" sz="1300" dirty="0"/>
           </a:p>
@@ -36799,7 +37819,7 @@
                 <a:ea typeface="Calibri" pitchFamily="34" charset="-122"/>
                 <a:cs typeface="Calibri" pitchFamily="34" charset="-120"/>
               </a:rPr>
-              <a:t>Word Labs  •  wordlabs.app  •  Root: 'start' = begin, move suddenly, set going</a:t>
+              <a:t>Word Labs  •  wordlabs.app  •  Root: 'start' = to begin</a:t>
             </a:r>
             <a:endParaRPr lang="en-US" sz="800" dirty="0"/>
           </a:p>
@@ -36936,7 +37956,7 @@
                 <a:ea typeface="Trebuchet MS" pitchFamily="34" charset="-122"/>
                 <a:cs typeface="Trebuchet MS" pitchFamily="34" charset="-120"/>
               </a:rPr>
-              <a:t>begin, move suddenly, set going</a:t>
+              <a:t>to begin</a:t>
             </a:r>
             <a:endParaRPr lang="en-US" sz="2000" dirty="0"/>
           </a:p>
@@ -36975,7 +37995,7 @@
                 <a:ea typeface="Calibri" pitchFamily="34" charset="-122"/>
                 <a:cs typeface="Calibri" pitchFamily="34" charset="-120"/>
               </a:rPr>
-              <a:t>Origin: Latin: startare</a:t>
+              <a:t>Origin: Anglo-Saxon (Old English) root</a:t>
             </a:r>
             <a:endParaRPr lang="en-US" sz="1100" dirty="0"/>
           </a:p>
@@ -37080,7 +38100,7 @@
                 <a:ea typeface="Trebuchet MS" pitchFamily="34" charset="-122"/>
                 <a:cs typeface="Trebuchet MS" pitchFamily="34" charset="-120"/>
               </a:rPr>
-              <a:t>started</a:t>
+              <a:t>start</a:t>
             </a:r>
             <a:endParaRPr lang="en-US" sz="1300" dirty="0"/>
           </a:p>
@@ -37146,7 +38166,7 @@
                 <a:ea typeface="Trebuchet MS" pitchFamily="34" charset="-122"/>
                 <a:cs typeface="Trebuchet MS" pitchFamily="34" charset="-120"/>
               </a:rPr>
-              <a:t>starting</a:t>
+              <a:t>starts</a:t>
             </a:r>
             <a:endParaRPr lang="en-US" sz="1300" dirty="0"/>
           </a:p>
@@ -37212,7 +38232,7 @@
                 <a:ea typeface="Trebuchet MS" pitchFamily="34" charset="-122"/>
                 <a:cs typeface="Trebuchet MS" pitchFamily="34" charset="-120"/>
               </a:rPr>
-              <a:t>starter</a:t>
+              <a:t>restart</a:t>
             </a:r>
             <a:endParaRPr lang="en-US" sz="1300" dirty="0"/>
           </a:p>
@@ -37278,205 +38298,7 @@
                 <a:ea typeface="Trebuchet MS" pitchFamily="34" charset="-122"/>
                 <a:cs typeface="Trebuchet MS" pitchFamily="34" charset="-120"/>
               </a:rPr>
-              <a:t>restart</a:t>
-            </a:r>
-            <a:endParaRPr lang="en-US" sz="1300" dirty="0"/>
-          </a:p>
-        </p:txBody>
-      </p:sp>
-      <p:sp>
-        <p:nvSpPr>
-          <p:cNvPr id="24" name="Shape 22"/>
-          <p:cNvSpPr/>
-          <p:nvPr/>
-        </p:nvSpPr>
-        <p:spPr>
-          <a:xfrm>
-            <a:off x="365760" y="3401568"/>
-            <a:ext cx="2011680" cy="502920"/>
-          </a:xfrm>
-          <a:prstGeom prst="rect">
-            <a:avLst>
-              <a:gd name="adj" fmla="val 14545"/>
-            </a:avLst>
-          </a:prstGeom>
-          <a:solidFill>
-            <a:srgbClr val="EEF2FF"/>
-          </a:solidFill>
-          <a:ln w="12700">
-            <a:solidFill>
-              <a:srgbClr val="6366F1"/>
-            </a:solidFill>
-            <a:prstDash val="solid"/>
-          </a:ln>
-        </p:spPr>
-      </p:sp>
-      <p:sp>
-        <p:nvSpPr>
-          <p:cNvPr id="25" name="Text 23"/>
-          <p:cNvSpPr/>
-          <p:nvPr/>
-        </p:nvSpPr>
-        <p:spPr>
-          <a:xfrm>
-            <a:off x="365760" y="3401568"/>
-            <a:ext cx="2011680" cy="502920"/>
-          </a:xfrm>
-          <a:prstGeom prst="rect">
-            <a:avLst/>
-          </a:prstGeom>
-          <a:noFill/>
-          <a:ln/>
-        </p:spPr>
-        <p:txBody>
-          <a:bodyPr wrap="square" lIns="0" tIns="0" rIns="0" bIns="0" rtlCol="0" anchor="ctr"/>
-          <a:lstStyle/>
-          <a:p>
-            <a:pPr algn="ctr" indent="0" marL="0">
-              <a:buNone/>
-            </a:pPr>
-            <a:r>
-              <a:rPr lang="en-US" sz="1300" b="1" dirty="0">
-                <a:solidFill>
-                  <a:srgbClr val="4338CA"/>
-                </a:solidFill>
-                <a:latin typeface="Trebuchet MS" pitchFamily="34" charset="0"/>
-                <a:ea typeface="Trebuchet MS" pitchFamily="34" charset="-122"/>
-                <a:cs typeface="Trebuchet MS" pitchFamily="34" charset="-120"/>
-              </a:rPr>
-              <a:t>kickstart</a:t>
-            </a:r>
-            <a:endParaRPr lang="en-US" sz="1300" dirty="0"/>
-          </a:p>
-        </p:txBody>
-      </p:sp>
-      <p:sp>
-        <p:nvSpPr>
-          <p:cNvPr id="26" name="Shape 24"/>
-          <p:cNvSpPr/>
-          <p:nvPr/>
-        </p:nvSpPr>
-        <p:spPr>
-          <a:xfrm>
-            <a:off x="2514600" y="3401568"/>
-            <a:ext cx="2011680" cy="502920"/>
-          </a:xfrm>
-          <a:prstGeom prst="rect">
-            <a:avLst>
-              <a:gd name="adj" fmla="val 14545"/>
-            </a:avLst>
-          </a:prstGeom>
-          <a:solidFill>
-            <a:srgbClr val="EEF2FF"/>
-          </a:solidFill>
-          <a:ln w="12700">
-            <a:solidFill>
-              <a:srgbClr val="6366F1"/>
-            </a:solidFill>
-            <a:prstDash val="solid"/>
-          </a:ln>
-        </p:spPr>
-      </p:sp>
-      <p:sp>
-        <p:nvSpPr>
-          <p:cNvPr id="27" name="Text 25"/>
-          <p:cNvSpPr/>
-          <p:nvPr/>
-        </p:nvSpPr>
-        <p:spPr>
-          <a:xfrm>
-            <a:off x="2514600" y="3401568"/>
-            <a:ext cx="2011680" cy="502920"/>
-          </a:xfrm>
-          <a:prstGeom prst="rect">
-            <a:avLst/>
-          </a:prstGeom>
-          <a:noFill/>
-          <a:ln/>
-        </p:spPr>
-        <p:txBody>
-          <a:bodyPr wrap="square" lIns="0" tIns="0" rIns="0" bIns="0" rtlCol="0" anchor="ctr"/>
-          <a:lstStyle/>
-          <a:p>
-            <a:pPr algn="ctr" indent="0" marL="0">
-              <a:buNone/>
-            </a:pPr>
-            <a:r>
-              <a:rPr lang="en-US" sz="1300" b="1" dirty="0">
-                <a:solidFill>
-                  <a:srgbClr val="4338CA"/>
-                </a:solidFill>
-                <a:latin typeface="Trebuchet MS" pitchFamily="34" charset="0"/>
-                <a:ea typeface="Trebuchet MS" pitchFamily="34" charset="-122"/>
-                <a:cs typeface="Trebuchet MS" pitchFamily="34" charset="-120"/>
-              </a:rPr>
-              <a:t>headstart</a:t>
-            </a:r>
-            <a:endParaRPr lang="en-US" sz="1300" dirty="0"/>
-          </a:p>
-        </p:txBody>
-      </p:sp>
-      <p:sp>
-        <p:nvSpPr>
-          <p:cNvPr id="28" name="Shape 26"/>
-          <p:cNvSpPr/>
-          <p:nvPr/>
-        </p:nvSpPr>
-        <p:spPr>
-          <a:xfrm>
-            <a:off x="4663440" y="3401568"/>
-            <a:ext cx="2011680" cy="502920"/>
-          </a:xfrm>
-          <a:prstGeom prst="rect">
-            <a:avLst>
-              <a:gd name="adj" fmla="val 14545"/>
-            </a:avLst>
-          </a:prstGeom>
-          <a:solidFill>
-            <a:srgbClr val="EEF2FF"/>
-          </a:solidFill>
-          <a:ln w="12700">
-            <a:solidFill>
-              <a:srgbClr val="6366F1"/>
-            </a:solidFill>
-            <a:prstDash val="solid"/>
-          </a:ln>
-        </p:spPr>
-      </p:sp>
-      <p:sp>
-        <p:nvSpPr>
-          <p:cNvPr id="29" name="Text 27"/>
-          <p:cNvSpPr/>
-          <p:nvPr/>
-        </p:nvSpPr>
-        <p:spPr>
-          <a:xfrm>
-            <a:off x="4663440" y="3401568"/>
-            <a:ext cx="2011680" cy="502920"/>
-          </a:xfrm>
-          <a:prstGeom prst="rect">
-            <a:avLst/>
-          </a:prstGeom>
-          <a:noFill/>
-          <a:ln/>
-        </p:spPr>
-        <p:txBody>
-          <a:bodyPr wrap="square" lIns="0" tIns="0" rIns="0" bIns="0" rtlCol="0" anchor="ctr"/>
-          <a:lstStyle/>
-          <a:p>
-            <a:pPr algn="ctr" indent="0" marL="0">
-              <a:buNone/>
-            </a:pPr>
-            <a:r>
-              <a:rPr lang="en-US" sz="1300" b="1" dirty="0">
-                <a:solidFill>
-                  <a:srgbClr val="4338CA"/>
-                </a:solidFill>
-                <a:latin typeface="Trebuchet MS" pitchFamily="34" charset="0"/>
-                <a:ea typeface="Trebuchet MS" pitchFamily="34" charset="-122"/>
-                <a:cs typeface="Trebuchet MS" pitchFamily="34" charset="-120"/>
-              </a:rPr>
-              <a:t>startling</a:t>
+              <a:t>started</a:t>
             </a:r>
             <a:endParaRPr lang="en-US" sz="1300" dirty="0"/>
           </a:p>
@@ -37768,7 +38590,7 @@
                 <a:ea typeface="Calibri" pitchFamily="34" charset="-122"/>
                 <a:cs typeface="Calibri" pitchFamily="34" charset="-120"/>
               </a:rPr>
-              <a:t>Word Labs  •  wordlabs.app  •  Root: 'start' = begin, move suddenly, set going</a:t>
+              <a:t>Word Labs  •  wordlabs.app  •  Root: 'start' = to begin</a:t>
             </a:r>
             <a:endParaRPr lang="en-US" sz="800" dirty="0"/>
           </a:p>
@@ -38218,7 +39040,7 @@
             <a:avLst/>
           </a:prstGeom>
           <a:solidFill>
-            <a:srgbClr val="DDD6FE"/>
+            <a:srgbClr val="F1F5F9"/>
           </a:solidFill>
           <a:ln w="12700">
             <a:solidFill>
@@ -38230,18 +39052,68 @@
       </p:sp>
       <p:sp>
         <p:nvSpPr>
-          <p:cNvPr id="24" name="Text 22"/>
-          <p:cNvSpPr/>
-          <p:nvPr/>
-        </p:nvSpPr>
-        <p:spPr>
-          <a:xfrm>
-            <a:off x="640080" y="2212848"/>
+          <p:cNvPr id="24" name="Shape 22"/>
+          <p:cNvSpPr/>
+          <p:nvPr/>
+        </p:nvSpPr>
+        <p:spPr>
+          <a:xfrm>
+            <a:off x="3291840" y="2212848"/>
+            <a:ext cx="1645920" cy="420624"/>
+          </a:xfrm>
+          <a:prstGeom prst="rect">
+            <a:avLst/>
+          </a:prstGeom>
+          <a:solidFill>
+            <a:srgbClr val="F1F5F9"/>
+          </a:solidFill>
+          <a:ln w="12700">
+            <a:solidFill>
+              <a:srgbClr val="E5E7EB"/>
+            </a:solidFill>
+            <a:prstDash val="solid"/>
+          </a:ln>
+        </p:spPr>
+      </p:sp>
+      <p:sp>
+        <p:nvSpPr>
+          <p:cNvPr id="25" name="Shape 23"/>
+          <p:cNvSpPr/>
+          <p:nvPr/>
+        </p:nvSpPr>
+        <p:spPr>
+          <a:xfrm>
+            <a:off x="5943600" y="2212848"/>
             <a:ext cx="1463040" cy="420624"/>
           </a:xfrm>
           <a:prstGeom prst="rect">
             <a:avLst/>
           </a:prstGeom>
+          <a:solidFill>
+            <a:srgbClr val="FCE7F3"/>
+          </a:solidFill>
+          <a:ln w="12700">
+            <a:solidFill>
+              <a:srgbClr val="E5E7EB"/>
+            </a:solidFill>
+            <a:prstDash val="solid"/>
+          </a:ln>
+        </p:spPr>
+      </p:sp>
+      <p:sp>
+        <p:nvSpPr>
+          <p:cNvPr id="26" name="Text 24"/>
+          <p:cNvSpPr/>
+          <p:nvPr/>
+        </p:nvSpPr>
+        <p:spPr>
+          <a:xfrm>
+            <a:off x="5943600" y="2212848"/>
+            <a:ext cx="1463040" cy="420624"/>
+          </a:xfrm>
+          <a:prstGeom prst="rect">
+            <a:avLst/>
+          </a:prstGeom>
           <a:noFill/>
           <a:ln/>
         </p:spPr>
@@ -38255,13 +39127,13 @@
             <a:r>
               <a:rPr lang="en-US" sz="1300" b="1" dirty="0">
                 <a:solidFill>
-                  <a:srgbClr val="4C1D95"/>
+                  <a:srgbClr val="9D174D"/>
                 </a:solidFill>
                 <a:latin typeface="Trebuchet MS" pitchFamily="34" charset="0"/>
                 <a:ea typeface="Trebuchet MS" pitchFamily="34" charset="-122"/>
                 <a:cs typeface="Trebuchet MS" pitchFamily="34" charset="-120"/>
               </a:rPr>
-              <a:t>kick-</a:t>
+              <a:t>-ing</a:t>
             </a:r>
             <a:endParaRPr lang="en-US" sz="1300" dirty="0"/>
           </a:p>
@@ -38269,20 +39141,45 @@
       </p:sp>
       <p:sp>
         <p:nvSpPr>
-          <p:cNvPr id="25" name="Shape 23"/>
-          <p:cNvSpPr/>
-          <p:nvPr/>
-        </p:nvSpPr>
-        <p:spPr>
-          <a:xfrm>
-            <a:off x="3291840" y="2212848"/>
+          <p:cNvPr id="27" name="Shape 25"/>
+          <p:cNvSpPr/>
+          <p:nvPr/>
+        </p:nvSpPr>
+        <p:spPr>
+          <a:xfrm>
+            <a:off x="640080" y="2670048"/>
+            <a:ext cx="1463040" cy="420624"/>
+          </a:xfrm>
+          <a:prstGeom prst="rect">
+            <a:avLst/>
+          </a:prstGeom>
+          <a:solidFill>
+            <a:srgbClr val="F8FAFC"/>
+          </a:solidFill>
+          <a:ln w="12700">
+            <a:solidFill>
+              <a:srgbClr val="E5E7EB"/>
+            </a:solidFill>
+            <a:prstDash val="solid"/>
+          </a:ln>
+        </p:spPr>
+      </p:sp>
+      <p:sp>
+        <p:nvSpPr>
+          <p:cNvPr id="28" name="Shape 26"/>
+          <p:cNvSpPr/>
+          <p:nvPr/>
+        </p:nvSpPr>
+        <p:spPr>
+          <a:xfrm>
+            <a:off x="3291840" y="2670048"/>
             <a:ext cx="1645920" cy="420624"/>
           </a:xfrm>
           <a:prstGeom prst="rect">
             <a:avLst/>
           </a:prstGeom>
           <a:solidFill>
-            <a:srgbClr val="F1F5F9"/>
+            <a:srgbClr val="F8FAFC"/>
           </a:solidFill>
           <a:ln w="12700">
             <a:solidFill>
@@ -38294,13 +39191,13 @@
       </p:sp>
       <p:sp>
         <p:nvSpPr>
-          <p:cNvPr id="26" name="Shape 24"/>
-          <p:cNvSpPr/>
-          <p:nvPr/>
-        </p:nvSpPr>
-        <p:spPr>
-          <a:xfrm>
-            <a:off x="5943600" y="2212848"/>
+          <p:cNvPr id="29" name="Shape 27"/>
+          <p:cNvSpPr/>
+          <p:nvPr/>
+        </p:nvSpPr>
+        <p:spPr>
+          <a:xfrm>
+            <a:off x="5943600" y="2670048"/>
             <a:ext cx="1463040" cy="420624"/>
           </a:xfrm>
           <a:prstGeom prst="rect">
@@ -38319,13 +39216,13 @@
       </p:sp>
       <p:sp>
         <p:nvSpPr>
-          <p:cNvPr id="27" name="Text 25"/>
-          <p:cNvSpPr/>
-          <p:nvPr/>
-        </p:nvSpPr>
-        <p:spPr>
-          <a:xfrm>
-            <a:off x="5943600" y="2212848"/>
+          <p:cNvPr id="30" name="Text 28"/>
+          <p:cNvSpPr/>
+          <p:nvPr/>
+        </p:nvSpPr>
+        <p:spPr>
+          <a:xfrm>
+            <a:off x="5943600" y="2670048"/>
             <a:ext cx="1463040" cy="420624"/>
           </a:xfrm>
           <a:prstGeom prst="rect">
@@ -38350,7 +39247,7 @@
                 <a:ea typeface="Trebuchet MS" pitchFamily="34" charset="-122"/>
                 <a:cs typeface="Trebuchet MS" pitchFamily="34" charset="-120"/>
               </a:rPr>
-              <a:t>-ing</a:t>
+              <a:t>-er</a:t>
             </a:r>
             <a:endParaRPr lang="en-US" sz="1300" dirty="0"/>
           </a:p>
@@ -38358,20 +39255,20 @@
       </p:sp>
       <p:sp>
         <p:nvSpPr>
-          <p:cNvPr id="28" name="Shape 26"/>
-          <p:cNvSpPr/>
-          <p:nvPr/>
-        </p:nvSpPr>
-        <p:spPr>
-          <a:xfrm>
-            <a:off x="640080" y="2670048"/>
+          <p:cNvPr id="31" name="Shape 29"/>
+          <p:cNvSpPr/>
+          <p:nvPr/>
+        </p:nvSpPr>
+        <p:spPr>
+          <a:xfrm>
+            <a:off x="640080" y="3127248"/>
             <a:ext cx="1463040" cy="420624"/>
           </a:xfrm>
           <a:prstGeom prst="rect">
             <a:avLst/>
           </a:prstGeom>
           <a:solidFill>
-            <a:srgbClr val="DDD6FE"/>
+            <a:srgbClr val="F1F5F9"/>
           </a:solidFill>
           <a:ln w="12700">
             <a:solidFill>
@@ -38383,18 +39280,68 @@
       </p:sp>
       <p:sp>
         <p:nvSpPr>
-          <p:cNvPr id="29" name="Text 27"/>
-          <p:cNvSpPr/>
-          <p:nvPr/>
-        </p:nvSpPr>
-        <p:spPr>
-          <a:xfrm>
-            <a:off x="640080" y="2670048"/>
+          <p:cNvPr id="32" name="Shape 30"/>
+          <p:cNvSpPr/>
+          <p:nvPr/>
+        </p:nvSpPr>
+        <p:spPr>
+          <a:xfrm>
+            <a:off x="3291840" y="3127248"/>
+            <a:ext cx="1645920" cy="420624"/>
+          </a:xfrm>
+          <a:prstGeom prst="rect">
+            <a:avLst/>
+          </a:prstGeom>
+          <a:solidFill>
+            <a:srgbClr val="F1F5F9"/>
+          </a:solidFill>
+          <a:ln w="12700">
+            <a:solidFill>
+              <a:srgbClr val="E5E7EB"/>
+            </a:solidFill>
+            <a:prstDash val="solid"/>
+          </a:ln>
+        </p:spPr>
+      </p:sp>
+      <p:sp>
+        <p:nvSpPr>
+          <p:cNvPr id="33" name="Shape 31"/>
+          <p:cNvSpPr/>
+          <p:nvPr/>
+        </p:nvSpPr>
+        <p:spPr>
+          <a:xfrm>
+            <a:off x="5943600" y="3127248"/>
             <a:ext cx="1463040" cy="420624"/>
           </a:xfrm>
           <a:prstGeom prst="rect">
             <a:avLst/>
           </a:prstGeom>
+          <a:solidFill>
+            <a:srgbClr val="FCE7F3"/>
+          </a:solidFill>
+          <a:ln w="12700">
+            <a:solidFill>
+              <a:srgbClr val="E5E7EB"/>
+            </a:solidFill>
+            <a:prstDash val="solid"/>
+          </a:ln>
+        </p:spPr>
+      </p:sp>
+      <p:sp>
+        <p:nvSpPr>
+          <p:cNvPr id="34" name="Text 32"/>
+          <p:cNvSpPr/>
+          <p:nvPr/>
+        </p:nvSpPr>
+        <p:spPr>
+          <a:xfrm>
+            <a:off x="5943600" y="3127248"/>
+            <a:ext cx="1463040" cy="420624"/>
+          </a:xfrm>
+          <a:prstGeom prst="rect">
+            <a:avLst/>
+          </a:prstGeom>
           <a:noFill/>
           <a:ln/>
         </p:spPr>
@@ -38408,13 +39355,13 @@
             <a:r>
               <a:rPr lang="en-US" sz="1300" b="1" dirty="0">
                 <a:solidFill>
-                  <a:srgbClr val="4C1D95"/>
+                  <a:srgbClr val="9D174D"/>
                 </a:solidFill>
                 <a:latin typeface="Trebuchet MS" pitchFamily="34" charset="0"/>
                 <a:ea typeface="Trebuchet MS" pitchFamily="34" charset="-122"/>
                 <a:cs typeface="Trebuchet MS" pitchFamily="34" charset="-120"/>
               </a:rPr>
-              <a:t>head-</a:t>
+              <a:t>-s</a:t>
             </a:r>
             <a:endParaRPr lang="en-US" sz="1300" dirty="0"/>
           </a:p>
@@ -38422,408 +39369,13 @@
       </p:sp>
       <p:sp>
         <p:nvSpPr>
-          <p:cNvPr id="30" name="Shape 28"/>
-          <p:cNvSpPr/>
-          <p:nvPr/>
-        </p:nvSpPr>
-        <p:spPr>
-          <a:xfrm>
-            <a:off x="3291840" y="2670048"/>
-            <a:ext cx="1645920" cy="420624"/>
-          </a:xfrm>
-          <a:prstGeom prst="rect">
-            <a:avLst/>
-          </a:prstGeom>
-          <a:solidFill>
-            <a:srgbClr val="F8FAFC"/>
-          </a:solidFill>
-          <a:ln w="12700">
-            <a:solidFill>
-              <a:srgbClr val="E5E7EB"/>
-            </a:solidFill>
-            <a:prstDash val="solid"/>
-          </a:ln>
-        </p:spPr>
-      </p:sp>
-      <p:sp>
-        <p:nvSpPr>
-          <p:cNvPr id="31" name="Shape 29"/>
-          <p:cNvSpPr/>
-          <p:nvPr/>
-        </p:nvSpPr>
-        <p:spPr>
-          <a:xfrm>
-            <a:off x="5943600" y="2670048"/>
-            <a:ext cx="1463040" cy="420624"/>
-          </a:xfrm>
-          <a:prstGeom prst="rect">
-            <a:avLst/>
-          </a:prstGeom>
-          <a:solidFill>
-            <a:srgbClr val="FCE7F3"/>
-          </a:solidFill>
-          <a:ln w="12700">
-            <a:solidFill>
-              <a:srgbClr val="E5E7EB"/>
-            </a:solidFill>
-            <a:prstDash val="solid"/>
-          </a:ln>
-        </p:spPr>
-      </p:sp>
-      <p:sp>
-        <p:nvSpPr>
-          <p:cNvPr id="32" name="Text 30"/>
-          <p:cNvSpPr/>
-          <p:nvPr/>
-        </p:nvSpPr>
-        <p:spPr>
-          <a:xfrm>
-            <a:off x="5943600" y="2670048"/>
-            <a:ext cx="1463040" cy="420624"/>
-          </a:xfrm>
-          <a:prstGeom prst="rect">
-            <a:avLst/>
-          </a:prstGeom>
-          <a:noFill/>
-          <a:ln/>
-        </p:spPr>
-        <p:txBody>
-          <a:bodyPr wrap="square" lIns="0" tIns="0" rIns="0" bIns="0" rtlCol="0" anchor="ctr"/>
-          <a:lstStyle/>
-          <a:p>
-            <a:pPr algn="ctr" indent="0" marL="0">
-              <a:buNone/>
-            </a:pPr>
-            <a:r>
-              <a:rPr lang="en-US" sz="1300" b="1" dirty="0">
-                <a:solidFill>
-                  <a:srgbClr val="9D174D"/>
-                </a:solidFill>
-                <a:latin typeface="Trebuchet MS" pitchFamily="34" charset="0"/>
-                <a:ea typeface="Trebuchet MS" pitchFamily="34" charset="-122"/>
-                <a:cs typeface="Trebuchet MS" pitchFamily="34" charset="-120"/>
-              </a:rPr>
-              <a:t>-er</a:t>
-            </a:r>
-            <a:endParaRPr lang="en-US" sz="1300" dirty="0"/>
-          </a:p>
-        </p:txBody>
-      </p:sp>
-      <p:sp>
-        <p:nvSpPr>
-          <p:cNvPr id="33" name="Shape 31"/>
-          <p:cNvSpPr/>
-          <p:nvPr/>
-        </p:nvSpPr>
-        <p:spPr>
-          <a:xfrm>
-            <a:off x="640080" y="3127248"/>
-            <a:ext cx="1463040" cy="420624"/>
-          </a:xfrm>
-          <a:prstGeom prst="rect">
-            <a:avLst/>
-          </a:prstGeom>
-          <a:solidFill>
-            <a:srgbClr val="DDD6FE"/>
-          </a:solidFill>
-          <a:ln w="12700">
-            <a:solidFill>
-              <a:srgbClr val="E5E7EB"/>
-            </a:solidFill>
-            <a:prstDash val="solid"/>
-          </a:ln>
-        </p:spPr>
-      </p:sp>
-      <p:sp>
-        <p:nvSpPr>
-          <p:cNvPr id="34" name="Text 32"/>
-          <p:cNvSpPr/>
-          <p:nvPr/>
-        </p:nvSpPr>
-        <p:spPr>
-          <a:xfrm>
-            <a:off x="640080" y="3127248"/>
-            <a:ext cx="1463040" cy="420624"/>
-          </a:xfrm>
-          <a:prstGeom prst="rect">
-            <a:avLst/>
-          </a:prstGeom>
-          <a:noFill/>
-          <a:ln/>
-        </p:spPr>
-        <p:txBody>
-          <a:bodyPr wrap="square" lIns="0" tIns="0" rIns="0" bIns="0" rtlCol="0" anchor="ctr"/>
-          <a:lstStyle/>
-          <a:p>
-            <a:pPr algn="ctr" indent="0" marL="0">
-              <a:buNone/>
-            </a:pPr>
-            <a:r>
-              <a:rPr lang="en-US" sz="1300" b="1" dirty="0">
-                <a:solidFill>
-                  <a:srgbClr val="4C1D95"/>
-                </a:solidFill>
-                <a:latin typeface="Trebuchet MS" pitchFamily="34" charset="0"/>
-                <a:ea typeface="Trebuchet MS" pitchFamily="34" charset="-122"/>
-                <a:cs typeface="Trebuchet MS" pitchFamily="34" charset="-120"/>
-              </a:rPr>
-              <a:t>down-</a:t>
-            </a:r>
-            <a:endParaRPr lang="en-US" sz="1300" dirty="0"/>
-          </a:p>
-        </p:txBody>
-      </p:sp>
-      <p:sp>
-        <p:nvSpPr>
-          <p:cNvPr id="35" name="Shape 33"/>
-          <p:cNvSpPr/>
-          <p:nvPr/>
-        </p:nvSpPr>
-        <p:spPr>
-          <a:xfrm>
-            <a:off x="3291840" y="3127248"/>
-            <a:ext cx="1645920" cy="420624"/>
-          </a:xfrm>
-          <a:prstGeom prst="rect">
-            <a:avLst/>
-          </a:prstGeom>
-          <a:solidFill>
-            <a:srgbClr val="F1F5F9"/>
-          </a:solidFill>
-          <a:ln w="12700">
-            <a:solidFill>
-              <a:srgbClr val="E5E7EB"/>
-            </a:solidFill>
-            <a:prstDash val="solid"/>
-          </a:ln>
-        </p:spPr>
-      </p:sp>
-      <p:sp>
-        <p:nvSpPr>
-          <p:cNvPr id="36" name="Shape 34"/>
-          <p:cNvSpPr/>
-          <p:nvPr/>
-        </p:nvSpPr>
-        <p:spPr>
-          <a:xfrm>
-            <a:off x="5943600" y="3127248"/>
-            <a:ext cx="1463040" cy="420624"/>
-          </a:xfrm>
-          <a:prstGeom prst="rect">
-            <a:avLst/>
-          </a:prstGeom>
-          <a:solidFill>
-            <a:srgbClr val="FCE7F3"/>
-          </a:solidFill>
-          <a:ln w="12700">
-            <a:solidFill>
-              <a:srgbClr val="E5E7EB"/>
-            </a:solidFill>
-            <a:prstDash val="solid"/>
-          </a:ln>
-        </p:spPr>
-      </p:sp>
-      <p:sp>
-        <p:nvSpPr>
-          <p:cNvPr id="37" name="Text 35"/>
-          <p:cNvSpPr/>
-          <p:nvPr/>
-        </p:nvSpPr>
-        <p:spPr>
-          <a:xfrm>
-            <a:off x="5943600" y="3127248"/>
-            <a:ext cx="1463040" cy="420624"/>
-          </a:xfrm>
-          <a:prstGeom prst="rect">
-            <a:avLst/>
-          </a:prstGeom>
-          <a:noFill/>
-          <a:ln/>
-        </p:spPr>
-        <p:txBody>
-          <a:bodyPr wrap="square" lIns="0" tIns="0" rIns="0" bIns="0" rtlCol="0" anchor="ctr"/>
-          <a:lstStyle/>
-          <a:p>
-            <a:pPr algn="ctr" indent="0" marL="0">
-              <a:buNone/>
-            </a:pPr>
-            <a:r>
-              <a:rPr lang="en-US" sz="1300" b="1" dirty="0">
-                <a:solidFill>
-                  <a:srgbClr val="9D174D"/>
-                </a:solidFill>
-                <a:latin typeface="Trebuchet MS" pitchFamily="34" charset="0"/>
-                <a:ea typeface="Trebuchet MS" pitchFamily="34" charset="-122"/>
-                <a:cs typeface="Trebuchet MS" pitchFamily="34" charset="-120"/>
-              </a:rPr>
-              <a:t>-s</a:t>
-            </a:r>
-            <a:endParaRPr lang="en-US" sz="1300" dirty="0"/>
-          </a:p>
-        </p:txBody>
-      </p:sp>
-      <p:sp>
-        <p:nvSpPr>
-          <p:cNvPr id="38" name="Shape 36"/>
-          <p:cNvSpPr/>
-          <p:nvPr/>
-        </p:nvSpPr>
-        <p:spPr>
-          <a:xfrm>
-            <a:off x="640080" y="3584448"/>
-            <a:ext cx="1463040" cy="420624"/>
-          </a:xfrm>
-          <a:prstGeom prst="rect">
-            <a:avLst/>
-          </a:prstGeom>
-          <a:solidFill>
-            <a:srgbClr val="DDD6FE"/>
-          </a:solidFill>
-          <a:ln w="12700">
-            <a:solidFill>
-              <a:srgbClr val="E5E7EB"/>
-            </a:solidFill>
-            <a:prstDash val="solid"/>
-          </a:ln>
-        </p:spPr>
-      </p:sp>
-      <p:sp>
-        <p:nvSpPr>
-          <p:cNvPr id="39" name="Text 37"/>
-          <p:cNvSpPr/>
-          <p:nvPr/>
-        </p:nvSpPr>
-        <p:spPr>
-          <a:xfrm>
-            <a:off x="640080" y="3584448"/>
-            <a:ext cx="1463040" cy="420624"/>
-          </a:xfrm>
-          <a:prstGeom prst="rect">
-            <a:avLst/>
-          </a:prstGeom>
-          <a:noFill/>
-          <a:ln/>
-        </p:spPr>
-        <p:txBody>
-          <a:bodyPr wrap="square" lIns="0" tIns="0" rIns="0" bIns="0" rtlCol="0" anchor="ctr"/>
-          <a:lstStyle/>
-          <a:p>
-            <a:pPr algn="ctr" indent="0" marL="0">
-              <a:buNone/>
-            </a:pPr>
-            <a:r>
-              <a:rPr lang="en-US" sz="1300" b="1" dirty="0">
-                <a:solidFill>
-                  <a:srgbClr val="4C1D95"/>
-                </a:solidFill>
-                <a:latin typeface="Trebuchet MS" pitchFamily="34" charset="0"/>
-                <a:ea typeface="Trebuchet MS" pitchFamily="34" charset="-122"/>
-                <a:cs typeface="Trebuchet MS" pitchFamily="34" charset="-120"/>
-              </a:rPr>
-              <a:t>out-</a:t>
-            </a:r>
-            <a:endParaRPr lang="en-US" sz="1300" dirty="0"/>
-          </a:p>
-        </p:txBody>
-      </p:sp>
-      <p:sp>
-        <p:nvSpPr>
-          <p:cNvPr id="40" name="Shape 38"/>
-          <p:cNvSpPr/>
-          <p:nvPr/>
-        </p:nvSpPr>
-        <p:spPr>
-          <a:xfrm>
-            <a:off x="3291840" y="3584448"/>
-            <a:ext cx="1645920" cy="420624"/>
-          </a:xfrm>
-          <a:prstGeom prst="rect">
-            <a:avLst/>
-          </a:prstGeom>
-          <a:solidFill>
-            <a:srgbClr val="F8FAFC"/>
-          </a:solidFill>
-          <a:ln w="12700">
-            <a:solidFill>
-              <a:srgbClr val="E5E7EB"/>
-            </a:solidFill>
-            <a:prstDash val="solid"/>
-          </a:ln>
-        </p:spPr>
-      </p:sp>
-      <p:sp>
-        <p:nvSpPr>
-          <p:cNvPr id="41" name="Shape 39"/>
-          <p:cNvSpPr/>
-          <p:nvPr/>
-        </p:nvSpPr>
-        <p:spPr>
-          <a:xfrm>
-            <a:off x="5943600" y="3584448"/>
-            <a:ext cx="1463040" cy="420624"/>
-          </a:xfrm>
-          <a:prstGeom prst="rect">
-            <a:avLst/>
-          </a:prstGeom>
-          <a:solidFill>
-            <a:srgbClr val="FCE7F3"/>
-          </a:solidFill>
-          <a:ln w="12700">
-            <a:solidFill>
-              <a:srgbClr val="E5E7EB"/>
-            </a:solidFill>
-            <a:prstDash val="solid"/>
-          </a:ln>
-        </p:spPr>
-      </p:sp>
-      <p:sp>
-        <p:nvSpPr>
-          <p:cNvPr id="42" name="Text 40"/>
-          <p:cNvSpPr/>
-          <p:nvPr/>
-        </p:nvSpPr>
-        <p:spPr>
-          <a:xfrm>
-            <a:off x="5943600" y="3584448"/>
-            <a:ext cx="1463040" cy="420624"/>
-          </a:xfrm>
-          <a:prstGeom prst="rect">
-            <a:avLst/>
-          </a:prstGeom>
-          <a:noFill/>
-          <a:ln/>
-        </p:spPr>
-        <p:txBody>
-          <a:bodyPr wrap="square" lIns="0" tIns="0" rIns="0" bIns="0" rtlCol="0" anchor="ctr"/>
-          <a:lstStyle/>
-          <a:p>
-            <a:pPr algn="ctr" indent="0" marL="0">
-              <a:buNone/>
-            </a:pPr>
-            <a:r>
-              <a:rPr lang="en-US" sz="1300" b="1" dirty="0">
-                <a:solidFill>
-                  <a:srgbClr val="9D174D"/>
-                </a:solidFill>
-                <a:latin typeface="Trebuchet MS" pitchFamily="34" charset="0"/>
-                <a:ea typeface="Trebuchet MS" pitchFamily="34" charset="-122"/>
-                <a:cs typeface="Trebuchet MS" pitchFamily="34" charset="-120"/>
-              </a:rPr>
-              <a:t>-ling</a:t>
-            </a:r>
-            <a:endParaRPr lang="en-US" sz="1300" dirty="0"/>
-          </a:p>
-        </p:txBody>
-      </p:sp>
-      <p:sp>
-        <p:nvSpPr>
-          <p:cNvPr id="43" name="Text 41"/>
-          <p:cNvSpPr/>
-          <p:nvPr/>
-        </p:nvSpPr>
-        <p:spPr>
-          <a:xfrm>
-            <a:off x="365760" y="4178808"/>
+          <p:cNvPr id="35" name="Text 33"/>
+          <p:cNvSpPr/>
+          <p:nvPr/>
+        </p:nvSpPr>
+        <p:spPr>
+          <a:xfrm>
+            <a:off x="365760" y="3721608"/>
             <a:ext cx="1097280" cy="420624"/>
           </a:xfrm>
           <a:prstGeom prst="rect">
@@ -38856,13 +39408,13 @@
       </p:sp>
       <p:sp>
         <p:nvSpPr>
-          <p:cNvPr id="44" name="Shape 42"/>
-          <p:cNvSpPr/>
-          <p:nvPr/>
-        </p:nvSpPr>
-        <p:spPr>
-          <a:xfrm>
-            <a:off x="1508760" y="4178808"/>
+          <p:cNvPr id="36" name="Shape 34"/>
+          <p:cNvSpPr/>
+          <p:nvPr/>
+        </p:nvSpPr>
+        <p:spPr>
+          <a:xfrm>
+            <a:off x="1508760" y="3721608"/>
             <a:ext cx="822960" cy="420624"/>
           </a:xfrm>
           <a:prstGeom prst="rect">
@@ -38890,13 +39442,13 @@
       </p:sp>
       <p:sp>
         <p:nvSpPr>
-          <p:cNvPr id="45" name="Text 43"/>
-          <p:cNvSpPr/>
-          <p:nvPr/>
-        </p:nvSpPr>
-        <p:spPr>
-          <a:xfrm>
-            <a:off x="1508760" y="4178808"/>
+          <p:cNvPr id="37" name="Text 35"/>
+          <p:cNvSpPr/>
+          <p:nvPr/>
+        </p:nvSpPr>
+        <p:spPr>
+          <a:xfrm>
+            <a:off x="1508760" y="3721608"/>
             <a:ext cx="822960" cy="420624"/>
           </a:xfrm>
           <a:prstGeom prst="rect">
@@ -38929,13 +39481,13 @@
       </p:sp>
       <p:sp>
         <p:nvSpPr>
-          <p:cNvPr id="46" name="Text 44"/>
-          <p:cNvSpPr/>
-          <p:nvPr/>
-        </p:nvSpPr>
-        <p:spPr>
-          <a:xfrm>
-            <a:off x="2359152" y="4178808"/>
+          <p:cNvPr id="38" name="Text 36"/>
+          <p:cNvSpPr/>
+          <p:nvPr/>
+        </p:nvSpPr>
+        <p:spPr>
+          <a:xfrm>
+            <a:off x="2359152" y="3721608"/>
             <a:ext cx="320040" cy="420624"/>
           </a:xfrm>
           <a:prstGeom prst="rect">
@@ -38968,13 +39520,13 @@
       </p:sp>
       <p:sp>
         <p:nvSpPr>
-          <p:cNvPr id="47" name="Shape 45"/>
-          <p:cNvSpPr/>
-          <p:nvPr/>
-        </p:nvSpPr>
-        <p:spPr>
-          <a:xfrm>
-            <a:off x="2706624" y="4178808"/>
+          <p:cNvPr id="39" name="Shape 37"/>
+          <p:cNvSpPr/>
+          <p:nvPr/>
+        </p:nvSpPr>
+        <p:spPr>
+          <a:xfrm>
+            <a:off x="2706624" y="3721608"/>
             <a:ext cx="1389888" cy="420624"/>
           </a:xfrm>
           <a:prstGeom prst="rect">
@@ -39002,13 +39554,13 @@
       </p:sp>
       <p:sp>
         <p:nvSpPr>
-          <p:cNvPr id="48" name="Text 46"/>
-          <p:cNvSpPr/>
-          <p:nvPr/>
-        </p:nvSpPr>
-        <p:spPr>
-          <a:xfrm>
-            <a:off x="2706624" y="4178808"/>
+          <p:cNvPr id="40" name="Text 38"/>
+          <p:cNvSpPr/>
+          <p:nvPr/>
+        </p:nvSpPr>
+        <p:spPr>
+          <a:xfrm>
+            <a:off x="2706624" y="3721608"/>
             <a:ext cx="1389888" cy="420624"/>
           </a:xfrm>
           <a:prstGeom prst="rect">
@@ -39041,13 +39593,13 @@
       </p:sp>
       <p:sp>
         <p:nvSpPr>
-          <p:cNvPr id="49" name="Text 47"/>
-          <p:cNvSpPr/>
-          <p:nvPr/>
-        </p:nvSpPr>
-        <p:spPr>
-          <a:xfrm>
-            <a:off x="4123944" y="4178808"/>
+          <p:cNvPr id="41" name="Text 39"/>
+          <p:cNvSpPr/>
+          <p:nvPr/>
+        </p:nvSpPr>
+        <p:spPr>
+          <a:xfrm>
+            <a:off x="4123944" y="3721608"/>
             <a:ext cx="320040" cy="420624"/>
           </a:xfrm>
           <a:prstGeom prst="rect">
@@ -39080,13 +39632,13 @@
       </p:sp>
       <p:sp>
         <p:nvSpPr>
-          <p:cNvPr id="50" name="Shape 48"/>
-          <p:cNvSpPr/>
-          <p:nvPr/>
-        </p:nvSpPr>
-        <p:spPr>
-          <a:xfrm>
-            <a:off x="4471416" y="4178808"/>
+          <p:cNvPr id="42" name="Shape 40"/>
+          <p:cNvSpPr/>
+          <p:nvPr/>
+        </p:nvSpPr>
+        <p:spPr>
+          <a:xfrm>
+            <a:off x="4471416" y="3721608"/>
             <a:ext cx="822960" cy="420624"/>
           </a:xfrm>
           <a:prstGeom prst="rect">
@@ -39114,13 +39666,13 @@
       </p:sp>
       <p:sp>
         <p:nvSpPr>
-          <p:cNvPr id="51" name="Text 49"/>
-          <p:cNvSpPr/>
-          <p:nvPr/>
-        </p:nvSpPr>
-        <p:spPr>
-          <a:xfrm>
-            <a:off x="4471416" y="4178808"/>
+          <p:cNvPr id="43" name="Text 41"/>
+          <p:cNvSpPr/>
+          <p:nvPr/>
+        </p:nvSpPr>
+        <p:spPr>
+          <a:xfrm>
+            <a:off x="4471416" y="3721608"/>
             <a:ext cx="822960" cy="420624"/>
           </a:xfrm>
           <a:prstGeom prst="rect">
@@ -39153,13 +39705,13 @@
       </p:sp>
       <p:sp>
         <p:nvSpPr>
-          <p:cNvPr id="52" name="Text 50"/>
-          <p:cNvSpPr/>
-          <p:nvPr/>
-        </p:nvSpPr>
-        <p:spPr>
-          <a:xfrm>
-            <a:off x="5367528" y="4178808"/>
+          <p:cNvPr id="44" name="Text 42"/>
+          <p:cNvSpPr/>
+          <p:nvPr/>
+        </p:nvSpPr>
+        <p:spPr>
+          <a:xfrm>
+            <a:off x="5367528" y="3721608"/>
             <a:ext cx="365760" cy="420624"/>
           </a:xfrm>
           <a:prstGeom prst="rect">
@@ -39192,13 +39744,13 @@
       </p:sp>
       <p:sp>
         <p:nvSpPr>
-          <p:cNvPr id="53" name="Shape 51"/>
-          <p:cNvSpPr/>
-          <p:nvPr/>
-        </p:nvSpPr>
-        <p:spPr>
-          <a:xfrm>
-            <a:off x="5779008" y="4178808"/>
+          <p:cNvPr id="45" name="Shape 43"/>
+          <p:cNvSpPr/>
+          <p:nvPr/>
+        </p:nvSpPr>
+        <p:spPr>
+          <a:xfrm>
+            <a:off x="5779008" y="3721608"/>
             <a:ext cx="2194560" cy="420624"/>
           </a:xfrm>
           <a:prstGeom prst="rect">
@@ -39219,13 +39771,13 @@
       </p:sp>
       <p:sp>
         <p:nvSpPr>
-          <p:cNvPr id="54" name="Text 52"/>
-          <p:cNvSpPr/>
-          <p:nvPr/>
-        </p:nvSpPr>
-        <p:spPr>
-          <a:xfrm>
-            <a:off x="5779008" y="4178808"/>
+          <p:cNvPr id="46" name="Text 44"/>
+          <p:cNvSpPr/>
+          <p:nvPr/>
+        </p:nvSpPr>
+        <p:spPr>
+          <a:xfrm>
+            <a:off x="5779008" y="3721608"/>
             <a:ext cx="2194560" cy="420624"/>
           </a:xfrm>
           <a:prstGeom prst="rect">
@@ -39250,7 +39802,7 @@
                 <a:ea typeface="Trebuchet MS" pitchFamily="34" charset="-122"/>
                 <a:cs typeface="Trebuchet MS" pitchFamily="34" charset="-120"/>
               </a:rPr>
-              <a:t>started</a:t>
+              <a:t>start</a:t>
             </a:r>
             <a:endParaRPr lang="en-US" sz="1400" dirty="0"/>
           </a:p>
@@ -39542,7 +40094,7 @@
                 <a:ea typeface="Calibri" pitchFamily="34" charset="-122"/>
                 <a:cs typeface="Calibri" pitchFamily="34" charset="-120"/>
               </a:rPr>
-              <a:t>Word Labs  •  wordlabs.app  •  Root: 'start' = begin, move suddenly, set going</a:t>
+              <a:t>Word Labs  •  wordlabs.app  •  Root: 'start' = to begin</a:t>
             </a:r>
             <a:endParaRPr lang="en-US" sz="800" dirty="0"/>
           </a:p>
@@ -39654,7 +40206,7 @@
                 <a:ea typeface="Trebuchet MS" pitchFamily="34" charset="-122"/>
                 <a:cs typeface="Trebuchet MS" pitchFamily="34" charset="-120"/>
               </a:rPr>
-              <a:t>started</a:t>
+              <a:t>start</a:t>
             </a:r>
             <a:endParaRPr lang="en-US" sz="1200" dirty="0"/>
           </a:p>
@@ -39720,7 +40272,7 @@
                 <a:ea typeface="Calibri" pitchFamily="34" charset="-122"/>
                 <a:cs typeface="Calibri" pitchFamily="34" charset="-120"/>
               </a:rPr>
-              <a:t>Something that surprises or shocks you suddenly.</a:t>
+              <a:t>begins</a:t>
             </a:r>
             <a:endParaRPr lang="en-US" sz="1200" dirty="0"/>
           </a:p>
@@ -39793,7 +40345,7 @@
                 <a:ea typeface="Trebuchet MS" pitchFamily="34" charset="-122"/>
                 <a:cs typeface="Trebuchet MS" pitchFamily="34" charset="-120"/>
               </a:rPr>
-              <a:t>starting</a:t>
+              <a:t>starts</a:t>
             </a:r>
             <a:endParaRPr lang="en-US" sz="1200" dirty="0"/>
           </a:p>
@@ -39859,7 +40411,7 @@
                 <a:ea typeface="Calibri" pitchFamily="34" charset="-122"/>
                 <a:cs typeface="Calibri" pitchFamily="34" charset="-120"/>
               </a:rPr>
-              <a:t>To start something quickly with a strong push or kick.</a:t>
+              <a:t>to start something again</a:t>
             </a:r>
             <a:endParaRPr lang="en-US" sz="1200" dirty="0"/>
           </a:p>
@@ -39932,7 +40484,7 @@
                 <a:ea typeface="Trebuchet MS" pitchFamily="34" charset="-122"/>
                 <a:cs typeface="Trebuchet MS" pitchFamily="34" charset="-120"/>
               </a:rPr>
-              <a:t>starter</a:t>
+              <a:t>restart</a:t>
             </a:r>
             <a:endParaRPr lang="en-US" sz="1200" dirty="0"/>
           </a:p>
@@ -39998,7 +40550,7 @@
                 <a:ea typeface="Calibri" pitchFamily="34" charset="-122"/>
                 <a:cs typeface="Calibri" pitchFamily="34" charset="-120"/>
               </a:rPr>
-              <a:t>To begin something again after it has stopped.</a:t>
+              <a:t>began doing something</a:t>
             </a:r>
             <a:endParaRPr lang="en-US" sz="1200" dirty="0"/>
           </a:p>
@@ -40071,7 +40623,7 @@
                 <a:ea typeface="Trebuchet MS" pitchFamily="34" charset="-122"/>
                 <a:cs typeface="Trebuchet MS" pitchFamily="34" charset="-120"/>
               </a:rPr>
-              <a:t>restart</a:t>
+              <a:t>started</a:t>
             </a:r>
             <a:endParaRPr lang="en-US" sz="1200" dirty="0"/>
           </a:p>
@@ -40137,424 +40689,7 @@
                 <a:ea typeface="Calibri" pitchFamily="34" charset="-122"/>
                 <a:cs typeface="Calibri" pitchFamily="34" charset="-120"/>
               </a:rPr>
-              <a:t>An advantage given to someone by letting them begin before others.</a:t>
-            </a:r>
-            <a:endParaRPr lang="en-US" sz="1200" dirty="0"/>
-          </a:p>
-        </p:txBody>
-      </p:sp>
-      <p:sp>
-        <p:nvSpPr>
-          <p:cNvPr id="27" name="Shape 25"/>
-          <p:cNvSpPr/>
-          <p:nvPr/>
-        </p:nvSpPr>
-        <p:spPr>
-          <a:xfrm>
-            <a:off x="365760" y="3310128"/>
-            <a:ext cx="2011680" cy="457200"/>
-          </a:xfrm>
-          <a:prstGeom prst="rect">
-            <a:avLst>
-              <a:gd name="adj" fmla="val 12000"/>
-            </a:avLst>
-          </a:prstGeom>
-          <a:solidFill>
-            <a:srgbClr val="EEF2FF"/>
-          </a:solidFill>
-          <a:ln w="12700">
-            <a:solidFill>
-              <a:srgbClr val="6366F1"/>
-            </a:solidFill>
-            <a:prstDash val="solid"/>
-          </a:ln>
-          <a:effectLst>
-            <a:outerShdw sx="100000" sy="100000" kx="0" ky="0" algn="bl" rotWithShape="0" blurRad="101600" dist="38100" dir="8100000">
-              <a:srgbClr val="000000">
-                <a:alpha val="12000"/>
-              </a:srgbClr>
-            </a:outerShdw>
-          </a:effectLst>
-        </p:spPr>
-      </p:sp>
-      <p:sp>
-        <p:nvSpPr>
-          <p:cNvPr id="28" name="Text 26"/>
-          <p:cNvSpPr/>
-          <p:nvPr/>
-        </p:nvSpPr>
-        <p:spPr>
-          <a:xfrm>
-            <a:off x="365760" y="3310128"/>
-            <a:ext cx="2011680" cy="457200"/>
-          </a:xfrm>
-          <a:prstGeom prst="rect">
-            <a:avLst/>
-          </a:prstGeom>
-          <a:noFill/>
-          <a:ln/>
-        </p:spPr>
-        <p:txBody>
-          <a:bodyPr wrap="square" lIns="0" tIns="0" rIns="0" bIns="0" rtlCol="0" anchor="ctr"/>
-          <a:lstStyle/>
-          <a:p>
-            <a:pPr algn="ctr" indent="0" marL="0">
-              <a:buNone/>
-            </a:pPr>
-            <a:r>
-              <a:rPr lang="en-US" sz="1200" b="1" dirty="0">
-                <a:solidFill>
-                  <a:srgbClr val="4338CA"/>
-                </a:solidFill>
-                <a:latin typeface="Trebuchet MS" pitchFamily="34" charset="0"/>
-                <a:ea typeface="Trebuchet MS" pitchFamily="34" charset="-122"/>
-                <a:cs typeface="Trebuchet MS" pitchFamily="34" charset="-120"/>
-              </a:rPr>
-              <a:t>kickstart</a:t>
-            </a:r>
-            <a:endParaRPr lang="en-US" sz="1200" dirty="0"/>
-          </a:p>
-        </p:txBody>
-      </p:sp>
-      <p:sp>
-        <p:nvSpPr>
-          <p:cNvPr id="29" name="Shape 27"/>
-          <p:cNvSpPr/>
-          <p:nvPr/>
-        </p:nvSpPr>
-        <p:spPr>
-          <a:xfrm>
-            <a:off x="2514600" y="3310128"/>
-            <a:ext cx="6263640" cy="457200"/>
-          </a:xfrm>
-          <a:prstGeom prst="rect">
-            <a:avLst>
-              <a:gd name="adj" fmla="val 12000"/>
-            </a:avLst>
-          </a:prstGeom>
-          <a:solidFill>
-            <a:srgbClr val="F8FAFC"/>
-          </a:solidFill>
-          <a:ln w="12700">
-            <a:solidFill>
-              <a:srgbClr val="E2E8F0"/>
-            </a:solidFill>
-            <a:prstDash val="solid"/>
-          </a:ln>
-        </p:spPr>
-      </p:sp>
-      <p:sp>
-        <p:nvSpPr>
-          <p:cNvPr id="30" name="Text 28"/>
-          <p:cNvSpPr/>
-          <p:nvPr/>
-        </p:nvSpPr>
-        <p:spPr>
-          <a:xfrm>
-            <a:off x="2651760" y="3310128"/>
-            <a:ext cx="6035040" cy="457200"/>
-          </a:xfrm>
-          <a:prstGeom prst="rect">
-            <a:avLst/>
-          </a:prstGeom>
-          <a:noFill/>
-          <a:ln/>
-        </p:spPr>
-        <p:txBody>
-          <a:bodyPr wrap="square" rtlCol="0" anchor="ctr"/>
-          <a:lstStyle/>
-          <a:p>
-            <a:pPr algn="l" indent="0" marL="0">
-              <a:buNone/>
-            </a:pPr>
-            <a:r>
-              <a:rPr lang="en-US" sz="1200" dirty="0">
-                <a:solidFill>
-                  <a:srgbClr val="0F172A"/>
-                </a:solidFill>
-                <a:latin typeface="Calibri" pitchFamily="34" charset="0"/>
-                <a:ea typeface="Calibri" pitchFamily="34" charset="-122"/>
-                <a:cs typeface="Calibri" pitchFamily="34" charset="-120"/>
-              </a:rPr>
-              <a:t>A person or thing that begins something, like the first course of a meal.</a:t>
-            </a:r>
-            <a:endParaRPr lang="en-US" sz="1200" dirty="0"/>
-          </a:p>
-        </p:txBody>
-      </p:sp>
-      <p:sp>
-        <p:nvSpPr>
-          <p:cNvPr id="31" name="Shape 29"/>
-          <p:cNvSpPr/>
-          <p:nvPr/>
-        </p:nvSpPr>
-        <p:spPr>
-          <a:xfrm>
-            <a:off x="365760" y="3840480"/>
-            <a:ext cx="2011680" cy="457200"/>
-          </a:xfrm>
-          <a:prstGeom prst="rect">
-            <a:avLst>
-              <a:gd name="adj" fmla="val 12000"/>
-            </a:avLst>
-          </a:prstGeom>
-          <a:solidFill>
-            <a:srgbClr val="EEF2FF"/>
-          </a:solidFill>
-          <a:ln w="12700">
-            <a:solidFill>
-              <a:srgbClr val="6366F1"/>
-            </a:solidFill>
-            <a:prstDash val="solid"/>
-          </a:ln>
-          <a:effectLst>
-            <a:outerShdw sx="100000" sy="100000" kx="0" ky="0" algn="bl" rotWithShape="0" blurRad="101600" dist="38100" dir="8100000">
-              <a:srgbClr val="000000">
-                <a:alpha val="12000"/>
-              </a:srgbClr>
-            </a:outerShdw>
-          </a:effectLst>
-        </p:spPr>
-      </p:sp>
-      <p:sp>
-        <p:nvSpPr>
-          <p:cNvPr id="32" name="Text 30"/>
-          <p:cNvSpPr/>
-          <p:nvPr/>
-        </p:nvSpPr>
-        <p:spPr>
-          <a:xfrm>
-            <a:off x="365760" y="3840480"/>
-            <a:ext cx="2011680" cy="457200"/>
-          </a:xfrm>
-          <a:prstGeom prst="rect">
-            <a:avLst/>
-          </a:prstGeom>
-          <a:noFill/>
-          <a:ln/>
-        </p:spPr>
-        <p:txBody>
-          <a:bodyPr wrap="square" lIns="0" tIns="0" rIns="0" bIns="0" rtlCol="0" anchor="ctr"/>
-          <a:lstStyle/>
-          <a:p>
-            <a:pPr algn="ctr" indent="0" marL="0">
-              <a:buNone/>
-            </a:pPr>
-            <a:r>
-              <a:rPr lang="en-US" sz="1200" b="1" dirty="0">
-                <a:solidFill>
-                  <a:srgbClr val="4338CA"/>
-                </a:solidFill>
-                <a:latin typeface="Trebuchet MS" pitchFamily="34" charset="0"/>
-                <a:ea typeface="Trebuchet MS" pitchFamily="34" charset="-122"/>
-                <a:cs typeface="Trebuchet MS" pitchFamily="34" charset="-120"/>
-              </a:rPr>
-              <a:t>headstart</a:t>
-            </a:r>
-            <a:endParaRPr lang="en-US" sz="1200" dirty="0"/>
-          </a:p>
-        </p:txBody>
-      </p:sp>
-      <p:sp>
-        <p:nvSpPr>
-          <p:cNvPr id="33" name="Shape 31"/>
-          <p:cNvSpPr/>
-          <p:nvPr/>
-        </p:nvSpPr>
-        <p:spPr>
-          <a:xfrm>
-            <a:off x="2514600" y="3840480"/>
-            <a:ext cx="6263640" cy="457200"/>
-          </a:xfrm>
-          <a:prstGeom prst="rect">
-            <a:avLst>
-              <a:gd name="adj" fmla="val 12000"/>
-            </a:avLst>
-          </a:prstGeom>
-          <a:solidFill>
-            <a:srgbClr val="F8FAFC"/>
-          </a:solidFill>
-          <a:ln w="12700">
-            <a:solidFill>
-              <a:srgbClr val="E2E8F0"/>
-            </a:solidFill>
-            <a:prstDash val="solid"/>
-          </a:ln>
-        </p:spPr>
-      </p:sp>
-      <p:sp>
-        <p:nvSpPr>
-          <p:cNvPr id="34" name="Text 32"/>
-          <p:cNvSpPr/>
-          <p:nvPr/>
-        </p:nvSpPr>
-        <p:spPr>
-          <a:xfrm>
-            <a:off x="2651760" y="3840480"/>
-            <a:ext cx="6035040" cy="457200"/>
-          </a:xfrm>
-          <a:prstGeom prst="rect">
-            <a:avLst/>
-          </a:prstGeom>
-          <a:noFill/>
-          <a:ln/>
-        </p:spPr>
-        <p:txBody>
-          <a:bodyPr wrap="square" rtlCol="0" anchor="ctr"/>
-          <a:lstStyle/>
-          <a:p>
-            <a:pPr algn="l" indent="0" marL="0">
-              <a:buNone/>
-            </a:pPr>
-            <a:r>
-              <a:rPr lang="en-US" sz="1200" dirty="0">
-                <a:solidFill>
-                  <a:srgbClr val="0F172A"/>
-                </a:solidFill>
-                <a:latin typeface="Calibri" pitchFamily="34" charset="0"/>
-                <a:ea typeface="Calibri" pitchFamily="34" charset="-122"/>
-                <a:cs typeface="Calibri" pitchFamily="34" charset="-120"/>
-              </a:rPr>
-              <a:t>When something began or got going in the past.</a:t>
-            </a:r>
-            <a:endParaRPr lang="en-US" sz="1200" dirty="0"/>
-          </a:p>
-        </p:txBody>
-      </p:sp>
-      <p:sp>
-        <p:nvSpPr>
-          <p:cNvPr id="35" name="Shape 33"/>
-          <p:cNvSpPr/>
-          <p:nvPr/>
-        </p:nvSpPr>
-        <p:spPr>
-          <a:xfrm>
-            <a:off x="365760" y="4370832"/>
-            <a:ext cx="2011680" cy="457200"/>
-          </a:xfrm>
-          <a:prstGeom prst="rect">
-            <a:avLst>
-              <a:gd name="adj" fmla="val 12000"/>
-            </a:avLst>
-          </a:prstGeom>
-          <a:solidFill>
-            <a:srgbClr val="EEF2FF"/>
-          </a:solidFill>
-          <a:ln w="12700">
-            <a:solidFill>
-              <a:srgbClr val="6366F1"/>
-            </a:solidFill>
-            <a:prstDash val="solid"/>
-          </a:ln>
-          <a:effectLst>
-            <a:outerShdw sx="100000" sy="100000" kx="0" ky="0" algn="bl" rotWithShape="0" blurRad="101600" dist="38100" dir="8100000">
-              <a:srgbClr val="000000">
-                <a:alpha val="12000"/>
-              </a:srgbClr>
-            </a:outerShdw>
-          </a:effectLst>
-        </p:spPr>
-      </p:sp>
-      <p:sp>
-        <p:nvSpPr>
-          <p:cNvPr id="36" name="Text 34"/>
-          <p:cNvSpPr/>
-          <p:nvPr/>
-        </p:nvSpPr>
-        <p:spPr>
-          <a:xfrm>
-            <a:off x="365760" y="4370832"/>
-            <a:ext cx="2011680" cy="457200"/>
-          </a:xfrm>
-          <a:prstGeom prst="rect">
-            <a:avLst/>
-          </a:prstGeom>
-          <a:noFill/>
-          <a:ln/>
-        </p:spPr>
-        <p:txBody>
-          <a:bodyPr wrap="square" lIns="0" tIns="0" rIns="0" bIns="0" rtlCol="0" anchor="ctr"/>
-          <a:lstStyle/>
-          <a:p>
-            <a:pPr algn="ctr" indent="0" marL="0">
-              <a:buNone/>
-            </a:pPr>
-            <a:r>
-              <a:rPr lang="en-US" sz="1200" b="1" dirty="0">
-                <a:solidFill>
-                  <a:srgbClr val="4338CA"/>
-                </a:solidFill>
-                <a:latin typeface="Trebuchet MS" pitchFamily="34" charset="0"/>
-                <a:ea typeface="Trebuchet MS" pitchFamily="34" charset="-122"/>
-                <a:cs typeface="Trebuchet MS" pitchFamily="34" charset="-120"/>
-              </a:rPr>
-              <a:t>startling</a:t>
-            </a:r>
-            <a:endParaRPr lang="en-US" sz="1200" dirty="0"/>
-          </a:p>
-        </p:txBody>
-      </p:sp>
-      <p:sp>
-        <p:nvSpPr>
-          <p:cNvPr id="37" name="Shape 35"/>
-          <p:cNvSpPr/>
-          <p:nvPr/>
-        </p:nvSpPr>
-        <p:spPr>
-          <a:xfrm>
-            <a:off x="2514600" y="4370832"/>
-            <a:ext cx="6263640" cy="457200"/>
-          </a:xfrm>
-          <a:prstGeom prst="rect">
-            <a:avLst>
-              <a:gd name="adj" fmla="val 12000"/>
-            </a:avLst>
-          </a:prstGeom>
-          <a:solidFill>
-            <a:srgbClr val="F8FAFC"/>
-          </a:solidFill>
-          <a:ln w="12700">
-            <a:solidFill>
-              <a:srgbClr val="E2E8F0"/>
-            </a:solidFill>
-            <a:prstDash val="solid"/>
-          </a:ln>
-        </p:spPr>
-      </p:sp>
-      <p:sp>
-        <p:nvSpPr>
-          <p:cNvPr id="38" name="Text 36"/>
-          <p:cNvSpPr/>
-          <p:nvPr/>
-        </p:nvSpPr>
-        <p:spPr>
-          <a:xfrm>
-            <a:off x="2651760" y="4370832"/>
-            <a:ext cx="6035040" cy="457200"/>
-          </a:xfrm>
-          <a:prstGeom prst="rect">
-            <a:avLst/>
-          </a:prstGeom>
-          <a:noFill/>
-          <a:ln/>
-        </p:spPr>
-        <p:txBody>
-          <a:bodyPr wrap="square" rtlCol="0" anchor="ctr"/>
-          <a:lstStyle/>
-          <a:p>
-            <a:pPr algn="l" indent="0" marL="0">
-              <a:buNone/>
-            </a:pPr>
-            <a:r>
-              <a:rPr lang="en-US" sz="1200" dirty="0">
-                <a:solidFill>
-                  <a:srgbClr val="0F172A"/>
-                </a:solidFill>
-                <a:latin typeface="Calibri" pitchFamily="34" charset="0"/>
-                <a:ea typeface="Calibri" pitchFamily="34" charset="-122"/>
-                <a:cs typeface="Calibri" pitchFamily="34" charset="-120"/>
-              </a:rPr>
-              <a:t>When something is beginning right now or about to begin.</a:t>
+              <a:t>the beginning of something</a:t>
             </a:r>
             <a:endParaRPr lang="en-US" sz="1200" dirty="0"/>
           </a:p>
@@ -40846,7 +40981,7 @@
                 <a:ea typeface="Calibri" pitchFamily="34" charset="-122"/>
                 <a:cs typeface="Calibri" pitchFamily="34" charset="-120"/>
               </a:rPr>
-              <a:t>Word Labs  •  wordlabs.app  •  Root: 'start' = begin, move suddenly, set going</a:t>
+              <a:t>Word Labs  •  wordlabs.app  •  Root: 'start' = to begin</a:t>
             </a:r>
             <a:endParaRPr lang="en-US" sz="800" dirty="0"/>
           </a:p>
@@ -41049,7 +41184,7 @@
                 <a:ea typeface="Calibri" pitchFamily="34" charset="-122"/>
                 <a:cs typeface="Calibri" pitchFamily="34" charset="-120"/>
               </a:rPr>
-              <a:t>The students were given a head start in the race because they were the youngest competitors.</a:t>
+              <a:t>The race will start at nine o'clock.</a:t>
             </a:r>
             <a:endParaRPr lang="en-US" sz="1500" dirty="0"/>
           </a:p>
@@ -41213,7 +41348,7 @@
                 <a:ea typeface="Calibri" pitchFamily="34" charset="-122"/>
                 <a:cs typeface="Calibri" pitchFamily="34" charset="-120"/>
               </a:rPr>
-              <a:t>The teacher asked everyone to restart the activity after the fire drill interrupted the class.</a:t>
+              <a:t>The film starts at seven o'clock.</a:t>
             </a:r>
             <a:endParaRPr lang="en-US" sz="1500" dirty="0"/>
           </a:p>
@@ -41377,7 +41512,7 @@
                 <a:ea typeface="Calibri" pitchFamily="34" charset="-122"/>
                 <a:cs typeface="Calibri" pitchFamily="34" charset="-120"/>
               </a:rPr>
-              <a:t>The startling noise from the thunderstorm made the whole class jump in their seats.</a:t>
+              <a:t>You need to restart the computer for the update to work.</a:t>
             </a:r>
             <a:endParaRPr lang="en-US" sz="1500" dirty="0"/>
           </a:p>
